--- a/Arquitectura de Sistemas Computacionales/Clases/Clase 7 - Redes y almacenamiento cloud/Presentacion.pptx
+++ b/Arquitectura de Sistemas Computacionales/Clases/Clase 7 - Redes y almacenamiento cloud/Presentacion.pptx
@@ -3377,7 +3377,7 @@
                 </a:solidFill>
                 <a:latin typeface="Calibri"/>
               </a:rPr>
-              <a:t> · Teoría breve · Taller PI · Quiz/cierre.</a:t>
+              <a:t> · Teoría breve · Taller PI · cierre.</a:t>
             </a:r>
           </a:p>
           <a:p>
@@ -4542,7 +4542,7 @@
                 </a:solidFill>
                 <a:latin typeface="Calibri"/>
               </a:rPr>
-              <a:t> Quiz corto / revisión de evidencias.</a:t>
+              <a:t> Revisión de evidencias del PI.</a:t>
             </a:r>
           </a:p>
           <a:p>

--- a/Arquitectura de Sistemas Computacionales/Clases/Clase 7 - Redes y almacenamiento cloud/Presentacion.pptx
+++ b/Arquitectura de Sistemas Computacionales/Clases/Clase 7 - Redes y almacenamiento cloud/Presentacion.pptx
@@ -3850,7 +3850,7 @@
                 </a:solidFill>
                 <a:latin typeface="Calibri"/>
               </a:rPr>
-              <a:t>Subir evidencias al paquete CloudLite (Drive/repo) y a ExamLab domingo 23:59.</a:t>
+              <a:t>Subir evidencias al paquete CloudLite (Drive/repo) y a ExamLab (https://examlab.lovable.app/) domingo 23:59.</a:t>
             </a:r>
           </a:p>
         </p:txBody>

--- a/Arquitectura de Sistemas Computacionales/Clases/Clase 7 - Redes y almacenamiento cloud/Presentacion.pptx
+++ b/Arquitectura de Sistemas Computacionales/Clases/Clase 7 - Redes y almacenamiento cloud/Presentacion.pptx
@@ -6693,7 +6693,7 @@
                 </a:solidFill>
                 <a:latin typeface="Calibri"/>
               </a:rPr>
-              <a:t> Dibujen Deployment en draw.io (zonas pública/privada/datos).</a:t>
+              <a:t> Paso 1: copien la lista canonica de 5 contenedores de la Clase 4 y asignen cada uno a una de 3 zonas con su subred (zona publica 10.10.1.0/24, zona privada 10.10.2.0/24, zona de datos 10.10.3.0/24), verificando que ningun contenedor quede sin zona y que la base de datos y la cola no queden en la zona publica.</a:t>
             </a:r>
           </a:p>
           <a:p>
@@ -6727,7 +6727,7 @@
                 </a:solidFill>
                 <a:latin typeface="Calibri"/>
               </a:rPr>
-              <a:t> Etiqueten puertos y tipo de storage por componente.</a:t>
+              <a:t> Paso 2: escriban en ExamLab el diagrama C4Deployment en Mermaid con 4 Deployment_Node (dispositivo del usuario, zona publica, zona privada y zona de datos), el tamano de cada nodo y los mismos nombres de contenedores, verificando al renderizar que cada relacion lleve puerto y que el nombre de cada contenedor sea identico letra por letra al del C4Container de la Clase 4.</a:t>
             </a:r>
           </a:p>
           <a:p>
@@ -6761,7 +6761,7 @@
                 </a:solidFill>
                 <a:latin typeface="Calibri"/>
               </a:rPr>
-              <a:t> Alineen nombres con el diagrama C4 de Clase 4.</a:t>
+              <a:t> Paso 3: en el editor de topologia de red arme la red con 5 dispositivos (equipo del usuario, edge o proxy reverso, dos nodos de aplicacion y un nodo de datos) y las 3 subredes del paso 1, verificando que cada interfaz tenga una direccion valida dentro de su subred y que el nodo de datos no tenga ruta hacia la subred del usuario.</a:t>
             </a:r>
           </a:p>
           <a:p>
@@ -6795,7 +6795,7 @@
                 </a:solidFill>
                 <a:latin typeface="Calibri"/>
               </a:rPr>
-              <a:t> Actualicen informe: sección Redes y almacenamiento.</a:t>
+              <a:t> Paso 4: en la consola de red ejecuten las 4 comprobaciones (direcciones de las interfaces, alcance del usuario al edge, alcance del edge a la aplicacion y alcance del usuario a la base de datos) y peguen las salidas, verificando que las 3 primeras tengan exito y que la cuarta falle, porque un exito ahi significa que la zona de datos quedo expuesta.</a:t>
             </a:r>
           </a:p>
           <a:p>
@@ -6829,7 +6829,7 @@
                 </a:solidFill>
                 <a:latin typeface="Calibri"/>
               </a:rPr>
-              <a:t> Entrega domingo 23:59.</a:t>
+              <a:t> Paso 5: completen la tabla de almacenamiento de 5 filas y la matriz de puertos de 6 filas, actualicen la seccion Redes y almacenamiento del informe y suban las 5 preguntas a ExamLab (modulo Talleres) antes del domingo 23:59, verificando que los puertos del diagrama, de la matriz y de la topologia sean los mismos numeros.</a:t>
             </a:r>
           </a:p>
         </p:txBody>

--- a/Arquitectura de Sistemas Computacionales/Clases/Clase 7 - Redes y almacenamiento cloud/Presentacion.pptx
+++ b/Arquitectura de Sistemas Computacionales/Clases/Clase 7 - Redes y almacenamiento cloud/Presentacion.pptx
@@ -4517,7 +4517,7 @@
                 </a:solidFill>
                 <a:latin typeface="Calibri"/>
               </a:rPr>
-              <a:t> Taller guiado PI (demo en vivo + trabajo de equipo).</a:t>
+              <a:t> Taller guiado PI (demo en vivo + avance individual).</a:t>
             </a:r>
           </a:p>
           <a:p>
@@ -5150,7 +5150,7 @@
                 </a:solidFill>
                 <a:latin typeface="Calibri"/>
               </a:rPr>
-              <a:t>–   Equipos 2–3 · todos deben poder explicar el artefacto.</a:t>
+              <a:t>–   Individual por defecto · el docente puede autorizar equipos de 2–3; la entrega en ExamLab siempre es individual.</a:t>
             </a:r>
           </a:p>
         </p:txBody>

--- a/Arquitectura de Sistemas Computacionales/Clases/Clase 7 - Redes y almacenamiento cloud/Presentacion.pptx
+++ b/Arquitectura de Sistemas Computacionales/Clases/Clase 7 - Redes y almacenamiento cloud/Presentacion.pptx
@@ -3850,7 +3850,7 @@
                 </a:solidFill>
                 <a:latin typeface="Calibri"/>
               </a:rPr>
-              <a:t>Subir evidencias al paquete CloudLite (Drive/repo) y a ExamLab (https://examlab.lovable.app/) domingo 23:59.</a:t>
+              <a:t>Subir evidencias al paquete CloudLite (Drive/repo) y a ExamLab (https://uniaj.examlab.workers.dev/) domingo 23:59.</a:t>
             </a:r>
           </a:p>
         </p:txBody>

--- a/Arquitectura de Sistemas Computacionales/Clases/Clase 7 - Redes y almacenamiento cloud/Presentacion.pptx
+++ b/Arquitectura de Sistemas Computacionales/Clases/Clase 7 - Redes y almacenamiento cloud/Presentacion.pptx
@@ -16,6 +16,8 @@
     <p:sldId id="264" r:id="rId15"/>
     <p:sldId id="265" r:id="rId16"/>
     <p:sldId id="266" r:id="rId17"/>
+    <p:sldId id="267" r:id="rId18"/>
+    <p:sldId id="268" r:id="rId19"/>
   </p:sldIdLst>
   <p:sldSz cx="12191695" cy="6858000" type="screen4x3"/>
   <p:notesSz cx="6858000" cy="9144000"/>
@@ -3468,7 +3470,7 @@
         <p:spPr>
           <a:xfrm>
             <a:off x="0" y="0"/>
-            <a:ext cx="12191695" cy="960120"/>
+            <a:ext cx="12191695" cy="1170432"/>
           </a:xfrm>
           <a:prstGeom prst="rect">
             <a:avLst/>
@@ -3510,7 +3512,7 @@
         </p:nvSpPr>
         <p:spPr>
           <a:xfrm>
-            <a:off x="0" y="960120"/>
+            <a:off x="0" y="1170432"/>
             <a:ext cx="12191695" cy="41148"/>
           </a:xfrm>
           <a:prstGeom prst="rect">
@@ -3554,7 +3556,7 @@
         <p:spPr>
           <a:xfrm>
             <a:off x="457200" y="164592"/>
-            <a:ext cx="11277295" cy="502920"/>
+            <a:ext cx="11277295" cy="384048"/>
           </a:xfrm>
           <a:prstGeom prst="rect">
             <a:avLst/>
@@ -3574,20 +3576,225 @@
                 </a:solidFill>
                 <a:latin typeface="Calibri"/>
               </a:rPr>
-              <a:t>Para continuar (PI)</a:t>
-            </a:r>
-          </a:p>
-        </p:txBody>
-      </p:sp>
-      <p:sp>
-        <p:nvSpPr>
-          <p:cNvPr id="5" name="Rounded Rectangle 4"/>
+              <a:t>Del boceto a ExamLab (diagrama)</a:t>
+            </a:r>
+          </a:p>
+        </p:txBody>
+      </p:sp>
+      <p:sp>
+        <p:nvSpPr>
+          <p:cNvPr id="5" name="TextBox 4"/>
+          <p:cNvSpPr txBox="1"/>
+          <p:nvPr/>
+        </p:nvSpPr>
+        <p:spPr>
+          <a:xfrm>
+            <a:off x="457200" y="566928"/>
+            <a:ext cx="11277295" cy="411480"/>
+          </a:xfrm>
+          <a:prstGeom prst="rect">
+            <a:avLst/>
+          </a:prstGeom>
+          <a:noFill/>
+        </p:spPr>
+        <p:txBody>
+          <a:bodyPr wrap="square">
+            <a:spAutoFit/>
+          </a:bodyPr>
+          <a:lstStyle/>
+          <a:p>
+            <a:r>
+              <a:rPr sz="1400" b="0" i="0">
+                <a:solidFill>
+                  <a:srgbClr val="B8D8EE"/>
+                </a:solidFill>
+                <a:latin typeface="Calibri"/>
+              </a:rPr>
+              <a:t>El diagrama se entrega como código Mermaid dentro de ExamLab, no como imagen</a:t>
+            </a:r>
+          </a:p>
+        </p:txBody>
+      </p:sp>
+      <p:sp>
+        <p:nvSpPr>
+          <p:cNvPr id="6" name="Rounded Rectangle 5"/>
           <p:cNvSpPr/>
           <p:nvPr/>
         </p:nvSpPr>
         <p:spPr>
           <a:xfrm>
-            <a:off x="457200" y="1261872"/>
+            <a:off x="457200" y="1659636"/>
+            <a:ext cx="11277295" cy="1051560"/>
+          </a:xfrm>
+          <a:prstGeom prst="roundRect">
+            <a:avLst>
+              <a:gd name="adj" fmla="val 12000"/>
+            </a:avLst>
+          </a:prstGeom>
+          <a:solidFill>
+            <a:srgbClr val="F2F2F2"/>
+          </a:solidFill>
+          <a:ln>
+            <a:noFill/>
+          </a:ln>
+        </p:spPr>
+        <p:style>
+          <a:lnRef idx="1">
+            <a:schemeClr val="accent1"/>
+          </a:lnRef>
+          <a:fillRef idx="3">
+            <a:schemeClr val="accent1"/>
+          </a:fillRef>
+          <a:effectRef idx="2">
+            <a:schemeClr val="accent1"/>
+          </a:effectRef>
+          <a:fontRef idx="minor">
+            <a:schemeClr val="lt1"/>
+          </a:fontRef>
+        </p:style>
+        <p:txBody>
+          <a:bodyPr rtlCol="0" anchor="ctr"/>
+          <a:lstStyle/>
+          <a:p>
+            <a:pPr algn="ctr"/>
+          </a:p>
+        </p:txBody>
+      </p:sp>
+      <p:sp>
+        <p:nvSpPr>
+          <p:cNvPr id="7" name="Rounded Rectangle 6"/>
+          <p:cNvSpPr/>
+          <p:nvPr/>
+        </p:nvSpPr>
+        <p:spPr>
+          <a:xfrm>
+            <a:off x="594360" y="1965960"/>
+            <a:ext cx="438912" cy="438912"/>
+          </a:xfrm>
+          <a:prstGeom prst="roundRect">
+            <a:avLst>
+              <a:gd name="adj" fmla="val 12000"/>
+            </a:avLst>
+          </a:prstGeom>
+          <a:solidFill>
+            <a:srgbClr val="095292"/>
+          </a:solidFill>
+          <a:ln>
+            <a:noFill/>
+          </a:ln>
+        </p:spPr>
+        <p:style>
+          <a:lnRef idx="1">
+            <a:schemeClr val="accent1"/>
+          </a:lnRef>
+          <a:fillRef idx="3">
+            <a:schemeClr val="accent1"/>
+          </a:fillRef>
+          <a:effectRef idx="2">
+            <a:schemeClr val="accent1"/>
+          </a:effectRef>
+          <a:fontRef idx="minor">
+            <a:schemeClr val="lt1"/>
+          </a:fontRef>
+        </p:style>
+        <p:txBody>
+          <a:bodyPr rtlCol="0" anchor="ctr"/>
+          <a:lstStyle/>
+          <a:p>
+            <a:pPr algn="ctr"/>
+          </a:p>
+        </p:txBody>
+      </p:sp>
+      <p:sp>
+        <p:nvSpPr>
+          <p:cNvPr id="8" name="TextBox 7"/>
+          <p:cNvSpPr txBox="1"/>
+          <p:nvPr/>
+        </p:nvSpPr>
+        <p:spPr>
+          <a:xfrm>
+            <a:off x="594360" y="1965960"/>
+            <a:ext cx="438912" cy="438912"/>
+          </a:xfrm>
+          <a:prstGeom prst="rect">
+            <a:avLst/>
+          </a:prstGeom>
+          <a:noFill/>
+        </p:spPr>
+        <p:txBody>
+          <a:bodyPr wrap="square" anchor="ctr"/>
+          <a:lstStyle/>
+          <a:p>
+            <a:pPr algn="ctr"/>
+            <a:r>
+              <a:rPr sz="1600" b="1" i="0">
+                <a:solidFill>
+                  <a:srgbClr val="FFFFFF"/>
+                </a:solidFill>
+                <a:latin typeface="Calibri"/>
+              </a:rPr>
+              <a:t>1</a:t>
+            </a:r>
+          </a:p>
+        </p:txBody>
+      </p:sp>
+      <p:sp>
+        <p:nvSpPr>
+          <p:cNvPr id="9" name="TextBox 8"/>
+          <p:cNvSpPr txBox="1"/>
+          <p:nvPr/>
+        </p:nvSpPr>
+        <p:spPr>
+          <a:xfrm>
+            <a:off x="1188720" y="1751076"/>
+            <a:ext cx="10271455" cy="886968"/>
+          </a:xfrm>
+          <a:prstGeom prst="rect">
+            <a:avLst/>
+          </a:prstGeom>
+          <a:noFill/>
+        </p:spPr>
+        <p:txBody>
+          <a:bodyPr wrap="square" anchor="ctr"/>
+          <a:lstStyle/>
+          <a:p>
+            <a:r>
+              <a:rPr sz="1500" b="1" i="0">
+                <a:solidFill>
+                  <a:srgbClr val="095292"/>
+                </a:solidFill>
+                <a:latin typeface="Calibri"/>
+              </a:rPr>
+              <a:t>Disena visual</a:t>
+            </a:r>
+          </a:p>
+          <a:p>
+            <a:pPr>
+              <a:spcBef>
+                <a:spcPts val="200"/>
+              </a:spcBef>
+            </a:pPr>
+            <a:r>
+              <a:rPr sz="1300" b="0" i="0">
+                <a:solidFill>
+                  <a:srgbClr val="333333"/>
+                </a:solidFill>
+                <a:latin typeface="Calibri"/>
+              </a:rPr>
+              <a:t>Dibuja el diagrama como quieras en Excalidraw o draw.io: es mas rapido arrastrar cajas que escribir codigo, y ahi es donde piensas el modelo.</a:t>
+            </a:r>
+          </a:p>
+        </p:txBody>
+      </p:sp>
+      <p:sp>
+        <p:nvSpPr>
+          <p:cNvPr id="10" name="Rounded Rectangle 9"/>
+          <p:cNvSpPr/>
+          <p:nvPr/>
+        </p:nvSpPr>
+        <p:spPr>
+          <a:xfrm>
+            <a:off x="457200" y="2802636"/>
             <a:ext cx="11277295" cy="1051560"/>
           </a:xfrm>
           <a:prstGeom prst="roundRect">
@@ -3626,20 +3833,22 @@
       </p:sp>
       <p:sp>
         <p:nvSpPr>
-          <p:cNvPr id="6" name="Rectangle 5"/>
+          <p:cNvPr id="11" name="Rounded Rectangle 10"/>
           <p:cNvSpPr/>
           <p:nvPr/>
         </p:nvSpPr>
         <p:spPr>
           <a:xfrm>
-            <a:off x="457200" y="1261872"/>
-            <a:ext cx="128016" cy="1051560"/>
-          </a:xfrm>
-          <a:prstGeom prst="rect">
-            <a:avLst/>
+            <a:off x="594360" y="3108960"/>
+            <a:ext cx="438912" cy="438912"/>
+          </a:xfrm>
+          <a:prstGeom prst="roundRect">
+            <a:avLst>
+              <a:gd name="adj" fmla="val 12000"/>
+            </a:avLst>
           </a:prstGeom>
           <a:solidFill>
-            <a:srgbClr val="269CCB"/>
+            <a:srgbClr val="095292"/>
           </a:solidFill>
           <a:ln>
             <a:noFill/>
@@ -3669,14 +3878,14 @@
       </p:sp>
       <p:sp>
         <p:nvSpPr>
-          <p:cNvPr id="7" name="TextBox 6"/>
+          <p:cNvPr id="12" name="TextBox 11"/>
           <p:cNvSpPr txBox="1"/>
           <p:nvPr/>
         </p:nvSpPr>
         <p:spPr>
           <a:xfrm>
-            <a:off x="777240" y="1399031"/>
-            <a:ext cx="10774375" cy="822959"/>
+            <a:off x="594360" y="3108960"/>
+            <a:ext cx="438912" cy="438912"/>
           </a:xfrm>
           <a:prstGeom prst="rect">
             <a:avLst/>
@@ -3684,48 +3893,79 @@
           <a:noFill/>
         </p:spPr>
         <p:txBody>
-          <a:bodyPr wrap="square">
-            <a:spAutoFit/>
-          </a:bodyPr>
-          <a:lstStyle/>
-          <a:p>
-            <a:r>
-              <a:rPr sz="1200" b="1" i="0">
-                <a:solidFill>
-                  <a:srgbClr val="269CCB"/>
-                </a:solidFill>
-                <a:latin typeface="Calibri"/>
-              </a:rPr>
-              <a:t>Info</a:t>
+          <a:bodyPr wrap="square" anchor="ctr"/>
+          <a:lstStyle/>
+          <a:p>
+            <a:pPr algn="ctr"/>
+            <a:r>
+              <a:rPr sz="1600" b="1" i="0">
+                <a:solidFill>
+                  <a:srgbClr val="FFFFFF"/>
+                </a:solidFill>
+                <a:latin typeface="Calibri"/>
+              </a:rPr>
+              <a:t>2</a:t>
+            </a:r>
+          </a:p>
+        </p:txBody>
+      </p:sp>
+      <p:sp>
+        <p:nvSpPr>
+          <p:cNvPr id="13" name="TextBox 12"/>
+          <p:cNvSpPr txBox="1"/>
+          <p:nvPr/>
+        </p:nvSpPr>
+        <p:spPr>
+          <a:xfrm>
+            <a:off x="1188720" y="2894076"/>
+            <a:ext cx="10271455" cy="886968"/>
+          </a:xfrm>
+          <a:prstGeom prst="rect">
+            <a:avLst/>
+          </a:prstGeom>
+          <a:noFill/>
+        </p:spPr>
+        <p:txBody>
+          <a:bodyPr wrap="square" anchor="ctr"/>
+          <a:lstStyle/>
+          <a:p>
+            <a:r>
+              <a:rPr sz="1500" b="1" i="0">
+                <a:solidFill>
+                  <a:srgbClr val="095292"/>
+                </a:solidFill>
+                <a:latin typeface="Calibri"/>
+              </a:rPr>
+              <a:t>Traduce con IA</a:t>
             </a:r>
           </a:p>
           <a:p>
             <a:pPr>
               <a:spcBef>
-                <a:spcPts val="400"/>
+                <a:spcPts val="200"/>
               </a:spcBef>
             </a:pPr>
             <a:r>
-              <a:rPr sz="1400" b="0" i="0">
+              <a:rPr sz="1300" b="0" i="0">
                 <a:solidFill>
                   <a:srgbClr val="333333"/>
                 </a:solidFill>
                 <a:latin typeface="Calibri"/>
               </a:rPr>
-              <a:t>Entregable: Diagrama Deployment (draw.io) + elección de storage (objeto/bloque/relacional conceptual)</a:t>
-            </a:r>
-          </a:p>
-        </p:txBody>
-      </p:sp>
-      <p:sp>
-        <p:nvSpPr>
-          <p:cNvPr id="8" name="Rounded Rectangle 7"/>
+              <a:t>Copia o describe tu boceto a una IA y pidele el codigo Mermaid: «convierte este diagrama a Mermaid usando C4Deployment». Revisa el resultado: la IA acierta la sintaxis, no tu modelo.</a:t>
+            </a:r>
+          </a:p>
+        </p:txBody>
+      </p:sp>
+      <p:sp>
+        <p:nvSpPr>
+          <p:cNvPr id="14" name="Rounded Rectangle 13"/>
           <p:cNvSpPr/>
           <p:nvPr/>
         </p:nvSpPr>
         <p:spPr>
           <a:xfrm>
-            <a:off x="457200" y="2478024"/>
+            <a:off x="457200" y="3945636"/>
             <a:ext cx="11277295" cy="1051560"/>
           </a:xfrm>
           <a:prstGeom prst="roundRect">
@@ -3734,7 +3974,7 @@
             </a:avLst>
           </a:prstGeom>
           <a:solidFill>
-            <a:srgbClr val="FFF8E1"/>
+            <a:srgbClr val="F2F2F2"/>
           </a:solidFill>
           <a:ln>
             <a:noFill/>
@@ -3764,20 +4004,22 @@
       </p:sp>
       <p:sp>
         <p:nvSpPr>
-          <p:cNvPr id="9" name="Rectangle 8"/>
+          <p:cNvPr id="15" name="Rounded Rectangle 14"/>
           <p:cNvSpPr/>
           <p:nvPr/>
         </p:nvSpPr>
         <p:spPr>
           <a:xfrm>
-            <a:off x="457200" y="2478024"/>
-            <a:ext cx="128016" cy="1051560"/>
-          </a:xfrm>
-          <a:prstGeom prst="rect">
-            <a:avLst/>
+            <a:off x="594360" y="4251960"/>
+            <a:ext cx="438912" cy="438912"/>
+          </a:xfrm>
+          <a:prstGeom prst="roundRect">
+            <a:avLst>
+              <a:gd name="adj" fmla="val 12000"/>
+            </a:avLst>
           </a:prstGeom>
           <a:solidFill>
-            <a:srgbClr val="FFD000"/>
+            <a:srgbClr val="095292"/>
           </a:solidFill>
           <a:ln>
             <a:noFill/>
@@ -3807,14 +4049,14 @@
       </p:sp>
       <p:sp>
         <p:nvSpPr>
-          <p:cNvPr id="10" name="TextBox 9"/>
+          <p:cNvPr id="16" name="TextBox 15"/>
           <p:cNvSpPr txBox="1"/>
           <p:nvPr/>
         </p:nvSpPr>
         <p:spPr>
           <a:xfrm>
-            <a:off x="777240" y="2615184"/>
-            <a:ext cx="10774375" cy="822959"/>
+            <a:off x="594360" y="4251960"/>
+            <a:ext cx="438912" cy="438912"/>
           </a:xfrm>
           <a:prstGeom prst="rect">
             <a:avLst/>
@@ -3822,48 +4064,79 @@
           <a:noFill/>
         </p:spPr>
         <p:txBody>
-          <a:bodyPr wrap="square">
-            <a:spAutoFit/>
-          </a:bodyPr>
-          <a:lstStyle/>
-          <a:p>
-            <a:r>
-              <a:rPr sz="1200" b="1" i="0">
-                <a:solidFill>
-                  <a:srgbClr val="FFD000"/>
-                </a:solidFill>
-                <a:latin typeface="Calibri"/>
-              </a:rPr>
-              <a:t>Aclaración</a:t>
+          <a:bodyPr wrap="square" anchor="ctr"/>
+          <a:lstStyle/>
+          <a:p>
+            <a:pPr algn="ctr"/>
+            <a:r>
+              <a:rPr sz="1600" b="1" i="0">
+                <a:solidFill>
+                  <a:srgbClr val="FFFFFF"/>
+                </a:solidFill>
+                <a:latin typeface="Calibri"/>
+              </a:rPr>
+              <a:t>3</a:t>
+            </a:r>
+          </a:p>
+        </p:txBody>
+      </p:sp>
+      <p:sp>
+        <p:nvSpPr>
+          <p:cNvPr id="17" name="TextBox 16"/>
+          <p:cNvSpPr txBox="1"/>
+          <p:nvPr/>
+        </p:nvSpPr>
+        <p:spPr>
+          <a:xfrm>
+            <a:off x="1188720" y="4037076"/>
+            <a:ext cx="10271455" cy="886968"/>
+          </a:xfrm>
+          <a:prstGeom prst="rect">
+            <a:avLst/>
+          </a:prstGeom>
+          <a:noFill/>
+        </p:spPr>
+        <p:txBody>
+          <a:bodyPr wrap="square" anchor="ctr"/>
+          <a:lstStyle/>
+          <a:p>
+            <a:r>
+              <a:rPr sz="1500" b="1" i="0">
+                <a:solidFill>
+                  <a:srgbClr val="095292"/>
+                </a:solidFill>
+                <a:latin typeface="Calibri"/>
+              </a:rPr>
+              <a:t>Pega y renderiza en ExamLab</a:t>
             </a:r>
           </a:p>
           <a:p>
             <a:pPr>
               <a:spcBef>
-                <a:spcPts val="400"/>
+                <a:spcPts val="200"/>
               </a:spcBef>
             </a:pPr>
             <a:r>
-              <a:rPr sz="1400" b="0" i="0">
+              <a:rPr sz="1300" b="0" i="0">
                 <a:solidFill>
                   <a:srgbClr val="333333"/>
                 </a:solidFill>
                 <a:latin typeface="Calibri"/>
               </a:rPr>
-              <a:t>Subir evidencias al paquete CloudLite (Drive/repo) y a ExamLab (https://uniaj.examlab.workers.dev/) domingo 23:59.</a:t>
-            </a:r>
-          </a:p>
-        </p:txBody>
-      </p:sp>
-      <p:sp>
-        <p:nvSpPr>
-          <p:cNvPr id="11" name="Rounded Rectangle 10"/>
+              <a:t>Pega ese codigo en la caja de texto de la pregunta y mira como lo dibuja la plataforma. Si no renderiza, corrige ahi mismo: lo que se califica es el diagrama renderizado dentro de ExamLab.</a:t>
+            </a:r>
+          </a:p>
+        </p:txBody>
+      </p:sp>
+      <p:sp>
+        <p:nvSpPr>
+          <p:cNvPr id="18" name="Rounded Rectangle 17"/>
           <p:cNvSpPr/>
           <p:nvPr/>
         </p:nvSpPr>
         <p:spPr>
           <a:xfrm>
-            <a:off x="457200" y="3694176"/>
+            <a:off x="457200" y="5088636"/>
             <a:ext cx="11277295" cy="1051560"/>
           </a:xfrm>
           <a:prstGeom prst="roundRect">
@@ -3872,7 +4145,7 @@
             </a:avLst>
           </a:prstGeom>
           <a:solidFill>
-            <a:srgbClr val="FBE4E4"/>
+            <a:srgbClr val="E8F4FA"/>
           </a:solidFill>
           <a:ln>
             <a:noFill/>
@@ -3902,20 +4175,22 @@
       </p:sp>
       <p:sp>
         <p:nvSpPr>
-          <p:cNvPr id="12" name="Rectangle 11"/>
+          <p:cNvPr id="19" name="Rounded Rectangle 18"/>
           <p:cNvSpPr/>
           <p:nvPr/>
         </p:nvSpPr>
         <p:spPr>
           <a:xfrm>
-            <a:off x="457200" y="3694176"/>
-            <a:ext cx="128016" cy="1051560"/>
-          </a:xfrm>
-          <a:prstGeom prst="rect">
-            <a:avLst/>
+            <a:off x="594360" y="5394960"/>
+            <a:ext cx="438912" cy="438912"/>
+          </a:xfrm>
+          <a:prstGeom prst="roundRect">
+            <a:avLst>
+              <a:gd name="adj" fmla="val 12000"/>
+            </a:avLst>
           </a:prstGeom>
           <a:solidFill>
-            <a:srgbClr val="A02030"/>
+            <a:srgbClr val="095292"/>
           </a:solidFill>
           <a:ln>
             <a:noFill/>
@@ -3945,14 +4220,14 @@
       </p:sp>
       <p:sp>
         <p:nvSpPr>
-          <p:cNvPr id="13" name="TextBox 12"/>
+          <p:cNvPr id="20" name="TextBox 19"/>
           <p:cNvSpPr txBox="1"/>
           <p:nvPr/>
         </p:nvSpPr>
         <p:spPr>
           <a:xfrm>
-            <a:off x="777240" y="3831336"/>
-            <a:ext cx="10774375" cy="822959"/>
+            <a:off x="594360" y="5394960"/>
+            <a:ext cx="438912" cy="438912"/>
           </a:xfrm>
           <a:prstGeom prst="rect">
             <a:avLst/>
@@ -3960,42 +4235,73 @@
           <a:noFill/>
         </p:spPr>
         <p:txBody>
-          <a:bodyPr wrap="square">
-            <a:spAutoFit/>
-          </a:bodyPr>
-          <a:lstStyle/>
-          <a:p>
-            <a:r>
-              <a:rPr sz="1200" b="1" i="0">
-                <a:solidFill>
-                  <a:srgbClr val="A02030"/>
-                </a:solidFill>
-                <a:latin typeface="Calibri"/>
-              </a:rPr>
-              <a:t>Atención</a:t>
+          <a:bodyPr wrap="square" anchor="ctr"/>
+          <a:lstStyle/>
+          <a:p>
+            <a:pPr algn="ctr"/>
+            <a:r>
+              <a:rPr sz="1600" b="1" i="0">
+                <a:solidFill>
+                  <a:srgbClr val="FFFFFF"/>
+                </a:solidFill>
+                <a:latin typeface="Calibri"/>
+              </a:rPr>
+              <a:t>4</a:t>
+            </a:r>
+          </a:p>
+        </p:txBody>
+      </p:sp>
+      <p:sp>
+        <p:nvSpPr>
+          <p:cNvPr id="21" name="TextBox 20"/>
+          <p:cNvSpPr txBox="1"/>
+          <p:nvPr/>
+        </p:nvSpPr>
+        <p:spPr>
+          <a:xfrm>
+            <a:off x="1188720" y="5180076"/>
+            <a:ext cx="10271455" cy="886968"/>
+          </a:xfrm>
+          <a:prstGeom prst="rect">
+            <a:avLst/>
+          </a:prstGeom>
+          <a:noFill/>
+        </p:spPr>
+        <p:txBody>
+          <a:bodyPr wrap="square" anchor="ctr"/>
+          <a:lstStyle/>
+          <a:p>
+            <a:r>
+              <a:rPr sz="1500" b="1" i="0">
+                <a:solidFill>
+                  <a:srgbClr val="095292"/>
+                </a:solidFill>
+                <a:latin typeface="Calibri"/>
+              </a:rPr>
+              <a:t>Guarda el PNG para tu PI</a:t>
             </a:r>
           </a:p>
           <a:p>
             <a:pPr>
               <a:spcBef>
-                <a:spcPts val="400"/>
+                <a:spcPts val="200"/>
               </a:spcBef>
             </a:pPr>
             <a:r>
-              <a:rPr sz="1400" b="0" i="0">
+              <a:rPr sz="1300" b="0" i="0">
                 <a:solidFill>
                   <a:srgbClr val="333333"/>
                 </a:solidFill>
                 <a:latin typeface="Calibri"/>
               </a:rPr>
-              <a:t>Sin cloud de pago ni instalaciones obligatorias de hipervisores/Docker Desktop.</a:t>
-            </a:r>
-          </a:p>
-        </p:txBody>
-      </p:sp>
-      <p:sp>
-        <p:nvSpPr>
-          <p:cNvPr id="14" name="TextBox 13"/>
+              <a:t>Exporta tambien la imagen a la carpeta de tu Proyecto Integrador. Esa copia es para tu informe; no reemplaza la respuesta en la plataforma.</a:t>
+            </a:r>
+          </a:p>
+        </p:txBody>
+      </p:sp>
+      <p:sp>
+        <p:nvSpPr>
+          <p:cNvPr id="22" name="TextBox 21"/>
           <p:cNvSpPr txBox="1"/>
           <p:nvPr/>
         </p:nvSpPr>
@@ -4063,6 +4369,966 @@
         <p:spPr>
           <a:xfrm>
             <a:off x="0" y="0"/>
+            <a:ext cx="12191695" cy="960120"/>
+          </a:xfrm>
+          <a:prstGeom prst="rect">
+            <a:avLst/>
+          </a:prstGeom>
+          <a:solidFill>
+            <a:srgbClr val="095292"/>
+          </a:solidFill>
+          <a:ln>
+            <a:noFill/>
+          </a:ln>
+        </p:spPr>
+        <p:style>
+          <a:lnRef idx="1">
+            <a:schemeClr val="accent1"/>
+          </a:lnRef>
+          <a:fillRef idx="3">
+            <a:schemeClr val="accent1"/>
+          </a:fillRef>
+          <a:effectRef idx="2">
+            <a:schemeClr val="accent1"/>
+          </a:effectRef>
+          <a:fontRef idx="minor">
+            <a:schemeClr val="lt1"/>
+          </a:fontRef>
+        </p:style>
+        <p:txBody>
+          <a:bodyPr rtlCol="0" anchor="ctr"/>
+          <a:lstStyle/>
+          <a:p>
+            <a:pPr algn="ctr"/>
+          </a:p>
+        </p:txBody>
+      </p:sp>
+      <p:sp>
+        <p:nvSpPr>
+          <p:cNvPr id="3" name="Rectangle 2"/>
+          <p:cNvSpPr/>
+          <p:nvPr/>
+        </p:nvSpPr>
+        <p:spPr>
+          <a:xfrm>
+            <a:off x="0" y="960120"/>
+            <a:ext cx="12191695" cy="41148"/>
+          </a:xfrm>
+          <a:prstGeom prst="rect">
+            <a:avLst/>
+          </a:prstGeom>
+          <a:solidFill>
+            <a:srgbClr val="FFD000"/>
+          </a:solidFill>
+          <a:ln>
+            <a:noFill/>
+          </a:ln>
+        </p:spPr>
+        <p:style>
+          <a:lnRef idx="1">
+            <a:schemeClr val="accent1"/>
+          </a:lnRef>
+          <a:fillRef idx="3">
+            <a:schemeClr val="accent1"/>
+          </a:fillRef>
+          <a:effectRef idx="2">
+            <a:schemeClr val="accent1"/>
+          </a:effectRef>
+          <a:fontRef idx="minor">
+            <a:schemeClr val="lt1"/>
+          </a:fontRef>
+        </p:style>
+        <p:txBody>
+          <a:bodyPr rtlCol="0" anchor="ctr"/>
+          <a:lstStyle/>
+          <a:p>
+            <a:pPr algn="ctr"/>
+          </a:p>
+        </p:txBody>
+      </p:sp>
+      <p:sp>
+        <p:nvSpPr>
+          <p:cNvPr id="4" name="TextBox 3"/>
+          <p:cNvSpPr txBox="1"/>
+          <p:nvPr/>
+        </p:nvSpPr>
+        <p:spPr>
+          <a:xfrm>
+            <a:off x="457200" y="164592"/>
+            <a:ext cx="11277295" cy="502920"/>
+          </a:xfrm>
+          <a:prstGeom prst="rect">
+            <a:avLst/>
+          </a:prstGeom>
+          <a:noFill/>
+        </p:spPr>
+        <p:txBody>
+          <a:bodyPr wrap="square">
+            <a:spAutoFit/>
+          </a:bodyPr>
+          <a:lstStyle/>
+          <a:p>
+            <a:r>
+              <a:rPr sz="2600" b="1" i="0">
+                <a:solidFill>
+                  <a:srgbClr val="FFFFFF"/>
+                </a:solidFill>
+                <a:latin typeface="Calibri"/>
+              </a:rPr>
+              <a:t>Taller PI (paso a paso)</a:t>
+            </a:r>
+          </a:p>
+        </p:txBody>
+      </p:sp>
+      <p:sp>
+        <p:nvSpPr>
+          <p:cNvPr id="5" name="TextBox 4"/>
+          <p:cNvSpPr txBox="1"/>
+          <p:nvPr/>
+        </p:nvSpPr>
+        <p:spPr>
+          <a:xfrm>
+            <a:off x="457200" y="1170432"/>
+            <a:ext cx="11277295" cy="5230368"/>
+          </a:xfrm>
+          <a:prstGeom prst="rect">
+            <a:avLst/>
+          </a:prstGeom>
+          <a:noFill/>
+        </p:spPr>
+        <p:txBody>
+          <a:bodyPr wrap="square">
+            <a:spAutoFit/>
+          </a:bodyPr>
+          <a:lstStyle/>
+          <a:p>
+            <a:pPr>
+              <a:spcAft>
+                <a:spcPts val="800"/>
+              </a:spcAft>
+            </a:pPr>
+            <a:r>
+              <a:rPr sz="1600" b="1" i="0">
+                <a:solidFill>
+                  <a:srgbClr val="333333"/>
+                </a:solidFill>
+                <a:latin typeface="Calibri"/>
+              </a:rPr>
+              <a:t>1.</a:t>
+            </a:r>
+            <a:r>
+              <a:rPr sz="1600" b="0" i="0">
+                <a:solidFill>
+                  <a:srgbClr val="333333"/>
+                </a:solidFill>
+                <a:latin typeface="Calibri"/>
+              </a:rPr>
+              <a:t> Paso 1: copien la lista canonica de 5 contenedores de la Clase 4 y asignen cada uno a una de 3 zonas con su subred (zona publica 10.10.1.0/24, zona privada 10.10.2.0/24, zona de datos 10.10.3.0/24), verificando que ningun contenedor quede sin zona y que la base de datos y la cola no queden en la zona publica.</a:t>
+            </a:r>
+          </a:p>
+          <a:p>
+            <a:pPr>
+              <a:spcAft>
+                <a:spcPts val="800"/>
+              </a:spcAft>
+            </a:pPr>
+            <a:r>
+              <a:rPr sz="1600" b="0" i="0">
+                <a:solidFill>
+                  <a:srgbClr val="333333"/>
+                </a:solidFill>
+                <a:latin typeface="Calibri"/>
+              </a:rPr>
+              <a:t>–   </a:t>
+            </a:r>
+            <a:r>
+              <a:rPr sz="1600" b="1" i="0">
+                <a:solidFill>
+                  <a:srgbClr val="333333"/>
+                </a:solidFill>
+                <a:latin typeface="Calibri"/>
+              </a:rPr>
+              <a:t>2.</a:t>
+            </a:r>
+            <a:r>
+              <a:rPr sz="1600" b="0" i="0">
+                <a:solidFill>
+                  <a:srgbClr val="333333"/>
+                </a:solidFill>
+                <a:latin typeface="Calibri"/>
+              </a:rPr>
+              <a:t> Paso 2: escriban en ExamLab el diagrama C4Deployment en Mermaid con 4 Deployment_Node (dispositivo del usuario, zona publica, zona privada y zona de datos), el tamano de cada nodo y los mismos nombres de contenedores, verificando al renderizar que cada relacion lleve puerto y que el nombre de cada contenedor sea identico letra por letra al del C4Container de la Clase 4.</a:t>
+            </a:r>
+          </a:p>
+          <a:p>
+            <a:pPr>
+              <a:spcAft>
+                <a:spcPts val="800"/>
+              </a:spcAft>
+            </a:pPr>
+            <a:r>
+              <a:rPr sz="1600" b="0" i="0">
+                <a:solidFill>
+                  <a:srgbClr val="333333"/>
+                </a:solidFill>
+                <a:latin typeface="Calibri"/>
+              </a:rPr>
+              <a:t>–   </a:t>
+            </a:r>
+            <a:r>
+              <a:rPr sz="1600" b="1" i="0">
+                <a:solidFill>
+                  <a:srgbClr val="333333"/>
+                </a:solidFill>
+                <a:latin typeface="Calibri"/>
+              </a:rPr>
+              <a:t>3.</a:t>
+            </a:r>
+            <a:r>
+              <a:rPr sz="1600" b="0" i="0">
+                <a:solidFill>
+                  <a:srgbClr val="333333"/>
+                </a:solidFill>
+                <a:latin typeface="Calibri"/>
+              </a:rPr>
+              <a:t> Paso 3: en el editor de topologia de red arme la red con 5 dispositivos (equipo del usuario, edge o proxy reverso, dos nodos de aplicacion y un nodo de datos) y las 3 subredes del paso 1, verificando que cada interfaz tenga una direccion valida dentro de su subred y que el nodo de datos no tenga ruta hacia la subred del usuario.</a:t>
+            </a:r>
+          </a:p>
+          <a:p>
+            <a:pPr>
+              <a:spcAft>
+                <a:spcPts val="800"/>
+              </a:spcAft>
+            </a:pPr>
+            <a:r>
+              <a:rPr sz="1600" b="0" i="0">
+                <a:solidFill>
+                  <a:srgbClr val="333333"/>
+                </a:solidFill>
+                <a:latin typeface="Calibri"/>
+              </a:rPr>
+              <a:t>–   </a:t>
+            </a:r>
+            <a:r>
+              <a:rPr sz="1600" b="1" i="0">
+                <a:solidFill>
+                  <a:srgbClr val="333333"/>
+                </a:solidFill>
+                <a:latin typeface="Calibri"/>
+              </a:rPr>
+              <a:t>4.</a:t>
+            </a:r>
+            <a:r>
+              <a:rPr sz="1600" b="0" i="0">
+                <a:solidFill>
+                  <a:srgbClr val="333333"/>
+                </a:solidFill>
+                <a:latin typeface="Calibri"/>
+              </a:rPr>
+              <a:t> Paso 4: en la consola de red ejecuten las 4 comprobaciones (direcciones de las interfaces, alcance del usuario al edge, alcance del edge a la aplicacion y alcance del usuario a la base de datos) y peguen las salidas, verificando que las 3 primeras tengan exito y que la cuarta falle, porque un exito ahi significa que la zona de datos quedo expuesta.</a:t>
+            </a:r>
+          </a:p>
+          <a:p>
+            <a:pPr>
+              <a:spcAft>
+                <a:spcPts val="800"/>
+              </a:spcAft>
+            </a:pPr>
+            <a:r>
+              <a:rPr sz="1600" b="0" i="0">
+                <a:solidFill>
+                  <a:srgbClr val="333333"/>
+                </a:solidFill>
+                <a:latin typeface="Calibri"/>
+              </a:rPr>
+              <a:t>–   </a:t>
+            </a:r>
+            <a:r>
+              <a:rPr sz="1600" b="1" i="0">
+                <a:solidFill>
+                  <a:srgbClr val="333333"/>
+                </a:solidFill>
+                <a:latin typeface="Calibri"/>
+              </a:rPr>
+              <a:t>5.</a:t>
+            </a:r>
+            <a:r>
+              <a:rPr sz="1600" b="0" i="0">
+                <a:solidFill>
+                  <a:srgbClr val="333333"/>
+                </a:solidFill>
+                <a:latin typeface="Calibri"/>
+              </a:rPr>
+              <a:t> Paso 5: completen la tabla de almacenamiento de 5 filas y la matriz de puertos de 6 filas, actualicen la seccion Redes y almacenamiento del informe y suban las 5 preguntas a ExamLab (modulo Talleres) antes del domingo 23:59, verificando que los puertos del diagrama, de la matriz y de la topologia sean los mismos numeros.</a:t>
+            </a:r>
+          </a:p>
+        </p:txBody>
+      </p:sp>
+      <p:sp>
+        <p:nvSpPr>
+          <p:cNvPr id="6" name="TextBox 5"/>
+          <p:cNvSpPr txBox="1"/>
+          <p:nvPr/>
+        </p:nvSpPr>
+        <p:spPr>
+          <a:xfrm>
+            <a:off x="11185855" y="6473952"/>
+            <a:ext cx="640080" cy="274320"/>
+          </a:xfrm>
+          <a:prstGeom prst="rect">
+            <a:avLst/>
+          </a:prstGeom>
+          <a:noFill/>
+        </p:spPr>
+        <p:txBody>
+          <a:bodyPr wrap="square">
+            <a:spAutoFit/>
+          </a:bodyPr>
+          <a:lstStyle/>
+          <a:p>
+            <a:pPr algn="r"/>
+            <a:r>
+              <a:rPr sz="1100" b="0" i="0">
+                <a:solidFill>
+                  <a:srgbClr val="666666"/>
+                </a:solidFill>
+                <a:latin typeface="Calibri"/>
+              </a:rPr>
+              <a:t>11</a:t>
+            </a:r>
+          </a:p>
+        </p:txBody>
+      </p:sp>
+    </p:spTree>
+  </p:cSld>
+  <p:clrMapOvr>
+    <a:masterClrMapping/>
+  </p:clrMapOvr>
+</p:sld>
+</file>
+
+<file path=ppt/slides/slide12.xml><?xml version="1.0" encoding="utf-8"?>
+<p:sld xmlns:a="http://schemas.openxmlformats.org/drawingml/2006/main" xmlns:p="http://schemas.openxmlformats.org/presentationml/2006/main" xmlns:r="http://schemas.openxmlformats.org/officeDocument/2006/relationships">
+  <p:cSld>
+    <p:bg>
+      <p:bgPr>
+        <a:solidFill>
+          <a:srgbClr val="FFFFFF"/>
+        </a:solidFill>
+        <a:effectLst/>
+      </p:bgPr>
+    </p:bg>
+    <p:spTree>
+      <p:nvGrpSpPr>
+        <p:cNvPr id="1" name=""/>
+        <p:cNvGrpSpPr/>
+        <p:nvPr/>
+      </p:nvGrpSpPr>
+      <p:grpSpPr/>
+      <p:sp>
+        <p:nvSpPr>
+          <p:cNvPr id="2" name="Rectangle 1"/>
+          <p:cNvSpPr/>
+          <p:nvPr/>
+        </p:nvSpPr>
+        <p:spPr>
+          <a:xfrm>
+            <a:off x="0" y="0"/>
+            <a:ext cx="12191695" cy="960120"/>
+          </a:xfrm>
+          <a:prstGeom prst="rect">
+            <a:avLst/>
+          </a:prstGeom>
+          <a:solidFill>
+            <a:srgbClr val="095292"/>
+          </a:solidFill>
+          <a:ln>
+            <a:noFill/>
+          </a:ln>
+        </p:spPr>
+        <p:style>
+          <a:lnRef idx="1">
+            <a:schemeClr val="accent1"/>
+          </a:lnRef>
+          <a:fillRef idx="3">
+            <a:schemeClr val="accent1"/>
+          </a:fillRef>
+          <a:effectRef idx="2">
+            <a:schemeClr val="accent1"/>
+          </a:effectRef>
+          <a:fontRef idx="minor">
+            <a:schemeClr val="lt1"/>
+          </a:fontRef>
+        </p:style>
+        <p:txBody>
+          <a:bodyPr rtlCol="0" anchor="ctr"/>
+          <a:lstStyle/>
+          <a:p>
+            <a:pPr algn="ctr"/>
+          </a:p>
+        </p:txBody>
+      </p:sp>
+      <p:sp>
+        <p:nvSpPr>
+          <p:cNvPr id="3" name="Rectangle 2"/>
+          <p:cNvSpPr/>
+          <p:nvPr/>
+        </p:nvSpPr>
+        <p:spPr>
+          <a:xfrm>
+            <a:off x="0" y="960120"/>
+            <a:ext cx="12191695" cy="41148"/>
+          </a:xfrm>
+          <a:prstGeom prst="rect">
+            <a:avLst/>
+          </a:prstGeom>
+          <a:solidFill>
+            <a:srgbClr val="FFD000"/>
+          </a:solidFill>
+          <a:ln>
+            <a:noFill/>
+          </a:ln>
+        </p:spPr>
+        <p:style>
+          <a:lnRef idx="1">
+            <a:schemeClr val="accent1"/>
+          </a:lnRef>
+          <a:fillRef idx="3">
+            <a:schemeClr val="accent1"/>
+          </a:fillRef>
+          <a:effectRef idx="2">
+            <a:schemeClr val="accent1"/>
+          </a:effectRef>
+          <a:fontRef idx="minor">
+            <a:schemeClr val="lt1"/>
+          </a:fontRef>
+        </p:style>
+        <p:txBody>
+          <a:bodyPr rtlCol="0" anchor="ctr"/>
+          <a:lstStyle/>
+          <a:p>
+            <a:pPr algn="ctr"/>
+          </a:p>
+        </p:txBody>
+      </p:sp>
+      <p:sp>
+        <p:nvSpPr>
+          <p:cNvPr id="4" name="TextBox 3"/>
+          <p:cNvSpPr txBox="1"/>
+          <p:nvPr/>
+        </p:nvSpPr>
+        <p:spPr>
+          <a:xfrm>
+            <a:off x="457200" y="164592"/>
+            <a:ext cx="11277295" cy="502920"/>
+          </a:xfrm>
+          <a:prstGeom prst="rect">
+            <a:avLst/>
+          </a:prstGeom>
+          <a:noFill/>
+        </p:spPr>
+        <p:txBody>
+          <a:bodyPr wrap="square">
+            <a:spAutoFit/>
+          </a:bodyPr>
+          <a:lstStyle/>
+          <a:p>
+            <a:r>
+              <a:rPr sz="2600" b="1" i="0">
+                <a:solidFill>
+                  <a:srgbClr val="FFFFFF"/>
+                </a:solidFill>
+                <a:latin typeface="Calibri"/>
+              </a:rPr>
+              <a:t>Para continuar (PI)</a:t>
+            </a:r>
+          </a:p>
+        </p:txBody>
+      </p:sp>
+      <p:sp>
+        <p:nvSpPr>
+          <p:cNvPr id="5" name="Rounded Rectangle 4"/>
+          <p:cNvSpPr/>
+          <p:nvPr/>
+        </p:nvSpPr>
+        <p:spPr>
+          <a:xfrm>
+            <a:off x="457200" y="1261872"/>
+            <a:ext cx="11277295" cy="1051560"/>
+          </a:xfrm>
+          <a:prstGeom prst="roundRect">
+            <a:avLst>
+              <a:gd name="adj" fmla="val 12000"/>
+            </a:avLst>
+          </a:prstGeom>
+          <a:solidFill>
+            <a:srgbClr val="E8F4FA"/>
+          </a:solidFill>
+          <a:ln>
+            <a:noFill/>
+          </a:ln>
+        </p:spPr>
+        <p:style>
+          <a:lnRef idx="1">
+            <a:schemeClr val="accent1"/>
+          </a:lnRef>
+          <a:fillRef idx="3">
+            <a:schemeClr val="accent1"/>
+          </a:fillRef>
+          <a:effectRef idx="2">
+            <a:schemeClr val="accent1"/>
+          </a:effectRef>
+          <a:fontRef idx="minor">
+            <a:schemeClr val="lt1"/>
+          </a:fontRef>
+        </p:style>
+        <p:txBody>
+          <a:bodyPr rtlCol="0" anchor="ctr"/>
+          <a:lstStyle/>
+          <a:p>
+            <a:pPr algn="ctr"/>
+          </a:p>
+        </p:txBody>
+      </p:sp>
+      <p:sp>
+        <p:nvSpPr>
+          <p:cNvPr id="6" name="Rectangle 5"/>
+          <p:cNvSpPr/>
+          <p:nvPr/>
+        </p:nvSpPr>
+        <p:spPr>
+          <a:xfrm>
+            <a:off x="457200" y="1261872"/>
+            <a:ext cx="128016" cy="1051560"/>
+          </a:xfrm>
+          <a:prstGeom prst="rect">
+            <a:avLst/>
+          </a:prstGeom>
+          <a:solidFill>
+            <a:srgbClr val="269CCB"/>
+          </a:solidFill>
+          <a:ln>
+            <a:noFill/>
+          </a:ln>
+        </p:spPr>
+        <p:style>
+          <a:lnRef idx="1">
+            <a:schemeClr val="accent1"/>
+          </a:lnRef>
+          <a:fillRef idx="3">
+            <a:schemeClr val="accent1"/>
+          </a:fillRef>
+          <a:effectRef idx="2">
+            <a:schemeClr val="accent1"/>
+          </a:effectRef>
+          <a:fontRef idx="minor">
+            <a:schemeClr val="lt1"/>
+          </a:fontRef>
+        </p:style>
+        <p:txBody>
+          <a:bodyPr rtlCol="0" anchor="ctr"/>
+          <a:lstStyle/>
+          <a:p>
+            <a:pPr algn="ctr"/>
+          </a:p>
+        </p:txBody>
+      </p:sp>
+      <p:sp>
+        <p:nvSpPr>
+          <p:cNvPr id="7" name="TextBox 6"/>
+          <p:cNvSpPr txBox="1"/>
+          <p:nvPr/>
+        </p:nvSpPr>
+        <p:spPr>
+          <a:xfrm>
+            <a:off x="777240" y="1399031"/>
+            <a:ext cx="10774375" cy="822959"/>
+          </a:xfrm>
+          <a:prstGeom prst="rect">
+            <a:avLst/>
+          </a:prstGeom>
+          <a:noFill/>
+        </p:spPr>
+        <p:txBody>
+          <a:bodyPr wrap="square">
+            <a:spAutoFit/>
+          </a:bodyPr>
+          <a:lstStyle/>
+          <a:p>
+            <a:r>
+              <a:rPr sz="1200" b="1" i="0">
+                <a:solidFill>
+                  <a:srgbClr val="269CCB"/>
+                </a:solidFill>
+                <a:latin typeface="Calibri"/>
+              </a:rPr>
+              <a:t>Info</a:t>
+            </a:r>
+          </a:p>
+          <a:p>
+            <a:pPr>
+              <a:spcBef>
+                <a:spcPts val="400"/>
+              </a:spcBef>
+            </a:pPr>
+            <a:r>
+              <a:rPr sz="1400" b="0" i="0">
+                <a:solidFill>
+                  <a:srgbClr val="333333"/>
+                </a:solidFill>
+                <a:latin typeface="Calibri"/>
+              </a:rPr>
+              <a:t>Entregable: Diagrama Deployment (draw.io) + elección de storage (objeto/bloque/relacional conceptual)</a:t>
+            </a:r>
+          </a:p>
+        </p:txBody>
+      </p:sp>
+      <p:sp>
+        <p:nvSpPr>
+          <p:cNvPr id="8" name="Rounded Rectangle 7"/>
+          <p:cNvSpPr/>
+          <p:nvPr/>
+        </p:nvSpPr>
+        <p:spPr>
+          <a:xfrm>
+            <a:off x="457200" y="2478024"/>
+            <a:ext cx="11277295" cy="1051560"/>
+          </a:xfrm>
+          <a:prstGeom prst="roundRect">
+            <a:avLst>
+              <a:gd name="adj" fmla="val 12000"/>
+            </a:avLst>
+          </a:prstGeom>
+          <a:solidFill>
+            <a:srgbClr val="FFF8E1"/>
+          </a:solidFill>
+          <a:ln>
+            <a:noFill/>
+          </a:ln>
+        </p:spPr>
+        <p:style>
+          <a:lnRef idx="1">
+            <a:schemeClr val="accent1"/>
+          </a:lnRef>
+          <a:fillRef idx="3">
+            <a:schemeClr val="accent1"/>
+          </a:fillRef>
+          <a:effectRef idx="2">
+            <a:schemeClr val="accent1"/>
+          </a:effectRef>
+          <a:fontRef idx="minor">
+            <a:schemeClr val="lt1"/>
+          </a:fontRef>
+        </p:style>
+        <p:txBody>
+          <a:bodyPr rtlCol="0" anchor="ctr"/>
+          <a:lstStyle/>
+          <a:p>
+            <a:pPr algn="ctr"/>
+          </a:p>
+        </p:txBody>
+      </p:sp>
+      <p:sp>
+        <p:nvSpPr>
+          <p:cNvPr id="9" name="Rectangle 8"/>
+          <p:cNvSpPr/>
+          <p:nvPr/>
+        </p:nvSpPr>
+        <p:spPr>
+          <a:xfrm>
+            <a:off x="457200" y="2478024"/>
+            <a:ext cx="128016" cy="1051560"/>
+          </a:xfrm>
+          <a:prstGeom prst="rect">
+            <a:avLst/>
+          </a:prstGeom>
+          <a:solidFill>
+            <a:srgbClr val="FFD000"/>
+          </a:solidFill>
+          <a:ln>
+            <a:noFill/>
+          </a:ln>
+        </p:spPr>
+        <p:style>
+          <a:lnRef idx="1">
+            <a:schemeClr val="accent1"/>
+          </a:lnRef>
+          <a:fillRef idx="3">
+            <a:schemeClr val="accent1"/>
+          </a:fillRef>
+          <a:effectRef idx="2">
+            <a:schemeClr val="accent1"/>
+          </a:effectRef>
+          <a:fontRef idx="minor">
+            <a:schemeClr val="lt1"/>
+          </a:fontRef>
+        </p:style>
+        <p:txBody>
+          <a:bodyPr rtlCol="0" anchor="ctr"/>
+          <a:lstStyle/>
+          <a:p>
+            <a:pPr algn="ctr"/>
+          </a:p>
+        </p:txBody>
+      </p:sp>
+      <p:sp>
+        <p:nvSpPr>
+          <p:cNvPr id="10" name="TextBox 9"/>
+          <p:cNvSpPr txBox="1"/>
+          <p:nvPr/>
+        </p:nvSpPr>
+        <p:spPr>
+          <a:xfrm>
+            <a:off x="777240" y="2615184"/>
+            <a:ext cx="10774375" cy="822959"/>
+          </a:xfrm>
+          <a:prstGeom prst="rect">
+            <a:avLst/>
+          </a:prstGeom>
+          <a:noFill/>
+        </p:spPr>
+        <p:txBody>
+          <a:bodyPr wrap="square">
+            <a:spAutoFit/>
+          </a:bodyPr>
+          <a:lstStyle/>
+          <a:p>
+            <a:r>
+              <a:rPr sz="1200" b="1" i="0">
+                <a:solidFill>
+                  <a:srgbClr val="FFD000"/>
+                </a:solidFill>
+                <a:latin typeface="Calibri"/>
+              </a:rPr>
+              <a:t>Aclaración</a:t>
+            </a:r>
+          </a:p>
+          <a:p>
+            <a:pPr>
+              <a:spcBef>
+                <a:spcPts val="400"/>
+              </a:spcBef>
+            </a:pPr>
+            <a:r>
+              <a:rPr sz="1400" b="0" i="0">
+                <a:solidFill>
+                  <a:srgbClr val="333333"/>
+                </a:solidFill>
+                <a:latin typeface="Calibri"/>
+              </a:rPr>
+              <a:t>Subir evidencias al paquete CloudLite (Drive/repo) y a ExamLab (https://uniaj.examlab.workers.dev/) domingo 23:59.</a:t>
+            </a:r>
+          </a:p>
+        </p:txBody>
+      </p:sp>
+      <p:sp>
+        <p:nvSpPr>
+          <p:cNvPr id="11" name="Rounded Rectangle 10"/>
+          <p:cNvSpPr/>
+          <p:nvPr/>
+        </p:nvSpPr>
+        <p:spPr>
+          <a:xfrm>
+            <a:off x="457200" y="3694176"/>
+            <a:ext cx="11277295" cy="1051560"/>
+          </a:xfrm>
+          <a:prstGeom prst="roundRect">
+            <a:avLst>
+              <a:gd name="adj" fmla="val 12000"/>
+            </a:avLst>
+          </a:prstGeom>
+          <a:solidFill>
+            <a:srgbClr val="FBE4E4"/>
+          </a:solidFill>
+          <a:ln>
+            <a:noFill/>
+          </a:ln>
+        </p:spPr>
+        <p:style>
+          <a:lnRef idx="1">
+            <a:schemeClr val="accent1"/>
+          </a:lnRef>
+          <a:fillRef idx="3">
+            <a:schemeClr val="accent1"/>
+          </a:fillRef>
+          <a:effectRef idx="2">
+            <a:schemeClr val="accent1"/>
+          </a:effectRef>
+          <a:fontRef idx="minor">
+            <a:schemeClr val="lt1"/>
+          </a:fontRef>
+        </p:style>
+        <p:txBody>
+          <a:bodyPr rtlCol="0" anchor="ctr"/>
+          <a:lstStyle/>
+          <a:p>
+            <a:pPr algn="ctr"/>
+          </a:p>
+        </p:txBody>
+      </p:sp>
+      <p:sp>
+        <p:nvSpPr>
+          <p:cNvPr id="12" name="Rectangle 11"/>
+          <p:cNvSpPr/>
+          <p:nvPr/>
+        </p:nvSpPr>
+        <p:spPr>
+          <a:xfrm>
+            <a:off x="457200" y="3694176"/>
+            <a:ext cx="128016" cy="1051560"/>
+          </a:xfrm>
+          <a:prstGeom prst="rect">
+            <a:avLst/>
+          </a:prstGeom>
+          <a:solidFill>
+            <a:srgbClr val="A02030"/>
+          </a:solidFill>
+          <a:ln>
+            <a:noFill/>
+          </a:ln>
+        </p:spPr>
+        <p:style>
+          <a:lnRef idx="1">
+            <a:schemeClr val="accent1"/>
+          </a:lnRef>
+          <a:fillRef idx="3">
+            <a:schemeClr val="accent1"/>
+          </a:fillRef>
+          <a:effectRef idx="2">
+            <a:schemeClr val="accent1"/>
+          </a:effectRef>
+          <a:fontRef idx="minor">
+            <a:schemeClr val="lt1"/>
+          </a:fontRef>
+        </p:style>
+        <p:txBody>
+          <a:bodyPr rtlCol="0" anchor="ctr"/>
+          <a:lstStyle/>
+          <a:p>
+            <a:pPr algn="ctr"/>
+          </a:p>
+        </p:txBody>
+      </p:sp>
+      <p:sp>
+        <p:nvSpPr>
+          <p:cNvPr id="13" name="TextBox 12"/>
+          <p:cNvSpPr txBox="1"/>
+          <p:nvPr/>
+        </p:nvSpPr>
+        <p:spPr>
+          <a:xfrm>
+            <a:off x="777240" y="3831336"/>
+            <a:ext cx="10774375" cy="822959"/>
+          </a:xfrm>
+          <a:prstGeom prst="rect">
+            <a:avLst/>
+          </a:prstGeom>
+          <a:noFill/>
+        </p:spPr>
+        <p:txBody>
+          <a:bodyPr wrap="square">
+            <a:spAutoFit/>
+          </a:bodyPr>
+          <a:lstStyle/>
+          <a:p>
+            <a:r>
+              <a:rPr sz="1200" b="1" i="0">
+                <a:solidFill>
+                  <a:srgbClr val="A02030"/>
+                </a:solidFill>
+                <a:latin typeface="Calibri"/>
+              </a:rPr>
+              <a:t>Atención</a:t>
+            </a:r>
+          </a:p>
+          <a:p>
+            <a:pPr>
+              <a:spcBef>
+                <a:spcPts val="400"/>
+              </a:spcBef>
+            </a:pPr>
+            <a:r>
+              <a:rPr sz="1400" b="0" i="0">
+                <a:solidFill>
+                  <a:srgbClr val="333333"/>
+                </a:solidFill>
+                <a:latin typeface="Calibri"/>
+              </a:rPr>
+              <a:t>Sin cloud de pago ni instalaciones obligatorias de hipervisores/Docker Desktop.</a:t>
+            </a:r>
+          </a:p>
+        </p:txBody>
+      </p:sp>
+      <p:sp>
+        <p:nvSpPr>
+          <p:cNvPr id="14" name="TextBox 13"/>
+          <p:cNvSpPr txBox="1"/>
+          <p:nvPr/>
+        </p:nvSpPr>
+        <p:spPr>
+          <a:xfrm>
+            <a:off x="11185855" y="6473952"/>
+            <a:ext cx="640080" cy="274320"/>
+          </a:xfrm>
+          <a:prstGeom prst="rect">
+            <a:avLst/>
+          </a:prstGeom>
+          <a:noFill/>
+        </p:spPr>
+        <p:txBody>
+          <a:bodyPr wrap="square">
+            <a:spAutoFit/>
+          </a:bodyPr>
+          <a:lstStyle/>
+          <a:p>
+            <a:pPr algn="r"/>
+            <a:r>
+              <a:rPr sz="1100" b="0" i="0">
+                <a:solidFill>
+                  <a:srgbClr val="666666"/>
+                </a:solidFill>
+                <a:latin typeface="Calibri"/>
+              </a:rPr>
+              <a:t>12</a:t>
+            </a:r>
+          </a:p>
+        </p:txBody>
+      </p:sp>
+    </p:spTree>
+  </p:cSld>
+  <p:clrMapOvr>
+    <a:masterClrMapping/>
+  </p:clrMapOvr>
+</p:sld>
+</file>
+
+<file path=ppt/slides/slide13.xml><?xml version="1.0" encoding="utf-8"?>
+<p:sld xmlns:a="http://schemas.openxmlformats.org/drawingml/2006/main" xmlns:p="http://schemas.openxmlformats.org/presentationml/2006/main" xmlns:r="http://schemas.openxmlformats.org/officeDocument/2006/relationships">
+  <p:cSld>
+    <p:bg>
+      <p:bgPr>
+        <a:solidFill>
+          <a:srgbClr val="FFFFFF"/>
+        </a:solidFill>
+        <a:effectLst/>
+      </p:bgPr>
+    </p:bg>
+    <p:spTree>
+      <p:nvGrpSpPr>
+        <p:cNvPr id="1" name=""/>
+        <p:cNvGrpSpPr/>
+        <p:nvPr/>
+      </p:nvGrpSpPr>
+      <p:grpSpPr/>
+      <p:sp>
+        <p:nvSpPr>
+          <p:cNvPr id="2" name="Rectangle 1"/>
+          <p:cNvSpPr/>
+          <p:nvPr/>
+        </p:nvSpPr>
+        <p:spPr>
+          <a:xfrm>
+            <a:off x="0" y="0"/>
             <a:ext cx="12191695" cy="164592"/>
           </a:xfrm>
           <a:prstGeom prst="rect">
@@ -6539,7 +7805,7 @@
         <p:spPr>
           <a:xfrm>
             <a:off x="0" y="0"/>
-            <a:ext cx="12191695" cy="960120"/>
+            <a:ext cx="12191695" cy="1170432"/>
           </a:xfrm>
           <a:prstGeom prst="rect">
             <a:avLst/>
@@ -6581,7 +7847,7 @@
         </p:nvSpPr>
         <p:spPr>
           <a:xfrm>
-            <a:off x="0" y="960120"/>
+            <a:off x="0" y="1170432"/>
             <a:ext cx="12191695" cy="41148"/>
           </a:xfrm>
           <a:prstGeom prst="rect">
@@ -6625,7 +7891,7 @@
         <p:spPr>
           <a:xfrm>
             <a:off x="457200" y="164592"/>
-            <a:ext cx="11277295" cy="502920"/>
+            <a:ext cx="11277295" cy="384048"/>
           </a:xfrm>
           <a:prstGeom prst="rect">
             <a:avLst/>
@@ -6645,7 +7911,7 @@
                 </a:solidFill>
                 <a:latin typeface="Calibri"/>
               </a:rPr>
-              <a:t>Taller PI (paso a paso)</a:t>
+              <a:t>Herramientas de hoy</a:t>
             </a:r>
           </a:p>
         </p:txBody>
@@ -6658,8 +7924,8 @@
         </p:nvSpPr>
         <p:spPr>
           <a:xfrm>
-            <a:off x="457200" y="1170432"/>
-            <a:ext cx="11277295" cy="5230368"/>
+            <a:off x="457200" y="566928"/>
+            <a:ext cx="11277295" cy="411480"/>
           </a:xfrm>
           <a:prstGeom prst="rect">
             <a:avLst/>
@@ -6672,171 +7938,837 @@
           </a:bodyPr>
           <a:lstStyle/>
           <a:p>
-            <a:pPr>
-              <a:spcAft>
-                <a:spcPts val="800"/>
-              </a:spcAft>
+            <a:r>
+              <a:rPr sz="1400" b="0" i="0">
+                <a:solidFill>
+                  <a:srgbClr val="B8D8EE"/>
+                </a:solidFill>
+                <a:latin typeface="Calibri"/>
+              </a:rPr>
+              <a:t>Gratis · navegador o free tier · sin cuenta de pago</a:t>
+            </a:r>
+          </a:p>
+        </p:txBody>
+      </p:sp>
+      <p:sp>
+        <p:nvSpPr>
+          <p:cNvPr id="6" name="Rounded Rectangle 5"/>
+          <p:cNvSpPr/>
+          <p:nvPr/>
+        </p:nvSpPr>
+        <p:spPr>
+          <a:xfrm>
+            <a:off x="457200" y="1591056"/>
+            <a:ext cx="3624986" cy="2299716"/>
+          </a:xfrm>
+          <a:prstGeom prst="roundRect">
+            <a:avLst>
+              <a:gd name="adj" fmla="val 12000"/>
+            </a:avLst>
+          </a:prstGeom>
+          <a:solidFill>
+            <a:srgbClr val="F2F2F2"/>
+          </a:solidFill>
+          <a:ln>
+            <a:noFill/>
+          </a:ln>
+        </p:spPr>
+        <p:style>
+          <a:lnRef idx="1">
+            <a:schemeClr val="accent1"/>
+          </a:lnRef>
+          <a:fillRef idx="3">
+            <a:schemeClr val="accent1"/>
+          </a:fillRef>
+          <a:effectRef idx="2">
+            <a:schemeClr val="accent1"/>
+          </a:effectRef>
+          <a:fontRef idx="minor">
+            <a:schemeClr val="lt1"/>
+          </a:fontRef>
+        </p:style>
+        <p:txBody>
+          <a:bodyPr rtlCol="0" anchor="ctr"/>
+          <a:lstStyle/>
+          <a:p>
+            <a:pPr algn="ctr"/>
+          </a:p>
+        </p:txBody>
+      </p:sp>
+      <p:sp>
+        <p:nvSpPr>
+          <p:cNvPr id="7" name="Rectangle 6"/>
+          <p:cNvSpPr/>
+          <p:nvPr/>
+        </p:nvSpPr>
+        <p:spPr>
+          <a:xfrm>
+            <a:off x="457200" y="1591056"/>
+            <a:ext cx="3624986" cy="64008"/>
+          </a:xfrm>
+          <a:prstGeom prst="rect">
+            <a:avLst/>
+          </a:prstGeom>
+          <a:solidFill>
+            <a:srgbClr val="095292"/>
+          </a:solidFill>
+          <a:ln>
+            <a:noFill/>
+          </a:ln>
+        </p:spPr>
+        <p:style>
+          <a:lnRef idx="1">
+            <a:schemeClr val="accent1"/>
+          </a:lnRef>
+          <a:fillRef idx="3">
+            <a:schemeClr val="accent1"/>
+          </a:fillRef>
+          <a:effectRef idx="2">
+            <a:schemeClr val="accent1"/>
+          </a:effectRef>
+          <a:fontRef idx="minor">
+            <a:schemeClr val="lt1"/>
+          </a:fontRef>
+        </p:style>
+        <p:txBody>
+          <a:bodyPr rtlCol="0" anchor="ctr"/>
+          <a:lstStyle/>
+          <a:p>
+            <a:pPr algn="ctr"/>
+          </a:p>
+        </p:txBody>
+      </p:sp>
+      <p:sp>
+        <p:nvSpPr>
+          <p:cNvPr id="8" name="Rectangle 7"/>
+          <p:cNvSpPr/>
+          <p:nvPr/>
+        </p:nvSpPr>
+        <p:spPr>
+          <a:xfrm>
+            <a:off x="457200" y="1655064"/>
+            <a:ext cx="3624986" cy="27432"/>
+          </a:xfrm>
+          <a:prstGeom prst="rect">
+            <a:avLst/>
+          </a:prstGeom>
+          <a:solidFill>
+            <a:srgbClr val="FFD000"/>
+          </a:solidFill>
+          <a:ln>
+            <a:noFill/>
+          </a:ln>
+        </p:spPr>
+        <p:style>
+          <a:lnRef idx="1">
+            <a:schemeClr val="accent1"/>
+          </a:lnRef>
+          <a:fillRef idx="3">
+            <a:schemeClr val="accent1"/>
+          </a:fillRef>
+          <a:effectRef idx="2">
+            <a:schemeClr val="accent1"/>
+          </a:effectRef>
+          <a:fontRef idx="minor">
+            <a:schemeClr val="lt1"/>
+          </a:fontRef>
+        </p:style>
+        <p:txBody>
+          <a:bodyPr rtlCol="0" anchor="ctr"/>
+          <a:lstStyle/>
+          <a:p>
+            <a:pPr algn="ctr"/>
+          </a:p>
+        </p:txBody>
+      </p:sp>
+      <p:pic>
+        <p:nvPicPr>
+          <p:cNvPr id="9" name="Picture 8" descr="drawio.png"/>
+          <p:cNvPicPr>
+            <a:picLocks noChangeAspect="1"/>
+          </p:cNvPicPr>
+          <p:nvPr/>
+        </p:nvPicPr>
+        <p:blipFill>
+          <a:blip r:embed="rId2"/>
+          <a:stretch>
+            <a:fillRect/>
+          </a:stretch>
+        </p:blipFill>
+        <p:spPr>
+          <a:xfrm>
+            <a:off x="1659331" y="1847087"/>
+            <a:ext cx="1220724" cy="1220724"/>
+          </a:xfrm>
+          <a:prstGeom prst="rect">
+            <a:avLst/>
+          </a:prstGeom>
+        </p:spPr>
+      </p:pic>
+      <p:sp>
+        <p:nvSpPr>
+          <p:cNvPr id="10" name="TextBox 9"/>
+          <p:cNvSpPr txBox="1"/>
+          <p:nvPr/>
+        </p:nvSpPr>
+        <p:spPr>
+          <a:xfrm>
+            <a:off x="530352" y="3159251"/>
+            <a:ext cx="3478682" cy="621792"/>
+          </a:xfrm>
+          <a:prstGeom prst="rect">
+            <a:avLst/>
+          </a:prstGeom>
+          <a:noFill/>
+        </p:spPr>
+        <p:txBody>
+          <a:bodyPr wrap="square" anchor="t"/>
+          <a:lstStyle/>
+          <a:p>
+            <a:pPr algn="ctr"/>
+            <a:r>
+              <a:rPr sz="1300" b="1" i="0">
+                <a:solidFill>
+                  <a:srgbClr val="095292"/>
+                </a:solidFill>
+                <a:latin typeface="Calibri"/>
+              </a:rPr>
+              <a:t>draw.io</a:t>
+            </a:r>
+          </a:p>
+          <a:p>
+            <a:pPr algn="ctr">
+              <a:spcBef>
+                <a:spcPts val="200"/>
+              </a:spcBef>
             </a:pPr>
             <a:r>
-              <a:rPr sz="1600" b="1" i="0">
-                <a:solidFill>
-                  <a:srgbClr val="333333"/>
-                </a:solidFill>
-                <a:latin typeface="Calibri"/>
-              </a:rPr>
-              <a:t>1.</a:t>
-            </a:r>
-            <a:r>
-              <a:rPr sz="1600" b="0" i="0">
-                <a:solidFill>
-                  <a:srgbClr val="333333"/>
-                </a:solidFill>
-                <a:latin typeface="Calibri"/>
-              </a:rPr>
-              <a:t> Paso 1: copien la lista canonica de 5 contenedores de la Clase 4 y asignen cada uno a una de 3 zonas con su subred (zona publica 10.10.1.0/24, zona privada 10.10.2.0/24, zona de datos 10.10.3.0/24), verificando que ningun contenedor quede sin zona y que la base de datos y la cola no queden en la zona publica.</a:t>
-            </a:r>
-          </a:p>
-          <a:p>
-            <a:pPr>
-              <a:spcAft>
-                <a:spcPts val="800"/>
-              </a:spcAft>
+              <a:rPr sz="1000" b="0" i="0">
+                <a:solidFill>
+                  <a:srgbClr val="666666"/>
+                </a:solidFill>
+                <a:latin typeface="Calibri"/>
+              </a:rPr>
+              <a:t>Deployment</a:t>
+            </a:r>
+          </a:p>
+        </p:txBody>
+      </p:sp>
+      <p:sp>
+        <p:nvSpPr>
+          <p:cNvPr id="11" name="Rounded Rectangle 10"/>
+          <p:cNvSpPr/>
+          <p:nvPr/>
+        </p:nvSpPr>
+        <p:spPr>
+          <a:xfrm>
+            <a:off x="4283354" y="1591056"/>
+            <a:ext cx="3624986" cy="2299716"/>
+          </a:xfrm>
+          <a:prstGeom prst="roundRect">
+            <a:avLst>
+              <a:gd name="adj" fmla="val 12000"/>
+            </a:avLst>
+          </a:prstGeom>
+          <a:solidFill>
+            <a:srgbClr val="F2F2F2"/>
+          </a:solidFill>
+          <a:ln>
+            <a:noFill/>
+          </a:ln>
+        </p:spPr>
+        <p:style>
+          <a:lnRef idx="1">
+            <a:schemeClr val="accent1"/>
+          </a:lnRef>
+          <a:fillRef idx="3">
+            <a:schemeClr val="accent1"/>
+          </a:fillRef>
+          <a:effectRef idx="2">
+            <a:schemeClr val="accent1"/>
+          </a:effectRef>
+          <a:fontRef idx="minor">
+            <a:schemeClr val="lt1"/>
+          </a:fontRef>
+        </p:style>
+        <p:txBody>
+          <a:bodyPr rtlCol="0" anchor="ctr"/>
+          <a:lstStyle/>
+          <a:p>
+            <a:pPr algn="ctr"/>
+          </a:p>
+        </p:txBody>
+      </p:sp>
+      <p:sp>
+        <p:nvSpPr>
+          <p:cNvPr id="12" name="Rectangle 11"/>
+          <p:cNvSpPr/>
+          <p:nvPr/>
+        </p:nvSpPr>
+        <p:spPr>
+          <a:xfrm>
+            <a:off x="4283354" y="1591056"/>
+            <a:ext cx="3624986" cy="64008"/>
+          </a:xfrm>
+          <a:prstGeom prst="rect">
+            <a:avLst/>
+          </a:prstGeom>
+          <a:solidFill>
+            <a:srgbClr val="095292"/>
+          </a:solidFill>
+          <a:ln>
+            <a:noFill/>
+          </a:ln>
+        </p:spPr>
+        <p:style>
+          <a:lnRef idx="1">
+            <a:schemeClr val="accent1"/>
+          </a:lnRef>
+          <a:fillRef idx="3">
+            <a:schemeClr val="accent1"/>
+          </a:fillRef>
+          <a:effectRef idx="2">
+            <a:schemeClr val="accent1"/>
+          </a:effectRef>
+          <a:fontRef idx="minor">
+            <a:schemeClr val="lt1"/>
+          </a:fontRef>
+        </p:style>
+        <p:txBody>
+          <a:bodyPr rtlCol="0" anchor="ctr"/>
+          <a:lstStyle/>
+          <a:p>
+            <a:pPr algn="ctr"/>
+          </a:p>
+        </p:txBody>
+      </p:sp>
+      <p:sp>
+        <p:nvSpPr>
+          <p:cNvPr id="13" name="Rectangle 12"/>
+          <p:cNvSpPr/>
+          <p:nvPr/>
+        </p:nvSpPr>
+        <p:spPr>
+          <a:xfrm>
+            <a:off x="4283354" y="1655064"/>
+            <a:ext cx="3624986" cy="27432"/>
+          </a:xfrm>
+          <a:prstGeom prst="rect">
+            <a:avLst/>
+          </a:prstGeom>
+          <a:solidFill>
+            <a:srgbClr val="FFD000"/>
+          </a:solidFill>
+          <a:ln>
+            <a:noFill/>
+          </a:ln>
+        </p:spPr>
+        <p:style>
+          <a:lnRef idx="1">
+            <a:schemeClr val="accent1"/>
+          </a:lnRef>
+          <a:fillRef idx="3">
+            <a:schemeClr val="accent1"/>
+          </a:fillRef>
+          <a:effectRef idx="2">
+            <a:schemeClr val="accent1"/>
+          </a:effectRef>
+          <a:fontRef idx="minor">
+            <a:schemeClr val="lt1"/>
+          </a:fontRef>
+        </p:style>
+        <p:txBody>
+          <a:bodyPr rtlCol="0" anchor="ctr"/>
+          <a:lstStyle/>
+          <a:p>
+            <a:pPr algn="ctr"/>
+          </a:p>
+        </p:txBody>
+      </p:sp>
+      <p:pic>
+        <p:nvPicPr>
+          <p:cNvPr id="14" name="Picture 13" descr="google_docs.png"/>
+          <p:cNvPicPr>
+            <a:picLocks noChangeAspect="1"/>
+          </p:cNvPicPr>
+          <p:nvPr/>
+        </p:nvPicPr>
+        <p:blipFill>
+          <a:blip r:embed="rId3"/>
+          <a:stretch>
+            <a:fillRect/>
+          </a:stretch>
+        </p:blipFill>
+        <p:spPr>
+          <a:xfrm>
+            <a:off x="5485485" y="1847087"/>
+            <a:ext cx="1220724" cy="1220724"/>
+          </a:xfrm>
+          <a:prstGeom prst="rect">
+            <a:avLst/>
+          </a:prstGeom>
+        </p:spPr>
+      </p:pic>
+      <p:sp>
+        <p:nvSpPr>
+          <p:cNvPr id="15" name="TextBox 14"/>
+          <p:cNvSpPr txBox="1"/>
+          <p:nvPr/>
+        </p:nvSpPr>
+        <p:spPr>
+          <a:xfrm>
+            <a:off x="4356506" y="3159251"/>
+            <a:ext cx="3478682" cy="621792"/>
+          </a:xfrm>
+          <a:prstGeom prst="rect">
+            <a:avLst/>
+          </a:prstGeom>
+          <a:noFill/>
+        </p:spPr>
+        <p:txBody>
+          <a:bodyPr wrap="square" anchor="t"/>
+          <a:lstStyle/>
+          <a:p>
+            <a:pPr algn="ctr"/>
+            <a:r>
+              <a:rPr sz="1300" b="1" i="0">
+                <a:solidFill>
+                  <a:srgbClr val="095292"/>
+                </a:solidFill>
+                <a:latin typeface="Calibri"/>
+              </a:rPr>
+              <a:t>Google Docs</a:t>
+            </a:r>
+          </a:p>
+          <a:p>
+            <a:pPr algn="ctr">
+              <a:spcBef>
+                <a:spcPts val="200"/>
+              </a:spcBef>
             </a:pPr>
             <a:r>
-              <a:rPr sz="1600" b="0" i="0">
-                <a:solidFill>
-                  <a:srgbClr val="333333"/>
-                </a:solidFill>
-                <a:latin typeface="Calibri"/>
-              </a:rPr>
-              <a:t>–   </a:t>
-            </a:r>
-            <a:r>
-              <a:rPr sz="1600" b="1" i="0">
-                <a:solidFill>
-                  <a:srgbClr val="333333"/>
-                </a:solidFill>
-                <a:latin typeface="Calibri"/>
-              </a:rPr>
-              <a:t>2.</a:t>
-            </a:r>
-            <a:r>
-              <a:rPr sz="1600" b="0" i="0">
-                <a:solidFill>
-                  <a:srgbClr val="333333"/>
-                </a:solidFill>
-                <a:latin typeface="Calibri"/>
-              </a:rPr>
-              <a:t> Paso 2: escriban en ExamLab el diagrama C4Deployment en Mermaid con 4 Deployment_Node (dispositivo del usuario, zona publica, zona privada y zona de datos), el tamano de cada nodo y los mismos nombres de contenedores, verificando al renderizar que cada relacion lleve puerto y que el nombre de cada contenedor sea identico letra por letra al del C4Container de la Clase 4.</a:t>
-            </a:r>
-          </a:p>
-          <a:p>
-            <a:pPr>
-              <a:spcAft>
-                <a:spcPts val="800"/>
-              </a:spcAft>
+              <a:rPr sz="1000" b="0" i="0">
+                <a:solidFill>
+                  <a:srgbClr val="666666"/>
+                </a:solidFill>
+                <a:latin typeface="Calibri"/>
+              </a:rPr>
+              <a:t>Informe PI</a:t>
+            </a:r>
+          </a:p>
+        </p:txBody>
+      </p:sp>
+      <p:sp>
+        <p:nvSpPr>
+          <p:cNvPr id="16" name="Rounded Rectangle 15"/>
+          <p:cNvSpPr/>
+          <p:nvPr/>
+        </p:nvSpPr>
+        <p:spPr>
+          <a:xfrm>
+            <a:off x="8109508" y="1591056"/>
+            <a:ext cx="3624986" cy="2299716"/>
+          </a:xfrm>
+          <a:prstGeom prst="roundRect">
+            <a:avLst>
+              <a:gd name="adj" fmla="val 12000"/>
+            </a:avLst>
+          </a:prstGeom>
+          <a:solidFill>
+            <a:srgbClr val="F2F2F2"/>
+          </a:solidFill>
+          <a:ln>
+            <a:noFill/>
+          </a:ln>
+        </p:spPr>
+        <p:style>
+          <a:lnRef idx="1">
+            <a:schemeClr val="accent1"/>
+          </a:lnRef>
+          <a:fillRef idx="3">
+            <a:schemeClr val="accent1"/>
+          </a:fillRef>
+          <a:effectRef idx="2">
+            <a:schemeClr val="accent1"/>
+          </a:effectRef>
+          <a:fontRef idx="minor">
+            <a:schemeClr val="lt1"/>
+          </a:fontRef>
+        </p:style>
+        <p:txBody>
+          <a:bodyPr rtlCol="0" anchor="ctr"/>
+          <a:lstStyle/>
+          <a:p>
+            <a:pPr algn="ctr"/>
+          </a:p>
+        </p:txBody>
+      </p:sp>
+      <p:sp>
+        <p:nvSpPr>
+          <p:cNvPr id="17" name="Rectangle 16"/>
+          <p:cNvSpPr/>
+          <p:nvPr/>
+        </p:nvSpPr>
+        <p:spPr>
+          <a:xfrm>
+            <a:off x="8109508" y="1591056"/>
+            <a:ext cx="3624986" cy="64008"/>
+          </a:xfrm>
+          <a:prstGeom prst="rect">
+            <a:avLst/>
+          </a:prstGeom>
+          <a:solidFill>
+            <a:srgbClr val="095292"/>
+          </a:solidFill>
+          <a:ln>
+            <a:noFill/>
+          </a:ln>
+        </p:spPr>
+        <p:style>
+          <a:lnRef idx="1">
+            <a:schemeClr val="accent1"/>
+          </a:lnRef>
+          <a:fillRef idx="3">
+            <a:schemeClr val="accent1"/>
+          </a:fillRef>
+          <a:effectRef idx="2">
+            <a:schemeClr val="accent1"/>
+          </a:effectRef>
+          <a:fontRef idx="minor">
+            <a:schemeClr val="lt1"/>
+          </a:fontRef>
+        </p:style>
+        <p:txBody>
+          <a:bodyPr rtlCol="0" anchor="ctr"/>
+          <a:lstStyle/>
+          <a:p>
+            <a:pPr algn="ctr"/>
+          </a:p>
+        </p:txBody>
+      </p:sp>
+      <p:sp>
+        <p:nvSpPr>
+          <p:cNvPr id="18" name="Rectangle 17"/>
+          <p:cNvSpPr/>
+          <p:nvPr/>
+        </p:nvSpPr>
+        <p:spPr>
+          <a:xfrm>
+            <a:off x="8109508" y="1655064"/>
+            <a:ext cx="3624986" cy="27432"/>
+          </a:xfrm>
+          <a:prstGeom prst="rect">
+            <a:avLst/>
+          </a:prstGeom>
+          <a:solidFill>
+            <a:srgbClr val="FFD000"/>
+          </a:solidFill>
+          <a:ln>
+            <a:noFill/>
+          </a:ln>
+        </p:spPr>
+        <p:style>
+          <a:lnRef idx="1">
+            <a:schemeClr val="accent1"/>
+          </a:lnRef>
+          <a:fillRef idx="3">
+            <a:schemeClr val="accent1"/>
+          </a:fillRef>
+          <a:effectRef idx="2">
+            <a:schemeClr val="accent1"/>
+          </a:effectRef>
+          <a:fontRef idx="minor">
+            <a:schemeClr val="lt1"/>
+          </a:fontRef>
+        </p:style>
+        <p:txBody>
+          <a:bodyPr rtlCol="0" anchor="ctr"/>
+          <a:lstStyle/>
+          <a:p>
+            <a:pPr algn="ctr"/>
+          </a:p>
+        </p:txBody>
+      </p:sp>
+      <p:pic>
+        <p:nvPicPr>
+          <p:cNvPr id="19" name="Picture 18" descr="mermaid.png"/>
+          <p:cNvPicPr>
+            <a:picLocks noChangeAspect="1"/>
+          </p:cNvPicPr>
+          <p:nvPr/>
+        </p:nvPicPr>
+        <p:blipFill>
+          <a:blip r:embed="rId4"/>
+          <a:stretch>
+            <a:fillRect/>
+          </a:stretch>
+        </p:blipFill>
+        <p:spPr>
+          <a:xfrm>
+            <a:off x="9311640" y="1847087"/>
+            <a:ext cx="1220724" cy="1220724"/>
+          </a:xfrm>
+          <a:prstGeom prst="rect">
+            <a:avLst/>
+          </a:prstGeom>
+        </p:spPr>
+      </p:pic>
+      <p:sp>
+        <p:nvSpPr>
+          <p:cNvPr id="20" name="TextBox 19"/>
+          <p:cNvSpPr txBox="1"/>
+          <p:nvPr/>
+        </p:nvSpPr>
+        <p:spPr>
+          <a:xfrm>
+            <a:off x="8182660" y="3159251"/>
+            <a:ext cx="3478682" cy="621792"/>
+          </a:xfrm>
+          <a:prstGeom prst="rect">
+            <a:avLst/>
+          </a:prstGeom>
+          <a:noFill/>
+        </p:spPr>
+        <p:txBody>
+          <a:bodyPr wrap="square" anchor="t"/>
+          <a:lstStyle/>
+          <a:p>
+            <a:pPr algn="ctr"/>
+            <a:r>
+              <a:rPr sz="1300" b="1" i="0">
+                <a:solidFill>
+                  <a:srgbClr val="095292"/>
+                </a:solidFill>
+                <a:latin typeface="Calibri"/>
+              </a:rPr>
+              <a:t>Mermaid</a:t>
+            </a:r>
+          </a:p>
+          <a:p>
+            <a:pPr algn="ctr">
+              <a:spcBef>
+                <a:spcPts val="200"/>
+              </a:spcBef>
             </a:pPr>
             <a:r>
-              <a:rPr sz="1600" b="0" i="0">
-                <a:solidFill>
-                  <a:srgbClr val="333333"/>
-                </a:solidFill>
-                <a:latin typeface="Calibri"/>
-              </a:rPr>
-              <a:t>–   </a:t>
-            </a:r>
-            <a:r>
-              <a:rPr sz="1600" b="1" i="0">
-                <a:solidFill>
-                  <a:srgbClr val="333333"/>
-                </a:solidFill>
-                <a:latin typeface="Calibri"/>
-              </a:rPr>
-              <a:t>3.</a:t>
-            </a:r>
-            <a:r>
-              <a:rPr sz="1600" b="0" i="0">
-                <a:solidFill>
-                  <a:srgbClr val="333333"/>
-                </a:solidFill>
-                <a:latin typeface="Calibri"/>
-              </a:rPr>
-              <a:t> Paso 3: en el editor de topologia de red arme la red con 5 dispositivos (equipo del usuario, edge o proxy reverso, dos nodos de aplicacion y un nodo de datos) y las 3 subredes del paso 1, verificando que cada interfaz tenga una direccion valida dentro de su subred y que el nodo de datos no tenga ruta hacia la subred del usuario.</a:t>
-            </a:r>
-          </a:p>
-          <a:p>
-            <a:pPr>
-              <a:spcAft>
-                <a:spcPts val="800"/>
-              </a:spcAft>
+              <a:rPr sz="1000" b="0" i="0">
+                <a:solidFill>
+                  <a:srgbClr val="666666"/>
+                </a:solidFill>
+                <a:latin typeface="Calibri"/>
+              </a:rPr>
+              <a:t>Codigo del diagrama</a:t>
+            </a:r>
+          </a:p>
+        </p:txBody>
+      </p:sp>
+      <p:sp>
+        <p:nvSpPr>
+          <p:cNvPr id="21" name="Rounded Rectangle 20"/>
+          <p:cNvSpPr/>
+          <p:nvPr/>
+        </p:nvSpPr>
+        <p:spPr>
+          <a:xfrm>
+            <a:off x="4283354" y="4055364"/>
+            <a:ext cx="3624986" cy="2299716"/>
+          </a:xfrm>
+          <a:prstGeom prst="roundRect">
+            <a:avLst>
+              <a:gd name="adj" fmla="val 12000"/>
+            </a:avLst>
+          </a:prstGeom>
+          <a:solidFill>
+            <a:srgbClr val="F2F2F2"/>
+          </a:solidFill>
+          <a:ln>
+            <a:noFill/>
+          </a:ln>
+        </p:spPr>
+        <p:style>
+          <a:lnRef idx="1">
+            <a:schemeClr val="accent1"/>
+          </a:lnRef>
+          <a:fillRef idx="3">
+            <a:schemeClr val="accent1"/>
+          </a:fillRef>
+          <a:effectRef idx="2">
+            <a:schemeClr val="accent1"/>
+          </a:effectRef>
+          <a:fontRef idx="minor">
+            <a:schemeClr val="lt1"/>
+          </a:fontRef>
+        </p:style>
+        <p:txBody>
+          <a:bodyPr rtlCol="0" anchor="ctr"/>
+          <a:lstStyle/>
+          <a:p>
+            <a:pPr algn="ctr"/>
+          </a:p>
+        </p:txBody>
+      </p:sp>
+      <p:sp>
+        <p:nvSpPr>
+          <p:cNvPr id="22" name="Rectangle 21"/>
+          <p:cNvSpPr/>
+          <p:nvPr/>
+        </p:nvSpPr>
+        <p:spPr>
+          <a:xfrm>
+            <a:off x="4283354" y="4055364"/>
+            <a:ext cx="3624986" cy="64008"/>
+          </a:xfrm>
+          <a:prstGeom prst="rect">
+            <a:avLst/>
+          </a:prstGeom>
+          <a:solidFill>
+            <a:srgbClr val="095292"/>
+          </a:solidFill>
+          <a:ln>
+            <a:noFill/>
+          </a:ln>
+        </p:spPr>
+        <p:style>
+          <a:lnRef idx="1">
+            <a:schemeClr val="accent1"/>
+          </a:lnRef>
+          <a:fillRef idx="3">
+            <a:schemeClr val="accent1"/>
+          </a:fillRef>
+          <a:effectRef idx="2">
+            <a:schemeClr val="accent1"/>
+          </a:effectRef>
+          <a:fontRef idx="minor">
+            <a:schemeClr val="lt1"/>
+          </a:fontRef>
+        </p:style>
+        <p:txBody>
+          <a:bodyPr rtlCol="0" anchor="ctr"/>
+          <a:lstStyle/>
+          <a:p>
+            <a:pPr algn="ctr"/>
+          </a:p>
+        </p:txBody>
+      </p:sp>
+      <p:sp>
+        <p:nvSpPr>
+          <p:cNvPr id="23" name="Rectangle 22"/>
+          <p:cNvSpPr/>
+          <p:nvPr/>
+        </p:nvSpPr>
+        <p:spPr>
+          <a:xfrm>
+            <a:off x="4283354" y="4119372"/>
+            <a:ext cx="3624986" cy="27432"/>
+          </a:xfrm>
+          <a:prstGeom prst="rect">
+            <a:avLst/>
+          </a:prstGeom>
+          <a:solidFill>
+            <a:srgbClr val="FFD000"/>
+          </a:solidFill>
+          <a:ln>
+            <a:noFill/>
+          </a:ln>
+        </p:spPr>
+        <p:style>
+          <a:lnRef idx="1">
+            <a:schemeClr val="accent1"/>
+          </a:lnRef>
+          <a:fillRef idx="3">
+            <a:schemeClr val="accent1"/>
+          </a:fillRef>
+          <a:effectRef idx="2">
+            <a:schemeClr val="accent1"/>
+          </a:effectRef>
+          <a:fontRef idx="minor">
+            <a:schemeClr val="lt1"/>
+          </a:fontRef>
+        </p:style>
+        <p:txBody>
+          <a:bodyPr rtlCol="0" anchor="ctr"/>
+          <a:lstStyle/>
+          <a:p>
+            <a:pPr algn="ctr"/>
+          </a:p>
+        </p:txBody>
+      </p:sp>
+      <p:pic>
+        <p:nvPicPr>
+          <p:cNvPr id="24" name="Picture 23" descr="examlab.png"/>
+          <p:cNvPicPr>
+            <a:picLocks noChangeAspect="1"/>
+          </p:cNvPicPr>
+          <p:nvPr/>
+        </p:nvPicPr>
+        <p:blipFill>
+          <a:blip r:embed="rId5"/>
+          <a:stretch>
+            <a:fillRect/>
+          </a:stretch>
+        </p:blipFill>
+        <p:spPr>
+          <a:xfrm>
+            <a:off x="5485485" y="4311396"/>
+            <a:ext cx="1220724" cy="1220724"/>
+          </a:xfrm>
+          <a:prstGeom prst="rect">
+            <a:avLst/>
+          </a:prstGeom>
+        </p:spPr>
+      </p:pic>
+      <p:sp>
+        <p:nvSpPr>
+          <p:cNvPr id="25" name="TextBox 24"/>
+          <p:cNvSpPr txBox="1"/>
+          <p:nvPr/>
+        </p:nvSpPr>
+        <p:spPr>
+          <a:xfrm>
+            <a:off x="4356506" y="5623560"/>
+            <a:ext cx="3478682" cy="621792"/>
+          </a:xfrm>
+          <a:prstGeom prst="rect">
+            <a:avLst/>
+          </a:prstGeom>
+          <a:noFill/>
+        </p:spPr>
+        <p:txBody>
+          <a:bodyPr wrap="square" anchor="t"/>
+          <a:lstStyle/>
+          <a:p>
+            <a:pPr algn="ctr"/>
+            <a:r>
+              <a:rPr sz="1300" b="1" i="0">
+                <a:solidFill>
+                  <a:srgbClr val="095292"/>
+                </a:solidFill>
+                <a:latin typeface="Calibri"/>
+              </a:rPr>
+              <a:t>ExamLab</a:t>
+            </a:r>
+          </a:p>
+          <a:p>
+            <a:pPr algn="ctr">
+              <a:spcBef>
+                <a:spcPts val="200"/>
+              </a:spcBef>
             </a:pPr>
             <a:r>
-              <a:rPr sz="1600" b="0" i="0">
-                <a:solidFill>
-                  <a:srgbClr val="333333"/>
-                </a:solidFill>
-                <a:latin typeface="Calibri"/>
-              </a:rPr>
-              <a:t>–   </a:t>
-            </a:r>
-            <a:r>
-              <a:rPr sz="1600" b="1" i="0">
-                <a:solidFill>
-                  <a:srgbClr val="333333"/>
-                </a:solidFill>
-                <a:latin typeface="Calibri"/>
-              </a:rPr>
-              <a:t>4.</a:t>
-            </a:r>
-            <a:r>
-              <a:rPr sz="1600" b="0" i="0">
-                <a:solidFill>
-                  <a:srgbClr val="333333"/>
-                </a:solidFill>
-                <a:latin typeface="Calibri"/>
-              </a:rPr>
-              <a:t> Paso 4: en la consola de red ejecuten las 4 comprobaciones (direcciones de las interfaces, alcance del usuario al edge, alcance del edge a la aplicacion y alcance del usuario a la base de datos) y peguen las salidas, verificando que las 3 primeras tengan exito y que la cuarta falle, porque un exito ahi significa que la zona de datos quedo expuesta.</a:t>
-            </a:r>
-          </a:p>
-          <a:p>
-            <a:pPr>
-              <a:spcAft>
-                <a:spcPts val="800"/>
-              </a:spcAft>
-            </a:pPr>
-            <a:r>
-              <a:rPr sz="1600" b="0" i="0">
-                <a:solidFill>
-                  <a:srgbClr val="333333"/>
-                </a:solidFill>
-                <a:latin typeface="Calibri"/>
-              </a:rPr>
-              <a:t>–   </a:t>
-            </a:r>
-            <a:r>
-              <a:rPr sz="1600" b="1" i="0">
-                <a:solidFill>
-                  <a:srgbClr val="333333"/>
-                </a:solidFill>
-                <a:latin typeface="Calibri"/>
-              </a:rPr>
-              <a:t>5.</a:t>
-            </a:r>
-            <a:r>
-              <a:rPr sz="1600" b="0" i="0">
-                <a:solidFill>
-                  <a:srgbClr val="333333"/>
-                </a:solidFill>
-                <a:latin typeface="Calibri"/>
-              </a:rPr>
-              <a:t> Paso 5: completen la tabla de almacenamiento de 5 filas y la matriz de puertos de 6 filas, actualicen la seccion Redes y almacenamiento del informe y suban las 5 preguntas a ExamLab (modulo Talleres) antes del domingo 23:59, verificando que los puertos del diagrama, de la matriz y de la topologia sean los mismos numeros.</a:t>
-            </a:r>
-          </a:p>
-        </p:txBody>
-      </p:sp>
-      <p:sp>
-        <p:nvSpPr>
-          <p:cNvPr id="6" name="TextBox 5"/>
+              <a:rPr sz="1000" b="0" i="0">
+                <a:solidFill>
+                  <a:srgbClr val="666666"/>
+                </a:solidFill>
+                <a:latin typeface="Calibri"/>
+              </a:rPr>
+              <a:t>Donde se entrega</a:t>
+            </a:r>
+          </a:p>
+        </p:txBody>
+      </p:sp>
+      <p:sp>
+        <p:nvSpPr>
+          <p:cNvPr id="26" name="TextBox 25"/>
           <p:cNvSpPr txBox="1"/>
           <p:nvPr/>
         </p:nvSpPr>

--- a/Arquitectura de Sistemas Computacionales/Clases/Clase 7 - Redes y almacenamiento cloud/Presentacion.pptx
+++ b/Arquitectura de Sistemas Computacionales/Clases/Clase 7 - Redes y almacenamiento cloud/Presentacion.pptx
@@ -3952,7 +3952,7 @@
                 </a:solidFill>
                 <a:latin typeface="Calibri"/>
               </a:rPr>
-              <a:t>Copia o describe tu boceto a una IA y pidele el codigo Mermaid: «convierte este diagrama a Mermaid usando C4Deployment». Revisa el resultado: la IA acierta la sintaxis, no tu modelo.</a:t>
+              <a:t>Copia o describe tu boceto a una IA y pidele el codigo Mermaid: «convierte este diagrama a Mermaid usando flowchart». Revisa el resultado: la IA acierta la sintaxis, no tu modelo.</a:t>
             </a:r>
           </a:p>
         </p:txBody>
@@ -4523,7 +4523,7 @@
                 </a:solidFill>
                 <a:latin typeface="Calibri"/>
               </a:rPr>
-              <a:t> Paso 1: copien la lista canonica de 5 contenedores de la Clase 4 y asignen cada uno a una de 3 zonas con su subred (zona publica 10.10.1.0/24, zona privada 10.10.2.0/24, zona de datos 10.10.3.0/24), verificando que ningun contenedor quede sin zona y que la base de datos y la cola no queden en la zona publica.</a:t>
+              <a:t> Paso 1: dibuje primero el boceto del despliegue en Excalidraw o draw.io con las tres zonas (publica, privada y de datos), y despues pidale a una IA que lo traduzca a Mermaid; peguelo en la pregunta 4 y verifique en el diagrama ya renderizado que la base de datos NO quede en la zona publica.</a:t>
             </a:r>
           </a:p>
           <a:p>
@@ -4557,7 +4557,7 @@
                 </a:solidFill>
                 <a:latin typeface="Calibri"/>
               </a:rPr>
-              <a:t> Paso 2: escriban en ExamLab el diagrama C4Deployment en Mermaid con 4 Deployment_Node (dispositivo del usuario, zona publica, zona privada y zona de datos), el tamano de cada nodo y los mismos nombres de contenedores, verificando al renderizar que cada relacion lleve puerto y que el nombre de cada contenedor sea identico letra por letra al del C4Container de la Clase 4.</a:t>
+              <a:t> Paso 2: etiquete en ese mismo diagrama el puerto de cada componente y marque las fronteras de confianza, es decir donde termina lo que usted controla; verifique que no aparezcan nombres de subredes ni de servicios de un proveedor concreto.</a:t>
             </a:r>
           </a:p>
           <a:p>
@@ -4591,7 +4591,7 @@
                 </a:solidFill>
                 <a:latin typeface="Calibri"/>
               </a:rPr>
-              <a:t> Paso 3: en el editor de topologia de red arme la red con 5 dispositivos (equipo del usuario, edge o proxy reverso, dos nodos de aplicacion y un nodo de datos) y las 3 subredes del paso 1, verificando que cada interfaz tenga una direccion valida dentro de su subred y que el nodo de datos no tenga ruta hacia la subred del usuario.</a:t>
+              <a:t> Paso 3: justifique en la pregunta 5 el tipo de almacenamiento de cada componente diciendo que caracteristica del dato lo exige; si su dominio no necesita almacenamiento de objetos, declarelo y justifiquelo en vez de agregarlo.</a:t>
             </a:r>
           </a:p>
           <a:p>
@@ -4625,41 +4625,7 @@
                 </a:solidFill>
                 <a:latin typeface="Calibri"/>
               </a:rPr>
-              <a:t> Paso 4: en la consola de red ejecuten las 4 comprobaciones (direcciones de las interfaces, alcance del usuario al edge, alcance del edge a la aplicacion y alcance del usuario a la base de datos) y peguen las salidas, verificando que las 3 primeras tengan exito y que la cuarta falle, porque un exito ahi significa que la zona de datos quedo expuesta.</a:t>
-            </a:r>
-          </a:p>
-          <a:p>
-            <a:pPr>
-              <a:spcAft>
-                <a:spcPts val="800"/>
-              </a:spcAft>
-            </a:pPr>
-            <a:r>
-              <a:rPr sz="1600" b="0" i="0">
-                <a:solidFill>
-                  <a:srgbClr val="333333"/>
-                </a:solidFill>
-                <a:latin typeface="Calibri"/>
-              </a:rPr>
-              <a:t>–   </a:t>
-            </a:r>
-            <a:r>
-              <a:rPr sz="1600" b="1" i="0">
-                <a:solidFill>
-                  <a:srgbClr val="333333"/>
-                </a:solidFill>
-                <a:latin typeface="Calibri"/>
-              </a:rPr>
-              <a:t>5.</a:t>
-            </a:r>
-            <a:r>
-              <a:rPr sz="1600" b="0" i="0">
-                <a:solidFill>
-                  <a:srgbClr val="333333"/>
-                </a:solidFill>
-                <a:latin typeface="Calibri"/>
-              </a:rPr>
-              <a:t> Paso 5: completen la tabla de almacenamiento de 5 filas y la matriz de puertos de 6 filas, actualicen la seccion Redes y almacenamiento del informe y suban las 5 preguntas a ExamLab (modulo Talleres) antes del domingo 23:59, verificando que los puertos del diagrama, de la matriz y de la topologia sean los mismos numeros.</a:t>
+              <a:t> Paso 4: complete en la pregunta 6 la tabla de correspondencia entre el C4 Containers y el Despliegue, con una fila por componente y su zona, y liste los renombres que aplico; si no hubo ninguno, digalo explicitamente.</a:t>
             </a:r>
           </a:p>
         </p:txBody>

--- a/Arquitectura de Sistemas Computacionales/Clases/Clase 7 - Redes y almacenamiento cloud/Presentacion.pptx
+++ b/Arquitectura de Sistemas Computacionales/Clases/Clase 7 - Redes y almacenamiento cloud/Presentacion.pptx
@@ -18,6 +18,7 @@
     <p:sldId id="266" r:id="rId17"/>
     <p:sldId id="267" r:id="rId18"/>
     <p:sldId id="268" r:id="rId19"/>
+    <p:sldId id="269" r:id="rId20"/>
   </p:sldIdLst>
   <p:sldSz cx="12191695" cy="6858000" type="screen4x3"/>
   <p:notesSz cx="6858000" cy="9144000"/>
@@ -3576,7 +3577,7 @@
                 </a:solidFill>
                 <a:latin typeface="Calibri"/>
               </a:rPr>
-              <a:t>Del boceto a ExamLab (diagrama)</a:t>
+              <a:t>Herramientas de hoy</a:t>
             </a:r>
           </a:p>
         </p:txBody>
@@ -3610,7 +3611,7 @@
                 </a:solidFill>
                 <a:latin typeface="Calibri"/>
               </a:rPr>
-              <a:t>El diagrama se entrega como código Mermaid dentro de ExamLab, no como imagen</a:t>
+              <a:t>Gratis · navegador o free tier · sin cuenta de pago</a:t>
             </a:r>
           </a:p>
         </p:txBody>
@@ -3623,8 +3624,8 @@
         </p:nvSpPr>
         <p:spPr>
           <a:xfrm>
-            <a:off x="457200" y="1659636"/>
-            <a:ext cx="11277295" cy="1051560"/>
+            <a:off x="457200" y="1591056"/>
+            <a:ext cx="3624986" cy="2299716"/>
           </a:xfrm>
           <a:prstGeom prst="roundRect">
             <a:avLst>
@@ -3662,19 +3663,17 @@
       </p:sp>
       <p:sp>
         <p:nvSpPr>
-          <p:cNvPr id="7" name="Rounded Rectangle 6"/>
+          <p:cNvPr id="7" name="Rectangle 6"/>
           <p:cNvSpPr/>
           <p:nvPr/>
         </p:nvSpPr>
         <p:spPr>
           <a:xfrm>
-            <a:off x="594360" y="1965960"/>
-            <a:ext cx="438912" cy="438912"/>
-          </a:xfrm>
-          <a:prstGeom prst="roundRect">
-            <a:avLst>
-              <a:gd name="adj" fmla="val 12000"/>
-            </a:avLst>
+            <a:off x="457200" y="1591056"/>
+            <a:ext cx="3624986" cy="64008"/>
+          </a:xfrm>
+          <a:prstGeom prst="rect">
+            <a:avLst/>
           </a:prstGeom>
           <a:solidFill>
             <a:srgbClr val="095292"/>
@@ -3707,103 +3706,20 @@
       </p:sp>
       <p:sp>
         <p:nvSpPr>
-          <p:cNvPr id="8" name="TextBox 7"/>
-          <p:cNvSpPr txBox="1"/>
-          <p:nvPr/>
-        </p:nvSpPr>
-        <p:spPr>
-          <a:xfrm>
-            <a:off x="594360" y="1965960"/>
-            <a:ext cx="438912" cy="438912"/>
-          </a:xfrm>
-          <a:prstGeom prst="rect">
-            <a:avLst/>
-          </a:prstGeom>
-          <a:noFill/>
-        </p:spPr>
-        <p:txBody>
-          <a:bodyPr wrap="square" anchor="ctr"/>
-          <a:lstStyle/>
-          <a:p>
-            <a:pPr algn="ctr"/>
-            <a:r>
-              <a:rPr sz="1600" b="1" i="0">
-                <a:solidFill>
-                  <a:srgbClr val="FFFFFF"/>
-                </a:solidFill>
-                <a:latin typeface="Calibri"/>
-              </a:rPr>
-              <a:t>1</a:t>
-            </a:r>
-          </a:p>
-        </p:txBody>
-      </p:sp>
-      <p:sp>
-        <p:nvSpPr>
-          <p:cNvPr id="9" name="TextBox 8"/>
-          <p:cNvSpPr txBox="1"/>
-          <p:nvPr/>
-        </p:nvSpPr>
-        <p:spPr>
-          <a:xfrm>
-            <a:off x="1188720" y="1751076"/>
-            <a:ext cx="10271455" cy="886968"/>
-          </a:xfrm>
-          <a:prstGeom prst="rect">
-            <a:avLst/>
-          </a:prstGeom>
-          <a:noFill/>
-        </p:spPr>
-        <p:txBody>
-          <a:bodyPr wrap="square" anchor="ctr"/>
-          <a:lstStyle/>
-          <a:p>
-            <a:r>
-              <a:rPr sz="1500" b="1" i="0">
-                <a:solidFill>
-                  <a:srgbClr val="095292"/>
-                </a:solidFill>
-                <a:latin typeface="Calibri"/>
-              </a:rPr>
-              <a:t>Disena visual</a:t>
-            </a:r>
-          </a:p>
-          <a:p>
-            <a:pPr>
-              <a:spcBef>
-                <a:spcPts val="200"/>
-              </a:spcBef>
-            </a:pPr>
-            <a:r>
-              <a:rPr sz="1300" b="0" i="0">
-                <a:solidFill>
-                  <a:srgbClr val="333333"/>
-                </a:solidFill>
-                <a:latin typeface="Calibri"/>
-              </a:rPr>
-              <a:t>Dibuja el diagrama como quieras en Excalidraw o draw.io: es mas rapido arrastrar cajas que escribir codigo, y ahi es donde piensas el modelo.</a:t>
-            </a:r>
-          </a:p>
-        </p:txBody>
-      </p:sp>
-      <p:sp>
-        <p:nvSpPr>
-          <p:cNvPr id="10" name="Rounded Rectangle 9"/>
+          <p:cNvPr id="8" name="Rectangle 7"/>
           <p:cNvSpPr/>
           <p:nvPr/>
         </p:nvSpPr>
         <p:spPr>
           <a:xfrm>
-            <a:off x="457200" y="2802636"/>
-            <a:ext cx="11277295" cy="1051560"/>
-          </a:xfrm>
-          <a:prstGeom prst="roundRect">
-            <a:avLst>
-              <a:gd name="adj" fmla="val 12000"/>
-            </a:avLst>
+            <a:off x="457200" y="1655064"/>
+            <a:ext cx="3624986" cy="27432"/>
+          </a:xfrm>
+          <a:prstGeom prst="rect">
+            <a:avLst/>
           </a:prstGeom>
           <a:solidFill>
-            <a:srgbClr val="E8F4FA"/>
+            <a:srgbClr val="FFD000"/>
           </a:solidFill>
           <a:ln>
             <a:noFill/>
@@ -3831,6 +3747,79 @@
           </a:p>
         </p:txBody>
       </p:sp>
+      <p:pic>
+        <p:nvPicPr>
+          <p:cNvPr id="9" name="Picture 8" descr="drawio.png"/>
+          <p:cNvPicPr>
+            <a:picLocks noChangeAspect="1"/>
+          </p:cNvPicPr>
+          <p:nvPr/>
+        </p:nvPicPr>
+        <p:blipFill>
+          <a:blip r:embed="rId2"/>
+          <a:stretch>
+            <a:fillRect/>
+          </a:stretch>
+        </p:blipFill>
+        <p:spPr>
+          <a:xfrm>
+            <a:off x="1659331" y="1847087"/>
+            <a:ext cx="1220724" cy="1220724"/>
+          </a:xfrm>
+          <a:prstGeom prst="rect">
+            <a:avLst/>
+          </a:prstGeom>
+        </p:spPr>
+      </p:pic>
+      <p:sp>
+        <p:nvSpPr>
+          <p:cNvPr id="10" name="TextBox 9"/>
+          <p:cNvSpPr txBox="1"/>
+          <p:nvPr/>
+        </p:nvSpPr>
+        <p:spPr>
+          <a:xfrm>
+            <a:off x="530352" y="3159251"/>
+            <a:ext cx="3478682" cy="621792"/>
+          </a:xfrm>
+          <a:prstGeom prst="rect">
+            <a:avLst/>
+          </a:prstGeom>
+          <a:noFill/>
+        </p:spPr>
+        <p:txBody>
+          <a:bodyPr wrap="square" anchor="t"/>
+          <a:lstStyle/>
+          <a:p>
+            <a:pPr algn="ctr"/>
+            <a:r>
+              <a:rPr sz="1300" b="1" i="0">
+                <a:solidFill>
+                  <a:srgbClr val="095292"/>
+                </a:solidFill>
+                <a:latin typeface="Calibri"/>
+              </a:rPr>
+              <a:t>draw.io</a:t>
+            </a:r>
+          </a:p>
+          <a:p>
+            <a:pPr algn="ctr">
+              <a:spcBef>
+                <a:spcPts val="200"/>
+              </a:spcBef>
+            </a:pPr>
+            <a:r>
+              <a:rPr sz="1000" b="0" i="0">
+                <a:solidFill>
+                  <a:srgbClr val="666666"/>
+                </a:solidFill>
+                <a:latin typeface="Calibri"/>
+              </a:rPr>
+              <a:t>Deployment</a:t>
+            </a:r>
+          </a:p>
+        </p:txBody>
+      </p:sp>
       <p:sp>
         <p:nvSpPr>
           <p:cNvPr id="11" name="Rounded Rectangle 10"/>
@@ -3839,13 +3828,56 @@
         </p:nvSpPr>
         <p:spPr>
           <a:xfrm>
-            <a:off x="594360" y="3108960"/>
-            <a:ext cx="438912" cy="438912"/>
+            <a:off x="4283354" y="1591056"/>
+            <a:ext cx="3624986" cy="2299716"/>
           </a:xfrm>
           <a:prstGeom prst="roundRect">
             <a:avLst>
               <a:gd name="adj" fmla="val 12000"/>
             </a:avLst>
+          </a:prstGeom>
+          <a:solidFill>
+            <a:srgbClr val="F2F2F2"/>
+          </a:solidFill>
+          <a:ln>
+            <a:noFill/>
+          </a:ln>
+        </p:spPr>
+        <p:style>
+          <a:lnRef idx="1">
+            <a:schemeClr val="accent1"/>
+          </a:lnRef>
+          <a:fillRef idx="3">
+            <a:schemeClr val="accent1"/>
+          </a:fillRef>
+          <a:effectRef idx="2">
+            <a:schemeClr val="accent1"/>
+          </a:effectRef>
+          <a:fontRef idx="minor">
+            <a:schemeClr val="lt1"/>
+          </a:fontRef>
+        </p:style>
+        <p:txBody>
+          <a:bodyPr rtlCol="0" anchor="ctr"/>
+          <a:lstStyle/>
+          <a:p>
+            <a:pPr algn="ctr"/>
+          </a:p>
+        </p:txBody>
+      </p:sp>
+      <p:sp>
+        <p:nvSpPr>
+          <p:cNvPr id="12" name="Rectangle 11"/>
+          <p:cNvSpPr/>
+          <p:nvPr/>
+        </p:nvSpPr>
+        <p:spPr>
+          <a:xfrm>
+            <a:off x="4283354" y="1591056"/>
+            <a:ext cx="3624986" cy="64008"/>
+          </a:xfrm>
+          <a:prstGeom prst="rect">
+            <a:avLst/>
           </a:prstGeom>
           <a:solidFill>
             <a:srgbClr val="095292"/>
@@ -3878,14 +3910,81 @@
       </p:sp>
       <p:sp>
         <p:nvSpPr>
-          <p:cNvPr id="12" name="TextBox 11"/>
+          <p:cNvPr id="13" name="Rectangle 12"/>
+          <p:cNvSpPr/>
+          <p:nvPr/>
+        </p:nvSpPr>
+        <p:spPr>
+          <a:xfrm>
+            <a:off x="4283354" y="1655064"/>
+            <a:ext cx="3624986" cy="27432"/>
+          </a:xfrm>
+          <a:prstGeom prst="rect">
+            <a:avLst/>
+          </a:prstGeom>
+          <a:solidFill>
+            <a:srgbClr val="FFD000"/>
+          </a:solidFill>
+          <a:ln>
+            <a:noFill/>
+          </a:ln>
+        </p:spPr>
+        <p:style>
+          <a:lnRef idx="1">
+            <a:schemeClr val="accent1"/>
+          </a:lnRef>
+          <a:fillRef idx="3">
+            <a:schemeClr val="accent1"/>
+          </a:fillRef>
+          <a:effectRef idx="2">
+            <a:schemeClr val="accent1"/>
+          </a:effectRef>
+          <a:fontRef idx="minor">
+            <a:schemeClr val="lt1"/>
+          </a:fontRef>
+        </p:style>
+        <p:txBody>
+          <a:bodyPr rtlCol="0" anchor="ctr"/>
+          <a:lstStyle/>
+          <a:p>
+            <a:pPr algn="ctr"/>
+          </a:p>
+        </p:txBody>
+      </p:sp>
+      <p:pic>
+        <p:nvPicPr>
+          <p:cNvPr id="14" name="Picture 13" descr="google_docs.png"/>
+          <p:cNvPicPr>
+            <a:picLocks noChangeAspect="1"/>
+          </p:cNvPicPr>
+          <p:nvPr/>
+        </p:nvPicPr>
+        <p:blipFill>
+          <a:blip r:embed="rId3"/>
+          <a:stretch>
+            <a:fillRect/>
+          </a:stretch>
+        </p:blipFill>
+        <p:spPr>
+          <a:xfrm>
+            <a:off x="5485485" y="1847087"/>
+            <a:ext cx="1220724" cy="1220724"/>
+          </a:xfrm>
+          <a:prstGeom prst="rect">
+            <a:avLst/>
+          </a:prstGeom>
+        </p:spPr>
+      </p:pic>
+      <p:sp>
+        <p:nvSpPr>
+          <p:cNvPr id="15" name="TextBox 14"/>
           <p:cNvSpPr txBox="1"/>
           <p:nvPr/>
         </p:nvSpPr>
         <p:spPr>
           <a:xfrm>
-            <a:off x="594360" y="3108960"/>
-            <a:ext cx="438912" cy="438912"/>
+            <a:off x="4356506" y="3159251"/>
+            <a:ext cx="3478682" cy="621792"/>
           </a:xfrm>
           <a:prstGeom prst="rect">
             <a:avLst/>
@@ -3893,80 +3992,48 @@
           <a:noFill/>
         </p:spPr>
         <p:txBody>
-          <a:bodyPr wrap="square" anchor="ctr"/>
+          <a:bodyPr wrap="square" anchor="t"/>
           <a:lstStyle/>
           <a:p>
             <a:pPr algn="ctr"/>
             <a:r>
-              <a:rPr sz="1600" b="1" i="0">
-                <a:solidFill>
-                  <a:srgbClr val="FFFFFF"/>
-                </a:solidFill>
-                <a:latin typeface="Calibri"/>
-              </a:rPr>
-              <a:t>2</a:t>
-            </a:r>
-          </a:p>
-        </p:txBody>
-      </p:sp>
-      <p:sp>
-        <p:nvSpPr>
-          <p:cNvPr id="13" name="TextBox 12"/>
-          <p:cNvSpPr txBox="1"/>
-          <p:nvPr/>
-        </p:nvSpPr>
-        <p:spPr>
-          <a:xfrm>
-            <a:off x="1188720" y="2894076"/>
-            <a:ext cx="10271455" cy="886968"/>
-          </a:xfrm>
-          <a:prstGeom prst="rect">
-            <a:avLst/>
-          </a:prstGeom>
-          <a:noFill/>
-        </p:spPr>
-        <p:txBody>
-          <a:bodyPr wrap="square" anchor="ctr"/>
-          <a:lstStyle/>
-          <a:p>
-            <a:r>
-              <a:rPr sz="1500" b="1" i="0">
+              <a:rPr sz="1300" b="1" i="0">
                 <a:solidFill>
                   <a:srgbClr val="095292"/>
                 </a:solidFill>
                 <a:latin typeface="Calibri"/>
               </a:rPr>
-              <a:t>Traduce con IA</a:t>
-            </a:r>
-          </a:p>
-          <a:p>
-            <a:pPr>
+              <a:t>Google Docs</a:t>
+            </a:r>
+          </a:p>
+          <a:p>
+            <a:pPr algn="ctr">
               <a:spcBef>
                 <a:spcPts val="200"/>
               </a:spcBef>
             </a:pPr>
             <a:r>
-              <a:rPr sz="1300" b="0" i="0">
-                <a:solidFill>
-                  <a:srgbClr val="333333"/>
-                </a:solidFill>
-                <a:latin typeface="Calibri"/>
-              </a:rPr>
-              <a:t>Copia o describe tu boceto a una IA y pidele el codigo Mermaid: «convierte este diagrama a Mermaid usando flowchart». Revisa el resultado: la IA acierta la sintaxis, no tu modelo.</a:t>
-            </a:r>
-          </a:p>
-        </p:txBody>
-      </p:sp>
-      <p:sp>
-        <p:nvSpPr>
-          <p:cNvPr id="14" name="Rounded Rectangle 13"/>
+              <a:rPr sz="1000" b="0" i="0">
+                <a:solidFill>
+                  <a:srgbClr val="666666"/>
+                </a:solidFill>
+                <a:latin typeface="Calibri"/>
+              </a:rPr>
+              <a:t>Informe PI</a:t>
+            </a:r>
+          </a:p>
+        </p:txBody>
+      </p:sp>
+      <p:sp>
+        <p:nvSpPr>
+          <p:cNvPr id="16" name="Rounded Rectangle 15"/>
           <p:cNvSpPr/>
           <p:nvPr/>
         </p:nvSpPr>
         <p:spPr>
           <a:xfrm>
-            <a:off x="457200" y="3945636"/>
-            <a:ext cx="11277295" cy="1051560"/>
+            <a:off x="8109508" y="1591056"/>
+            <a:ext cx="3624986" cy="2299716"/>
           </a:xfrm>
           <a:prstGeom prst="roundRect">
             <a:avLst>
@@ -4004,19 +4071,17 @@
       </p:sp>
       <p:sp>
         <p:nvSpPr>
-          <p:cNvPr id="15" name="Rounded Rectangle 14"/>
+          <p:cNvPr id="17" name="Rectangle 16"/>
           <p:cNvSpPr/>
           <p:nvPr/>
         </p:nvSpPr>
         <p:spPr>
           <a:xfrm>
-            <a:off x="594360" y="4251960"/>
-            <a:ext cx="438912" cy="438912"/>
-          </a:xfrm>
-          <a:prstGeom prst="roundRect">
-            <a:avLst>
-              <a:gd name="adj" fmla="val 12000"/>
-            </a:avLst>
+            <a:off x="8109508" y="1591056"/>
+            <a:ext cx="3624986" cy="64008"/>
+          </a:xfrm>
+          <a:prstGeom prst="rect">
+            <a:avLst/>
           </a:prstGeom>
           <a:solidFill>
             <a:srgbClr val="095292"/>
@@ -4049,103 +4114,20 @@
       </p:sp>
       <p:sp>
         <p:nvSpPr>
-          <p:cNvPr id="16" name="TextBox 15"/>
-          <p:cNvSpPr txBox="1"/>
-          <p:nvPr/>
-        </p:nvSpPr>
-        <p:spPr>
-          <a:xfrm>
-            <a:off x="594360" y="4251960"/>
-            <a:ext cx="438912" cy="438912"/>
-          </a:xfrm>
-          <a:prstGeom prst="rect">
-            <a:avLst/>
-          </a:prstGeom>
-          <a:noFill/>
-        </p:spPr>
-        <p:txBody>
-          <a:bodyPr wrap="square" anchor="ctr"/>
-          <a:lstStyle/>
-          <a:p>
-            <a:pPr algn="ctr"/>
-            <a:r>
-              <a:rPr sz="1600" b="1" i="0">
-                <a:solidFill>
-                  <a:srgbClr val="FFFFFF"/>
-                </a:solidFill>
-                <a:latin typeface="Calibri"/>
-              </a:rPr>
-              <a:t>3</a:t>
-            </a:r>
-          </a:p>
-        </p:txBody>
-      </p:sp>
-      <p:sp>
-        <p:nvSpPr>
-          <p:cNvPr id="17" name="TextBox 16"/>
-          <p:cNvSpPr txBox="1"/>
-          <p:nvPr/>
-        </p:nvSpPr>
-        <p:spPr>
-          <a:xfrm>
-            <a:off x="1188720" y="4037076"/>
-            <a:ext cx="10271455" cy="886968"/>
-          </a:xfrm>
-          <a:prstGeom prst="rect">
-            <a:avLst/>
-          </a:prstGeom>
-          <a:noFill/>
-        </p:spPr>
-        <p:txBody>
-          <a:bodyPr wrap="square" anchor="ctr"/>
-          <a:lstStyle/>
-          <a:p>
-            <a:r>
-              <a:rPr sz="1500" b="1" i="0">
-                <a:solidFill>
-                  <a:srgbClr val="095292"/>
-                </a:solidFill>
-                <a:latin typeface="Calibri"/>
-              </a:rPr>
-              <a:t>Pega y renderiza en ExamLab</a:t>
-            </a:r>
-          </a:p>
-          <a:p>
-            <a:pPr>
-              <a:spcBef>
-                <a:spcPts val="200"/>
-              </a:spcBef>
-            </a:pPr>
-            <a:r>
-              <a:rPr sz="1300" b="0" i="0">
-                <a:solidFill>
-                  <a:srgbClr val="333333"/>
-                </a:solidFill>
-                <a:latin typeface="Calibri"/>
-              </a:rPr>
-              <a:t>Pega ese codigo en la caja de texto de la pregunta y mira como lo dibuja la plataforma. Si no renderiza, corrige ahi mismo: lo que se califica es el diagrama renderizado dentro de ExamLab.</a:t>
-            </a:r>
-          </a:p>
-        </p:txBody>
-      </p:sp>
-      <p:sp>
-        <p:nvSpPr>
-          <p:cNvPr id="18" name="Rounded Rectangle 17"/>
+          <p:cNvPr id="18" name="Rectangle 17"/>
           <p:cNvSpPr/>
           <p:nvPr/>
         </p:nvSpPr>
         <p:spPr>
           <a:xfrm>
-            <a:off x="457200" y="5088636"/>
-            <a:ext cx="11277295" cy="1051560"/>
-          </a:xfrm>
-          <a:prstGeom prst="roundRect">
-            <a:avLst>
-              <a:gd name="adj" fmla="val 12000"/>
-            </a:avLst>
+            <a:off x="8109508" y="1655064"/>
+            <a:ext cx="3624986" cy="27432"/>
+          </a:xfrm>
+          <a:prstGeom prst="rect">
+            <a:avLst/>
           </a:prstGeom>
           <a:solidFill>
-            <a:srgbClr val="E8F4FA"/>
+            <a:srgbClr val="FFD000"/>
           </a:solidFill>
           <a:ln>
             <a:noFill/>
@@ -4173,21 +4155,137 @@
           </a:p>
         </p:txBody>
       </p:sp>
-      <p:sp>
-        <p:nvSpPr>
-          <p:cNvPr id="19" name="Rounded Rectangle 18"/>
+      <p:pic>
+        <p:nvPicPr>
+          <p:cNvPr id="19" name="Picture 18" descr="mermaid.png"/>
+          <p:cNvPicPr>
+            <a:picLocks noChangeAspect="1"/>
+          </p:cNvPicPr>
+          <p:nvPr/>
+        </p:nvPicPr>
+        <p:blipFill>
+          <a:blip r:embed="rId4"/>
+          <a:stretch>
+            <a:fillRect/>
+          </a:stretch>
+        </p:blipFill>
+        <p:spPr>
+          <a:xfrm>
+            <a:off x="9311640" y="1847087"/>
+            <a:ext cx="1220724" cy="1220724"/>
+          </a:xfrm>
+          <a:prstGeom prst="rect">
+            <a:avLst/>
+          </a:prstGeom>
+        </p:spPr>
+      </p:pic>
+      <p:sp>
+        <p:nvSpPr>
+          <p:cNvPr id="20" name="TextBox 19"/>
+          <p:cNvSpPr txBox="1"/>
+          <p:nvPr/>
+        </p:nvSpPr>
+        <p:spPr>
+          <a:xfrm>
+            <a:off x="8182660" y="3159251"/>
+            <a:ext cx="3478682" cy="621792"/>
+          </a:xfrm>
+          <a:prstGeom prst="rect">
+            <a:avLst/>
+          </a:prstGeom>
+          <a:noFill/>
+        </p:spPr>
+        <p:txBody>
+          <a:bodyPr wrap="square" anchor="t"/>
+          <a:lstStyle/>
+          <a:p>
+            <a:pPr algn="ctr"/>
+            <a:r>
+              <a:rPr sz="1300" b="1" i="0">
+                <a:solidFill>
+                  <a:srgbClr val="095292"/>
+                </a:solidFill>
+                <a:latin typeface="Calibri"/>
+              </a:rPr>
+              <a:t>Mermaid</a:t>
+            </a:r>
+          </a:p>
+          <a:p>
+            <a:pPr algn="ctr">
+              <a:spcBef>
+                <a:spcPts val="200"/>
+              </a:spcBef>
+            </a:pPr>
+            <a:r>
+              <a:rPr sz="1000" b="0" i="0">
+                <a:solidFill>
+                  <a:srgbClr val="666666"/>
+                </a:solidFill>
+                <a:latin typeface="Calibri"/>
+              </a:rPr>
+              <a:t>Codigo del diagrama</a:t>
+            </a:r>
+          </a:p>
+        </p:txBody>
+      </p:sp>
+      <p:sp>
+        <p:nvSpPr>
+          <p:cNvPr id="21" name="Rounded Rectangle 20"/>
           <p:cNvSpPr/>
           <p:nvPr/>
         </p:nvSpPr>
         <p:spPr>
           <a:xfrm>
-            <a:off x="594360" y="5394960"/>
-            <a:ext cx="438912" cy="438912"/>
+            <a:off x="4283354" y="4055364"/>
+            <a:ext cx="3624986" cy="2299716"/>
           </a:xfrm>
           <a:prstGeom prst="roundRect">
             <a:avLst>
               <a:gd name="adj" fmla="val 12000"/>
             </a:avLst>
+          </a:prstGeom>
+          <a:solidFill>
+            <a:srgbClr val="F2F2F2"/>
+          </a:solidFill>
+          <a:ln>
+            <a:noFill/>
+          </a:ln>
+        </p:spPr>
+        <p:style>
+          <a:lnRef idx="1">
+            <a:schemeClr val="accent1"/>
+          </a:lnRef>
+          <a:fillRef idx="3">
+            <a:schemeClr val="accent1"/>
+          </a:fillRef>
+          <a:effectRef idx="2">
+            <a:schemeClr val="accent1"/>
+          </a:effectRef>
+          <a:fontRef idx="minor">
+            <a:schemeClr val="lt1"/>
+          </a:fontRef>
+        </p:style>
+        <p:txBody>
+          <a:bodyPr rtlCol="0" anchor="ctr"/>
+          <a:lstStyle/>
+          <a:p>
+            <a:pPr algn="ctr"/>
+          </a:p>
+        </p:txBody>
+      </p:sp>
+      <p:sp>
+        <p:nvSpPr>
+          <p:cNvPr id="22" name="Rectangle 21"/>
+          <p:cNvSpPr/>
+          <p:nvPr/>
+        </p:nvSpPr>
+        <p:spPr>
+          <a:xfrm>
+            <a:off x="4283354" y="4055364"/>
+            <a:ext cx="3624986" cy="64008"/>
+          </a:xfrm>
+          <a:prstGeom prst="rect">
+            <a:avLst/>
           </a:prstGeom>
           <a:solidFill>
             <a:srgbClr val="095292"/>
@@ -4220,14 +4318,81 @@
       </p:sp>
       <p:sp>
         <p:nvSpPr>
-          <p:cNvPr id="20" name="TextBox 19"/>
+          <p:cNvPr id="23" name="Rectangle 22"/>
+          <p:cNvSpPr/>
+          <p:nvPr/>
+        </p:nvSpPr>
+        <p:spPr>
+          <a:xfrm>
+            <a:off x="4283354" y="4119372"/>
+            <a:ext cx="3624986" cy="27432"/>
+          </a:xfrm>
+          <a:prstGeom prst="rect">
+            <a:avLst/>
+          </a:prstGeom>
+          <a:solidFill>
+            <a:srgbClr val="FFD000"/>
+          </a:solidFill>
+          <a:ln>
+            <a:noFill/>
+          </a:ln>
+        </p:spPr>
+        <p:style>
+          <a:lnRef idx="1">
+            <a:schemeClr val="accent1"/>
+          </a:lnRef>
+          <a:fillRef idx="3">
+            <a:schemeClr val="accent1"/>
+          </a:fillRef>
+          <a:effectRef idx="2">
+            <a:schemeClr val="accent1"/>
+          </a:effectRef>
+          <a:fontRef idx="minor">
+            <a:schemeClr val="lt1"/>
+          </a:fontRef>
+        </p:style>
+        <p:txBody>
+          <a:bodyPr rtlCol="0" anchor="ctr"/>
+          <a:lstStyle/>
+          <a:p>
+            <a:pPr algn="ctr"/>
+          </a:p>
+        </p:txBody>
+      </p:sp>
+      <p:pic>
+        <p:nvPicPr>
+          <p:cNvPr id="24" name="Picture 23" descr="examlab.png"/>
+          <p:cNvPicPr>
+            <a:picLocks noChangeAspect="1"/>
+          </p:cNvPicPr>
+          <p:nvPr/>
+        </p:nvPicPr>
+        <p:blipFill>
+          <a:blip r:embed="rId5"/>
+          <a:stretch>
+            <a:fillRect/>
+          </a:stretch>
+        </p:blipFill>
+        <p:spPr>
+          <a:xfrm>
+            <a:off x="5485485" y="4311396"/>
+            <a:ext cx="1220724" cy="1220724"/>
+          </a:xfrm>
+          <a:prstGeom prst="rect">
+            <a:avLst/>
+          </a:prstGeom>
+        </p:spPr>
+      </p:pic>
+      <p:sp>
+        <p:nvSpPr>
+          <p:cNvPr id="25" name="TextBox 24"/>
           <p:cNvSpPr txBox="1"/>
           <p:nvPr/>
         </p:nvSpPr>
         <p:spPr>
           <a:xfrm>
-            <a:off x="594360" y="5394960"/>
-            <a:ext cx="438912" cy="438912"/>
+            <a:off x="4356506" y="5623560"/>
+            <a:ext cx="3478682" cy="621792"/>
           </a:xfrm>
           <a:prstGeom prst="rect">
             <a:avLst/>
@@ -4235,73 +4400,41 @@
           <a:noFill/>
         </p:spPr>
         <p:txBody>
-          <a:bodyPr wrap="square" anchor="ctr"/>
+          <a:bodyPr wrap="square" anchor="t"/>
           <a:lstStyle/>
           <a:p>
             <a:pPr algn="ctr"/>
             <a:r>
-              <a:rPr sz="1600" b="1" i="0">
-                <a:solidFill>
-                  <a:srgbClr val="FFFFFF"/>
-                </a:solidFill>
-                <a:latin typeface="Calibri"/>
-              </a:rPr>
-              <a:t>4</a:t>
-            </a:r>
-          </a:p>
-        </p:txBody>
-      </p:sp>
-      <p:sp>
-        <p:nvSpPr>
-          <p:cNvPr id="21" name="TextBox 20"/>
-          <p:cNvSpPr txBox="1"/>
-          <p:nvPr/>
-        </p:nvSpPr>
-        <p:spPr>
-          <a:xfrm>
-            <a:off x="1188720" y="5180076"/>
-            <a:ext cx="10271455" cy="886968"/>
-          </a:xfrm>
-          <a:prstGeom prst="rect">
-            <a:avLst/>
-          </a:prstGeom>
-          <a:noFill/>
-        </p:spPr>
-        <p:txBody>
-          <a:bodyPr wrap="square" anchor="ctr"/>
-          <a:lstStyle/>
-          <a:p>
-            <a:r>
-              <a:rPr sz="1500" b="1" i="0">
+              <a:rPr sz="1300" b="1" i="0">
                 <a:solidFill>
                   <a:srgbClr val="095292"/>
                 </a:solidFill>
                 <a:latin typeface="Calibri"/>
               </a:rPr>
-              <a:t>Guarda el PNG para tu PI</a:t>
-            </a:r>
-          </a:p>
-          <a:p>
-            <a:pPr>
+              <a:t>ExamLab</a:t>
+            </a:r>
+          </a:p>
+          <a:p>
+            <a:pPr algn="ctr">
               <a:spcBef>
                 <a:spcPts val="200"/>
               </a:spcBef>
             </a:pPr>
             <a:r>
-              <a:rPr sz="1300" b="0" i="0">
-                <a:solidFill>
-                  <a:srgbClr val="333333"/>
-                </a:solidFill>
-                <a:latin typeface="Calibri"/>
-              </a:rPr>
-              <a:t>Exporta tambien la imagen a la carpeta de tu Proyecto Integrador. Esa copia es para tu informe; no reemplaza la respuesta en la plataforma.</a:t>
-            </a:r>
-          </a:p>
-        </p:txBody>
-      </p:sp>
-      <p:sp>
-        <p:nvSpPr>
-          <p:cNvPr id="22" name="TextBox 21"/>
+              <a:rPr sz="1000" b="0" i="0">
+                <a:solidFill>
+                  <a:srgbClr val="666666"/>
+                </a:solidFill>
+                <a:latin typeface="Calibri"/>
+              </a:rPr>
+              <a:t>Donde se entrega</a:t>
+            </a:r>
+          </a:p>
+        </p:txBody>
+      </p:sp>
+      <p:sp>
+        <p:nvSpPr>
+          <p:cNvPr id="26" name="TextBox 25"/>
           <p:cNvSpPr txBox="1"/>
           <p:nvPr/>
         </p:nvSpPr>
@@ -4369,7 +4502,7 @@
         <p:spPr>
           <a:xfrm>
             <a:off x="0" y="0"/>
-            <a:ext cx="12191695" cy="960120"/>
+            <a:ext cx="12191695" cy="1170432"/>
           </a:xfrm>
           <a:prstGeom prst="rect">
             <a:avLst/>
@@ -4411,7 +4544,7 @@
         </p:nvSpPr>
         <p:spPr>
           <a:xfrm>
-            <a:off x="0" y="960120"/>
+            <a:off x="0" y="1170432"/>
             <a:ext cx="12191695" cy="41148"/>
           </a:xfrm>
           <a:prstGeom prst="rect">
@@ -4455,7 +4588,7 @@
         <p:spPr>
           <a:xfrm>
             <a:off x="457200" y="164592"/>
-            <a:ext cx="11277295" cy="502920"/>
+            <a:ext cx="11277295" cy="384048"/>
           </a:xfrm>
           <a:prstGeom prst="rect">
             <a:avLst/>
@@ -4475,7 +4608,7 @@
                 </a:solidFill>
                 <a:latin typeface="Calibri"/>
               </a:rPr>
-              <a:t>Taller PI (paso a paso)</a:t>
+              <a:t>Del boceto a ExamLab (diagrama)</a:t>
             </a:r>
           </a:p>
         </p:txBody>
@@ -4488,8 +4621,8 @@
         </p:nvSpPr>
         <p:spPr>
           <a:xfrm>
-            <a:off x="457200" y="1170432"/>
-            <a:ext cx="11277295" cy="5230368"/>
+            <a:off x="457200" y="566928"/>
+            <a:ext cx="11277295" cy="411480"/>
           </a:xfrm>
           <a:prstGeom prst="rect">
             <a:avLst/>
@@ -4502,137 +4635,705 @@
           </a:bodyPr>
           <a:lstStyle/>
           <a:p>
+            <a:r>
+              <a:rPr sz="1400" b="0" i="0">
+                <a:solidFill>
+                  <a:srgbClr val="B8D8EE"/>
+                </a:solidFill>
+                <a:latin typeface="Calibri"/>
+              </a:rPr>
+              <a:t>El diagrama se entrega como código Mermaid dentro de ExamLab, no como imagen</a:t>
+            </a:r>
+          </a:p>
+        </p:txBody>
+      </p:sp>
+      <p:sp>
+        <p:nvSpPr>
+          <p:cNvPr id="6" name="Rounded Rectangle 5"/>
+          <p:cNvSpPr/>
+          <p:nvPr/>
+        </p:nvSpPr>
+        <p:spPr>
+          <a:xfrm>
+            <a:off x="457200" y="1659636"/>
+            <a:ext cx="11277295" cy="1051560"/>
+          </a:xfrm>
+          <a:prstGeom prst="roundRect">
+            <a:avLst>
+              <a:gd name="adj" fmla="val 12000"/>
+            </a:avLst>
+          </a:prstGeom>
+          <a:solidFill>
+            <a:srgbClr val="F2F2F2"/>
+          </a:solidFill>
+          <a:ln>
+            <a:noFill/>
+          </a:ln>
+        </p:spPr>
+        <p:style>
+          <a:lnRef idx="1">
+            <a:schemeClr val="accent1"/>
+          </a:lnRef>
+          <a:fillRef idx="3">
+            <a:schemeClr val="accent1"/>
+          </a:fillRef>
+          <a:effectRef idx="2">
+            <a:schemeClr val="accent1"/>
+          </a:effectRef>
+          <a:fontRef idx="minor">
+            <a:schemeClr val="lt1"/>
+          </a:fontRef>
+        </p:style>
+        <p:txBody>
+          <a:bodyPr rtlCol="0" anchor="ctr"/>
+          <a:lstStyle/>
+          <a:p>
+            <a:pPr algn="ctr"/>
+          </a:p>
+        </p:txBody>
+      </p:sp>
+      <p:sp>
+        <p:nvSpPr>
+          <p:cNvPr id="7" name="Rounded Rectangle 6"/>
+          <p:cNvSpPr/>
+          <p:nvPr/>
+        </p:nvSpPr>
+        <p:spPr>
+          <a:xfrm>
+            <a:off x="594360" y="1965960"/>
+            <a:ext cx="438912" cy="438912"/>
+          </a:xfrm>
+          <a:prstGeom prst="roundRect">
+            <a:avLst>
+              <a:gd name="adj" fmla="val 12000"/>
+            </a:avLst>
+          </a:prstGeom>
+          <a:solidFill>
+            <a:srgbClr val="095292"/>
+          </a:solidFill>
+          <a:ln>
+            <a:noFill/>
+          </a:ln>
+        </p:spPr>
+        <p:style>
+          <a:lnRef idx="1">
+            <a:schemeClr val="accent1"/>
+          </a:lnRef>
+          <a:fillRef idx="3">
+            <a:schemeClr val="accent1"/>
+          </a:fillRef>
+          <a:effectRef idx="2">
+            <a:schemeClr val="accent1"/>
+          </a:effectRef>
+          <a:fontRef idx="minor">
+            <a:schemeClr val="lt1"/>
+          </a:fontRef>
+        </p:style>
+        <p:txBody>
+          <a:bodyPr rtlCol="0" anchor="ctr"/>
+          <a:lstStyle/>
+          <a:p>
+            <a:pPr algn="ctr"/>
+          </a:p>
+        </p:txBody>
+      </p:sp>
+      <p:sp>
+        <p:nvSpPr>
+          <p:cNvPr id="8" name="TextBox 7"/>
+          <p:cNvSpPr txBox="1"/>
+          <p:nvPr/>
+        </p:nvSpPr>
+        <p:spPr>
+          <a:xfrm>
+            <a:off x="594360" y="1965960"/>
+            <a:ext cx="438912" cy="438912"/>
+          </a:xfrm>
+          <a:prstGeom prst="rect">
+            <a:avLst/>
+          </a:prstGeom>
+          <a:noFill/>
+        </p:spPr>
+        <p:txBody>
+          <a:bodyPr wrap="square" anchor="ctr"/>
+          <a:lstStyle/>
+          <a:p>
+            <a:pPr algn="ctr"/>
+            <a:r>
+              <a:rPr sz="1600" b="1" i="0">
+                <a:solidFill>
+                  <a:srgbClr val="FFFFFF"/>
+                </a:solidFill>
+                <a:latin typeface="Calibri"/>
+              </a:rPr>
+              <a:t>1</a:t>
+            </a:r>
+          </a:p>
+        </p:txBody>
+      </p:sp>
+      <p:sp>
+        <p:nvSpPr>
+          <p:cNvPr id="9" name="TextBox 8"/>
+          <p:cNvSpPr txBox="1"/>
+          <p:nvPr/>
+        </p:nvSpPr>
+        <p:spPr>
+          <a:xfrm>
+            <a:off x="1188720" y="1751076"/>
+            <a:ext cx="10271455" cy="886968"/>
+          </a:xfrm>
+          <a:prstGeom prst="rect">
+            <a:avLst/>
+          </a:prstGeom>
+          <a:noFill/>
+        </p:spPr>
+        <p:txBody>
+          <a:bodyPr wrap="square" anchor="ctr"/>
+          <a:lstStyle/>
+          <a:p>
+            <a:r>
+              <a:rPr sz="1500" b="1" i="0">
+                <a:solidFill>
+                  <a:srgbClr val="095292"/>
+                </a:solidFill>
+                <a:latin typeface="Calibri"/>
+              </a:rPr>
+              <a:t>Disena visual</a:t>
+            </a:r>
+          </a:p>
+          <a:p>
             <a:pPr>
-              <a:spcAft>
-                <a:spcPts val="800"/>
-              </a:spcAft>
+              <a:spcBef>
+                <a:spcPts val="200"/>
+              </a:spcBef>
             </a:pPr>
             <a:r>
+              <a:rPr sz="1300" b="0" i="0">
+                <a:solidFill>
+                  <a:srgbClr val="333333"/>
+                </a:solidFill>
+                <a:latin typeface="Calibri"/>
+              </a:rPr>
+              <a:t>Dibuja el diagrama como quieras en Excalidraw o draw.io: es mas rapido arrastrar cajas que escribir codigo, y ahi es donde piensas el modelo.</a:t>
+            </a:r>
+          </a:p>
+        </p:txBody>
+      </p:sp>
+      <p:sp>
+        <p:nvSpPr>
+          <p:cNvPr id="10" name="Rounded Rectangle 9"/>
+          <p:cNvSpPr/>
+          <p:nvPr/>
+        </p:nvSpPr>
+        <p:spPr>
+          <a:xfrm>
+            <a:off x="457200" y="2802636"/>
+            <a:ext cx="11277295" cy="1051560"/>
+          </a:xfrm>
+          <a:prstGeom prst="roundRect">
+            <a:avLst>
+              <a:gd name="adj" fmla="val 12000"/>
+            </a:avLst>
+          </a:prstGeom>
+          <a:solidFill>
+            <a:srgbClr val="E8F4FA"/>
+          </a:solidFill>
+          <a:ln>
+            <a:noFill/>
+          </a:ln>
+        </p:spPr>
+        <p:style>
+          <a:lnRef idx="1">
+            <a:schemeClr val="accent1"/>
+          </a:lnRef>
+          <a:fillRef idx="3">
+            <a:schemeClr val="accent1"/>
+          </a:fillRef>
+          <a:effectRef idx="2">
+            <a:schemeClr val="accent1"/>
+          </a:effectRef>
+          <a:fontRef idx="minor">
+            <a:schemeClr val="lt1"/>
+          </a:fontRef>
+        </p:style>
+        <p:txBody>
+          <a:bodyPr rtlCol="0" anchor="ctr"/>
+          <a:lstStyle/>
+          <a:p>
+            <a:pPr algn="ctr"/>
+          </a:p>
+        </p:txBody>
+      </p:sp>
+      <p:sp>
+        <p:nvSpPr>
+          <p:cNvPr id="11" name="Rounded Rectangle 10"/>
+          <p:cNvSpPr/>
+          <p:nvPr/>
+        </p:nvSpPr>
+        <p:spPr>
+          <a:xfrm>
+            <a:off x="594360" y="3108960"/>
+            <a:ext cx="438912" cy="438912"/>
+          </a:xfrm>
+          <a:prstGeom prst="roundRect">
+            <a:avLst>
+              <a:gd name="adj" fmla="val 12000"/>
+            </a:avLst>
+          </a:prstGeom>
+          <a:solidFill>
+            <a:srgbClr val="095292"/>
+          </a:solidFill>
+          <a:ln>
+            <a:noFill/>
+          </a:ln>
+        </p:spPr>
+        <p:style>
+          <a:lnRef idx="1">
+            <a:schemeClr val="accent1"/>
+          </a:lnRef>
+          <a:fillRef idx="3">
+            <a:schemeClr val="accent1"/>
+          </a:fillRef>
+          <a:effectRef idx="2">
+            <a:schemeClr val="accent1"/>
+          </a:effectRef>
+          <a:fontRef idx="minor">
+            <a:schemeClr val="lt1"/>
+          </a:fontRef>
+        </p:style>
+        <p:txBody>
+          <a:bodyPr rtlCol="0" anchor="ctr"/>
+          <a:lstStyle/>
+          <a:p>
+            <a:pPr algn="ctr"/>
+          </a:p>
+        </p:txBody>
+      </p:sp>
+      <p:sp>
+        <p:nvSpPr>
+          <p:cNvPr id="12" name="TextBox 11"/>
+          <p:cNvSpPr txBox="1"/>
+          <p:nvPr/>
+        </p:nvSpPr>
+        <p:spPr>
+          <a:xfrm>
+            <a:off x="594360" y="3108960"/>
+            <a:ext cx="438912" cy="438912"/>
+          </a:xfrm>
+          <a:prstGeom prst="rect">
+            <a:avLst/>
+          </a:prstGeom>
+          <a:noFill/>
+        </p:spPr>
+        <p:txBody>
+          <a:bodyPr wrap="square" anchor="ctr"/>
+          <a:lstStyle/>
+          <a:p>
+            <a:pPr algn="ctr"/>
+            <a:r>
               <a:rPr sz="1600" b="1" i="0">
                 <a:solidFill>
+                  <a:srgbClr val="FFFFFF"/>
+                </a:solidFill>
+                <a:latin typeface="Calibri"/>
+              </a:rPr>
+              <a:t>2</a:t>
+            </a:r>
+          </a:p>
+        </p:txBody>
+      </p:sp>
+      <p:sp>
+        <p:nvSpPr>
+          <p:cNvPr id="13" name="TextBox 12"/>
+          <p:cNvSpPr txBox="1"/>
+          <p:nvPr/>
+        </p:nvSpPr>
+        <p:spPr>
+          <a:xfrm>
+            <a:off x="1188720" y="2894076"/>
+            <a:ext cx="10271455" cy="886968"/>
+          </a:xfrm>
+          <a:prstGeom prst="rect">
+            <a:avLst/>
+          </a:prstGeom>
+          <a:noFill/>
+        </p:spPr>
+        <p:txBody>
+          <a:bodyPr wrap="square" anchor="ctr"/>
+          <a:lstStyle/>
+          <a:p>
+            <a:r>
+              <a:rPr sz="1500" b="1" i="0">
+                <a:solidFill>
+                  <a:srgbClr val="095292"/>
+                </a:solidFill>
+                <a:latin typeface="Calibri"/>
+              </a:rPr>
+              <a:t>Traduce con IA</a:t>
+            </a:r>
+          </a:p>
+          <a:p>
+            <a:pPr>
+              <a:spcBef>
+                <a:spcPts val="200"/>
+              </a:spcBef>
+            </a:pPr>
+            <a:r>
+              <a:rPr sz="1300" b="0" i="0">
+                <a:solidFill>
                   <a:srgbClr val="333333"/>
                 </a:solidFill>
                 <a:latin typeface="Calibri"/>
               </a:rPr>
-              <a:t>1.</a:t>
-            </a:r>
-            <a:r>
-              <a:rPr sz="1600" b="0" i="0">
+              <a:t>Copia o describe tu boceto a una IA y pidele el codigo Mermaid: «convierte este diagrama a Mermaid usando flowchart». Revisa el resultado: la IA acierta la sintaxis, no tu modelo.</a:t>
+            </a:r>
+          </a:p>
+        </p:txBody>
+      </p:sp>
+      <p:sp>
+        <p:nvSpPr>
+          <p:cNvPr id="14" name="Rounded Rectangle 13"/>
+          <p:cNvSpPr/>
+          <p:nvPr/>
+        </p:nvSpPr>
+        <p:spPr>
+          <a:xfrm>
+            <a:off x="457200" y="3945636"/>
+            <a:ext cx="11277295" cy="1051560"/>
+          </a:xfrm>
+          <a:prstGeom prst="roundRect">
+            <a:avLst>
+              <a:gd name="adj" fmla="val 12000"/>
+            </a:avLst>
+          </a:prstGeom>
+          <a:solidFill>
+            <a:srgbClr val="F2F2F2"/>
+          </a:solidFill>
+          <a:ln>
+            <a:noFill/>
+          </a:ln>
+        </p:spPr>
+        <p:style>
+          <a:lnRef idx="1">
+            <a:schemeClr val="accent1"/>
+          </a:lnRef>
+          <a:fillRef idx="3">
+            <a:schemeClr val="accent1"/>
+          </a:fillRef>
+          <a:effectRef idx="2">
+            <a:schemeClr val="accent1"/>
+          </a:effectRef>
+          <a:fontRef idx="minor">
+            <a:schemeClr val="lt1"/>
+          </a:fontRef>
+        </p:style>
+        <p:txBody>
+          <a:bodyPr rtlCol="0" anchor="ctr"/>
+          <a:lstStyle/>
+          <a:p>
+            <a:pPr algn="ctr"/>
+          </a:p>
+        </p:txBody>
+      </p:sp>
+      <p:sp>
+        <p:nvSpPr>
+          <p:cNvPr id="15" name="Rounded Rectangle 14"/>
+          <p:cNvSpPr/>
+          <p:nvPr/>
+        </p:nvSpPr>
+        <p:spPr>
+          <a:xfrm>
+            <a:off x="594360" y="4251960"/>
+            <a:ext cx="438912" cy="438912"/>
+          </a:xfrm>
+          <a:prstGeom prst="roundRect">
+            <a:avLst>
+              <a:gd name="adj" fmla="val 12000"/>
+            </a:avLst>
+          </a:prstGeom>
+          <a:solidFill>
+            <a:srgbClr val="095292"/>
+          </a:solidFill>
+          <a:ln>
+            <a:noFill/>
+          </a:ln>
+        </p:spPr>
+        <p:style>
+          <a:lnRef idx="1">
+            <a:schemeClr val="accent1"/>
+          </a:lnRef>
+          <a:fillRef idx="3">
+            <a:schemeClr val="accent1"/>
+          </a:fillRef>
+          <a:effectRef idx="2">
+            <a:schemeClr val="accent1"/>
+          </a:effectRef>
+          <a:fontRef idx="minor">
+            <a:schemeClr val="lt1"/>
+          </a:fontRef>
+        </p:style>
+        <p:txBody>
+          <a:bodyPr rtlCol="0" anchor="ctr"/>
+          <a:lstStyle/>
+          <a:p>
+            <a:pPr algn="ctr"/>
+          </a:p>
+        </p:txBody>
+      </p:sp>
+      <p:sp>
+        <p:nvSpPr>
+          <p:cNvPr id="16" name="TextBox 15"/>
+          <p:cNvSpPr txBox="1"/>
+          <p:nvPr/>
+        </p:nvSpPr>
+        <p:spPr>
+          <a:xfrm>
+            <a:off x="594360" y="4251960"/>
+            <a:ext cx="438912" cy="438912"/>
+          </a:xfrm>
+          <a:prstGeom prst="rect">
+            <a:avLst/>
+          </a:prstGeom>
+          <a:noFill/>
+        </p:spPr>
+        <p:txBody>
+          <a:bodyPr wrap="square" anchor="ctr"/>
+          <a:lstStyle/>
+          <a:p>
+            <a:pPr algn="ctr"/>
+            <a:r>
+              <a:rPr sz="1600" b="1" i="0">
+                <a:solidFill>
+                  <a:srgbClr val="FFFFFF"/>
+                </a:solidFill>
+                <a:latin typeface="Calibri"/>
+              </a:rPr>
+              <a:t>3</a:t>
+            </a:r>
+          </a:p>
+        </p:txBody>
+      </p:sp>
+      <p:sp>
+        <p:nvSpPr>
+          <p:cNvPr id="17" name="TextBox 16"/>
+          <p:cNvSpPr txBox="1"/>
+          <p:nvPr/>
+        </p:nvSpPr>
+        <p:spPr>
+          <a:xfrm>
+            <a:off x="1188720" y="4037076"/>
+            <a:ext cx="10271455" cy="886968"/>
+          </a:xfrm>
+          <a:prstGeom prst="rect">
+            <a:avLst/>
+          </a:prstGeom>
+          <a:noFill/>
+        </p:spPr>
+        <p:txBody>
+          <a:bodyPr wrap="square" anchor="ctr"/>
+          <a:lstStyle/>
+          <a:p>
+            <a:r>
+              <a:rPr sz="1500" b="1" i="0">
+                <a:solidFill>
+                  <a:srgbClr val="095292"/>
+                </a:solidFill>
+                <a:latin typeface="Calibri"/>
+              </a:rPr>
+              <a:t>Pega y renderiza en ExamLab</a:t>
+            </a:r>
+          </a:p>
+          <a:p>
+            <a:pPr>
+              <a:spcBef>
+                <a:spcPts val="200"/>
+              </a:spcBef>
+            </a:pPr>
+            <a:r>
+              <a:rPr sz="1300" b="0" i="0">
                 <a:solidFill>
                   <a:srgbClr val="333333"/>
                 </a:solidFill>
                 <a:latin typeface="Calibri"/>
               </a:rPr>
-              <a:t> Paso 1: dibuje primero el boceto del despliegue en Excalidraw o draw.io con las tres zonas (publica, privada y de datos), y despues pidale a una IA que lo traduzca a Mermaid; peguelo en la pregunta 4 y verifique en el diagrama ya renderizado que la base de datos NO quede en la zona publica.</a:t>
+              <a:t>Pega ese codigo en la caja de texto de la pregunta y mira como lo dibuja la plataforma. Si no renderiza, corrige ahi mismo: lo que se califica es el diagrama renderizado dentro de ExamLab.</a:t>
+            </a:r>
+          </a:p>
+        </p:txBody>
+      </p:sp>
+      <p:sp>
+        <p:nvSpPr>
+          <p:cNvPr id="18" name="Rounded Rectangle 17"/>
+          <p:cNvSpPr/>
+          <p:nvPr/>
+        </p:nvSpPr>
+        <p:spPr>
+          <a:xfrm>
+            <a:off x="457200" y="5088636"/>
+            <a:ext cx="11277295" cy="1051560"/>
+          </a:xfrm>
+          <a:prstGeom prst="roundRect">
+            <a:avLst>
+              <a:gd name="adj" fmla="val 12000"/>
+            </a:avLst>
+          </a:prstGeom>
+          <a:solidFill>
+            <a:srgbClr val="E8F4FA"/>
+          </a:solidFill>
+          <a:ln>
+            <a:noFill/>
+          </a:ln>
+        </p:spPr>
+        <p:style>
+          <a:lnRef idx="1">
+            <a:schemeClr val="accent1"/>
+          </a:lnRef>
+          <a:fillRef idx="3">
+            <a:schemeClr val="accent1"/>
+          </a:fillRef>
+          <a:effectRef idx="2">
+            <a:schemeClr val="accent1"/>
+          </a:effectRef>
+          <a:fontRef idx="minor">
+            <a:schemeClr val="lt1"/>
+          </a:fontRef>
+        </p:style>
+        <p:txBody>
+          <a:bodyPr rtlCol="0" anchor="ctr"/>
+          <a:lstStyle/>
+          <a:p>
+            <a:pPr algn="ctr"/>
+          </a:p>
+        </p:txBody>
+      </p:sp>
+      <p:sp>
+        <p:nvSpPr>
+          <p:cNvPr id="19" name="Rounded Rectangle 18"/>
+          <p:cNvSpPr/>
+          <p:nvPr/>
+        </p:nvSpPr>
+        <p:spPr>
+          <a:xfrm>
+            <a:off x="594360" y="5394960"/>
+            <a:ext cx="438912" cy="438912"/>
+          </a:xfrm>
+          <a:prstGeom prst="roundRect">
+            <a:avLst>
+              <a:gd name="adj" fmla="val 12000"/>
+            </a:avLst>
+          </a:prstGeom>
+          <a:solidFill>
+            <a:srgbClr val="095292"/>
+          </a:solidFill>
+          <a:ln>
+            <a:noFill/>
+          </a:ln>
+        </p:spPr>
+        <p:style>
+          <a:lnRef idx="1">
+            <a:schemeClr val="accent1"/>
+          </a:lnRef>
+          <a:fillRef idx="3">
+            <a:schemeClr val="accent1"/>
+          </a:fillRef>
+          <a:effectRef idx="2">
+            <a:schemeClr val="accent1"/>
+          </a:effectRef>
+          <a:fontRef idx="minor">
+            <a:schemeClr val="lt1"/>
+          </a:fontRef>
+        </p:style>
+        <p:txBody>
+          <a:bodyPr rtlCol="0" anchor="ctr"/>
+          <a:lstStyle/>
+          <a:p>
+            <a:pPr algn="ctr"/>
+          </a:p>
+        </p:txBody>
+      </p:sp>
+      <p:sp>
+        <p:nvSpPr>
+          <p:cNvPr id="20" name="TextBox 19"/>
+          <p:cNvSpPr txBox="1"/>
+          <p:nvPr/>
+        </p:nvSpPr>
+        <p:spPr>
+          <a:xfrm>
+            <a:off x="594360" y="5394960"/>
+            <a:ext cx="438912" cy="438912"/>
+          </a:xfrm>
+          <a:prstGeom prst="rect">
+            <a:avLst/>
+          </a:prstGeom>
+          <a:noFill/>
+        </p:spPr>
+        <p:txBody>
+          <a:bodyPr wrap="square" anchor="ctr"/>
+          <a:lstStyle/>
+          <a:p>
+            <a:pPr algn="ctr"/>
+            <a:r>
+              <a:rPr sz="1600" b="1" i="0">
+                <a:solidFill>
+                  <a:srgbClr val="FFFFFF"/>
+                </a:solidFill>
+                <a:latin typeface="Calibri"/>
+              </a:rPr>
+              <a:t>4</a:t>
+            </a:r>
+          </a:p>
+        </p:txBody>
+      </p:sp>
+      <p:sp>
+        <p:nvSpPr>
+          <p:cNvPr id="21" name="TextBox 20"/>
+          <p:cNvSpPr txBox="1"/>
+          <p:nvPr/>
+        </p:nvSpPr>
+        <p:spPr>
+          <a:xfrm>
+            <a:off x="1188720" y="5180076"/>
+            <a:ext cx="10271455" cy="886968"/>
+          </a:xfrm>
+          <a:prstGeom prst="rect">
+            <a:avLst/>
+          </a:prstGeom>
+          <a:noFill/>
+        </p:spPr>
+        <p:txBody>
+          <a:bodyPr wrap="square" anchor="ctr"/>
+          <a:lstStyle/>
+          <a:p>
+            <a:r>
+              <a:rPr sz="1500" b="1" i="0">
+                <a:solidFill>
+                  <a:srgbClr val="095292"/>
+                </a:solidFill>
+                <a:latin typeface="Calibri"/>
+              </a:rPr>
+              <a:t>Guarda el PNG para tu PI</a:t>
             </a:r>
           </a:p>
           <a:p>
             <a:pPr>
-              <a:spcAft>
-                <a:spcPts val="800"/>
-              </a:spcAft>
+              <a:spcBef>
+                <a:spcPts val="200"/>
+              </a:spcBef>
             </a:pPr>
             <a:r>
-              <a:rPr sz="1600" b="0" i="0">
+              <a:rPr sz="1300" b="0" i="0">
                 <a:solidFill>
                   <a:srgbClr val="333333"/>
                 </a:solidFill>
                 <a:latin typeface="Calibri"/>
               </a:rPr>
-              <a:t>–   </a:t>
-            </a:r>
-            <a:r>
-              <a:rPr sz="1600" b="1" i="0">
-                <a:solidFill>
-                  <a:srgbClr val="333333"/>
-                </a:solidFill>
-                <a:latin typeface="Calibri"/>
-              </a:rPr>
-              <a:t>2.</a:t>
-            </a:r>
-            <a:r>
-              <a:rPr sz="1600" b="0" i="0">
-                <a:solidFill>
-                  <a:srgbClr val="333333"/>
-                </a:solidFill>
-                <a:latin typeface="Calibri"/>
-              </a:rPr>
-              <a:t> Paso 2: etiquete en ese mismo diagrama el puerto de cada componente y marque las fronteras de confianza, es decir donde termina lo que usted controla; verifique que no aparezcan nombres de subredes ni de servicios de un proveedor concreto.</a:t>
-            </a:r>
-          </a:p>
-          <a:p>
-            <a:pPr>
-              <a:spcAft>
-                <a:spcPts val="800"/>
-              </a:spcAft>
-            </a:pPr>
-            <a:r>
-              <a:rPr sz="1600" b="0" i="0">
-                <a:solidFill>
-                  <a:srgbClr val="333333"/>
-                </a:solidFill>
-                <a:latin typeface="Calibri"/>
-              </a:rPr>
-              <a:t>–   </a:t>
-            </a:r>
-            <a:r>
-              <a:rPr sz="1600" b="1" i="0">
-                <a:solidFill>
-                  <a:srgbClr val="333333"/>
-                </a:solidFill>
-                <a:latin typeface="Calibri"/>
-              </a:rPr>
-              <a:t>3.</a:t>
-            </a:r>
-            <a:r>
-              <a:rPr sz="1600" b="0" i="0">
-                <a:solidFill>
-                  <a:srgbClr val="333333"/>
-                </a:solidFill>
-                <a:latin typeface="Calibri"/>
-              </a:rPr>
-              <a:t> Paso 3: justifique en la pregunta 5 el tipo de almacenamiento de cada componente diciendo que caracteristica del dato lo exige; si su dominio no necesita almacenamiento de objetos, declarelo y justifiquelo en vez de agregarlo.</a:t>
-            </a:r>
-          </a:p>
-          <a:p>
-            <a:pPr>
-              <a:spcAft>
-                <a:spcPts val="800"/>
-              </a:spcAft>
-            </a:pPr>
-            <a:r>
-              <a:rPr sz="1600" b="0" i="0">
-                <a:solidFill>
-                  <a:srgbClr val="333333"/>
-                </a:solidFill>
-                <a:latin typeface="Calibri"/>
-              </a:rPr>
-              <a:t>–   </a:t>
-            </a:r>
-            <a:r>
-              <a:rPr sz="1600" b="1" i="0">
-                <a:solidFill>
-                  <a:srgbClr val="333333"/>
-                </a:solidFill>
-                <a:latin typeface="Calibri"/>
-              </a:rPr>
-              <a:t>4.</a:t>
-            </a:r>
-            <a:r>
-              <a:rPr sz="1600" b="0" i="0">
-                <a:solidFill>
-                  <a:srgbClr val="333333"/>
-                </a:solidFill>
-                <a:latin typeface="Calibri"/>
-              </a:rPr>
-              <a:t> Paso 4: complete en la pregunta 6 la tabla de correspondencia entre el C4 Containers y el Despliegue, con una fila por componente y su zona, y liste los renombres que aplico; si no hubo ninguno, digalo explicitamente.</a:t>
-            </a:r>
-          </a:p>
-        </p:txBody>
-      </p:sp>
-      <p:sp>
-        <p:nvSpPr>
-          <p:cNvPr id="6" name="TextBox 5"/>
+              <a:t>Exporta tambien la imagen a la carpeta de tu Proyecto Integrador. Esa copia es para tu informe; no reemplaza la respuesta en la plataforma.</a:t>
+            </a:r>
+          </a:p>
+        </p:txBody>
+      </p:sp>
+      <p:sp>
+        <p:nvSpPr>
+          <p:cNvPr id="22" name="TextBox 21"/>
           <p:cNvSpPr txBox="1"/>
           <p:nvPr/>
         </p:nvSpPr>
@@ -4806,109 +5507,21 @@
                 </a:solidFill>
                 <a:latin typeface="Calibri"/>
               </a:rPr>
-              <a:t>Para continuar (PI)</a:t>
-            </a:r>
-          </a:p>
-        </p:txBody>
-      </p:sp>
-      <p:sp>
-        <p:nvSpPr>
-          <p:cNvPr id="5" name="Rounded Rectangle 4"/>
-          <p:cNvSpPr/>
-          <p:nvPr/>
-        </p:nvSpPr>
-        <p:spPr>
-          <a:xfrm>
-            <a:off x="457200" y="1261872"/>
-            <a:ext cx="11277295" cy="1051560"/>
-          </a:xfrm>
-          <a:prstGeom prst="roundRect">
-            <a:avLst>
-              <a:gd name="adj" fmla="val 12000"/>
-            </a:avLst>
-          </a:prstGeom>
-          <a:solidFill>
-            <a:srgbClr val="E8F4FA"/>
-          </a:solidFill>
-          <a:ln>
-            <a:noFill/>
-          </a:ln>
-        </p:spPr>
-        <p:style>
-          <a:lnRef idx="1">
-            <a:schemeClr val="accent1"/>
-          </a:lnRef>
-          <a:fillRef idx="3">
-            <a:schemeClr val="accent1"/>
-          </a:fillRef>
-          <a:effectRef idx="2">
-            <a:schemeClr val="accent1"/>
-          </a:effectRef>
-          <a:fontRef idx="minor">
-            <a:schemeClr val="lt1"/>
-          </a:fontRef>
-        </p:style>
-        <p:txBody>
-          <a:bodyPr rtlCol="0" anchor="ctr"/>
-          <a:lstStyle/>
-          <a:p>
-            <a:pPr algn="ctr"/>
-          </a:p>
-        </p:txBody>
-      </p:sp>
-      <p:sp>
-        <p:nvSpPr>
-          <p:cNvPr id="6" name="Rectangle 5"/>
-          <p:cNvSpPr/>
-          <p:nvPr/>
-        </p:nvSpPr>
-        <p:spPr>
-          <a:xfrm>
-            <a:off x="457200" y="1261872"/>
-            <a:ext cx="128016" cy="1051560"/>
-          </a:xfrm>
-          <a:prstGeom prst="rect">
-            <a:avLst/>
-          </a:prstGeom>
-          <a:solidFill>
-            <a:srgbClr val="269CCB"/>
-          </a:solidFill>
-          <a:ln>
-            <a:noFill/>
-          </a:ln>
-        </p:spPr>
-        <p:style>
-          <a:lnRef idx="1">
-            <a:schemeClr val="accent1"/>
-          </a:lnRef>
-          <a:fillRef idx="3">
-            <a:schemeClr val="accent1"/>
-          </a:fillRef>
-          <a:effectRef idx="2">
-            <a:schemeClr val="accent1"/>
-          </a:effectRef>
-          <a:fontRef idx="minor">
-            <a:schemeClr val="lt1"/>
-          </a:fontRef>
-        </p:style>
-        <p:txBody>
-          <a:bodyPr rtlCol="0" anchor="ctr"/>
-          <a:lstStyle/>
-          <a:p>
-            <a:pPr algn="ctr"/>
-          </a:p>
-        </p:txBody>
-      </p:sp>
-      <p:sp>
-        <p:nvSpPr>
-          <p:cNvPr id="7" name="TextBox 6"/>
+              <a:t>Taller PI (paso a paso)</a:t>
+            </a:r>
+          </a:p>
+        </p:txBody>
+      </p:sp>
+      <p:sp>
+        <p:nvSpPr>
+          <p:cNvPr id="5" name="TextBox 4"/>
           <p:cNvSpPr txBox="1"/>
           <p:nvPr/>
         </p:nvSpPr>
         <p:spPr>
           <a:xfrm>
-            <a:off x="777240" y="1399031"/>
-            <a:ext cx="10774375" cy="822959"/>
+            <a:off x="457200" y="1170432"/>
+            <a:ext cx="11277295" cy="5230368"/>
           </a:xfrm>
           <a:prstGeom prst="rect">
             <a:avLst/>
@@ -4921,313 +5534,137 @@
           </a:bodyPr>
           <a:lstStyle/>
           <a:p>
-            <a:r>
-              <a:rPr sz="1200" b="1" i="0">
-                <a:solidFill>
-                  <a:srgbClr val="269CCB"/>
-                </a:solidFill>
-                <a:latin typeface="Calibri"/>
-              </a:rPr>
-              <a:t>Info</a:t>
-            </a:r>
-          </a:p>
-          <a:p>
             <a:pPr>
-              <a:spcBef>
-                <a:spcPts val="400"/>
-              </a:spcBef>
+              <a:spcAft>
+                <a:spcPts val="800"/>
+              </a:spcAft>
             </a:pPr>
             <a:r>
-              <a:rPr sz="1400" b="0" i="0">
+              <a:rPr sz="1600" b="1" i="0">
                 <a:solidFill>
                   <a:srgbClr val="333333"/>
                 </a:solidFill>
                 <a:latin typeface="Calibri"/>
               </a:rPr>
-              <a:t>Entregable: Diagrama Deployment (draw.io) + elección de storage (objeto/bloque/relacional conceptual)</a:t>
-            </a:r>
-          </a:p>
-        </p:txBody>
-      </p:sp>
-      <p:sp>
-        <p:nvSpPr>
-          <p:cNvPr id="8" name="Rounded Rectangle 7"/>
-          <p:cNvSpPr/>
-          <p:nvPr/>
-        </p:nvSpPr>
-        <p:spPr>
-          <a:xfrm>
-            <a:off x="457200" y="2478024"/>
-            <a:ext cx="11277295" cy="1051560"/>
-          </a:xfrm>
-          <a:prstGeom prst="roundRect">
-            <a:avLst>
-              <a:gd name="adj" fmla="val 12000"/>
-            </a:avLst>
-          </a:prstGeom>
-          <a:solidFill>
-            <a:srgbClr val="FFF8E1"/>
-          </a:solidFill>
-          <a:ln>
-            <a:noFill/>
-          </a:ln>
-        </p:spPr>
-        <p:style>
-          <a:lnRef idx="1">
-            <a:schemeClr val="accent1"/>
-          </a:lnRef>
-          <a:fillRef idx="3">
-            <a:schemeClr val="accent1"/>
-          </a:fillRef>
-          <a:effectRef idx="2">
-            <a:schemeClr val="accent1"/>
-          </a:effectRef>
-          <a:fontRef idx="minor">
-            <a:schemeClr val="lt1"/>
-          </a:fontRef>
-        </p:style>
-        <p:txBody>
-          <a:bodyPr rtlCol="0" anchor="ctr"/>
-          <a:lstStyle/>
-          <a:p>
-            <a:pPr algn="ctr"/>
-          </a:p>
-        </p:txBody>
-      </p:sp>
-      <p:sp>
-        <p:nvSpPr>
-          <p:cNvPr id="9" name="Rectangle 8"/>
-          <p:cNvSpPr/>
-          <p:nvPr/>
-        </p:nvSpPr>
-        <p:spPr>
-          <a:xfrm>
-            <a:off x="457200" y="2478024"/>
-            <a:ext cx="128016" cy="1051560"/>
-          </a:xfrm>
-          <a:prstGeom prst="rect">
-            <a:avLst/>
-          </a:prstGeom>
-          <a:solidFill>
-            <a:srgbClr val="FFD000"/>
-          </a:solidFill>
-          <a:ln>
-            <a:noFill/>
-          </a:ln>
-        </p:spPr>
-        <p:style>
-          <a:lnRef idx="1">
-            <a:schemeClr val="accent1"/>
-          </a:lnRef>
-          <a:fillRef idx="3">
-            <a:schemeClr val="accent1"/>
-          </a:fillRef>
-          <a:effectRef idx="2">
-            <a:schemeClr val="accent1"/>
-          </a:effectRef>
-          <a:fontRef idx="minor">
-            <a:schemeClr val="lt1"/>
-          </a:fontRef>
-        </p:style>
-        <p:txBody>
-          <a:bodyPr rtlCol="0" anchor="ctr"/>
-          <a:lstStyle/>
-          <a:p>
-            <a:pPr algn="ctr"/>
-          </a:p>
-        </p:txBody>
-      </p:sp>
-      <p:sp>
-        <p:nvSpPr>
-          <p:cNvPr id="10" name="TextBox 9"/>
-          <p:cNvSpPr txBox="1"/>
-          <p:nvPr/>
-        </p:nvSpPr>
-        <p:spPr>
-          <a:xfrm>
-            <a:off x="777240" y="2615184"/>
-            <a:ext cx="10774375" cy="822959"/>
-          </a:xfrm>
-          <a:prstGeom prst="rect">
-            <a:avLst/>
-          </a:prstGeom>
-          <a:noFill/>
-        </p:spPr>
-        <p:txBody>
-          <a:bodyPr wrap="square">
-            <a:spAutoFit/>
-          </a:bodyPr>
-          <a:lstStyle/>
-          <a:p>
-            <a:r>
-              <a:rPr sz="1200" b="1" i="0">
-                <a:solidFill>
-                  <a:srgbClr val="FFD000"/>
-                </a:solidFill>
-                <a:latin typeface="Calibri"/>
-              </a:rPr>
-              <a:t>Aclaración</a:t>
+              <a:t>1.</a:t>
+            </a:r>
+            <a:r>
+              <a:rPr sz="1600" b="0" i="0">
+                <a:solidFill>
+                  <a:srgbClr val="333333"/>
+                </a:solidFill>
+                <a:latin typeface="Calibri"/>
+              </a:rPr>
+              <a:t> Paso 1: dibuje primero el boceto del despliegue en Excalidraw o draw.io con las tres zonas (publica, privada y de datos), y despues pidale a una IA que lo traduzca a Mermaid; peguelo en la pregunta 4 y verifique en el diagrama ya renderizado que la base de datos NO quede en la zona publica.</a:t>
             </a:r>
           </a:p>
           <a:p>
             <a:pPr>
-              <a:spcBef>
-                <a:spcPts val="400"/>
-              </a:spcBef>
+              <a:spcAft>
+                <a:spcPts val="800"/>
+              </a:spcAft>
             </a:pPr>
             <a:r>
-              <a:rPr sz="1400" b="0" i="0">
+              <a:rPr sz="1600" b="0" i="0">
                 <a:solidFill>
                   <a:srgbClr val="333333"/>
                 </a:solidFill>
                 <a:latin typeface="Calibri"/>
               </a:rPr>
-              <a:t>Subir evidencias al paquete CloudLite (Drive/repo) y a ExamLab (https://uniaj.examlab.workers.dev/) domingo 23:59.</a:t>
-            </a:r>
-          </a:p>
-        </p:txBody>
-      </p:sp>
-      <p:sp>
-        <p:nvSpPr>
-          <p:cNvPr id="11" name="Rounded Rectangle 10"/>
-          <p:cNvSpPr/>
-          <p:nvPr/>
-        </p:nvSpPr>
-        <p:spPr>
-          <a:xfrm>
-            <a:off x="457200" y="3694176"/>
-            <a:ext cx="11277295" cy="1051560"/>
-          </a:xfrm>
-          <a:prstGeom prst="roundRect">
-            <a:avLst>
-              <a:gd name="adj" fmla="val 12000"/>
-            </a:avLst>
-          </a:prstGeom>
-          <a:solidFill>
-            <a:srgbClr val="FBE4E4"/>
-          </a:solidFill>
-          <a:ln>
-            <a:noFill/>
-          </a:ln>
-        </p:spPr>
-        <p:style>
-          <a:lnRef idx="1">
-            <a:schemeClr val="accent1"/>
-          </a:lnRef>
-          <a:fillRef idx="3">
-            <a:schemeClr val="accent1"/>
-          </a:fillRef>
-          <a:effectRef idx="2">
-            <a:schemeClr val="accent1"/>
-          </a:effectRef>
-          <a:fontRef idx="minor">
-            <a:schemeClr val="lt1"/>
-          </a:fontRef>
-        </p:style>
-        <p:txBody>
-          <a:bodyPr rtlCol="0" anchor="ctr"/>
-          <a:lstStyle/>
-          <a:p>
-            <a:pPr algn="ctr"/>
-          </a:p>
-        </p:txBody>
-      </p:sp>
-      <p:sp>
-        <p:nvSpPr>
-          <p:cNvPr id="12" name="Rectangle 11"/>
-          <p:cNvSpPr/>
-          <p:nvPr/>
-        </p:nvSpPr>
-        <p:spPr>
-          <a:xfrm>
-            <a:off x="457200" y="3694176"/>
-            <a:ext cx="128016" cy="1051560"/>
-          </a:xfrm>
-          <a:prstGeom prst="rect">
-            <a:avLst/>
-          </a:prstGeom>
-          <a:solidFill>
-            <a:srgbClr val="A02030"/>
-          </a:solidFill>
-          <a:ln>
-            <a:noFill/>
-          </a:ln>
-        </p:spPr>
-        <p:style>
-          <a:lnRef idx="1">
-            <a:schemeClr val="accent1"/>
-          </a:lnRef>
-          <a:fillRef idx="3">
-            <a:schemeClr val="accent1"/>
-          </a:fillRef>
-          <a:effectRef idx="2">
-            <a:schemeClr val="accent1"/>
-          </a:effectRef>
-          <a:fontRef idx="minor">
-            <a:schemeClr val="lt1"/>
-          </a:fontRef>
-        </p:style>
-        <p:txBody>
-          <a:bodyPr rtlCol="0" anchor="ctr"/>
-          <a:lstStyle/>
-          <a:p>
-            <a:pPr algn="ctr"/>
-          </a:p>
-        </p:txBody>
-      </p:sp>
-      <p:sp>
-        <p:nvSpPr>
-          <p:cNvPr id="13" name="TextBox 12"/>
-          <p:cNvSpPr txBox="1"/>
-          <p:nvPr/>
-        </p:nvSpPr>
-        <p:spPr>
-          <a:xfrm>
-            <a:off x="777240" y="3831336"/>
-            <a:ext cx="10774375" cy="822959"/>
-          </a:xfrm>
-          <a:prstGeom prst="rect">
-            <a:avLst/>
-          </a:prstGeom>
-          <a:noFill/>
-        </p:spPr>
-        <p:txBody>
-          <a:bodyPr wrap="square">
-            <a:spAutoFit/>
-          </a:bodyPr>
-          <a:lstStyle/>
-          <a:p>
-            <a:r>
-              <a:rPr sz="1200" b="1" i="0">
-                <a:solidFill>
-                  <a:srgbClr val="A02030"/>
-                </a:solidFill>
-                <a:latin typeface="Calibri"/>
-              </a:rPr>
-              <a:t>Atención</a:t>
+              <a:t>–   </a:t>
+            </a:r>
+            <a:r>
+              <a:rPr sz="1600" b="1" i="0">
+                <a:solidFill>
+                  <a:srgbClr val="333333"/>
+                </a:solidFill>
+                <a:latin typeface="Calibri"/>
+              </a:rPr>
+              <a:t>2.</a:t>
+            </a:r>
+            <a:r>
+              <a:rPr sz="1600" b="0" i="0">
+                <a:solidFill>
+                  <a:srgbClr val="333333"/>
+                </a:solidFill>
+                <a:latin typeface="Calibri"/>
+              </a:rPr>
+              <a:t> Paso 2: etiquete en ese mismo diagrama el puerto de cada componente y marque las fronteras de confianza, es decir donde termina lo que usted controla; verifique que no aparezcan nombres de subredes ni de servicios de un proveedor concreto.</a:t>
             </a:r>
           </a:p>
           <a:p>
             <a:pPr>
-              <a:spcBef>
-                <a:spcPts val="400"/>
-              </a:spcBef>
+              <a:spcAft>
+                <a:spcPts val="800"/>
+              </a:spcAft>
             </a:pPr>
             <a:r>
-              <a:rPr sz="1400" b="0" i="0">
+              <a:rPr sz="1600" b="0" i="0">
                 <a:solidFill>
                   <a:srgbClr val="333333"/>
                 </a:solidFill>
                 <a:latin typeface="Calibri"/>
               </a:rPr>
-              <a:t>Sin cloud de pago ni instalaciones obligatorias de hipervisores/Docker Desktop.</a:t>
-            </a:r>
-          </a:p>
-        </p:txBody>
-      </p:sp>
-      <p:sp>
-        <p:nvSpPr>
-          <p:cNvPr id="14" name="TextBox 13"/>
+              <a:t>–   </a:t>
+            </a:r>
+            <a:r>
+              <a:rPr sz="1600" b="1" i="0">
+                <a:solidFill>
+                  <a:srgbClr val="333333"/>
+                </a:solidFill>
+                <a:latin typeface="Calibri"/>
+              </a:rPr>
+              <a:t>3.</a:t>
+            </a:r>
+            <a:r>
+              <a:rPr sz="1600" b="0" i="0">
+                <a:solidFill>
+                  <a:srgbClr val="333333"/>
+                </a:solidFill>
+                <a:latin typeface="Calibri"/>
+              </a:rPr>
+              <a:t> Paso 3: justifique en la pregunta 5 el tipo de almacenamiento de cada componente diciendo que caracteristica del dato lo exige; si su dominio no necesita almacenamiento de objetos, declarelo y justifiquelo en vez de agregarlo.</a:t>
+            </a:r>
+          </a:p>
+          <a:p>
+            <a:pPr>
+              <a:spcAft>
+                <a:spcPts val="800"/>
+              </a:spcAft>
+            </a:pPr>
+            <a:r>
+              <a:rPr sz="1600" b="0" i="0">
+                <a:solidFill>
+                  <a:srgbClr val="333333"/>
+                </a:solidFill>
+                <a:latin typeface="Calibri"/>
+              </a:rPr>
+              <a:t>–   </a:t>
+            </a:r>
+            <a:r>
+              <a:rPr sz="1600" b="1" i="0">
+                <a:solidFill>
+                  <a:srgbClr val="333333"/>
+                </a:solidFill>
+                <a:latin typeface="Calibri"/>
+              </a:rPr>
+              <a:t>4.</a:t>
+            </a:r>
+            <a:r>
+              <a:rPr sz="1600" b="0" i="0">
+                <a:solidFill>
+                  <a:srgbClr val="333333"/>
+                </a:solidFill>
+                <a:latin typeface="Calibri"/>
+              </a:rPr>
+              <a:t> Paso 4: complete en la pregunta 6 la tabla de correspondencia entre el C4 Containers y el Despliegue, con una fila por componente y su zona, y liste los renombres que aplico; si no hubo ninguno, digalo explicitamente.</a:t>
+            </a:r>
+          </a:p>
+        </p:txBody>
+      </p:sp>
+      <p:sp>
+        <p:nvSpPr>
+          <p:cNvPr id="6" name="TextBox 5"/>
           <p:cNvSpPr txBox="1"/>
           <p:nvPr/>
         </p:nvSpPr>
@@ -5295,6 +5732,601 @@
         <p:spPr>
           <a:xfrm>
             <a:off x="0" y="0"/>
+            <a:ext cx="12191695" cy="960120"/>
+          </a:xfrm>
+          <a:prstGeom prst="rect">
+            <a:avLst/>
+          </a:prstGeom>
+          <a:solidFill>
+            <a:srgbClr val="095292"/>
+          </a:solidFill>
+          <a:ln>
+            <a:noFill/>
+          </a:ln>
+        </p:spPr>
+        <p:style>
+          <a:lnRef idx="1">
+            <a:schemeClr val="accent1"/>
+          </a:lnRef>
+          <a:fillRef idx="3">
+            <a:schemeClr val="accent1"/>
+          </a:fillRef>
+          <a:effectRef idx="2">
+            <a:schemeClr val="accent1"/>
+          </a:effectRef>
+          <a:fontRef idx="minor">
+            <a:schemeClr val="lt1"/>
+          </a:fontRef>
+        </p:style>
+        <p:txBody>
+          <a:bodyPr rtlCol="0" anchor="ctr"/>
+          <a:lstStyle/>
+          <a:p>
+            <a:pPr algn="ctr"/>
+          </a:p>
+        </p:txBody>
+      </p:sp>
+      <p:sp>
+        <p:nvSpPr>
+          <p:cNvPr id="3" name="Rectangle 2"/>
+          <p:cNvSpPr/>
+          <p:nvPr/>
+        </p:nvSpPr>
+        <p:spPr>
+          <a:xfrm>
+            <a:off x="0" y="960120"/>
+            <a:ext cx="12191695" cy="41148"/>
+          </a:xfrm>
+          <a:prstGeom prst="rect">
+            <a:avLst/>
+          </a:prstGeom>
+          <a:solidFill>
+            <a:srgbClr val="FFD000"/>
+          </a:solidFill>
+          <a:ln>
+            <a:noFill/>
+          </a:ln>
+        </p:spPr>
+        <p:style>
+          <a:lnRef idx="1">
+            <a:schemeClr val="accent1"/>
+          </a:lnRef>
+          <a:fillRef idx="3">
+            <a:schemeClr val="accent1"/>
+          </a:fillRef>
+          <a:effectRef idx="2">
+            <a:schemeClr val="accent1"/>
+          </a:effectRef>
+          <a:fontRef idx="minor">
+            <a:schemeClr val="lt1"/>
+          </a:fontRef>
+        </p:style>
+        <p:txBody>
+          <a:bodyPr rtlCol="0" anchor="ctr"/>
+          <a:lstStyle/>
+          <a:p>
+            <a:pPr algn="ctr"/>
+          </a:p>
+        </p:txBody>
+      </p:sp>
+      <p:sp>
+        <p:nvSpPr>
+          <p:cNvPr id="4" name="TextBox 3"/>
+          <p:cNvSpPr txBox="1"/>
+          <p:nvPr/>
+        </p:nvSpPr>
+        <p:spPr>
+          <a:xfrm>
+            <a:off x="457200" y="164592"/>
+            <a:ext cx="11277295" cy="502920"/>
+          </a:xfrm>
+          <a:prstGeom prst="rect">
+            <a:avLst/>
+          </a:prstGeom>
+          <a:noFill/>
+        </p:spPr>
+        <p:txBody>
+          <a:bodyPr wrap="square">
+            <a:spAutoFit/>
+          </a:bodyPr>
+          <a:lstStyle/>
+          <a:p>
+            <a:r>
+              <a:rPr sz="2600" b="1" i="0">
+                <a:solidFill>
+                  <a:srgbClr val="FFFFFF"/>
+                </a:solidFill>
+                <a:latin typeface="Calibri"/>
+              </a:rPr>
+              <a:t>Para continuar (PI)</a:t>
+            </a:r>
+          </a:p>
+        </p:txBody>
+      </p:sp>
+      <p:sp>
+        <p:nvSpPr>
+          <p:cNvPr id="5" name="Rounded Rectangle 4"/>
+          <p:cNvSpPr/>
+          <p:nvPr/>
+        </p:nvSpPr>
+        <p:spPr>
+          <a:xfrm>
+            <a:off x="457200" y="1261872"/>
+            <a:ext cx="11277295" cy="1051560"/>
+          </a:xfrm>
+          <a:prstGeom prst="roundRect">
+            <a:avLst>
+              <a:gd name="adj" fmla="val 12000"/>
+            </a:avLst>
+          </a:prstGeom>
+          <a:solidFill>
+            <a:srgbClr val="E8F4FA"/>
+          </a:solidFill>
+          <a:ln>
+            <a:noFill/>
+          </a:ln>
+        </p:spPr>
+        <p:style>
+          <a:lnRef idx="1">
+            <a:schemeClr val="accent1"/>
+          </a:lnRef>
+          <a:fillRef idx="3">
+            <a:schemeClr val="accent1"/>
+          </a:fillRef>
+          <a:effectRef idx="2">
+            <a:schemeClr val="accent1"/>
+          </a:effectRef>
+          <a:fontRef idx="minor">
+            <a:schemeClr val="lt1"/>
+          </a:fontRef>
+        </p:style>
+        <p:txBody>
+          <a:bodyPr rtlCol="0" anchor="ctr"/>
+          <a:lstStyle/>
+          <a:p>
+            <a:pPr algn="ctr"/>
+          </a:p>
+        </p:txBody>
+      </p:sp>
+      <p:sp>
+        <p:nvSpPr>
+          <p:cNvPr id="6" name="Rectangle 5"/>
+          <p:cNvSpPr/>
+          <p:nvPr/>
+        </p:nvSpPr>
+        <p:spPr>
+          <a:xfrm>
+            <a:off x="457200" y="1261872"/>
+            <a:ext cx="128016" cy="1051560"/>
+          </a:xfrm>
+          <a:prstGeom prst="rect">
+            <a:avLst/>
+          </a:prstGeom>
+          <a:solidFill>
+            <a:srgbClr val="269CCB"/>
+          </a:solidFill>
+          <a:ln>
+            <a:noFill/>
+          </a:ln>
+        </p:spPr>
+        <p:style>
+          <a:lnRef idx="1">
+            <a:schemeClr val="accent1"/>
+          </a:lnRef>
+          <a:fillRef idx="3">
+            <a:schemeClr val="accent1"/>
+          </a:fillRef>
+          <a:effectRef idx="2">
+            <a:schemeClr val="accent1"/>
+          </a:effectRef>
+          <a:fontRef idx="minor">
+            <a:schemeClr val="lt1"/>
+          </a:fontRef>
+        </p:style>
+        <p:txBody>
+          <a:bodyPr rtlCol="0" anchor="ctr"/>
+          <a:lstStyle/>
+          <a:p>
+            <a:pPr algn="ctr"/>
+          </a:p>
+        </p:txBody>
+      </p:sp>
+      <p:sp>
+        <p:nvSpPr>
+          <p:cNvPr id="7" name="TextBox 6"/>
+          <p:cNvSpPr txBox="1"/>
+          <p:nvPr/>
+        </p:nvSpPr>
+        <p:spPr>
+          <a:xfrm>
+            <a:off x="777240" y="1399031"/>
+            <a:ext cx="10774375" cy="822959"/>
+          </a:xfrm>
+          <a:prstGeom prst="rect">
+            <a:avLst/>
+          </a:prstGeom>
+          <a:noFill/>
+        </p:spPr>
+        <p:txBody>
+          <a:bodyPr wrap="square">
+            <a:spAutoFit/>
+          </a:bodyPr>
+          <a:lstStyle/>
+          <a:p>
+            <a:r>
+              <a:rPr sz="1200" b="1" i="0">
+                <a:solidFill>
+                  <a:srgbClr val="269CCB"/>
+                </a:solidFill>
+                <a:latin typeface="Calibri"/>
+              </a:rPr>
+              <a:t>Info</a:t>
+            </a:r>
+          </a:p>
+          <a:p>
+            <a:pPr>
+              <a:spcBef>
+                <a:spcPts val="400"/>
+              </a:spcBef>
+            </a:pPr>
+            <a:r>
+              <a:rPr sz="1400" b="0" i="0">
+                <a:solidFill>
+                  <a:srgbClr val="333333"/>
+                </a:solidFill>
+                <a:latin typeface="Calibri"/>
+              </a:rPr>
+              <a:t>Entregable: Diagrama Deployment en Mermaid dentro de ExamLab (3 zonas + puertos) + tipo de almacenamiento por componente</a:t>
+            </a:r>
+          </a:p>
+        </p:txBody>
+      </p:sp>
+      <p:sp>
+        <p:nvSpPr>
+          <p:cNvPr id="8" name="Rounded Rectangle 7"/>
+          <p:cNvSpPr/>
+          <p:nvPr/>
+        </p:nvSpPr>
+        <p:spPr>
+          <a:xfrm>
+            <a:off x="457200" y="2478024"/>
+            <a:ext cx="11277295" cy="1051560"/>
+          </a:xfrm>
+          <a:prstGeom prst="roundRect">
+            <a:avLst>
+              <a:gd name="adj" fmla="val 12000"/>
+            </a:avLst>
+          </a:prstGeom>
+          <a:solidFill>
+            <a:srgbClr val="FFF8E1"/>
+          </a:solidFill>
+          <a:ln>
+            <a:noFill/>
+          </a:ln>
+        </p:spPr>
+        <p:style>
+          <a:lnRef idx="1">
+            <a:schemeClr val="accent1"/>
+          </a:lnRef>
+          <a:fillRef idx="3">
+            <a:schemeClr val="accent1"/>
+          </a:fillRef>
+          <a:effectRef idx="2">
+            <a:schemeClr val="accent1"/>
+          </a:effectRef>
+          <a:fontRef idx="minor">
+            <a:schemeClr val="lt1"/>
+          </a:fontRef>
+        </p:style>
+        <p:txBody>
+          <a:bodyPr rtlCol="0" anchor="ctr"/>
+          <a:lstStyle/>
+          <a:p>
+            <a:pPr algn="ctr"/>
+          </a:p>
+        </p:txBody>
+      </p:sp>
+      <p:sp>
+        <p:nvSpPr>
+          <p:cNvPr id="9" name="Rectangle 8"/>
+          <p:cNvSpPr/>
+          <p:nvPr/>
+        </p:nvSpPr>
+        <p:spPr>
+          <a:xfrm>
+            <a:off x="457200" y="2478024"/>
+            <a:ext cx="128016" cy="1051560"/>
+          </a:xfrm>
+          <a:prstGeom prst="rect">
+            <a:avLst/>
+          </a:prstGeom>
+          <a:solidFill>
+            <a:srgbClr val="FFD000"/>
+          </a:solidFill>
+          <a:ln>
+            <a:noFill/>
+          </a:ln>
+        </p:spPr>
+        <p:style>
+          <a:lnRef idx="1">
+            <a:schemeClr val="accent1"/>
+          </a:lnRef>
+          <a:fillRef idx="3">
+            <a:schemeClr val="accent1"/>
+          </a:fillRef>
+          <a:effectRef idx="2">
+            <a:schemeClr val="accent1"/>
+          </a:effectRef>
+          <a:fontRef idx="minor">
+            <a:schemeClr val="lt1"/>
+          </a:fontRef>
+        </p:style>
+        <p:txBody>
+          <a:bodyPr rtlCol="0" anchor="ctr"/>
+          <a:lstStyle/>
+          <a:p>
+            <a:pPr algn="ctr"/>
+          </a:p>
+        </p:txBody>
+      </p:sp>
+      <p:sp>
+        <p:nvSpPr>
+          <p:cNvPr id="10" name="TextBox 9"/>
+          <p:cNvSpPr txBox="1"/>
+          <p:nvPr/>
+        </p:nvSpPr>
+        <p:spPr>
+          <a:xfrm>
+            <a:off x="777240" y="2615184"/>
+            <a:ext cx="10774375" cy="822959"/>
+          </a:xfrm>
+          <a:prstGeom prst="rect">
+            <a:avLst/>
+          </a:prstGeom>
+          <a:noFill/>
+        </p:spPr>
+        <p:txBody>
+          <a:bodyPr wrap="square">
+            <a:spAutoFit/>
+          </a:bodyPr>
+          <a:lstStyle/>
+          <a:p>
+            <a:r>
+              <a:rPr sz="1200" b="1" i="0">
+                <a:solidFill>
+                  <a:srgbClr val="FFD000"/>
+                </a:solidFill>
+                <a:latin typeface="Calibri"/>
+              </a:rPr>
+              <a:t>Aclaración</a:t>
+            </a:r>
+          </a:p>
+          <a:p>
+            <a:pPr>
+              <a:spcBef>
+                <a:spcPts val="400"/>
+              </a:spcBef>
+            </a:pPr>
+            <a:r>
+              <a:rPr sz="1400" b="0" i="0">
+                <a:solidFill>
+                  <a:srgbClr val="333333"/>
+                </a:solidFill>
+                <a:latin typeface="Calibri"/>
+              </a:rPr>
+              <a:t>Subir evidencias al paquete CloudLite (Drive/repo) y a ExamLab (https://uniaj.examlab.workers.dev/) domingo 23:59.</a:t>
+            </a:r>
+          </a:p>
+        </p:txBody>
+      </p:sp>
+      <p:sp>
+        <p:nvSpPr>
+          <p:cNvPr id="11" name="Rounded Rectangle 10"/>
+          <p:cNvSpPr/>
+          <p:nvPr/>
+        </p:nvSpPr>
+        <p:spPr>
+          <a:xfrm>
+            <a:off x="457200" y="3694176"/>
+            <a:ext cx="11277295" cy="1051560"/>
+          </a:xfrm>
+          <a:prstGeom prst="roundRect">
+            <a:avLst>
+              <a:gd name="adj" fmla="val 12000"/>
+            </a:avLst>
+          </a:prstGeom>
+          <a:solidFill>
+            <a:srgbClr val="FBE4E4"/>
+          </a:solidFill>
+          <a:ln>
+            <a:noFill/>
+          </a:ln>
+        </p:spPr>
+        <p:style>
+          <a:lnRef idx="1">
+            <a:schemeClr val="accent1"/>
+          </a:lnRef>
+          <a:fillRef idx="3">
+            <a:schemeClr val="accent1"/>
+          </a:fillRef>
+          <a:effectRef idx="2">
+            <a:schemeClr val="accent1"/>
+          </a:effectRef>
+          <a:fontRef idx="minor">
+            <a:schemeClr val="lt1"/>
+          </a:fontRef>
+        </p:style>
+        <p:txBody>
+          <a:bodyPr rtlCol="0" anchor="ctr"/>
+          <a:lstStyle/>
+          <a:p>
+            <a:pPr algn="ctr"/>
+          </a:p>
+        </p:txBody>
+      </p:sp>
+      <p:sp>
+        <p:nvSpPr>
+          <p:cNvPr id="12" name="Rectangle 11"/>
+          <p:cNvSpPr/>
+          <p:nvPr/>
+        </p:nvSpPr>
+        <p:spPr>
+          <a:xfrm>
+            <a:off x="457200" y="3694176"/>
+            <a:ext cx="128016" cy="1051560"/>
+          </a:xfrm>
+          <a:prstGeom prst="rect">
+            <a:avLst/>
+          </a:prstGeom>
+          <a:solidFill>
+            <a:srgbClr val="A02030"/>
+          </a:solidFill>
+          <a:ln>
+            <a:noFill/>
+          </a:ln>
+        </p:spPr>
+        <p:style>
+          <a:lnRef idx="1">
+            <a:schemeClr val="accent1"/>
+          </a:lnRef>
+          <a:fillRef idx="3">
+            <a:schemeClr val="accent1"/>
+          </a:fillRef>
+          <a:effectRef idx="2">
+            <a:schemeClr val="accent1"/>
+          </a:effectRef>
+          <a:fontRef idx="minor">
+            <a:schemeClr val="lt1"/>
+          </a:fontRef>
+        </p:style>
+        <p:txBody>
+          <a:bodyPr rtlCol="0" anchor="ctr"/>
+          <a:lstStyle/>
+          <a:p>
+            <a:pPr algn="ctr"/>
+          </a:p>
+        </p:txBody>
+      </p:sp>
+      <p:sp>
+        <p:nvSpPr>
+          <p:cNvPr id="13" name="TextBox 12"/>
+          <p:cNvSpPr txBox="1"/>
+          <p:nvPr/>
+        </p:nvSpPr>
+        <p:spPr>
+          <a:xfrm>
+            <a:off x="777240" y="3831336"/>
+            <a:ext cx="10774375" cy="822959"/>
+          </a:xfrm>
+          <a:prstGeom prst="rect">
+            <a:avLst/>
+          </a:prstGeom>
+          <a:noFill/>
+        </p:spPr>
+        <p:txBody>
+          <a:bodyPr wrap="square">
+            <a:spAutoFit/>
+          </a:bodyPr>
+          <a:lstStyle/>
+          <a:p>
+            <a:r>
+              <a:rPr sz="1200" b="1" i="0">
+                <a:solidFill>
+                  <a:srgbClr val="A02030"/>
+                </a:solidFill>
+                <a:latin typeface="Calibri"/>
+              </a:rPr>
+              <a:t>Atención</a:t>
+            </a:r>
+          </a:p>
+          <a:p>
+            <a:pPr>
+              <a:spcBef>
+                <a:spcPts val="400"/>
+              </a:spcBef>
+            </a:pPr>
+            <a:r>
+              <a:rPr sz="1400" b="0" i="0">
+                <a:solidFill>
+                  <a:srgbClr val="333333"/>
+                </a:solidFill>
+                <a:latin typeface="Calibri"/>
+              </a:rPr>
+              <a:t>Sin cloud de pago ni instalaciones obligatorias de hipervisores/Docker Desktop.</a:t>
+            </a:r>
+          </a:p>
+        </p:txBody>
+      </p:sp>
+      <p:sp>
+        <p:nvSpPr>
+          <p:cNvPr id="14" name="TextBox 13"/>
+          <p:cNvSpPr txBox="1"/>
+          <p:nvPr/>
+        </p:nvSpPr>
+        <p:spPr>
+          <a:xfrm>
+            <a:off x="11185855" y="6473952"/>
+            <a:ext cx="640080" cy="274320"/>
+          </a:xfrm>
+          <a:prstGeom prst="rect">
+            <a:avLst/>
+          </a:prstGeom>
+          <a:noFill/>
+        </p:spPr>
+        <p:txBody>
+          <a:bodyPr wrap="square">
+            <a:spAutoFit/>
+          </a:bodyPr>
+          <a:lstStyle/>
+          <a:p>
+            <a:pPr algn="r"/>
+            <a:r>
+              <a:rPr sz="1100" b="0" i="0">
+                <a:solidFill>
+                  <a:srgbClr val="666666"/>
+                </a:solidFill>
+                <a:latin typeface="Calibri"/>
+              </a:rPr>
+              <a:t>13</a:t>
+            </a:r>
+          </a:p>
+        </p:txBody>
+      </p:sp>
+    </p:spTree>
+  </p:cSld>
+  <p:clrMapOvr>
+    <a:masterClrMapping/>
+  </p:clrMapOvr>
+</p:sld>
+</file>
+
+<file path=ppt/slides/slide14.xml><?xml version="1.0" encoding="utf-8"?>
+<p:sld xmlns:a="http://schemas.openxmlformats.org/drawingml/2006/main" xmlns:p="http://schemas.openxmlformats.org/presentationml/2006/main" xmlns:r="http://schemas.openxmlformats.org/officeDocument/2006/relationships">
+  <p:cSld>
+    <p:bg>
+      <p:bgPr>
+        <a:solidFill>
+          <a:srgbClr val="FFFFFF"/>
+        </a:solidFill>
+        <a:effectLst/>
+      </p:bgPr>
+    </p:bg>
+    <p:spTree>
+      <p:nvGrpSpPr>
+        <p:cNvPr id="1" name=""/>
+        <p:cNvGrpSpPr/>
+        <p:nvPr/>
+      </p:nvGrpSpPr>
+      <p:grpSpPr/>
+      <p:sp>
+        <p:nvSpPr>
+          <p:cNvPr id="2" name="Rectangle 1"/>
+          <p:cNvSpPr/>
+          <p:nvPr/>
+        </p:nvSpPr>
+        <p:spPr>
+          <a:xfrm>
+            <a:off x="0" y="0"/>
             <a:ext cx="12191695" cy="164592"/>
           </a:xfrm>
           <a:prstGeom prst="rect">
@@ -5436,7 +6468,7 @@
                 </a:solidFill>
                 <a:latin typeface="Calibri"/>
               </a:rPr>
-              <a:t>Evidencia: Diagrama Deployment (draw.io) + elección de storage (objeto/bloque/relacional conceptual)</a:t>
+              <a:t>Evidencia: Diagrama Deployment en Mermaid dentro de ExamLab (3 zonas + puertos) + tipo de almacenamiento por componente</a:t>
             </a:r>
           </a:p>
           <a:p>
@@ -6307,7 +7339,7 @@
                 </a:solidFill>
                 <a:latin typeface="Calibri"/>
               </a:rPr>
-              <a:t> Diagrama Deployment (draw.io) + elección de storage (objeto/bloque/relacional conceptual)</a:t>
+              <a:t> Diagrama Deployment en Mermaid dentro de ExamLab (3 zonas + puertos) + tipo de almacenamiento por componente</a:t>
             </a:r>
           </a:p>
           <a:p>
@@ -6332,7 +7364,7 @@
                 </a:solidFill>
                 <a:latin typeface="Calibri"/>
               </a:rPr>
-              <a:t>draw.io</a:t>
+              <a:t>ExamLab (Mermaid) · boceto en draw.io o Excalidraw</a:t>
             </a:r>
           </a:p>
           <a:p>
@@ -6602,7 +7634,25 @@
                 </a:solidFill>
                 <a:latin typeface="Calibri"/>
               </a:rPr>
-              <a:t>–   Cliente → DNS/edge → balanceador conceptual → app → datos.</a:t>
+              <a:t>–   Cliente → edge/balanceador → app → datos: </a:t>
+            </a:r>
+            <a:r>
+              <a:rPr sz="1600" b="1" i="0">
+                <a:solidFill>
+                  <a:srgbClr val="333333"/>
+                </a:solidFill>
+                <a:latin typeface="Calibri"/>
+              </a:rPr>
+              <a:t>tres zonas</a:t>
+            </a:r>
+            <a:r>
+              <a:rPr sz="1600" b="0" i="0">
+                <a:solidFill>
+                  <a:srgbClr val="333333"/>
+                </a:solidFill>
+                <a:latin typeface="Calibri"/>
+              </a:rPr>
+              <a:t>, no dos.</a:t>
             </a:r>
           </a:p>
           <a:p>
@@ -6618,7 +7668,59 @@
                 </a:solidFill>
                 <a:latin typeface="Calibri"/>
               </a:rPr>
-              <a:t>–   Segregación: frontend público vs datos privados (aunque sea «caja» en draw.io).</a:t>
+              <a:t>–   </a:t>
+            </a:r>
+            <a:r>
+              <a:rPr sz="1600" b="1" i="0">
+                <a:solidFill>
+                  <a:srgbClr val="333333"/>
+                </a:solidFill>
+                <a:latin typeface="Calibri"/>
+              </a:rPr>
+              <a:t>La base de datos va en la zona de datos</a:t>
+            </a:r>
+            <a:r>
+              <a:rPr sz="1600" b="0" i="0">
+                <a:solidFill>
+                  <a:srgbClr val="333333"/>
+                </a:solidFill>
+                <a:latin typeface="Calibri"/>
+              </a:rPr>
+              <a:t>, nunca en la pública: es el error que la nota castiga.</a:t>
+            </a:r>
+          </a:p>
+          <a:p>
+            <a:pPr>
+              <a:spcAft>
+                <a:spcPts val="800"/>
+              </a:spcAft>
+            </a:pPr>
+            <a:r>
+              <a:rPr sz="1600" b="0" i="0">
+                <a:solidFill>
+                  <a:srgbClr val="333333"/>
+                </a:solidFill>
+                <a:latin typeface="Calibri"/>
+              </a:rPr>
+              <a:t>–   </a:t>
+            </a:r>
+            <a:r>
+              <a:rPr sz="1600" b="1" i="0">
+                <a:solidFill>
+                  <a:srgbClr val="333333"/>
+                </a:solidFill>
+                <a:latin typeface="Calibri"/>
+              </a:rPr>
+              <a:t>Frontera de confianza:</a:t>
+            </a:r>
+            <a:r>
+              <a:rPr sz="1600" b="0" i="0">
+                <a:solidFill>
+                  <a:srgbClr val="333333"/>
+                </a:solidFill>
+                <a:latin typeface="Calibri"/>
+              </a:rPr>
+              <a:t> la flecha donde termina lo que tú controlas (un SaaS externo).</a:t>
             </a:r>
           </a:p>
           <a:p>
@@ -6872,7 +7974,61 @@
                 </a:solidFill>
                 <a:latin typeface="Calibri"/>
               </a:rPr>
-              <a:t>–   Objeto (archivos/media) · Bloque (discos) · Archivo · DB gestionada conceptual.</a:t>
+              <a:t>–   Tres tipos y sus nombres exactos: </a:t>
+            </a:r>
+            <a:r>
+              <a:rPr sz="1600" b="1" i="0">
+                <a:solidFill>
+                  <a:srgbClr val="333333"/>
+                </a:solidFill>
+                <a:latin typeface="Calibri"/>
+              </a:rPr>
+              <a:t>Relacional</a:t>
+            </a:r>
+            <a:r>
+              <a:rPr sz="1600" b="0" i="0">
+                <a:solidFill>
+                  <a:srgbClr val="333333"/>
+                </a:solidFill>
+                <a:latin typeface="Calibri"/>
+              </a:rPr>
+              <a:t> · </a:t>
+            </a:r>
+            <a:r>
+              <a:rPr sz="1600" b="1" i="0">
+                <a:solidFill>
+                  <a:srgbClr val="333333"/>
+                </a:solidFill>
+                <a:latin typeface="Calibri"/>
+              </a:rPr>
+              <a:t>Bloque</a:t>
+            </a:r>
+            <a:r>
+              <a:rPr sz="1600" b="0" i="0">
+                <a:solidFill>
+                  <a:srgbClr val="333333"/>
+                </a:solidFill>
+                <a:latin typeface="Calibri"/>
+              </a:rPr>
+              <a:t> · </a:t>
+            </a:r>
+            <a:r>
+              <a:rPr sz="1600" b="1" i="0">
+                <a:solidFill>
+                  <a:srgbClr val="333333"/>
+                </a:solidFill>
+                <a:latin typeface="Calibri"/>
+              </a:rPr>
+              <a:t>Objeto</a:t>
+            </a:r>
+            <a:r>
+              <a:rPr sz="1600" b="0" i="0">
+                <a:solidFill>
+                  <a:srgbClr val="333333"/>
+                </a:solidFill>
+                <a:latin typeface="Calibri"/>
+              </a:rPr>
+              <a:t>.</a:t>
             </a:r>
           </a:p>
           <a:p>
@@ -6888,7 +8044,7 @@
                 </a:solidFill>
                 <a:latin typeface="Calibri"/>
               </a:rPr>
-              <a:t>–   CloudLite: justifiquen 1 primario + 1 secundario (ej. DB + object para adjuntos).</a:t>
+              <a:t>–   Relacional: el dato se cruza con otro · Bloque: lo monta un solo proceso · Objeto: se recupera entero.</a:t>
             </a:r>
           </a:p>
           <a:p>
@@ -6904,7 +8060,59 @@
                 </a:solidFill>
                 <a:latin typeface="Calibri"/>
               </a:rPr>
-              <a:t>–   Backup/retención: una frase de política cualitativa basta.</a:t>
+              <a:t>–   Se justifica por la </a:t>
+            </a:r>
+            <a:r>
+              <a:rPr sz="1600" b="1" i="0">
+                <a:solidFill>
+                  <a:srgbClr val="333333"/>
+                </a:solidFill>
+                <a:latin typeface="Calibri"/>
+              </a:rPr>
+              <a:t>característica del dato</a:t>
+            </a:r>
+            <a:r>
+              <a:rPr sz="1600" b="0" i="0">
+                <a:solidFill>
+                  <a:srgbClr val="333333"/>
+                </a:solidFill>
+                <a:latin typeface="Calibri"/>
+              </a:rPr>
+              <a:t>, no por preferencia.</a:t>
+            </a:r>
+          </a:p>
+          <a:p>
+            <a:pPr>
+              <a:spcAft>
+                <a:spcPts val="800"/>
+              </a:spcAft>
+            </a:pPr>
+            <a:r>
+              <a:rPr sz="1600" b="0" i="0">
+                <a:solidFill>
+                  <a:srgbClr val="333333"/>
+                </a:solidFill>
+                <a:latin typeface="Calibri"/>
+              </a:rPr>
+              <a:t>–   Si tu dominio no maneja archivos, </a:t>
+            </a:r>
+            <a:r>
+              <a:rPr sz="1600" b="1" i="0">
+                <a:solidFill>
+                  <a:srgbClr val="333333"/>
+                </a:solidFill>
+                <a:latin typeface="Calibri"/>
+              </a:rPr>
+              <a:t>declara que no necesitas objeto</a:t>
+            </a:r>
+            <a:r>
+              <a:rPr sz="1600" b="0" i="0">
+                <a:solidFill>
+                  <a:srgbClr val="333333"/>
+                </a:solidFill>
+                <a:latin typeface="Calibri"/>
+              </a:rPr>
+              <a:t>: eso suma.</a:t>
             </a:r>
           </a:p>
         </p:txBody>
@@ -7124,7 +8332,41 @@
                 </a:solidFill>
                 <a:latin typeface="Calibri"/>
               </a:rPr>
-              <a:t>–   Nodos, redes/zonas, puertos, almacenes, relación con CI (artefacto).</a:t>
+              <a:t>–   Tres zonas rotuladas · cada componente en su zona · puerto de cada uno.</a:t>
+            </a:r>
+          </a:p>
+          <a:p>
+            <a:pPr>
+              <a:spcAft>
+                <a:spcPts val="800"/>
+              </a:spcAft>
+            </a:pPr>
+            <a:r>
+              <a:rPr sz="1600" b="0" i="0">
+                <a:solidFill>
+                  <a:srgbClr val="333333"/>
+                </a:solidFill>
+                <a:latin typeface="Calibri"/>
+              </a:rPr>
+              <a:t>–   Fronteras de confianza marcadas · </a:t>
+            </a:r>
+            <a:r>
+              <a:rPr sz="1600" b="1" i="0">
+                <a:solidFill>
+                  <a:srgbClr val="333333"/>
+                </a:solidFill>
+                <a:latin typeface="Calibri"/>
+              </a:rPr>
+              <a:t>que renderice sin error</a:t>
+            </a:r>
+            <a:r>
+              <a:rPr sz="1600" b="0" i="0">
+                <a:solidFill>
+                  <a:srgbClr val="333333"/>
+                </a:solidFill>
+                <a:latin typeface="Calibri"/>
+              </a:rPr>
+              <a:t> en ExamLab.</a:t>
             </a:r>
           </a:p>
           <a:p>
@@ -7591,7 +8833,7 @@
                 </a:solidFill>
                 <a:latin typeface="Calibri"/>
               </a:rPr>
-              <a:t>solo puerto 443</a:t>
+              <a:t>solo el 8080</a:t>
             </a:r>
           </a:p>
         </p:txBody>
@@ -7662,7 +8904,7 @@
                 </a:solidFill>
                 <a:latin typeface="Calibri"/>
               </a:rPr>
-              <a:t>solo puerto BD</a:t>
+              <a:t>solo el 5432</a:t>
             </a:r>
           </a:p>
         </p:txBody>
@@ -7771,7 +9013,7 @@
         <p:spPr>
           <a:xfrm>
             <a:off x="0" y="0"/>
-            <a:ext cx="12191695" cy="1170432"/>
+            <a:ext cx="12191695" cy="960120"/>
           </a:xfrm>
           <a:prstGeom prst="rect">
             <a:avLst/>
@@ -7813,7 +9055,7 @@
         </p:nvSpPr>
         <p:spPr>
           <a:xfrm>
-            <a:off x="0" y="1170432"/>
+            <a:off x="0" y="960120"/>
             <a:ext cx="12191695" cy="41148"/>
           </a:xfrm>
           <a:prstGeom prst="rect">
@@ -7857,7 +9099,7 @@
         <p:spPr>
           <a:xfrm>
             <a:off x="457200" y="164592"/>
-            <a:ext cx="11277295" cy="384048"/>
+            <a:ext cx="11277295" cy="502920"/>
           </a:xfrm>
           <a:prstGeom prst="rect">
             <a:avLst/>
@@ -7877,55 +9119,21 @@
                 </a:solidFill>
                 <a:latin typeface="Calibri"/>
               </a:rPr>
-              <a:t>Herramientas de hoy</a:t>
-            </a:r>
-          </a:p>
-        </p:txBody>
-      </p:sp>
-      <p:sp>
-        <p:nvSpPr>
-          <p:cNvPr id="5" name="TextBox 4"/>
-          <p:cNvSpPr txBox="1"/>
-          <p:nvPr/>
-        </p:nvSpPr>
-        <p:spPr>
-          <a:xfrm>
-            <a:off x="457200" y="566928"/>
-            <a:ext cx="11277295" cy="411480"/>
-          </a:xfrm>
-          <a:prstGeom prst="rect">
-            <a:avLst/>
-          </a:prstGeom>
-          <a:noFill/>
-        </p:spPr>
-        <p:txBody>
-          <a:bodyPr wrap="square">
-            <a:spAutoFit/>
-          </a:bodyPr>
-          <a:lstStyle/>
-          <a:p>
-            <a:r>
-              <a:rPr sz="1400" b="0" i="0">
-                <a:solidFill>
-                  <a:srgbClr val="B8D8EE"/>
-                </a:solidFill>
-                <a:latin typeface="Calibri"/>
-              </a:rPr>
-              <a:t>Gratis · navegador o free tier · sin cuenta de pago</a:t>
-            </a:r>
-          </a:p>
-        </p:txBody>
-      </p:sp>
-      <p:sp>
-        <p:nvSpPr>
-          <p:cNvPr id="6" name="Rounded Rectangle 5"/>
+              <a:t>El Despliegue en Mermaid: el molde que ExamLab renderiza</a:t>
+            </a:r>
+          </a:p>
+        </p:txBody>
+      </p:sp>
+      <p:sp>
+        <p:nvSpPr>
+          <p:cNvPr id="5" name="Rounded Rectangle 4"/>
           <p:cNvSpPr/>
           <p:nvPr/>
         </p:nvSpPr>
         <p:spPr>
           <a:xfrm>
-            <a:off x="457200" y="1591056"/>
-            <a:ext cx="3624986" cy="2299716"/>
+            <a:off x="457200" y="1261872"/>
+            <a:ext cx="11277295" cy="4773168"/>
           </a:xfrm>
           <a:prstGeom prst="roundRect">
             <a:avLst>
@@ -7933,7 +9141,7 @@
             </a:avLst>
           </a:prstGeom>
           <a:solidFill>
-            <a:srgbClr val="F2F2F2"/>
+            <a:srgbClr val="1E2A38"/>
           </a:solidFill>
           <a:ln>
             <a:noFill/>
@@ -7963,14 +9171,14 @@
       </p:sp>
       <p:sp>
         <p:nvSpPr>
-          <p:cNvPr id="7" name="Rectangle 6"/>
+          <p:cNvPr id="6" name="Rectangle 5"/>
           <p:cNvSpPr/>
           <p:nvPr/>
         </p:nvSpPr>
         <p:spPr>
           <a:xfrm>
-            <a:off x="457200" y="1591056"/>
-            <a:ext cx="3624986" cy="64008"/>
+            <a:off x="457200" y="1261872"/>
+            <a:ext cx="11277295" cy="320040"/>
           </a:xfrm>
           <a:prstGeom prst="rect">
             <a:avLst/>
@@ -8006,735 +9214,337 @@
       </p:sp>
       <p:sp>
         <p:nvSpPr>
-          <p:cNvPr id="8" name="Rectangle 7"/>
-          <p:cNvSpPr/>
-          <p:nvPr/>
-        </p:nvSpPr>
-        <p:spPr>
-          <a:xfrm>
-            <a:off x="457200" y="1655064"/>
-            <a:ext cx="3624986" cy="27432"/>
-          </a:xfrm>
-          <a:prstGeom prst="rect">
-            <a:avLst/>
-          </a:prstGeom>
-          <a:solidFill>
-            <a:srgbClr val="FFD000"/>
-          </a:solidFill>
-          <a:ln>
-            <a:noFill/>
-          </a:ln>
-        </p:spPr>
-        <p:style>
-          <a:lnRef idx="1">
-            <a:schemeClr val="accent1"/>
-          </a:lnRef>
-          <a:fillRef idx="3">
-            <a:schemeClr val="accent1"/>
-          </a:fillRef>
-          <a:effectRef idx="2">
-            <a:schemeClr val="accent1"/>
-          </a:effectRef>
-          <a:fontRef idx="minor">
-            <a:schemeClr val="lt1"/>
-          </a:fontRef>
-        </p:style>
-        <p:txBody>
-          <a:bodyPr rtlCol="0" anchor="ctr"/>
+          <p:cNvPr id="7" name="TextBox 6"/>
+          <p:cNvSpPr txBox="1"/>
+          <p:nvPr/>
+        </p:nvSpPr>
+        <p:spPr>
+          <a:xfrm>
+            <a:off x="685800" y="1307592"/>
+            <a:ext cx="10820095" cy="256032"/>
+          </a:xfrm>
+          <a:prstGeom prst="rect">
+            <a:avLst/>
+          </a:prstGeom>
+          <a:noFill/>
+        </p:spPr>
+        <p:txBody>
+          <a:bodyPr wrap="square" anchor="ctr"/>
+          <a:lstStyle/>
+          <a:p>
+            <a:r>
+              <a:rPr sz="1000" b="1" i="0">
+                <a:solidFill>
+                  <a:srgbClr val="269CCB"/>
+                </a:solidFill>
+                <a:latin typeface="Calibri"/>
+              </a:rPr>
+              <a:t>● ● ●</a:t>
+            </a:r>
+          </a:p>
+        </p:txBody>
+      </p:sp>
+      <p:sp>
+        <p:nvSpPr>
+          <p:cNvPr id="8" name="TextBox 7"/>
+          <p:cNvSpPr txBox="1"/>
+          <p:nvPr/>
+        </p:nvSpPr>
+        <p:spPr>
+          <a:xfrm>
+            <a:off x="777240" y="1719072"/>
+            <a:ext cx="10637215" cy="4133087"/>
+          </a:xfrm>
+          <a:prstGeom prst="rect">
+            <a:avLst/>
+          </a:prstGeom>
+          <a:noFill/>
+        </p:spPr>
+        <p:txBody>
+          <a:bodyPr wrap="square">
+            <a:spAutoFit/>
+          </a:bodyPr>
+          <a:lstStyle/>
+          <a:p>
+            <a:pPr>
+              <a:spcAft>
+                <a:spcPts val="400"/>
+              </a:spcAft>
+            </a:pPr>
+            <a:r>
+              <a:rPr sz="1400" b="0" i="0">
+                <a:solidFill>
+                  <a:srgbClr val="FFFFFF"/>
+                </a:solidFill>
+                <a:latin typeface="Calibri"/>
+              </a:rPr>
+              <a:t>flowchart LR</a:t>
+            </a:r>
+          </a:p>
+          <a:p>
+            <a:pPr>
+              <a:spcAft>
+                <a:spcPts val="400"/>
+              </a:spcAft>
+            </a:pPr>
+            <a:r>
+              <a:rPr sz="1400" b="0" i="0">
+                <a:solidFill>
+                  <a:srgbClr val="FFFFFF"/>
+                </a:solidFill>
+                <a:latin typeface="Calibri"/>
+              </a:rPr>
+              <a:t>  subgraph publica["Zona publica - internet"]</a:t>
+            </a:r>
+          </a:p>
+          <a:p>
+            <a:pPr>
+              <a:spcAft>
+                <a:spcPts val="400"/>
+              </a:spcAft>
+            </a:pPr>
+            <a:r>
+              <a:rPr sz="1400" b="0" i="0">
+                <a:solidFill>
+                  <a:srgbClr val="FFFFFF"/>
+                </a:solidFill>
+                <a:latin typeface="Calibri"/>
+              </a:rPr>
+              <a:t>    web["App web&lt;br/&gt;React estatico - 443"]</a:t>
+            </a:r>
+          </a:p>
+          <a:p>
+            <a:pPr>
+              <a:spcAft>
+                <a:spcPts val="400"/>
+              </a:spcAft>
+            </a:pPr>
+            <a:r>
+              <a:rPr sz="1400" b="0" i="0">
+                <a:solidFill>
+                  <a:srgbClr val="FFFFFF"/>
+                </a:solidFill>
+                <a:latin typeface="Calibri"/>
+              </a:rPr>
+              <a:t>    edge["Edge / balanceador&lt;br/&gt;443 HTTPS"]</a:t>
+            </a:r>
+          </a:p>
+          <a:p>
+            <a:pPr>
+              <a:spcAft>
+                <a:spcPts val="400"/>
+              </a:spcAft>
+            </a:pPr>
+            <a:r>
+              <a:rPr sz="1400" b="0" i="0">
+                <a:solidFill>
+                  <a:srgbClr val="FFFFFF"/>
+                </a:solidFill>
+                <a:latin typeface="Calibri"/>
+              </a:rPr>
+              <a:t>  end</a:t>
+            </a:r>
+          </a:p>
+          <a:p>
+            <a:pPr>
+              <a:spcAft>
+                <a:spcPts val="400"/>
+              </a:spcAft>
+            </a:pPr>
+            <a:r>
+              <a:rPr sz="1400" b="0" i="0">
+                <a:solidFill>
+                  <a:srgbClr val="FFFFFF"/>
+                </a:solidFill>
+                <a:latin typeface="Calibri"/>
+              </a:rPr>
+              <a:t>  subgraph privada["Zona privada - solo desde el edge"]</a:t>
+            </a:r>
+          </a:p>
+          <a:p>
+            <a:pPr>
+              <a:spcAft>
+                <a:spcPts val="400"/>
+              </a:spcAft>
+            </a:pPr>
+            <a:r>
+              <a:rPr sz="1400" b="0" i="0">
+                <a:solidFill>
+                  <a:srgbClr val="FFFFFF"/>
+                </a:solidFill>
+                <a:latin typeface="Calibri"/>
+              </a:rPr>
+              <a:t>    api["API CloudLite&lt;br/&gt;8080 HTTP"]</a:t>
+            </a:r>
+          </a:p>
+          <a:p>
+            <a:pPr>
+              <a:spcAft>
+                <a:spcPts val="400"/>
+              </a:spcAft>
+            </a:pPr>
+            <a:r>
+              <a:rPr sz="1400" b="0" i="0">
+                <a:solidFill>
+                  <a:srgbClr val="FFFFFF"/>
+                </a:solidFill>
+                <a:latin typeface="Calibri"/>
+              </a:rPr>
+              <a:t>  end</a:t>
+            </a:r>
+          </a:p>
+          <a:p>
+            <a:pPr>
+              <a:spcAft>
+                <a:spcPts val="400"/>
+              </a:spcAft>
+            </a:pPr>
+            <a:r>
+              <a:rPr sz="1400" b="0" i="0">
+                <a:solidFill>
+                  <a:srgbClr val="FFFFFF"/>
+                </a:solidFill>
+                <a:latin typeface="Calibri"/>
+              </a:rPr>
+              <a:t>  subgraph datos["Zona de datos - sin internet: la BD va AQUI"]</a:t>
+            </a:r>
+          </a:p>
+          <a:p>
+            <a:pPr>
+              <a:spcAft>
+                <a:spcPts val="400"/>
+              </a:spcAft>
+            </a:pPr>
+            <a:r>
+              <a:rPr sz="1400" b="0" i="0">
+                <a:solidFill>
+                  <a:srgbClr val="FFFFFF"/>
+                </a:solidFill>
+                <a:latin typeface="Calibri"/>
+              </a:rPr>
+              <a:t>    db[("Base de datos&lt;br/&gt;5432 TCP")]</a:t>
+            </a:r>
+          </a:p>
+          <a:p>
+            <a:pPr>
+              <a:spcAft>
+                <a:spcPts val="400"/>
+              </a:spcAft>
+            </a:pPr>
+            <a:r>
+              <a:rPr sz="1400" b="0" i="0">
+                <a:solidFill>
+                  <a:srgbClr val="FFFFFF"/>
+                </a:solidFill>
+                <a:latin typeface="Calibri"/>
+              </a:rPr>
+              <a:t>  end</a:t>
+            </a:r>
+          </a:p>
+          <a:p>
+            <a:pPr>
+              <a:spcAft>
+                <a:spcPts val="400"/>
+              </a:spcAft>
+            </a:pPr>
+            <a:r>
+              <a:rPr sz="1400" b="0" i="0">
+                <a:solidFill>
+                  <a:srgbClr val="FFFFFF"/>
+                </a:solidFill>
+                <a:latin typeface="Calibri"/>
+              </a:rPr>
+              <a:t>  web --&gt;|"HTTPS 443"| edge</a:t>
+            </a:r>
+          </a:p>
+          <a:p>
+            <a:pPr>
+              <a:spcAft>
+                <a:spcPts val="400"/>
+              </a:spcAft>
+            </a:pPr>
+            <a:r>
+              <a:rPr sz="1400" b="0" i="0">
+                <a:solidFill>
+                  <a:srgbClr val="FFFFFF"/>
+                </a:solidFill>
+                <a:latin typeface="Calibri"/>
+              </a:rPr>
+              <a:t>  edge --&gt;|"HTTP 8080"| api</a:t>
+            </a:r>
+          </a:p>
+          <a:p>
+            <a:pPr>
+              <a:spcAft>
+                <a:spcPts val="400"/>
+              </a:spcAft>
+            </a:pPr>
+            <a:r>
+              <a:rPr sz="1400" b="0" i="0">
+                <a:solidFill>
+                  <a:srgbClr val="FFFFFF"/>
+                </a:solidFill>
+                <a:latin typeface="Calibri"/>
+              </a:rPr>
+              <a:t>  api --&gt;|"TCP 5432"| db</a:t>
+            </a:r>
+          </a:p>
+          <a:p>
+            <a:pPr>
+              <a:spcAft>
+                <a:spcPts val="400"/>
+              </a:spcAft>
+            </a:pPr>
+            <a:r>
+              <a:rPr sz="1400" b="0" i="0">
+                <a:solidFill>
+                  <a:srgbClr val="FFFFFF"/>
+                </a:solidFill>
+                <a:latin typeface="Calibri"/>
+              </a:rPr>
+              <a:t>  api --&gt;|"HTTPS 443 - frontera de confianza"| pagos["Pasarela de pagos externa"]</a:t>
+            </a:r>
+          </a:p>
+        </p:txBody>
+      </p:sp>
+      <p:sp>
+        <p:nvSpPr>
+          <p:cNvPr id="9" name="TextBox 8"/>
+          <p:cNvSpPr txBox="1"/>
+          <p:nvPr/>
+        </p:nvSpPr>
+        <p:spPr>
+          <a:xfrm>
+            <a:off x="457200" y="6080760"/>
+            <a:ext cx="11277295" cy="320040"/>
+          </a:xfrm>
+          <a:prstGeom prst="rect">
+            <a:avLst/>
+          </a:prstGeom>
+          <a:noFill/>
+        </p:spPr>
+        <p:txBody>
+          <a:bodyPr wrap="square">
+            <a:spAutoFit/>
+          </a:bodyPr>
           <a:lstStyle/>
           <a:p>
             <a:pPr algn="ctr"/>
-          </a:p>
-        </p:txBody>
-      </p:sp>
-      <p:pic>
-        <p:nvPicPr>
-          <p:cNvPr id="9" name="Picture 8" descr="drawio.png"/>
-          <p:cNvPicPr>
-            <a:picLocks noChangeAspect="1"/>
-          </p:cNvPicPr>
-          <p:nvPr/>
-        </p:nvPicPr>
-        <p:blipFill>
-          <a:blip r:embed="rId2"/>
-          <a:stretch>
-            <a:fillRect/>
-          </a:stretch>
-        </p:blipFill>
-        <p:spPr>
-          <a:xfrm>
-            <a:off x="1659331" y="1847087"/>
-            <a:ext cx="1220724" cy="1220724"/>
-          </a:xfrm>
-          <a:prstGeom prst="rect">
-            <a:avLst/>
-          </a:prstGeom>
-        </p:spPr>
-      </p:pic>
+            <a:r>
+              <a:rPr sz="1200" b="0" i="1">
+                <a:solidFill>
+                  <a:srgbClr val="666666"/>
+                </a:solidFill>
+                <a:latin typeface="Calibri"/>
+              </a:rPr>
+              <a:t>Una «subgraph» por zona, el puerto en cada caja y la base con «[( )]». La flecha al externo ES la frontera de confianza. Nombres: los mismos del C4 Containers de la Clase 4.</a:t>
+            </a:r>
+          </a:p>
+        </p:txBody>
+      </p:sp>
       <p:sp>
         <p:nvSpPr>
           <p:cNvPr id="10" name="TextBox 9"/>
-          <p:cNvSpPr txBox="1"/>
-          <p:nvPr/>
-        </p:nvSpPr>
-        <p:spPr>
-          <a:xfrm>
-            <a:off x="530352" y="3159251"/>
-            <a:ext cx="3478682" cy="621792"/>
-          </a:xfrm>
-          <a:prstGeom prst="rect">
-            <a:avLst/>
-          </a:prstGeom>
-          <a:noFill/>
-        </p:spPr>
-        <p:txBody>
-          <a:bodyPr wrap="square" anchor="t"/>
-          <a:lstStyle/>
-          <a:p>
-            <a:pPr algn="ctr"/>
-            <a:r>
-              <a:rPr sz="1300" b="1" i="0">
-                <a:solidFill>
-                  <a:srgbClr val="095292"/>
-                </a:solidFill>
-                <a:latin typeface="Calibri"/>
-              </a:rPr>
-              <a:t>draw.io</a:t>
-            </a:r>
-          </a:p>
-          <a:p>
-            <a:pPr algn="ctr">
-              <a:spcBef>
-                <a:spcPts val="200"/>
-              </a:spcBef>
-            </a:pPr>
-            <a:r>
-              <a:rPr sz="1000" b="0" i="0">
-                <a:solidFill>
-                  <a:srgbClr val="666666"/>
-                </a:solidFill>
-                <a:latin typeface="Calibri"/>
-              </a:rPr>
-              <a:t>Deployment</a:t>
-            </a:r>
-          </a:p>
-        </p:txBody>
-      </p:sp>
-      <p:sp>
-        <p:nvSpPr>
-          <p:cNvPr id="11" name="Rounded Rectangle 10"/>
-          <p:cNvSpPr/>
-          <p:nvPr/>
-        </p:nvSpPr>
-        <p:spPr>
-          <a:xfrm>
-            <a:off x="4283354" y="1591056"/>
-            <a:ext cx="3624986" cy="2299716"/>
-          </a:xfrm>
-          <a:prstGeom prst="roundRect">
-            <a:avLst>
-              <a:gd name="adj" fmla="val 12000"/>
-            </a:avLst>
-          </a:prstGeom>
-          <a:solidFill>
-            <a:srgbClr val="F2F2F2"/>
-          </a:solidFill>
-          <a:ln>
-            <a:noFill/>
-          </a:ln>
-        </p:spPr>
-        <p:style>
-          <a:lnRef idx="1">
-            <a:schemeClr val="accent1"/>
-          </a:lnRef>
-          <a:fillRef idx="3">
-            <a:schemeClr val="accent1"/>
-          </a:fillRef>
-          <a:effectRef idx="2">
-            <a:schemeClr val="accent1"/>
-          </a:effectRef>
-          <a:fontRef idx="minor">
-            <a:schemeClr val="lt1"/>
-          </a:fontRef>
-        </p:style>
-        <p:txBody>
-          <a:bodyPr rtlCol="0" anchor="ctr"/>
-          <a:lstStyle/>
-          <a:p>
-            <a:pPr algn="ctr"/>
-          </a:p>
-        </p:txBody>
-      </p:sp>
-      <p:sp>
-        <p:nvSpPr>
-          <p:cNvPr id="12" name="Rectangle 11"/>
-          <p:cNvSpPr/>
-          <p:nvPr/>
-        </p:nvSpPr>
-        <p:spPr>
-          <a:xfrm>
-            <a:off x="4283354" y="1591056"/>
-            <a:ext cx="3624986" cy="64008"/>
-          </a:xfrm>
-          <a:prstGeom prst="rect">
-            <a:avLst/>
-          </a:prstGeom>
-          <a:solidFill>
-            <a:srgbClr val="095292"/>
-          </a:solidFill>
-          <a:ln>
-            <a:noFill/>
-          </a:ln>
-        </p:spPr>
-        <p:style>
-          <a:lnRef idx="1">
-            <a:schemeClr val="accent1"/>
-          </a:lnRef>
-          <a:fillRef idx="3">
-            <a:schemeClr val="accent1"/>
-          </a:fillRef>
-          <a:effectRef idx="2">
-            <a:schemeClr val="accent1"/>
-          </a:effectRef>
-          <a:fontRef idx="minor">
-            <a:schemeClr val="lt1"/>
-          </a:fontRef>
-        </p:style>
-        <p:txBody>
-          <a:bodyPr rtlCol="0" anchor="ctr"/>
-          <a:lstStyle/>
-          <a:p>
-            <a:pPr algn="ctr"/>
-          </a:p>
-        </p:txBody>
-      </p:sp>
-      <p:sp>
-        <p:nvSpPr>
-          <p:cNvPr id="13" name="Rectangle 12"/>
-          <p:cNvSpPr/>
-          <p:nvPr/>
-        </p:nvSpPr>
-        <p:spPr>
-          <a:xfrm>
-            <a:off x="4283354" y="1655064"/>
-            <a:ext cx="3624986" cy="27432"/>
-          </a:xfrm>
-          <a:prstGeom prst="rect">
-            <a:avLst/>
-          </a:prstGeom>
-          <a:solidFill>
-            <a:srgbClr val="FFD000"/>
-          </a:solidFill>
-          <a:ln>
-            <a:noFill/>
-          </a:ln>
-        </p:spPr>
-        <p:style>
-          <a:lnRef idx="1">
-            <a:schemeClr val="accent1"/>
-          </a:lnRef>
-          <a:fillRef idx="3">
-            <a:schemeClr val="accent1"/>
-          </a:fillRef>
-          <a:effectRef idx="2">
-            <a:schemeClr val="accent1"/>
-          </a:effectRef>
-          <a:fontRef idx="minor">
-            <a:schemeClr val="lt1"/>
-          </a:fontRef>
-        </p:style>
-        <p:txBody>
-          <a:bodyPr rtlCol="0" anchor="ctr"/>
-          <a:lstStyle/>
-          <a:p>
-            <a:pPr algn="ctr"/>
-          </a:p>
-        </p:txBody>
-      </p:sp>
-      <p:pic>
-        <p:nvPicPr>
-          <p:cNvPr id="14" name="Picture 13" descr="google_docs.png"/>
-          <p:cNvPicPr>
-            <a:picLocks noChangeAspect="1"/>
-          </p:cNvPicPr>
-          <p:nvPr/>
-        </p:nvPicPr>
-        <p:blipFill>
-          <a:blip r:embed="rId3"/>
-          <a:stretch>
-            <a:fillRect/>
-          </a:stretch>
-        </p:blipFill>
-        <p:spPr>
-          <a:xfrm>
-            <a:off x="5485485" y="1847087"/>
-            <a:ext cx="1220724" cy="1220724"/>
-          </a:xfrm>
-          <a:prstGeom prst="rect">
-            <a:avLst/>
-          </a:prstGeom>
-        </p:spPr>
-      </p:pic>
-      <p:sp>
-        <p:nvSpPr>
-          <p:cNvPr id="15" name="TextBox 14"/>
-          <p:cNvSpPr txBox="1"/>
-          <p:nvPr/>
-        </p:nvSpPr>
-        <p:spPr>
-          <a:xfrm>
-            <a:off x="4356506" y="3159251"/>
-            <a:ext cx="3478682" cy="621792"/>
-          </a:xfrm>
-          <a:prstGeom prst="rect">
-            <a:avLst/>
-          </a:prstGeom>
-          <a:noFill/>
-        </p:spPr>
-        <p:txBody>
-          <a:bodyPr wrap="square" anchor="t"/>
-          <a:lstStyle/>
-          <a:p>
-            <a:pPr algn="ctr"/>
-            <a:r>
-              <a:rPr sz="1300" b="1" i="0">
-                <a:solidFill>
-                  <a:srgbClr val="095292"/>
-                </a:solidFill>
-                <a:latin typeface="Calibri"/>
-              </a:rPr>
-              <a:t>Google Docs</a:t>
-            </a:r>
-          </a:p>
-          <a:p>
-            <a:pPr algn="ctr">
-              <a:spcBef>
-                <a:spcPts val="200"/>
-              </a:spcBef>
-            </a:pPr>
-            <a:r>
-              <a:rPr sz="1000" b="0" i="0">
-                <a:solidFill>
-                  <a:srgbClr val="666666"/>
-                </a:solidFill>
-                <a:latin typeface="Calibri"/>
-              </a:rPr>
-              <a:t>Informe PI</a:t>
-            </a:r>
-          </a:p>
-        </p:txBody>
-      </p:sp>
-      <p:sp>
-        <p:nvSpPr>
-          <p:cNvPr id="16" name="Rounded Rectangle 15"/>
-          <p:cNvSpPr/>
-          <p:nvPr/>
-        </p:nvSpPr>
-        <p:spPr>
-          <a:xfrm>
-            <a:off x="8109508" y="1591056"/>
-            <a:ext cx="3624986" cy="2299716"/>
-          </a:xfrm>
-          <a:prstGeom prst="roundRect">
-            <a:avLst>
-              <a:gd name="adj" fmla="val 12000"/>
-            </a:avLst>
-          </a:prstGeom>
-          <a:solidFill>
-            <a:srgbClr val="F2F2F2"/>
-          </a:solidFill>
-          <a:ln>
-            <a:noFill/>
-          </a:ln>
-        </p:spPr>
-        <p:style>
-          <a:lnRef idx="1">
-            <a:schemeClr val="accent1"/>
-          </a:lnRef>
-          <a:fillRef idx="3">
-            <a:schemeClr val="accent1"/>
-          </a:fillRef>
-          <a:effectRef idx="2">
-            <a:schemeClr val="accent1"/>
-          </a:effectRef>
-          <a:fontRef idx="minor">
-            <a:schemeClr val="lt1"/>
-          </a:fontRef>
-        </p:style>
-        <p:txBody>
-          <a:bodyPr rtlCol="0" anchor="ctr"/>
-          <a:lstStyle/>
-          <a:p>
-            <a:pPr algn="ctr"/>
-          </a:p>
-        </p:txBody>
-      </p:sp>
-      <p:sp>
-        <p:nvSpPr>
-          <p:cNvPr id="17" name="Rectangle 16"/>
-          <p:cNvSpPr/>
-          <p:nvPr/>
-        </p:nvSpPr>
-        <p:spPr>
-          <a:xfrm>
-            <a:off x="8109508" y="1591056"/>
-            <a:ext cx="3624986" cy="64008"/>
-          </a:xfrm>
-          <a:prstGeom prst="rect">
-            <a:avLst/>
-          </a:prstGeom>
-          <a:solidFill>
-            <a:srgbClr val="095292"/>
-          </a:solidFill>
-          <a:ln>
-            <a:noFill/>
-          </a:ln>
-        </p:spPr>
-        <p:style>
-          <a:lnRef idx="1">
-            <a:schemeClr val="accent1"/>
-          </a:lnRef>
-          <a:fillRef idx="3">
-            <a:schemeClr val="accent1"/>
-          </a:fillRef>
-          <a:effectRef idx="2">
-            <a:schemeClr val="accent1"/>
-          </a:effectRef>
-          <a:fontRef idx="minor">
-            <a:schemeClr val="lt1"/>
-          </a:fontRef>
-        </p:style>
-        <p:txBody>
-          <a:bodyPr rtlCol="0" anchor="ctr"/>
-          <a:lstStyle/>
-          <a:p>
-            <a:pPr algn="ctr"/>
-          </a:p>
-        </p:txBody>
-      </p:sp>
-      <p:sp>
-        <p:nvSpPr>
-          <p:cNvPr id="18" name="Rectangle 17"/>
-          <p:cNvSpPr/>
-          <p:nvPr/>
-        </p:nvSpPr>
-        <p:spPr>
-          <a:xfrm>
-            <a:off x="8109508" y="1655064"/>
-            <a:ext cx="3624986" cy="27432"/>
-          </a:xfrm>
-          <a:prstGeom prst="rect">
-            <a:avLst/>
-          </a:prstGeom>
-          <a:solidFill>
-            <a:srgbClr val="FFD000"/>
-          </a:solidFill>
-          <a:ln>
-            <a:noFill/>
-          </a:ln>
-        </p:spPr>
-        <p:style>
-          <a:lnRef idx="1">
-            <a:schemeClr val="accent1"/>
-          </a:lnRef>
-          <a:fillRef idx="3">
-            <a:schemeClr val="accent1"/>
-          </a:fillRef>
-          <a:effectRef idx="2">
-            <a:schemeClr val="accent1"/>
-          </a:effectRef>
-          <a:fontRef idx="minor">
-            <a:schemeClr val="lt1"/>
-          </a:fontRef>
-        </p:style>
-        <p:txBody>
-          <a:bodyPr rtlCol="0" anchor="ctr"/>
-          <a:lstStyle/>
-          <a:p>
-            <a:pPr algn="ctr"/>
-          </a:p>
-        </p:txBody>
-      </p:sp>
-      <p:pic>
-        <p:nvPicPr>
-          <p:cNvPr id="19" name="Picture 18" descr="mermaid.png"/>
-          <p:cNvPicPr>
-            <a:picLocks noChangeAspect="1"/>
-          </p:cNvPicPr>
-          <p:nvPr/>
-        </p:nvPicPr>
-        <p:blipFill>
-          <a:blip r:embed="rId4"/>
-          <a:stretch>
-            <a:fillRect/>
-          </a:stretch>
-        </p:blipFill>
-        <p:spPr>
-          <a:xfrm>
-            <a:off x="9311640" y="1847087"/>
-            <a:ext cx="1220724" cy="1220724"/>
-          </a:xfrm>
-          <a:prstGeom prst="rect">
-            <a:avLst/>
-          </a:prstGeom>
-        </p:spPr>
-      </p:pic>
-      <p:sp>
-        <p:nvSpPr>
-          <p:cNvPr id="20" name="TextBox 19"/>
-          <p:cNvSpPr txBox="1"/>
-          <p:nvPr/>
-        </p:nvSpPr>
-        <p:spPr>
-          <a:xfrm>
-            <a:off x="8182660" y="3159251"/>
-            <a:ext cx="3478682" cy="621792"/>
-          </a:xfrm>
-          <a:prstGeom prst="rect">
-            <a:avLst/>
-          </a:prstGeom>
-          <a:noFill/>
-        </p:spPr>
-        <p:txBody>
-          <a:bodyPr wrap="square" anchor="t"/>
-          <a:lstStyle/>
-          <a:p>
-            <a:pPr algn="ctr"/>
-            <a:r>
-              <a:rPr sz="1300" b="1" i="0">
-                <a:solidFill>
-                  <a:srgbClr val="095292"/>
-                </a:solidFill>
-                <a:latin typeface="Calibri"/>
-              </a:rPr>
-              <a:t>Mermaid</a:t>
-            </a:r>
-          </a:p>
-          <a:p>
-            <a:pPr algn="ctr">
-              <a:spcBef>
-                <a:spcPts val="200"/>
-              </a:spcBef>
-            </a:pPr>
-            <a:r>
-              <a:rPr sz="1000" b="0" i="0">
-                <a:solidFill>
-                  <a:srgbClr val="666666"/>
-                </a:solidFill>
-                <a:latin typeface="Calibri"/>
-              </a:rPr>
-              <a:t>Codigo del diagrama</a:t>
-            </a:r>
-          </a:p>
-        </p:txBody>
-      </p:sp>
-      <p:sp>
-        <p:nvSpPr>
-          <p:cNvPr id="21" name="Rounded Rectangle 20"/>
-          <p:cNvSpPr/>
-          <p:nvPr/>
-        </p:nvSpPr>
-        <p:spPr>
-          <a:xfrm>
-            <a:off x="4283354" y="4055364"/>
-            <a:ext cx="3624986" cy="2299716"/>
-          </a:xfrm>
-          <a:prstGeom prst="roundRect">
-            <a:avLst>
-              <a:gd name="adj" fmla="val 12000"/>
-            </a:avLst>
-          </a:prstGeom>
-          <a:solidFill>
-            <a:srgbClr val="F2F2F2"/>
-          </a:solidFill>
-          <a:ln>
-            <a:noFill/>
-          </a:ln>
-        </p:spPr>
-        <p:style>
-          <a:lnRef idx="1">
-            <a:schemeClr val="accent1"/>
-          </a:lnRef>
-          <a:fillRef idx="3">
-            <a:schemeClr val="accent1"/>
-          </a:fillRef>
-          <a:effectRef idx="2">
-            <a:schemeClr val="accent1"/>
-          </a:effectRef>
-          <a:fontRef idx="minor">
-            <a:schemeClr val="lt1"/>
-          </a:fontRef>
-        </p:style>
-        <p:txBody>
-          <a:bodyPr rtlCol="0" anchor="ctr"/>
-          <a:lstStyle/>
-          <a:p>
-            <a:pPr algn="ctr"/>
-          </a:p>
-        </p:txBody>
-      </p:sp>
-      <p:sp>
-        <p:nvSpPr>
-          <p:cNvPr id="22" name="Rectangle 21"/>
-          <p:cNvSpPr/>
-          <p:nvPr/>
-        </p:nvSpPr>
-        <p:spPr>
-          <a:xfrm>
-            <a:off x="4283354" y="4055364"/>
-            <a:ext cx="3624986" cy="64008"/>
-          </a:xfrm>
-          <a:prstGeom prst="rect">
-            <a:avLst/>
-          </a:prstGeom>
-          <a:solidFill>
-            <a:srgbClr val="095292"/>
-          </a:solidFill>
-          <a:ln>
-            <a:noFill/>
-          </a:ln>
-        </p:spPr>
-        <p:style>
-          <a:lnRef idx="1">
-            <a:schemeClr val="accent1"/>
-          </a:lnRef>
-          <a:fillRef idx="3">
-            <a:schemeClr val="accent1"/>
-          </a:fillRef>
-          <a:effectRef idx="2">
-            <a:schemeClr val="accent1"/>
-          </a:effectRef>
-          <a:fontRef idx="minor">
-            <a:schemeClr val="lt1"/>
-          </a:fontRef>
-        </p:style>
-        <p:txBody>
-          <a:bodyPr rtlCol="0" anchor="ctr"/>
-          <a:lstStyle/>
-          <a:p>
-            <a:pPr algn="ctr"/>
-          </a:p>
-        </p:txBody>
-      </p:sp>
-      <p:sp>
-        <p:nvSpPr>
-          <p:cNvPr id="23" name="Rectangle 22"/>
-          <p:cNvSpPr/>
-          <p:nvPr/>
-        </p:nvSpPr>
-        <p:spPr>
-          <a:xfrm>
-            <a:off x="4283354" y="4119372"/>
-            <a:ext cx="3624986" cy="27432"/>
-          </a:xfrm>
-          <a:prstGeom prst="rect">
-            <a:avLst/>
-          </a:prstGeom>
-          <a:solidFill>
-            <a:srgbClr val="FFD000"/>
-          </a:solidFill>
-          <a:ln>
-            <a:noFill/>
-          </a:ln>
-        </p:spPr>
-        <p:style>
-          <a:lnRef idx="1">
-            <a:schemeClr val="accent1"/>
-          </a:lnRef>
-          <a:fillRef idx="3">
-            <a:schemeClr val="accent1"/>
-          </a:fillRef>
-          <a:effectRef idx="2">
-            <a:schemeClr val="accent1"/>
-          </a:effectRef>
-          <a:fontRef idx="minor">
-            <a:schemeClr val="lt1"/>
-          </a:fontRef>
-        </p:style>
-        <p:txBody>
-          <a:bodyPr rtlCol="0" anchor="ctr"/>
-          <a:lstStyle/>
-          <a:p>
-            <a:pPr algn="ctr"/>
-          </a:p>
-        </p:txBody>
-      </p:sp>
-      <p:pic>
-        <p:nvPicPr>
-          <p:cNvPr id="24" name="Picture 23" descr="examlab.png"/>
-          <p:cNvPicPr>
-            <a:picLocks noChangeAspect="1"/>
-          </p:cNvPicPr>
-          <p:nvPr/>
-        </p:nvPicPr>
-        <p:blipFill>
-          <a:blip r:embed="rId5"/>
-          <a:stretch>
-            <a:fillRect/>
-          </a:stretch>
-        </p:blipFill>
-        <p:spPr>
-          <a:xfrm>
-            <a:off x="5485485" y="4311396"/>
-            <a:ext cx="1220724" cy="1220724"/>
-          </a:xfrm>
-          <a:prstGeom prst="rect">
-            <a:avLst/>
-          </a:prstGeom>
-        </p:spPr>
-      </p:pic>
-      <p:sp>
-        <p:nvSpPr>
-          <p:cNvPr id="25" name="TextBox 24"/>
-          <p:cNvSpPr txBox="1"/>
-          <p:nvPr/>
-        </p:nvSpPr>
-        <p:spPr>
-          <a:xfrm>
-            <a:off x="4356506" y="5623560"/>
-            <a:ext cx="3478682" cy="621792"/>
-          </a:xfrm>
-          <a:prstGeom prst="rect">
-            <a:avLst/>
-          </a:prstGeom>
-          <a:noFill/>
-        </p:spPr>
-        <p:txBody>
-          <a:bodyPr wrap="square" anchor="t"/>
-          <a:lstStyle/>
-          <a:p>
-            <a:pPr algn="ctr"/>
-            <a:r>
-              <a:rPr sz="1300" b="1" i="0">
-                <a:solidFill>
-                  <a:srgbClr val="095292"/>
-                </a:solidFill>
-                <a:latin typeface="Calibri"/>
-              </a:rPr>
-              <a:t>ExamLab</a:t>
-            </a:r>
-          </a:p>
-          <a:p>
-            <a:pPr algn="ctr">
-              <a:spcBef>
-                <a:spcPts val="200"/>
-              </a:spcBef>
-            </a:pPr>
-            <a:r>
-              <a:rPr sz="1000" b="0" i="0">
-                <a:solidFill>
-                  <a:srgbClr val="666666"/>
-                </a:solidFill>
-                <a:latin typeface="Calibri"/>
-              </a:rPr>
-              <a:t>Donde se entrega</a:t>
-            </a:r>
-          </a:p>
-        </p:txBody>
-      </p:sp>
-      <p:sp>
-        <p:nvSpPr>
-          <p:cNvPr id="26" name="TextBox 25"/>
           <p:cNvSpPr txBox="1"/>
           <p:nvPr/>
         </p:nvSpPr>

--- a/Arquitectura de Sistemas Computacionales/Clases/Clase 7 - Redes y almacenamiento cloud/Presentacion.pptx
+++ b/Arquitectura de Sistemas Computacionales/Clases/Clase 7 - Redes y almacenamiento cloud/Presentacion.pptx
@@ -5540,7 +5540,7 @@
               </a:spcAft>
             </a:pPr>
             <a:r>
-              <a:rPr sz="1600" b="1" i="0">
+              <a:rPr sz="2000" b="1" i="0">
                 <a:solidFill>
                   <a:srgbClr val="333333"/>
                 </a:solidFill>
@@ -5549,7 +5549,7 @@
               <a:t>1.</a:t>
             </a:r>
             <a:r>
-              <a:rPr sz="1600" b="0" i="0">
+              <a:rPr sz="2000" b="0" i="0">
                 <a:solidFill>
                   <a:srgbClr val="333333"/>
                 </a:solidFill>
@@ -5565,7 +5565,7 @@
               </a:spcAft>
             </a:pPr>
             <a:r>
-              <a:rPr sz="1600" b="0" i="0">
+              <a:rPr sz="2000" b="0" i="0">
                 <a:solidFill>
                   <a:srgbClr val="333333"/>
                 </a:solidFill>
@@ -5574,7 +5574,7 @@
               <a:t>–   </a:t>
             </a:r>
             <a:r>
-              <a:rPr sz="1600" b="1" i="0">
+              <a:rPr sz="2000" b="1" i="0">
                 <a:solidFill>
                   <a:srgbClr val="333333"/>
                 </a:solidFill>
@@ -5583,7 +5583,7 @@
               <a:t>2.</a:t>
             </a:r>
             <a:r>
-              <a:rPr sz="1600" b="0" i="0">
+              <a:rPr sz="2000" b="0" i="0">
                 <a:solidFill>
                   <a:srgbClr val="333333"/>
                 </a:solidFill>
@@ -5599,7 +5599,7 @@
               </a:spcAft>
             </a:pPr>
             <a:r>
-              <a:rPr sz="1600" b="0" i="0">
+              <a:rPr sz="2000" b="0" i="0">
                 <a:solidFill>
                   <a:srgbClr val="333333"/>
                 </a:solidFill>
@@ -5608,7 +5608,7 @@
               <a:t>–   </a:t>
             </a:r>
             <a:r>
-              <a:rPr sz="1600" b="1" i="0">
+              <a:rPr sz="2000" b="1" i="0">
                 <a:solidFill>
                   <a:srgbClr val="333333"/>
                 </a:solidFill>
@@ -5617,7 +5617,7 @@
               <a:t>3.</a:t>
             </a:r>
             <a:r>
-              <a:rPr sz="1600" b="0" i="0">
+              <a:rPr sz="2000" b="0" i="0">
                 <a:solidFill>
                   <a:srgbClr val="333333"/>
                 </a:solidFill>
@@ -5633,7 +5633,7 @@
               </a:spcAft>
             </a:pPr>
             <a:r>
-              <a:rPr sz="1600" b="0" i="0">
+              <a:rPr sz="2000" b="0" i="0">
                 <a:solidFill>
                   <a:srgbClr val="333333"/>
                 </a:solidFill>
@@ -5642,7 +5642,7 @@
               <a:t>–   </a:t>
             </a:r>
             <a:r>
-              <a:rPr sz="1600" b="1" i="0">
+              <a:rPr sz="2000" b="1" i="0">
                 <a:solidFill>
                   <a:srgbClr val="333333"/>
                 </a:solidFill>
@@ -5651,7 +5651,7 @@
               <a:t>4.</a:t>
             </a:r>
             <a:r>
-              <a:rPr sz="1600" b="0" i="0">
+              <a:rPr sz="2000" b="0" i="0">
                 <a:solidFill>
                   <a:srgbClr val="333333"/>
                 </a:solidFill>
@@ -6698,7 +6698,7 @@
               </a:spcAft>
             </a:pPr>
             <a:r>
-              <a:rPr sz="1600" b="0" i="0">
+              <a:rPr sz="2000" b="0" i="0">
                 <a:solidFill>
                   <a:srgbClr val="333333"/>
                 </a:solidFill>
@@ -6707,7 +6707,7 @@
               <a:t>–   </a:t>
             </a:r>
             <a:r>
-              <a:rPr sz="1600" b="1" i="0">
+              <a:rPr sz="2000" b="1" i="0">
                 <a:solidFill>
                   <a:srgbClr val="333333"/>
                 </a:solidFill>
@@ -6716,7 +6716,7 @@
               <a:t>0–10</a:t>
             </a:r>
             <a:r>
-              <a:rPr sz="1600" b="0" i="0">
+              <a:rPr sz="2000" b="0" i="0">
                 <a:solidFill>
                   <a:srgbClr val="333333"/>
                 </a:solidFill>
@@ -6732,7 +6732,7 @@
               </a:spcAft>
             </a:pPr>
             <a:r>
-              <a:rPr sz="1600" b="1" i="0">
+              <a:rPr sz="2000" b="1" i="0">
                 <a:solidFill>
                   <a:srgbClr val="333333"/>
                 </a:solidFill>
@@ -6741,7 +6741,7 @@
               <a:t>10–40</a:t>
             </a:r>
             <a:r>
-              <a:rPr sz="1600" b="0" i="0">
+              <a:rPr sz="2000" b="0" i="0">
                 <a:solidFill>
                   <a:srgbClr val="333333"/>
                 </a:solidFill>
@@ -6757,7 +6757,7 @@
               </a:spcAft>
             </a:pPr>
             <a:r>
-              <a:rPr sz="1600" b="0" i="0">
+              <a:rPr sz="2000" b="0" i="0">
                 <a:solidFill>
                   <a:srgbClr val="333333"/>
                 </a:solidFill>
@@ -6766,7 +6766,7 @@
               <a:t>–   </a:t>
             </a:r>
             <a:r>
-              <a:rPr sz="1600" b="1" i="0">
+              <a:rPr sz="2000" b="1" i="0">
                 <a:solidFill>
                   <a:srgbClr val="333333"/>
                 </a:solidFill>
@@ -6775,7 +6775,7 @@
               <a:t>40–100</a:t>
             </a:r>
             <a:r>
-              <a:rPr sz="1600" b="0" i="0">
+              <a:rPr sz="2000" b="0" i="0">
                 <a:solidFill>
                   <a:srgbClr val="333333"/>
                 </a:solidFill>
@@ -6791,7 +6791,7 @@
               </a:spcAft>
             </a:pPr>
             <a:r>
-              <a:rPr sz="1600" b="1" i="0">
+              <a:rPr sz="2000" b="1" i="0">
                 <a:solidFill>
                   <a:srgbClr val="333333"/>
                 </a:solidFill>
@@ -6800,7 +6800,7 @@
               <a:t>100–115</a:t>
             </a:r>
             <a:r>
-              <a:rPr sz="1600" b="0" i="0">
+              <a:rPr sz="2000" b="0" i="0">
                 <a:solidFill>
                   <a:srgbClr val="333333"/>
                 </a:solidFill>
@@ -6816,7 +6816,7 @@
               </a:spcAft>
             </a:pPr>
             <a:r>
-              <a:rPr sz="1600" b="1" i="0">
+              <a:rPr sz="2000" b="1" i="0">
                 <a:solidFill>
                   <a:srgbClr val="333333"/>
                 </a:solidFill>
@@ -6825,7 +6825,7 @@
               <a:t>115–120</a:t>
             </a:r>
             <a:r>
-              <a:rPr sz="1600" b="0" i="0">
+              <a:rPr sz="2000" b="0" i="0">
                 <a:solidFill>
                   <a:srgbClr val="333333"/>
                 </a:solidFill>
@@ -7045,7 +7045,7 @@
               </a:spcAft>
             </a:pPr>
             <a:r>
-              <a:rPr sz="1600" b="0" i="0">
+              <a:rPr sz="2000" b="0" i="0">
                 <a:solidFill>
                   <a:srgbClr val="333333"/>
                 </a:solidFill>
@@ -7061,7 +7061,7 @@
               </a:spcAft>
             </a:pPr>
             <a:r>
-              <a:rPr sz="1600" b="0" i="0">
+              <a:rPr sz="2000" b="0" i="0">
                 <a:solidFill>
                   <a:srgbClr val="333333"/>
                 </a:solidFill>
@@ -7077,7 +7077,7 @@
               </a:spcAft>
             </a:pPr>
             <a:r>
-              <a:rPr sz="1600" b="0" i="0">
+              <a:rPr sz="2000" b="0" i="0">
                 <a:solidFill>
                   <a:srgbClr val="333333"/>
                 </a:solidFill>
@@ -7086,7 +7086,7 @@
               <a:t>–   Completar el diagrama de </a:t>
             </a:r>
             <a:r>
-              <a:rPr sz="1600" b="1" i="0">
+              <a:rPr sz="2000" b="1" i="0">
                 <a:solidFill>
                   <a:srgbClr val="333333"/>
                 </a:solidFill>
@@ -7095,7 +7095,7 @@
               <a:t>despliegue</a:t>
             </a:r>
             <a:r>
-              <a:rPr sz="1600" b="0" i="0">
+              <a:rPr sz="2000" b="0" i="0">
                 <a:solidFill>
                   <a:srgbClr val="333333"/>
                 </a:solidFill>
@@ -7315,7 +7315,7 @@
               </a:spcAft>
             </a:pPr>
             <a:r>
-              <a:rPr sz="1600" b="0" i="0">
+              <a:rPr sz="2000" b="0" i="0">
                 <a:solidFill>
                   <a:srgbClr val="333333"/>
                 </a:solidFill>
@@ -7324,7 +7324,7 @@
               <a:t>–   </a:t>
             </a:r>
             <a:r>
-              <a:rPr sz="1600" b="1" i="0">
+              <a:rPr sz="2000" b="1" i="0">
                 <a:solidFill>
                   <a:srgbClr val="333333"/>
                 </a:solidFill>
@@ -7333,7 +7333,7 @@
               <a:t>Entregable:</a:t>
             </a:r>
             <a:r>
-              <a:rPr sz="1600" b="0" i="0">
+              <a:rPr sz="2000" b="0" i="0">
                 <a:solidFill>
                   <a:srgbClr val="333333"/>
                 </a:solidFill>
@@ -7349,7 +7349,7 @@
               </a:spcAft>
             </a:pPr>
             <a:r>
-              <a:rPr sz="1600" b="0" i="0">
+              <a:rPr sz="2000" b="0" i="0">
                 <a:solidFill>
                   <a:srgbClr val="333333"/>
                 </a:solidFill>
@@ -7358,7 +7358,7 @@
               <a:t>–   Herramienta: </a:t>
             </a:r>
             <a:r>
-              <a:rPr sz="1600" b="1" i="0">
+              <a:rPr sz="2000" b="1" i="0">
                 <a:solidFill>
                   <a:srgbClr val="333333"/>
                 </a:solidFill>
@@ -7374,7 +7374,7 @@
               </a:spcAft>
             </a:pPr>
             <a:r>
-              <a:rPr sz="1600" b="0" i="0">
+              <a:rPr sz="2000" b="0" i="0">
                 <a:solidFill>
                   <a:srgbClr val="333333"/>
                 </a:solidFill>
@@ -7383,7 +7383,7 @@
               <a:t>–   Todo lo que construyan hoy entra al </a:t>
             </a:r>
             <a:r>
-              <a:rPr sz="1600" b="1" i="0">
+              <a:rPr sz="2000" b="1" i="0">
                 <a:solidFill>
                   <a:srgbClr val="333333"/>
                 </a:solidFill>
@@ -7392,7 +7392,7 @@
               <a:t>informe/repo del PI</a:t>
             </a:r>
             <a:r>
-              <a:rPr sz="1600" b="0" i="0">
+              <a:rPr sz="2000" b="0" i="0">
                 <a:solidFill>
                   <a:srgbClr val="333333"/>
                 </a:solidFill>
@@ -7408,7 +7408,7 @@
               </a:spcAft>
             </a:pPr>
             <a:r>
-              <a:rPr sz="1600" b="0" i="0">
+              <a:rPr sz="2000" b="0" i="0">
                 <a:solidFill>
                   <a:srgbClr val="333333"/>
                 </a:solidFill>
@@ -7628,7 +7628,7 @@
               </a:spcAft>
             </a:pPr>
             <a:r>
-              <a:rPr sz="1600" b="0" i="0">
+              <a:rPr sz="2000" b="0" i="0">
                 <a:solidFill>
                   <a:srgbClr val="333333"/>
                 </a:solidFill>
@@ -7637,7 +7637,7 @@
               <a:t>–   Cliente → edge/balanceador → app → datos: </a:t>
             </a:r>
             <a:r>
-              <a:rPr sz="1600" b="1" i="0">
+              <a:rPr sz="2000" b="1" i="0">
                 <a:solidFill>
                   <a:srgbClr val="333333"/>
                 </a:solidFill>
@@ -7646,7 +7646,7 @@
               <a:t>tres zonas</a:t>
             </a:r>
             <a:r>
-              <a:rPr sz="1600" b="0" i="0">
+              <a:rPr sz="2000" b="0" i="0">
                 <a:solidFill>
                   <a:srgbClr val="333333"/>
                 </a:solidFill>
@@ -7662,7 +7662,7 @@
               </a:spcAft>
             </a:pPr>
             <a:r>
-              <a:rPr sz="1600" b="0" i="0">
+              <a:rPr sz="2000" b="0" i="0">
                 <a:solidFill>
                   <a:srgbClr val="333333"/>
                 </a:solidFill>
@@ -7671,7 +7671,7 @@
               <a:t>–   </a:t>
             </a:r>
             <a:r>
-              <a:rPr sz="1600" b="1" i="0">
+              <a:rPr sz="2000" b="1" i="0">
                 <a:solidFill>
                   <a:srgbClr val="333333"/>
                 </a:solidFill>
@@ -7680,7 +7680,7 @@
               <a:t>La base de datos va en la zona de datos</a:t>
             </a:r>
             <a:r>
-              <a:rPr sz="1600" b="0" i="0">
+              <a:rPr sz="2000" b="0" i="0">
                 <a:solidFill>
                   <a:srgbClr val="333333"/>
                 </a:solidFill>
@@ -7696,7 +7696,7 @@
               </a:spcAft>
             </a:pPr>
             <a:r>
-              <a:rPr sz="1600" b="0" i="0">
+              <a:rPr sz="2000" b="0" i="0">
                 <a:solidFill>
                   <a:srgbClr val="333333"/>
                 </a:solidFill>
@@ -7705,7 +7705,7 @@
               <a:t>–   </a:t>
             </a:r>
             <a:r>
-              <a:rPr sz="1600" b="1" i="0">
+              <a:rPr sz="2000" b="1" i="0">
                 <a:solidFill>
                   <a:srgbClr val="333333"/>
                 </a:solidFill>
@@ -7714,7 +7714,7 @@
               <a:t>Frontera de confianza:</a:t>
             </a:r>
             <a:r>
-              <a:rPr sz="1600" b="0" i="0">
+              <a:rPr sz="2000" b="0" i="0">
                 <a:solidFill>
                   <a:srgbClr val="333333"/>
                 </a:solidFill>
@@ -7730,7 +7730,7 @@
               </a:spcAft>
             </a:pPr>
             <a:r>
-              <a:rPr sz="1600" b="0" i="0">
+              <a:rPr sz="2000" b="0" i="0">
                 <a:solidFill>
                   <a:srgbClr val="333333"/>
                 </a:solidFill>
@@ -7739,7 +7739,7 @@
               <a:t>–   No inventen subnets AWS: usen zonas </a:t>
             </a:r>
             <a:r>
-              <a:rPr sz="1600" b="1" i="0">
+              <a:rPr sz="2000" b="1" i="0">
                 <a:solidFill>
                   <a:srgbClr val="333333"/>
                 </a:solidFill>
@@ -7748,7 +7748,7 @@
               <a:t>Pública / Privada / Datos</a:t>
             </a:r>
             <a:r>
-              <a:rPr sz="1600" b="0" i="0">
+              <a:rPr sz="2000" b="0" i="0">
                 <a:solidFill>
                   <a:srgbClr val="333333"/>
                 </a:solidFill>
@@ -7968,7 +7968,7 @@
               </a:spcAft>
             </a:pPr>
             <a:r>
-              <a:rPr sz="1600" b="0" i="0">
+              <a:rPr sz="2000" b="0" i="0">
                 <a:solidFill>
                   <a:srgbClr val="333333"/>
                 </a:solidFill>
@@ -7977,7 +7977,7 @@
               <a:t>–   Tres tipos y sus nombres exactos: </a:t>
             </a:r>
             <a:r>
-              <a:rPr sz="1600" b="1" i="0">
+              <a:rPr sz="2000" b="1" i="0">
                 <a:solidFill>
                   <a:srgbClr val="333333"/>
                 </a:solidFill>
@@ -7986,7 +7986,7 @@
               <a:t>Relacional</a:t>
             </a:r>
             <a:r>
-              <a:rPr sz="1600" b="0" i="0">
+              <a:rPr sz="2000" b="0" i="0">
                 <a:solidFill>
                   <a:srgbClr val="333333"/>
                 </a:solidFill>
@@ -7995,7 +7995,7 @@
               <a:t> · </a:t>
             </a:r>
             <a:r>
-              <a:rPr sz="1600" b="1" i="0">
+              <a:rPr sz="2000" b="1" i="0">
                 <a:solidFill>
                   <a:srgbClr val="333333"/>
                 </a:solidFill>
@@ -8004,7 +8004,7 @@
               <a:t>Bloque</a:t>
             </a:r>
             <a:r>
-              <a:rPr sz="1600" b="0" i="0">
+              <a:rPr sz="2000" b="0" i="0">
                 <a:solidFill>
                   <a:srgbClr val="333333"/>
                 </a:solidFill>
@@ -8013,7 +8013,7 @@
               <a:t> · </a:t>
             </a:r>
             <a:r>
-              <a:rPr sz="1600" b="1" i="0">
+              <a:rPr sz="2000" b="1" i="0">
                 <a:solidFill>
                   <a:srgbClr val="333333"/>
                 </a:solidFill>
@@ -8022,7 +8022,7 @@
               <a:t>Objeto</a:t>
             </a:r>
             <a:r>
-              <a:rPr sz="1600" b="0" i="0">
+              <a:rPr sz="2000" b="0" i="0">
                 <a:solidFill>
                   <a:srgbClr val="333333"/>
                 </a:solidFill>
@@ -8038,7 +8038,7 @@
               </a:spcAft>
             </a:pPr>
             <a:r>
-              <a:rPr sz="1600" b="0" i="0">
+              <a:rPr sz="2000" b="0" i="0">
                 <a:solidFill>
                   <a:srgbClr val="333333"/>
                 </a:solidFill>
@@ -8054,7 +8054,7 @@
               </a:spcAft>
             </a:pPr>
             <a:r>
-              <a:rPr sz="1600" b="0" i="0">
+              <a:rPr sz="2000" b="0" i="0">
                 <a:solidFill>
                   <a:srgbClr val="333333"/>
                 </a:solidFill>
@@ -8063,7 +8063,7 @@
               <a:t>–   Se justifica por la </a:t>
             </a:r>
             <a:r>
-              <a:rPr sz="1600" b="1" i="0">
+              <a:rPr sz="2000" b="1" i="0">
                 <a:solidFill>
                   <a:srgbClr val="333333"/>
                 </a:solidFill>
@@ -8072,7 +8072,7 @@
               <a:t>característica del dato</a:t>
             </a:r>
             <a:r>
-              <a:rPr sz="1600" b="0" i="0">
+              <a:rPr sz="2000" b="0" i="0">
                 <a:solidFill>
                   <a:srgbClr val="333333"/>
                 </a:solidFill>
@@ -8088,7 +8088,7 @@
               </a:spcAft>
             </a:pPr>
             <a:r>
-              <a:rPr sz="1600" b="0" i="0">
+              <a:rPr sz="2000" b="0" i="0">
                 <a:solidFill>
                   <a:srgbClr val="333333"/>
                 </a:solidFill>
@@ -8097,7 +8097,7 @@
               <a:t>–   Si tu dominio no maneja archivos, </a:t>
             </a:r>
             <a:r>
-              <a:rPr sz="1600" b="1" i="0">
+              <a:rPr sz="2000" b="1" i="0">
                 <a:solidFill>
                   <a:srgbClr val="333333"/>
                 </a:solidFill>
@@ -8106,7 +8106,7 @@
               <a:t>declara que no necesitas objeto</a:t>
             </a:r>
             <a:r>
-              <a:rPr sz="1600" b="0" i="0">
+              <a:rPr sz="2000" b="0" i="0">
                 <a:solidFill>
                   <a:srgbClr val="333333"/>
                 </a:solidFill>
@@ -8326,7 +8326,7 @@
               </a:spcAft>
             </a:pPr>
             <a:r>
-              <a:rPr sz="1600" b="0" i="0">
+              <a:rPr sz="2000" b="0" i="0">
                 <a:solidFill>
                   <a:srgbClr val="333333"/>
                 </a:solidFill>
@@ -8342,7 +8342,7 @@
               </a:spcAft>
             </a:pPr>
             <a:r>
-              <a:rPr sz="1600" b="0" i="0">
+              <a:rPr sz="2000" b="0" i="0">
                 <a:solidFill>
                   <a:srgbClr val="333333"/>
                 </a:solidFill>
@@ -8351,7 +8351,7 @@
               <a:t>–   Fronteras de confianza marcadas · </a:t>
             </a:r>
             <a:r>
-              <a:rPr sz="1600" b="1" i="0">
+              <a:rPr sz="2000" b="1" i="0">
                 <a:solidFill>
                   <a:srgbClr val="333333"/>
                 </a:solidFill>
@@ -8360,7 +8360,7 @@
               <a:t>que renderice sin error</a:t>
             </a:r>
             <a:r>
-              <a:rPr sz="1600" b="0" i="0">
+              <a:rPr sz="2000" b="0" i="0">
                 <a:solidFill>
                   <a:srgbClr val="333333"/>
                 </a:solidFill>
@@ -8376,7 +8376,7 @@
               </a:spcAft>
             </a:pPr>
             <a:r>
-              <a:rPr sz="1600" b="0" i="0">
+              <a:rPr sz="2000" b="0" i="0">
                 <a:solidFill>
                   <a:srgbClr val="333333"/>
                 </a:solidFill>

--- a/Arquitectura de Sistemas Computacionales/Clases/Clase 7 - Redes y almacenamiento cloud/Presentacion.pptx
+++ b/Arquitectura de Sistemas Computacionales/Clases/Clase 7 - Redes y almacenamiento cloud/Presentacion.pptx
@@ -4411,7 +4411,7 @@
                 </a:solidFill>
                 <a:latin typeface="Calibri"/>
               </a:rPr>
-              <a:t>ExamLab</a:t>
+              <a:t>la plataforma del curso</a:t>
             </a:r>
           </a:p>
           <a:p>
@@ -4608,7 +4608,7 @@
                 </a:solidFill>
                 <a:latin typeface="Calibri"/>
               </a:rPr>
-              <a:t>Del boceto a ExamLab (diagrama)</a:t>
+              <a:t>Del boceto a la plataforma del curso (diagrama)</a:t>
             </a:r>
           </a:p>
         </p:txBody>
@@ -4642,7 +4642,7 @@
                 </a:solidFill>
                 <a:latin typeface="Calibri"/>
               </a:rPr>
-              <a:t>El diagrama se entrega como código Mermaid dentro de ExamLab, no como imagen</a:t>
+              <a:t>El diagrama se entrega como código Mermaid dentro de la plataforma del curso, no como imagen</a:t>
             </a:r>
           </a:p>
         </p:txBody>
@@ -5139,7 +5139,7 @@
                 </a:solidFill>
                 <a:latin typeface="Calibri"/>
               </a:rPr>
-              <a:t>Pega y renderiza en ExamLab</a:t>
+              <a:t>Pega y renderiza en la plataforma del curso</a:t>
             </a:r>
           </a:p>
           <a:p>
@@ -5155,7 +5155,7 @@
                 </a:solidFill>
                 <a:latin typeface="Calibri"/>
               </a:rPr>
-              <a:t>Pega ese codigo en la caja de texto de la pregunta y mira como lo dibuja la plataforma. Si no renderiza, corrige ahi mismo: lo que se califica es el diagrama renderizado dentro de ExamLab.</a:t>
+              <a:t>Pega ese codigo en la caja de texto de la pregunta y mira como lo dibuja la plataforma. Si no renderiza, corrige ahi mismo: lo que se califica es el diagrama renderizado dentro de la plataforma del curso.</a:t>
             </a:r>
           </a:p>
         </p:txBody>
@@ -5976,7 +5976,7 @@
                 </a:solidFill>
                 <a:latin typeface="Calibri"/>
               </a:rPr>
-              <a:t>Entregable: Diagrama Deployment en Mermaid dentro de ExamLab (3 zonas + puertos) + tipo de almacenamiento por componente</a:t>
+              <a:t>Entregable: Diagrama Deployment en Mermaid dentro de la plataforma del curso (3 zonas + puertos) + tipo de almacenamiento por componente</a:t>
             </a:r>
           </a:p>
         </p:txBody>
@@ -6114,7 +6114,7 @@
                 </a:solidFill>
                 <a:latin typeface="Calibri"/>
               </a:rPr>
-              <a:t>Subir evidencias al paquete CloudLite (Drive/repo) y a ExamLab (https://uniaj.examlab.workers.dev/) domingo 23:59.</a:t>
+              <a:t>Subir evidencias al paquete CloudLite (Drive/repo) y a la plataforma del curso en la fecha que indique el docente.</a:t>
             </a:r>
           </a:p>
         </p:txBody>
@@ -6468,7 +6468,7 @@
                 </a:solidFill>
                 <a:latin typeface="Calibri"/>
               </a:rPr>
-              <a:t>Evidencia: Diagrama Deployment en Mermaid dentro de ExamLab (3 zonas + puertos) + tipo de almacenamiento por componente</a:t>
+              <a:t>Evidencia: Diagrama Deployment en Mermaid dentro de la plataforma del curso (3 zonas + puertos) + tipo de almacenamiento por componente</a:t>
             </a:r>
           </a:p>
           <a:p>
@@ -6831,7 +6831,7 @@
                 </a:solidFill>
                 <a:latin typeface="Calibri"/>
               </a:rPr>
-              <a:t> Cierre: criterio de éxito + plazo domingo 23:59.</a:t>
+              <a:t> Cierre: criterio de éxito + plazo en la fecha que indique el docente.</a:t>
             </a:r>
           </a:p>
         </p:txBody>
@@ -7339,7 +7339,7 @@
                 </a:solidFill>
                 <a:latin typeface="Calibri"/>
               </a:rPr>
-              <a:t> Diagrama Deployment en Mermaid dentro de ExamLab (3 zonas + puertos) + tipo de almacenamiento por componente</a:t>
+              <a:t> Diagrama Deployment en Mermaid dentro de la plataforma del curso (3 zonas + puertos) + tipo de almacenamiento por componente</a:t>
             </a:r>
           </a:p>
           <a:p>
@@ -7364,7 +7364,7 @@
                 </a:solidFill>
                 <a:latin typeface="Calibri"/>
               </a:rPr>
-              <a:t>ExamLab (Mermaid) · boceto en draw.io o Excalidraw</a:t>
+              <a:t>la plataforma del curso (Mermaid) · boceto en draw.io o Excalidraw</a:t>
             </a:r>
           </a:p>
           <a:p>
@@ -7414,7 +7414,7 @@
                 </a:solidFill>
                 <a:latin typeface="Calibri"/>
               </a:rPr>
-              <a:t>–   Individual por defecto · el docente puede autorizar equipos de 2–3; la entrega en ExamLab siempre es individual.</a:t>
+              <a:t>–   Individual por defecto · el docente puede autorizar equipos de 2–3; la entrega en la plataforma del curso siempre es individual.</a:t>
             </a:r>
           </a:p>
         </p:txBody>
@@ -8366,7 +8366,7 @@
                 </a:solidFill>
                 <a:latin typeface="Calibri"/>
               </a:rPr>
-              <a:t> en ExamLab.</a:t>
+              <a:t> en la plataforma del curso.</a:t>
             </a:r>
           </a:p>
           <a:p>
@@ -9119,7 +9119,7 @@
                 </a:solidFill>
                 <a:latin typeface="Calibri"/>
               </a:rPr>
-              <a:t>El Despliegue en Mermaid: el molde que ExamLab renderiza</a:t>
+              <a:t>El Despliegue en Mermaid: el molde que la plataforma del curso renderiza</a:t>
             </a:r>
           </a:p>
         </p:txBody>

--- a/Arquitectura de Sistemas Computacionales/Clases/Clase 7 - Redes y almacenamiento cloud/Presentacion.pptx
+++ b/Arquitectura de Sistemas Computacionales/Clases/Clase 7 - Redes y almacenamiento cloud/Presentacion.pptx
@@ -3577,7 +3577,7 @@
                 </a:solidFill>
                 <a:latin typeface="Calibri"/>
               </a:rPr>
-              <a:t>Herramientas de hoy</a:t>
+              <a:t>Del boceto a la plataforma del curso (diagrama)</a:t>
             </a:r>
           </a:p>
         </p:txBody>
@@ -3611,7 +3611,7 @@
                 </a:solidFill>
                 <a:latin typeface="Calibri"/>
               </a:rPr>
-              <a:t>Gratis · navegador o free tier · sin cuenta de pago</a:t>
+              <a:t>El diagrama se entrega como código Mermaid dentro de la plataforma del curso, no como imagen</a:t>
             </a:r>
           </a:p>
         </p:txBody>
@@ -3624,8 +3624,8 @@
         </p:nvSpPr>
         <p:spPr>
           <a:xfrm>
-            <a:off x="457200" y="1591056"/>
-            <a:ext cx="3624986" cy="2299716"/>
+            <a:off x="457200" y="1659636"/>
+            <a:ext cx="11277295" cy="1051560"/>
           </a:xfrm>
           <a:prstGeom prst="roundRect">
             <a:avLst>
@@ -3663,17 +3663,19 @@
       </p:sp>
       <p:sp>
         <p:nvSpPr>
-          <p:cNvPr id="7" name="Rectangle 6"/>
+          <p:cNvPr id="7" name="Rounded Rectangle 6"/>
           <p:cNvSpPr/>
           <p:nvPr/>
         </p:nvSpPr>
         <p:spPr>
           <a:xfrm>
-            <a:off x="457200" y="1591056"/>
-            <a:ext cx="3624986" cy="64008"/>
-          </a:xfrm>
-          <a:prstGeom prst="rect">
-            <a:avLst/>
+            <a:off x="594360" y="1965960"/>
+            <a:ext cx="438912" cy="438912"/>
+          </a:xfrm>
+          <a:prstGeom prst="roundRect">
+            <a:avLst>
+              <a:gd name="adj" fmla="val 12000"/>
+            </a:avLst>
           </a:prstGeom>
           <a:solidFill>
             <a:srgbClr val="095292"/>
@@ -3706,20 +3708,103 @@
       </p:sp>
       <p:sp>
         <p:nvSpPr>
-          <p:cNvPr id="8" name="Rectangle 7"/>
+          <p:cNvPr id="8" name="TextBox 7"/>
+          <p:cNvSpPr txBox="1"/>
+          <p:nvPr/>
+        </p:nvSpPr>
+        <p:spPr>
+          <a:xfrm>
+            <a:off x="594360" y="1965960"/>
+            <a:ext cx="438912" cy="438912"/>
+          </a:xfrm>
+          <a:prstGeom prst="rect">
+            <a:avLst/>
+          </a:prstGeom>
+          <a:noFill/>
+        </p:spPr>
+        <p:txBody>
+          <a:bodyPr wrap="square" anchor="ctr"/>
+          <a:lstStyle/>
+          <a:p>
+            <a:pPr algn="ctr"/>
+            <a:r>
+              <a:rPr sz="1600" b="1" i="0">
+                <a:solidFill>
+                  <a:srgbClr val="FFFFFF"/>
+                </a:solidFill>
+                <a:latin typeface="Calibri"/>
+              </a:rPr>
+              <a:t>1</a:t>
+            </a:r>
+          </a:p>
+        </p:txBody>
+      </p:sp>
+      <p:sp>
+        <p:nvSpPr>
+          <p:cNvPr id="9" name="TextBox 8"/>
+          <p:cNvSpPr txBox="1"/>
+          <p:nvPr/>
+        </p:nvSpPr>
+        <p:spPr>
+          <a:xfrm>
+            <a:off x="1188720" y="1751076"/>
+            <a:ext cx="10271455" cy="886968"/>
+          </a:xfrm>
+          <a:prstGeom prst="rect">
+            <a:avLst/>
+          </a:prstGeom>
+          <a:noFill/>
+        </p:spPr>
+        <p:txBody>
+          <a:bodyPr wrap="square" anchor="ctr"/>
+          <a:lstStyle/>
+          <a:p>
+            <a:r>
+              <a:rPr sz="1500" b="1" i="0">
+                <a:solidFill>
+                  <a:srgbClr val="095292"/>
+                </a:solidFill>
+                <a:latin typeface="Calibri"/>
+              </a:rPr>
+              <a:t>Disena visual</a:t>
+            </a:r>
+          </a:p>
+          <a:p>
+            <a:pPr>
+              <a:spcBef>
+                <a:spcPts val="200"/>
+              </a:spcBef>
+            </a:pPr>
+            <a:r>
+              <a:rPr sz="1300" b="0" i="0">
+                <a:solidFill>
+                  <a:srgbClr val="333333"/>
+                </a:solidFill>
+                <a:latin typeface="Calibri"/>
+              </a:rPr>
+              <a:t>Dibuja el diagrama como quieras en Excalidraw o draw.io: es mas rapido arrastrar cajas que escribir codigo, y ahi es donde piensas el modelo.</a:t>
+            </a:r>
+          </a:p>
+        </p:txBody>
+      </p:sp>
+      <p:sp>
+        <p:nvSpPr>
+          <p:cNvPr id="10" name="Rounded Rectangle 9"/>
           <p:cNvSpPr/>
           <p:nvPr/>
         </p:nvSpPr>
         <p:spPr>
           <a:xfrm>
-            <a:off x="457200" y="1655064"/>
-            <a:ext cx="3624986" cy="27432"/>
-          </a:xfrm>
-          <a:prstGeom prst="rect">
-            <a:avLst/>
+            <a:off x="457200" y="2802636"/>
+            <a:ext cx="11277295" cy="1051560"/>
+          </a:xfrm>
+          <a:prstGeom prst="roundRect">
+            <a:avLst>
+              <a:gd name="adj" fmla="val 12000"/>
+            </a:avLst>
           </a:prstGeom>
           <a:solidFill>
-            <a:srgbClr val="FFD000"/>
+            <a:srgbClr val="E8F4FA"/>
           </a:solidFill>
           <a:ln>
             <a:noFill/>
@@ -3747,40 +3832,61 @@
           </a:p>
         </p:txBody>
       </p:sp>
-      <p:pic>
-        <p:nvPicPr>
-          <p:cNvPr id="9" name="Picture 8" descr="drawio.png"/>
-          <p:cNvPicPr>
-            <a:picLocks noChangeAspect="1"/>
-          </p:cNvPicPr>
-          <p:nvPr/>
-        </p:nvPicPr>
-        <p:blipFill>
-          <a:blip r:embed="rId2"/>
-          <a:stretch>
-            <a:fillRect/>
-          </a:stretch>
-        </p:blipFill>
-        <p:spPr>
-          <a:xfrm>
-            <a:off x="1659331" y="1847087"/>
-            <a:ext cx="1220724" cy="1220724"/>
-          </a:xfrm>
-          <a:prstGeom prst="rect">
-            <a:avLst/>
-          </a:prstGeom>
-        </p:spPr>
-      </p:pic>
-      <p:sp>
-        <p:nvSpPr>
-          <p:cNvPr id="10" name="TextBox 9"/>
+      <p:sp>
+        <p:nvSpPr>
+          <p:cNvPr id="11" name="Rounded Rectangle 10"/>
+          <p:cNvSpPr/>
+          <p:nvPr/>
+        </p:nvSpPr>
+        <p:spPr>
+          <a:xfrm>
+            <a:off x="594360" y="3108960"/>
+            <a:ext cx="438912" cy="438912"/>
+          </a:xfrm>
+          <a:prstGeom prst="roundRect">
+            <a:avLst>
+              <a:gd name="adj" fmla="val 12000"/>
+            </a:avLst>
+          </a:prstGeom>
+          <a:solidFill>
+            <a:srgbClr val="095292"/>
+          </a:solidFill>
+          <a:ln>
+            <a:noFill/>
+          </a:ln>
+        </p:spPr>
+        <p:style>
+          <a:lnRef idx="1">
+            <a:schemeClr val="accent1"/>
+          </a:lnRef>
+          <a:fillRef idx="3">
+            <a:schemeClr val="accent1"/>
+          </a:fillRef>
+          <a:effectRef idx="2">
+            <a:schemeClr val="accent1"/>
+          </a:effectRef>
+          <a:fontRef idx="minor">
+            <a:schemeClr val="lt1"/>
+          </a:fontRef>
+        </p:style>
+        <p:txBody>
+          <a:bodyPr rtlCol="0" anchor="ctr"/>
+          <a:lstStyle/>
+          <a:p>
+            <a:pPr algn="ctr"/>
+          </a:p>
+        </p:txBody>
+      </p:sp>
+      <p:sp>
+        <p:nvSpPr>
+          <p:cNvPr id="12" name="TextBox 11"/>
           <p:cNvSpPr txBox="1"/>
           <p:nvPr/>
         </p:nvSpPr>
         <p:spPr>
           <a:xfrm>
-            <a:off x="530352" y="3159251"/>
-            <a:ext cx="3478682" cy="621792"/>
+            <a:off x="594360" y="3108960"/>
+            <a:ext cx="438912" cy="438912"/>
           </a:xfrm>
           <a:prstGeom prst="rect">
             <a:avLst/>
@@ -3788,48 +3894,80 @@
           <a:noFill/>
         </p:spPr>
         <p:txBody>
-          <a:bodyPr wrap="square" anchor="t"/>
+          <a:bodyPr wrap="square" anchor="ctr"/>
           <a:lstStyle/>
           <a:p>
             <a:pPr algn="ctr"/>
             <a:r>
-              <a:rPr sz="1300" b="1" i="0">
+              <a:rPr sz="1600" b="1" i="0">
+                <a:solidFill>
+                  <a:srgbClr val="FFFFFF"/>
+                </a:solidFill>
+                <a:latin typeface="Calibri"/>
+              </a:rPr>
+              <a:t>2</a:t>
+            </a:r>
+          </a:p>
+        </p:txBody>
+      </p:sp>
+      <p:sp>
+        <p:nvSpPr>
+          <p:cNvPr id="13" name="TextBox 12"/>
+          <p:cNvSpPr txBox="1"/>
+          <p:nvPr/>
+        </p:nvSpPr>
+        <p:spPr>
+          <a:xfrm>
+            <a:off x="1188720" y="2894076"/>
+            <a:ext cx="10271455" cy="886968"/>
+          </a:xfrm>
+          <a:prstGeom prst="rect">
+            <a:avLst/>
+          </a:prstGeom>
+          <a:noFill/>
+        </p:spPr>
+        <p:txBody>
+          <a:bodyPr wrap="square" anchor="ctr"/>
+          <a:lstStyle/>
+          <a:p>
+            <a:r>
+              <a:rPr sz="1500" b="1" i="0">
                 <a:solidFill>
                   <a:srgbClr val="095292"/>
                 </a:solidFill>
                 <a:latin typeface="Calibri"/>
               </a:rPr>
-              <a:t>draw.io</a:t>
-            </a:r>
-          </a:p>
-          <a:p>
-            <a:pPr algn="ctr">
+              <a:t>Traduce con IA</a:t>
+            </a:r>
+          </a:p>
+          <a:p>
+            <a:pPr>
               <a:spcBef>
                 <a:spcPts val="200"/>
               </a:spcBef>
             </a:pPr>
             <a:r>
-              <a:rPr sz="1000" b="0" i="0">
-                <a:solidFill>
-                  <a:srgbClr val="666666"/>
-                </a:solidFill>
-                <a:latin typeface="Calibri"/>
-              </a:rPr>
-              <a:t>Deployment</a:t>
-            </a:r>
-          </a:p>
-        </p:txBody>
-      </p:sp>
-      <p:sp>
-        <p:nvSpPr>
-          <p:cNvPr id="11" name="Rounded Rectangle 10"/>
+              <a:rPr sz="1300" b="0" i="0">
+                <a:solidFill>
+                  <a:srgbClr val="333333"/>
+                </a:solidFill>
+                <a:latin typeface="Calibri"/>
+              </a:rPr>
+              <a:t>Copia o describe tu boceto a una IA y pidele el codigo Mermaid: «convierte este diagrama a Mermaid usando flowchart». Revisa el resultado: la IA acierta la sintaxis, no tu modelo.</a:t>
+            </a:r>
+          </a:p>
+        </p:txBody>
+      </p:sp>
+      <p:sp>
+        <p:nvSpPr>
+          <p:cNvPr id="14" name="Rounded Rectangle 13"/>
           <p:cNvSpPr/>
           <p:nvPr/>
         </p:nvSpPr>
         <p:spPr>
           <a:xfrm>
-            <a:off x="4283354" y="1591056"/>
-            <a:ext cx="3624986" cy="2299716"/>
+            <a:off x="457200" y="3945636"/>
+            <a:ext cx="11277295" cy="1051560"/>
           </a:xfrm>
           <a:prstGeom prst="roundRect">
             <a:avLst>
@@ -3867,17 +4005,19 @@
       </p:sp>
       <p:sp>
         <p:nvSpPr>
-          <p:cNvPr id="12" name="Rectangle 11"/>
+          <p:cNvPr id="15" name="Rounded Rectangle 14"/>
           <p:cNvSpPr/>
           <p:nvPr/>
         </p:nvSpPr>
         <p:spPr>
           <a:xfrm>
-            <a:off x="4283354" y="1591056"/>
-            <a:ext cx="3624986" cy="64008"/>
-          </a:xfrm>
-          <a:prstGeom prst="rect">
-            <a:avLst/>
+            <a:off x="594360" y="4251960"/>
+            <a:ext cx="438912" cy="438912"/>
+          </a:xfrm>
+          <a:prstGeom prst="roundRect">
+            <a:avLst>
+              <a:gd name="adj" fmla="val 12000"/>
+            </a:avLst>
           </a:prstGeom>
           <a:solidFill>
             <a:srgbClr val="095292"/>
@@ -3910,20 +4050,103 @@
       </p:sp>
       <p:sp>
         <p:nvSpPr>
-          <p:cNvPr id="13" name="Rectangle 12"/>
+          <p:cNvPr id="16" name="TextBox 15"/>
+          <p:cNvSpPr txBox="1"/>
+          <p:nvPr/>
+        </p:nvSpPr>
+        <p:spPr>
+          <a:xfrm>
+            <a:off x="594360" y="4251960"/>
+            <a:ext cx="438912" cy="438912"/>
+          </a:xfrm>
+          <a:prstGeom prst="rect">
+            <a:avLst/>
+          </a:prstGeom>
+          <a:noFill/>
+        </p:spPr>
+        <p:txBody>
+          <a:bodyPr wrap="square" anchor="ctr"/>
+          <a:lstStyle/>
+          <a:p>
+            <a:pPr algn="ctr"/>
+            <a:r>
+              <a:rPr sz="1600" b="1" i="0">
+                <a:solidFill>
+                  <a:srgbClr val="FFFFFF"/>
+                </a:solidFill>
+                <a:latin typeface="Calibri"/>
+              </a:rPr>
+              <a:t>3</a:t>
+            </a:r>
+          </a:p>
+        </p:txBody>
+      </p:sp>
+      <p:sp>
+        <p:nvSpPr>
+          <p:cNvPr id="17" name="TextBox 16"/>
+          <p:cNvSpPr txBox="1"/>
+          <p:nvPr/>
+        </p:nvSpPr>
+        <p:spPr>
+          <a:xfrm>
+            <a:off x="1188720" y="4037076"/>
+            <a:ext cx="10271455" cy="886968"/>
+          </a:xfrm>
+          <a:prstGeom prst="rect">
+            <a:avLst/>
+          </a:prstGeom>
+          <a:noFill/>
+        </p:spPr>
+        <p:txBody>
+          <a:bodyPr wrap="square" anchor="ctr"/>
+          <a:lstStyle/>
+          <a:p>
+            <a:r>
+              <a:rPr sz="1500" b="1" i="0">
+                <a:solidFill>
+                  <a:srgbClr val="095292"/>
+                </a:solidFill>
+                <a:latin typeface="Calibri"/>
+              </a:rPr>
+              <a:t>Pega y renderiza en la plataforma del curso</a:t>
+            </a:r>
+          </a:p>
+          <a:p>
+            <a:pPr>
+              <a:spcBef>
+                <a:spcPts val="200"/>
+              </a:spcBef>
+            </a:pPr>
+            <a:r>
+              <a:rPr sz="1300" b="0" i="0">
+                <a:solidFill>
+                  <a:srgbClr val="333333"/>
+                </a:solidFill>
+                <a:latin typeface="Calibri"/>
+              </a:rPr>
+              <a:t>Pega ese codigo en la caja de texto de la pregunta y mira como lo dibuja la plataforma. Si no renderiza, corrige ahi mismo: lo que se califica es el diagrama renderizado dentro de la plataforma del curso.</a:t>
+            </a:r>
+          </a:p>
+        </p:txBody>
+      </p:sp>
+      <p:sp>
+        <p:nvSpPr>
+          <p:cNvPr id="18" name="Rounded Rectangle 17"/>
           <p:cNvSpPr/>
           <p:nvPr/>
         </p:nvSpPr>
         <p:spPr>
           <a:xfrm>
-            <a:off x="4283354" y="1655064"/>
-            <a:ext cx="3624986" cy="27432"/>
-          </a:xfrm>
-          <a:prstGeom prst="rect">
-            <a:avLst/>
+            <a:off x="457200" y="5088636"/>
+            <a:ext cx="11277295" cy="1051560"/>
+          </a:xfrm>
+          <a:prstGeom prst="roundRect">
+            <a:avLst>
+              <a:gd name="adj" fmla="val 12000"/>
+            </a:avLst>
           </a:prstGeom>
           <a:solidFill>
-            <a:srgbClr val="FFD000"/>
+            <a:srgbClr val="E8F4FA"/>
           </a:solidFill>
           <a:ln>
             <a:noFill/>
@@ -3951,137 +4174,21 @@
           </a:p>
         </p:txBody>
       </p:sp>
-      <p:pic>
-        <p:nvPicPr>
-          <p:cNvPr id="14" name="Picture 13" descr="google_docs.png"/>
-          <p:cNvPicPr>
-            <a:picLocks noChangeAspect="1"/>
-          </p:cNvPicPr>
-          <p:nvPr/>
-        </p:nvPicPr>
-        <p:blipFill>
-          <a:blip r:embed="rId3"/>
-          <a:stretch>
-            <a:fillRect/>
-          </a:stretch>
-        </p:blipFill>
-        <p:spPr>
-          <a:xfrm>
-            <a:off x="5485485" y="1847087"/>
-            <a:ext cx="1220724" cy="1220724"/>
-          </a:xfrm>
-          <a:prstGeom prst="rect">
-            <a:avLst/>
-          </a:prstGeom>
-        </p:spPr>
-      </p:pic>
-      <p:sp>
-        <p:nvSpPr>
-          <p:cNvPr id="15" name="TextBox 14"/>
-          <p:cNvSpPr txBox="1"/>
-          <p:nvPr/>
-        </p:nvSpPr>
-        <p:spPr>
-          <a:xfrm>
-            <a:off x="4356506" y="3159251"/>
-            <a:ext cx="3478682" cy="621792"/>
-          </a:xfrm>
-          <a:prstGeom prst="rect">
-            <a:avLst/>
-          </a:prstGeom>
-          <a:noFill/>
-        </p:spPr>
-        <p:txBody>
-          <a:bodyPr wrap="square" anchor="t"/>
-          <a:lstStyle/>
-          <a:p>
-            <a:pPr algn="ctr"/>
-            <a:r>
-              <a:rPr sz="1300" b="1" i="0">
-                <a:solidFill>
-                  <a:srgbClr val="095292"/>
-                </a:solidFill>
-                <a:latin typeface="Calibri"/>
-              </a:rPr>
-              <a:t>Google Docs</a:t>
-            </a:r>
-          </a:p>
-          <a:p>
-            <a:pPr algn="ctr">
-              <a:spcBef>
-                <a:spcPts val="200"/>
-              </a:spcBef>
-            </a:pPr>
-            <a:r>
-              <a:rPr sz="1000" b="0" i="0">
-                <a:solidFill>
-                  <a:srgbClr val="666666"/>
-                </a:solidFill>
-                <a:latin typeface="Calibri"/>
-              </a:rPr>
-              <a:t>Informe PI</a:t>
-            </a:r>
-          </a:p>
-        </p:txBody>
-      </p:sp>
-      <p:sp>
-        <p:nvSpPr>
-          <p:cNvPr id="16" name="Rounded Rectangle 15"/>
+      <p:sp>
+        <p:nvSpPr>
+          <p:cNvPr id="19" name="Rounded Rectangle 18"/>
           <p:cNvSpPr/>
           <p:nvPr/>
         </p:nvSpPr>
         <p:spPr>
           <a:xfrm>
-            <a:off x="8109508" y="1591056"/>
-            <a:ext cx="3624986" cy="2299716"/>
+            <a:off x="594360" y="5394960"/>
+            <a:ext cx="438912" cy="438912"/>
           </a:xfrm>
           <a:prstGeom prst="roundRect">
             <a:avLst>
               <a:gd name="adj" fmla="val 12000"/>
             </a:avLst>
-          </a:prstGeom>
-          <a:solidFill>
-            <a:srgbClr val="F2F2F2"/>
-          </a:solidFill>
-          <a:ln>
-            <a:noFill/>
-          </a:ln>
-        </p:spPr>
-        <p:style>
-          <a:lnRef idx="1">
-            <a:schemeClr val="accent1"/>
-          </a:lnRef>
-          <a:fillRef idx="3">
-            <a:schemeClr val="accent1"/>
-          </a:fillRef>
-          <a:effectRef idx="2">
-            <a:schemeClr val="accent1"/>
-          </a:effectRef>
-          <a:fontRef idx="minor">
-            <a:schemeClr val="lt1"/>
-          </a:fontRef>
-        </p:style>
-        <p:txBody>
-          <a:bodyPr rtlCol="0" anchor="ctr"/>
-          <a:lstStyle/>
-          <a:p>
-            <a:pPr algn="ctr"/>
-          </a:p>
-        </p:txBody>
-      </p:sp>
-      <p:sp>
-        <p:nvSpPr>
-          <p:cNvPr id="17" name="Rectangle 16"/>
-          <p:cNvSpPr/>
-          <p:nvPr/>
-        </p:nvSpPr>
-        <p:spPr>
-          <a:xfrm>
-            <a:off x="8109508" y="1591056"/>
-            <a:ext cx="3624986" cy="64008"/>
-          </a:xfrm>
-          <a:prstGeom prst="rect">
-            <a:avLst/>
           </a:prstGeom>
           <a:solidFill>
             <a:srgbClr val="095292"/>
@@ -4114,81 +4221,14 @@
       </p:sp>
       <p:sp>
         <p:nvSpPr>
-          <p:cNvPr id="18" name="Rectangle 17"/>
-          <p:cNvSpPr/>
-          <p:nvPr/>
-        </p:nvSpPr>
-        <p:spPr>
-          <a:xfrm>
-            <a:off x="8109508" y="1655064"/>
-            <a:ext cx="3624986" cy="27432"/>
-          </a:xfrm>
-          <a:prstGeom prst="rect">
-            <a:avLst/>
-          </a:prstGeom>
-          <a:solidFill>
-            <a:srgbClr val="FFD000"/>
-          </a:solidFill>
-          <a:ln>
-            <a:noFill/>
-          </a:ln>
-        </p:spPr>
-        <p:style>
-          <a:lnRef idx="1">
-            <a:schemeClr val="accent1"/>
-          </a:lnRef>
-          <a:fillRef idx="3">
-            <a:schemeClr val="accent1"/>
-          </a:fillRef>
-          <a:effectRef idx="2">
-            <a:schemeClr val="accent1"/>
-          </a:effectRef>
-          <a:fontRef idx="minor">
-            <a:schemeClr val="lt1"/>
-          </a:fontRef>
-        </p:style>
-        <p:txBody>
-          <a:bodyPr rtlCol="0" anchor="ctr"/>
-          <a:lstStyle/>
-          <a:p>
-            <a:pPr algn="ctr"/>
-          </a:p>
-        </p:txBody>
-      </p:sp>
-      <p:pic>
-        <p:nvPicPr>
-          <p:cNvPr id="19" name="Picture 18" descr="mermaid.png"/>
-          <p:cNvPicPr>
-            <a:picLocks noChangeAspect="1"/>
-          </p:cNvPicPr>
-          <p:nvPr/>
-        </p:nvPicPr>
-        <p:blipFill>
-          <a:blip r:embed="rId4"/>
-          <a:stretch>
-            <a:fillRect/>
-          </a:stretch>
-        </p:blipFill>
-        <p:spPr>
-          <a:xfrm>
-            <a:off x="9311640" y="1847087"/>
-            <a:ext cx="1220724" cy="1220724"/>
-          </a:xfrm>
-          <a:prstGeom prst="rect">
-            <a:avLst/>
-          </a:prstGeom>
-        </p:spPr>
-      </p:pic>
-      <p:sp>
-        <p:nvSpPr>
           <p:cNvPr id="20" name="TextBox 19"/>
           <p:cNvSpPr txBox="1"/>
           <p:nvPr/>
         </p:nvSpPr>
         <p:spPr>
           <a:xfrm>
-            <a:off x="8182660" y="3159251"/>
-            <a:ext cx="3478682" cy="621792"/>
+            <a:off x="594360" y="5394960"/>
+            <a:ext cx="438912" cy="438912"/>
           </a:xfrm>
           <a:prstGeom prst="rect">
             <a:avLst/>
@@ -4196,245 +4236,73 @@
           <a:noFill/>
         </p:spPr>
         <p:txBody>
-          <a:bodyPr wrap="square" anchor="t"/>
+          <a:bodyPr wrap="square" anchor="ctr"/>
           <a:lstStyle/>
           <a:p>
             <a:pPr algn="ctr"/>
             <a:r>
-              <a:rPr sz="1300" b="1" i="0">
+              <a:rPr sz="1600" b="1" i="0">
+                <a:solidFill>
+                  <a:srgbClr val="FFFFFF"/>
+                </a:solidFill>
+                <a:latin typeface="Calibri"/>
+              </a:rPr>
+              <a:t>4</a:t>
+            </a:r>
+          </a:p>
+        </p:txBody>
+      </p:sp>
+      <p:sp>
+        <p:nvSpPr>
+          <p:cNvPr id="21" name="TextBox 20"/>
+          <p:cNvSpPr txBox="1"/>
+          <p:nvPr/>
+        </p:nvSpPr>
+        <p:spPr>
+          <a:xfrm>
+            <a:off x="1188720" y="5180076"/>
+            <a:ext cx="10271455" cy="886968"/>
+          </a:xfrm>
+          <a:prstGeom prst="rect">
+            <a:avLst/>
+          </a:prstGeom>
+          <a:noFill/>
+        </p:spPr>
+        <p:txBody>
+          <a:bodyPr wrap="square" anchor="ctr"/>
+          <a:lstStyle/>
+          <a:p>
+            <a:r>
+              <a:rPr sz="1500" b="1" i="0">
                 <a:solidFill>
                   <a:srgbClr val="095292"/>
                 </a:solidFill>
                 <a:latin typeface="Calibri"/>
               </a:rPr>
-              <a:t>Mermaid</a:t>
-            </a:r>
-          </a:p>
-          <a:p>
-            <a:pPr algn="ctr">
+              <a:t>Guarda el PNG para tu PI</a:t>
+            </a:r>
+          </a:p>
+          <a:p>
+            <a:pPr>
               <a:spcBef>
                 <a:spcPts val="200"/>
               </a:spcBef>
             </a:pPr>
             <a:r>
-              <a:rPr sz="1000" b="0" i="0">
-                <a:solidFill>
-                  <a:srgbClr val="666666"/>
-                </a:solidFill>
-                <a:latin typeface="Calibri"/>
-              </a:rPr>
-              <a:t>Codigo del diagrama</a:t>
-            </a:r>
-          </a:p>
-        </p:txBody>
-      </p:sp>
-      <p:sp>
-        <p:nvSpPr>
-          <p:cNvPr id="21" name="Rounded Rectangle 20"/>
-          <p:cNvSpPr/>
-          <p:nvPr/>
-        </p:nvSpPr>
-        <p:spPr>
-          <a:xfrm>
-            <a:off x="4283354" y="4055364"/>
-            <a:ext cx="3624986" cy="2299716"/>
-          </a:xfrm>
-          <a:prstGeom prst="roundRect">
-            <a:avLst>
-              <a:gd name="adj" fmla="val 12000"/>
-            </a:avLst>
-          </a:prstGeom>
-          <a:solidFill>
-            <a:srgbClr val="F2F2F2"/>
-          </a:solidFill>
-          <a:ln>
-            <a:noFill/>
-          </a:ln>
-        </p:spPr>
-        <p:style>
-          <a:lnRef idx="1">
-            <a:schemeClr val="accent1"/>
-          </a:lnRef>
-          <a:fillRef idx="3">
-            <a:schemeClr val="accent1"/>
-          </a:fillRef>
-          <a:effectRef idx="2">
-            <a:schemeClr val="accent1"/>
-          </a:effectRef>
-          <a:fontRef idx="minor">
-            <a:schemeClr val="lt1"/>
-          </a:fontRef>
-        </p:style>
-        <p:txBody>
-          <a:bodyPr rtlCol="0" anchor="ctr"/>
-          <a:lstStyle/>
-          <a:p>
-            <a:pPr algn="ctr"/>
-          </a:p>
-        </p:txBody>
-      </p:sp>
-      <p:sp>
-        <p:nvSpPr>
-          <p:cNvPr id="22" name="Rectangle 21"/>
-          <p:cNvSpPr/>
-          <p:nvPr/>
-        </p:nvSpPr>
-        <p:spPr>
-          <a:xfrm>
-            <a:off x="4283354" y="4055364"/>
-            <a:ext cx="3624986" cy="64008"/>
-          </a:xfrm>
-          <a:prstGeom prst="rect">
-            <a:avLst/>
-          </a:prstGeom>
-          <a:solidFill>
-            <a:srgbClr val="095292"/>
-          </a:solidFill>
-          <a:ln>
-            <a:noFill/>
-          </a:ln>
-        </p:spPr>
-        <p:style>
-          <a:lnRef idx="1">
-            <a:schemeClr val="accent1"/>
-          </a:lnRef>
-          <a:fillRef idx="3">
-            <a:schemeClr val="accent1"/>
-          </a:fillRef>
-          <a:effectRef idx="2">
-            <a:schemeClr val="accent1"/>
-          </a:effectRef>
-          <a:fontRef idx="minor">
-            <a:schemeClr val="lt1"/>
-          </a:fontRef>
-        </p:style>
-        <p:txBody>
-          <a:bodyPr rtlCol="0" anchor="ctr"/>
-          <a:lstStyle/>
-          <a:p>
-            <a:pPr algn="ctr"/>
-          </a:p>
-        </p:txBody>
-      </p:sp>
-      <p:sp>
-        <p:nvSpPr>
-          <p:cNvPr id="23" name="Rectangle 22"/>
-          <p:cNvSpPr/>
-          <p:nvPr/>
-        </p:nvSpPr>
-        <p:spPr>
-          <a:xfrm>
-            <a:off x="4283354" y="4119372"/>
-            <a:ext cx="3624986" cy="27432"/>
-          </a:xfrm>
-          <a:prstGeom prst="rect">
-            <a:avLst/>
-          </a:prstGeom>
-          <a:solidFill>
-            <a:srgbClr val="FFD000"/>
-          </a:solidFill>
-          <a:ln>
-            <a:noFill/>
-          </a:ln>
-        </p:spPr>
-        <p:style>
-          <a:lnRef idx="1">
-            <a:schemeClr val="accent1"/>
-          </a:lnRef>
-          <a:fillRef idx="3">
-            <a:schemeClr val="accent1"/>
-          </a:fillRef>
-          <a:effectRef idx="2">
-            <a:schemeClr val="accent1"/>
-          </a:effectRef>
-          <a:fontRef idx="minor">
-            <a:schemeClr val="lt1"/>
-          </a:fontRef>
-        </p:style>
-        <p:txBody>
-          <a:bodyPr rtlCol="0" anchor="ctr"/>
-          <a:lstStyle/>
-          <a:p>
-            <a:pPr algn="ctr"/>
-          </a:p>
-        </p:txBody>
-      </p:sp>
-      <p:pic>
-        <p:nvPicPr>
-          <p:cNvPr id="24" name="Picture 23" descr="examlab.png"/>
-          <p:cNvPicPr>
-            <a:picLocks noChangeAspect="1"/>
-          </p:cNvPicPr>
-          <p:nvPr/>
-        </p:nvPicPr>
-        <p:blipFill>
-          <a:blip r:embed="rId5"/>
-          <a:stretch>
-            <a:fillRect/>
-          </a:stretch>
-        </p:blipFill>
-        <p:spPr>
-          <a:xfrm>
-            <a:off x="5485485" y="4311396"/>
-            <a:ext cx="1220724" cy="1220724"/>
-          </a:xfrm>
-          <a:prstGeom prst="rect">
-            <a:avLst/>
-          </a:prstGeom>
-        </p:spPr>
-      </p:pic>
-      <p:sp>
-        <p:nvSpPr>
-          <p:cNvPr id="25" name="TextBox 24"/>
-          <p:cNvSpPr txBox="1"/>
-          <p:nvPr/>
-        </p:nvSpPr>
-        <p:spPr>
-          <a:xfrm>
-            <a:off x="4356506" y="5623560"/>
-            <a:ext cx="3478682" cy="621792"/>
-          </a:xfrm>
-          <a:prstGeom prst="rect">
-            <a:avLst/>
-          </a:prstGeom>
-          <a:noFill/>
-        </p:spPr>
-        <p:txBody>
-          <a:bodyPr wrap="square" anchor="t"/>
-          <a:lstStyle/>
-          <a:p>
-            <a:pPr algn="ctr"/>
-            <a:r>
-              <a:rPr sz="1300" b="1" i="0">
-                <a:solidFill>
-                  <a:srgbClr val="095292"/>
-                </a:solidFill>
-                <a:latin typeface="Calibri"/>
-              </a:rPr>
-              <a:t>la plataforma del curso</a:t>
-            </a:r>
-          </a:p>
-          <a:p>
-            <a:pPr algn="ctr">
-              <a:spcBef>
-                <a:spcPts val="200"/>
-              </a:spcBef>
-            </a:pPr>
-            <a:r>
-              <a:rPr sz="1000" b="0" i="0">
-                <a:solidFill>
-                  <a:srgbClr val="666666"/>
-                </a:solidFill>
-                <a:latin typeface="Calibri"/>
-              </a:rPr>
-              <a:t>Donde se entrega</a:t>
-            </a:r>
-          </a:p>
-        </p:txBody>
-      </p:sp>
-      <p:sp>
-        <p:nvSpPr>
-          <p:cNvPr id="26" name="TextBox 25"/>
+              <a:rPr sz="1300" b="0" i="0">
+                <a:solidFill>
+                  <a:srgbClr val="333333"/>
+                </a:solidFill>
+                <a:latin typeface="Calibri"/>
+              </a:rPr>
+              <a:t>Exporta tambien la imagen a la carpeta de tu Proyecto Integrador. Esa copia es para tu informe; no reemplaza la respuesta en la plataforma.</a:t>
+            </a:r>
+          </a:p>
+        </p:txBody>
+      </p:sp>
+      <p:sp>
+        <p:nvSpPr>
+          <p:cNvPr id="22" name="TextBox 21"/>
           <p:cNvSpPr txBox="1"/>
           <p:nvPr/>
         </p:nvSpPr>
@@ -4502,7 +4370,7 @@
         <p:spPr>
           <a:xfrm>
             <a:off x="0" y="0"/>
-            <a:ext cx="12191695" cy="1170432"/>
+            <a:ext cx="12191695" cy="960120"/>
           </a:xfrm>
           <a:prstGeom prst="rect">
             <a:avLst/>
@@ -4544,7 +4412,7 @@
         </p:nvSpPr>
         <p:spPr>
           <a:xfrm>
-            <a:off x="0" y="1170432"/>
+            <a:off x="0" y="960120"/>
             <a:ext cx="12191695" cy="41148"/>
           </a:xfrm>
           <a:prstGeom prst="rect">
@@ -4588,7 +4456,7 @@
         <p:spPr>
           <a:xfrm>
             <a:off x="457200" y="164592"/>
-            <a:ext cx="11277295" cy="384048"/>
+            <a:ext cx="11277295" cy="502920"/>
           </a:xfrm>
           <a:prstGeom prst="rect">
             <a:avLst/>
@@ -4608,7 +4476,7 @@
                 </a:solidFill>
                 <a:latin typeface="Calibri"/>
               </a:rPr>
-              <a:t>Del boceto a la plataforma del curso (diagrama)</a:t>
+              <a:t>PI CloudLite — entregable de hoy</a:t>
             </a:r>
           </a:p>
         </p:txBody>
@@ -4621,8 +4489,8 @@
         </p:nvSpPr>
         <p:spPr>
           <a:xfrm>
-            <a:off x="457200" y="566928"/>
-            <a:ext cx="11277295" cy="411480"/>
+            <a:off x="457200" y="1170432"/>
+            <a:ext cx="11277295" cy="5230368"/>
           </a:xfrm>
           <a:prstGeom prst="rect">
             <a:avLst/>
@@ -4635,705 +4503,119 @@
           </a:bodyPr>
           <a:lstStyle/>
           <a:p>
-            <a:r>
-              <a:rPr sz="1400" b="0" i="0">
-                <a:solidFill>
-                  <a:srgbClr val="B8D8EE"/>
-                </a:solidFill>
-                <a:latin typeface="Calibri"/>
-              </a:rPr>
-              <a:t>El diagrama se entrega como código Mermaid dentro de la plataforma del curso, no como imagen</a:t>
-            </a:r>
-          </a:p>
-        </p:txBody>
-      </p:sp>
-      <p:sp>
-        <p:nvSpPr>
-          <p:cNvPr id="6" name="Rounded Rectangle 5"/>
-          <p:cNvSpPr/>
-          <p:nvPr/>
-        </p:nvSpPr>
-        <p:spPr>
-          <a:xfrm>
-            <a:off x="457200" y="1659636"/>
-            <a:ext cx="11277295" cy="1051560"/>
-          </a:xfrm>
-          <a:prstGeom prst="roundRect">
-            <a:avLst>
-              <a:gd name="adj" fmla="val 12000"/>
-            </a:avLst>
-          </a:prstGeom>
-          <a:solidFill>
-            <a:srgbClr val="F2F2F2"/>
-          </a:solidFill>
-          <a:ln>
-            <a:noFill/>
-          </a:ln>
-        </p:spPr>
-        <p:style>
-          <a:lnRef idx="1">
-            <a:schemeClr val="accent1"/>
-          </a:lnRef>
-          <a:fillRef idx="3">
-            <a:schemeClr val="accent1"/>
-          </a:fillRef>
-          <a:effectRef idx="2">
-            <a:schemeClr val="accent1"/>
-          </a:effectRef>
-          <a:fontRef idx="minor">
-            <a:schemeClr val="lt1"/>
-          </a:fontRef>
-        </p:style>
-        <p:txBody>
-          <a:bodyPr rtlCol="0" anchor="ctr"/>
-          <a:lstStyle/>
-          <a:p>
-            <a:pPr algn="ctr"/>
-          </a:p>
-        </p:txBody>
-      </p:sp>
-      <p:sp>
-        <p:nvSpPr>
-          <p:cNvPr id="7" name="Rounded Rectangle 6"/>
-          <p:cNvSpPr/>
-          <p:nvPr/>
-        </p:nvSpPr>
-        <p:spPr>
-          <a:xfrm>
-            <a:off x="594360" y="1965960"/>
-            <a:ext cx="438912" cy="438912"/>
-          </a:xfrm>
-          <a:prstGeom prst="roundRect">
-            <a:avLst>
-              <a:gd name="adj" fmla="val 12000"/>
-            </a:avLst>
-          </a:prstGeom>
-          <a:solidFill>
-            <a:srgbClr val="095292"/>
-          </a:solidFill>
-          <a:ln>
-            <a:noFill/>
-          </a:ln>
-        </p:spPr>
-        <p:style>
-          <a:lnRef idx="1">
-            <a:schemeClr val="accent1"/>
-          </a:lnRef>
-          <a:fillRef idx="3">
-            <a:schemeClr val="accent1"/>
-          </a:fillRef>
-          <a:effectRef idx="2">
-            <a:schemeClr val="accent1"/>
-          </a:effectRef>
-          <a:fontRef idx="minor">
-            <a:schemeClr val="lt1"/>
-          </a:fontRef>
-        </p:style>
-        <p:txBody>
-          <a:bodyPr rtlCol="0" anchor="ctr"/>
-          <a:lstStyle/>
-          <a:p>
-            <a:pPr algn="ctr"/>
-          </a:p>
-        </p:txBody>
-      </p:sp>
-      <p:sp>
-        <p:nvSpPr>
-          <p:cNvPr id="8" name="TextBox 7"/>
-          <p:cNvSpPr txBox="1"/>
-          <p:nvPr/>
-        </p:nvSpPr>
-        <p:spPr>
-          <a:xfrm>
-            <a:off x="594360" y="1965960"/>
-            <a:ext cx="438912" cy="438912"/>
-          </a:xfrm>
-          <a:prstGeom prst="rect">
-            <a:avLst/>
-          </a:prstGeom>
-          <a:noFill/>
-        </p:spPr>
-        <p:txBody>
-          <a:bodyPr wrap="square" anchor="ctr"/>
-          <a:lstStyle/>
-          <a:p>
-            <a:pPr algn="ctr"/>
-            <a:r>
-              <a:rPr sz="1600" b="1" i="0">
-                <a:solidFill>
-                  <a:srgbClr val="FFFFFF"/>
-                </a:solidFill>
-                <a:latin typeface="Calibri"/>
-              </a:rPr>
-              <a:t>1</a:t>
-            </a:r>
-          </a:p>
-        </p:txBody>
-      </p:sp>
-      <p:sp>
-        <p:nvSpPr>
-          <p:cNvPr id="9" name="TextBox 8"/>
-          <p:cNvSpPr txBox="1"/>
-          <p:nvPr/>
-        </p:nvSpPr>
-        <p:spPr>
-          <a:xfrm>
-            <a:off x="1188720" y="1751076"/>
-            <a:ext cx="10271455" cy="886968"/>
-          </a:xfrm>
-          <a:prstGeom prst="rect">
-            <a:avLst/>
-          </a:prstGeom>
-          <a:noFill/>
-        </p:spPr>
-        <p:txBody>
-          <a:bodyPr wrap="square" anchor="ctr"/>
-          <a:lstStyle/>
-          <a:p>
-            <a:r>
-              <a:rPr sz="1500" b="1" i="0">
-                <a:solidFill>
-                  <a:srgbClr val="095292"/>
-                </a:solidFill>
-                <a:latin typeface="Calibri"/>
-              </a:rPr>
-              <a:t>Disena visual</a:t>
-            </a:r>
-          </a:p>
-          <a:p>
             <a:pPr>
-              <a:spcBef>
-                <a:spcPts val="200"/>
-              </a:spcBef>
+              <a:spcAft>
+                <a:spcPts val="800"/>
+              </a:spcAft>
             </a:pPr>
             <a:r>
-              <a:rPr sz="1300" b="0" i="0">
+              <a:rPr sz="2000" b="0" i="0">
                 <a:solidFill>
                   <a:srgbClr val="333333"/>
                 </a:solidFill>
                 <a:latin typeface="Calibri"/>
               </a:rPr>
-              <a:t>Dibuja el diagrama como quieras en Excalidraw o draw.io: es mas rapido arrastrar cajas que escribir codigo, y ahi es donde piensas el modelo.</a:t>
-            </a:r>
-          </a:p>
-        </p:txBody>
-      </p:sp>
-      <p:sp>
-        <p:nvSpPr>
-          <p:cNvPr id="10" name="Rounded Rectangle 9"/>
-          <p:cNvSpPr/>
-          <p:nvPr/>
-        </p:nvSpPr>
-        <p:spPr>
-          <a:xfrm>
-            <a:off x="457200" y="2802636"/>
-            <a:ext cx="11277295" cy="1051560"/>
-          </a:xfrm>
-          <a:prstGeom prst="roundRect">
-            <a:avLst>
-              <a:gd name="adj" fmla="val 12000"/>
-            </a:avLst>
-          </a:prstGeom>
-          <a:solidFill>
-            <a:srgbClr val="E8F4FA"/>
-          </a:solidFill>
-          <a:ln>
-            <a:noFill/>
-          </a:ln>
-        </p:spPr>
-        <p:style>
-          <a:lnRef idx="1">
-            <a:schemeClr val="accent1"/>
-          </a:lnRef>
-          <a:fillRef idx="3">
-            <a:schemeClr val="accent1"/>
-          </a:fillRef>
-          <a:effectRef idx="2">
-            <a:schemeClr val="accent1"/>
-          </a:effectRef>
-          <a:fontRef idx="minor">
-            <a:schemeClr val="lt1"/>
-          </a:fontRef>
-        </p:style>
-        <p:txBody>
-          <a:bodyPr rtlCol="0" anchor="ctr"/>
-          <a:lstStyle/>
-          <a:p>
-            <a:pPr algn="ctr"/>
-          </a:p>
-        </p:txBody>
-      </p:sp>
-      <p:sp>
-        <p:nvSpPr>
-          <p:cNvPr id="11" name="Rounded Rectangle 10"/>
-          <p:cNvSpPr/>
-          <p:nvPr/>
-        </p:nvSpPr>
-        <p:spPr>
-          <a:xfrm>
-            <a:off x="594360" y="3108960"/>
-            <a:ext cx="438912" cy="438912"/>
-          </a:xfrm>
-          <a:prstGeom prst="roundRect">
-            <a:avLst>
-              <a:gd name="adj" fmla="val 12000"/>
-            </a:avLst>
-          </a:prstGeom>
-          <a:solidFill>
-            <a:srgbClr val="095292"/>
-          </a:solidFill>
-          <a:ln>
-            <a:noFill/>
-          </a:ln>
-        </p:spPr>
-        <p:style>
-          <a:lnRef idx="1">
-            <a:schemeClr val="accent1"/>
-          </a:lnRef>
-          <a:fillRef idx="3">
-            <a:schemeClr val="accent1"/>
-          </a:fillRef>
-          <a:effectRef idx="2">
-            <a:schemeClr val="accent1"/>
-          </a:effectRef>
-          <a:fontRef idx="minor">
-            <a:schemeClr val="lt1"/>
-          </a:fontRef>
-        </p:style>
-        <p:txBody>
-          <a:bodyPr rtlCol="0" anchor="ctr"/>
-          <a:lstStyle/>
-          <a:p>
-            <a:pPr algn="ctr"/>
-          </a:p>
-        </p:txBody>
-      </p:sp>
-      <p:sp>
-        <p:nvSpPr>
-          <p:cNvPr id="12" name="TextBox 11"/>
-          <p:cNvSpPr txBox="1"/>
-          <p:nvPr/>
-        </p:nvSpPr>
-        <p:spPr>
-          <a:xfrm>
-            <a:off x="594360" y="3108960"/>
-            <a:ext cx="438912" cy="438912"/>
-          </a:xfrm>
-          <a:prstGeom prst="rect">
-            <a:avLst/>
-          </a:prstGeom>
-          <a:noFill/>
-        </p:spPr>
-        <p:txBody>
-          <a:bodyPr wrap="square" anchor="ctr"/>
-          <a:lstStyle/>
-          <a:p>
-            <a:pPr algn="ctr"/>
-            <a:r>
-              <a:rPr sz="1600" b="1" i="0">
-                <a:solidFill>
-                  <a:srgbClr val="FFFFFF"/>
-                </a:solidFill>
-                <a:latin typeface="Calibri"/>
-              </a:rPr>
-              <a:t>2</a:t>
-            </a:r>
-          </a:p>
-        </p:txBody>
-      </p:sp>
-      <p:sp>
-        <p:nvSpPr>
-          <p:cNvPr id="13" name="TextBox 12"/>
-          <p:cNvSpPr txBox="1"/>
-          <p:nvPr/>
-        </p:nvSpPr>
-        <p:spPr>
-          <a:xfrm>
-            <a:off x="1188720" y="2894076"/>
-            <a:ext cx="10271455" cy="886968"/>
-          </a:xfrm>
-          <a:prstGeom prst="rect">
-            <a:avLst/>
-          </a:prstGeom>
-          <a:noFill/>
-        </p:spPr>
-        <p:txBody>
-          <a:bodyPr wrap="square" anchor="ctr"/>
-          <a:lstStyle/>
-          <a:p>
-            <a:r>
-              <a:rPr sz="1500" b="1" i="0">
-                <a:solidFill>
-                  <a:srgbClr val="095292"/>
-                </a:solidFill>
-                <a:latin typeface="Calibri"/>
-              </a:rPr>
-              <a:t>Traduce con IA</a:t>
+              <a:t>–   </a:t>
+            </a:r>
+            <a:r>
+              <a:rPr sz="2000" b="1" i="0">
+                <a:solidFill>
+                  <a:srgbClr val="333333"/>
+                </a:solidFill>
+                <a:latin typeface="Calibri"/>
+              </a:rPr>
+              <a:t>Entregable:</a:t>
+            </a:r>
+            <a:r>
+              <a:rPr sz="2000" b="0" i="0">
+                <a:solidFill>
+                  <a:srgbClr val="333333"/>
+                </a:solidFill>
+                <a:latin typeface="Calibri"/>
+              </a:rPr>
+              <a:t> Diagrama Deployment en Mermaid dentro de la plataforma del curso (3 zonas + puertos) + tipo de almacenamiento por componente</a:t>
             </a:r>
           </a:p>
           <a:p>
             <a:pPr>
-              <a:spcBef>
-                <a:spcPts val="200"/>
-              </a:spcBef>
+              <a:spcAft>
+                <a:spcPts val="800"/>
+              </a:spcAft>
             </a:pPr>
             <a:r>
-              <a:rPr sz="1300" b="0" i="0">
+              <a:rPr sz="2000" b="0" i="0">
                 <a:solidFill>
                   <a:srgbClr val="333333"/>
                 </a:solidFill>
                 <a:latin typeface="Calibri"/>
               </a:rPr>
-              <a:t>Copia o describe tu boceto a una IA y pidele el codigo Mermaid: «convierte este diagrama a Mermaid usando flowchart». Revisa el resultado: la IA acierta la sintaxis, no tu modelo.</a:t>
-            </a:r>
-          </a:p>
-        </p:txBody>
-      </p:sp>
-      <p:sp>
-        <p:nvSpPr>
-          <p:cNvPr id="14" name="Rounded Rectangle 13"/>
-          <p:cNvSpPr/>
-          <p:nvPr/>
-        </p:nvSpPr>
-        <p:spPr>
-          <a:xfrm>
-            <a:off x="457200" y="3945636"/>
-            <a:ext cx="11277295" cy="1051560"/>
-          </a:xfrm>
-          <a:prstGeom prst="roundRect">
-            <a:avLst>
-              <a:gd name="adj" fmla="val 12000"/>
-            </a:avLst>
-          </a:prstGeom>
-          <a:solidFill>
-            <a:srgbClr val="F2F2F2"/>
-          </a:solidFill>
-          <a:ln>
-            <a:noFill/>
-          </a:ln>
-        </p:spPr>
-        <p:style>
-          <a:lnRef idx="1">
-            <a:schemeClr val="accent1"/>
-          </a:lnRef>
-          <a:fillRef idx="3">
-            <a:schemeClr val="accent1"/>
-          </a:fillRef>
-          <a:effectRef idx="2">
-            <a:schemeClr val="accent1"/>
-          </a:effectRef>
-          <a:fontRef idx="minor">
-            <a:schemeClr val="lt1"/>
-          </a:fontRef>
-        </p:style>
-        <p:txBody>
-          <a:bodyPr rtlCol="0" anchor="ctr"/>
-          <a:lstStyle/>
-          <a:p>
-            <a:pPr algn="ctr"/>
-          </a:p>
-        </p:txBody>
-      </p:sp>
-      <p:sp>
-        <p:nvSpPr>
-          <p:cNvPr id="15" name="Rounded Rectangle 14"/>
-          <p:cNvSpPr/>
-          <p:nvPr/>
-        </p:nvSpPr>
-        <p:spPr>
-          <a:xfrm>
-            <a:off x="594360" y="4251960"/>
-            <a:ext cx="438912" cy="438912"/>
-          </a:xfrm>
-          <a:prstGeom prst="roundRect">
-            <a:avLst>
-              <a:gd name="adj" fmla="val 12000"/>
-            </a:avLst>
-          </a:prstGeom>
-          <a:solidFill>
-            <a:srgbClr val="095292"/>
-          </a:solidFill>
-          <a:ln>
-            <a:noFill/>
-          </a:ln>
-        </p:spPr>
-        <p:style>
-          <a:lnRef idx="1">
-            <a:schemeClr val="accent1"/>
-          </a:lnRef>
-          <a:fillRef idx="3">
-            <a:schemeClr val="accent1"/>
-          </a:fillRef>
-          <a:effectRef idx="2">
-            <a:schemeClr val="accent1"/>
-          </a:effectRef>
-          <a:fontRef idx="minor">
-            <a:schemeClr val="lt1"/>
-          </a:fontRef>
-        </p:style>
-        <p:txBody>
-          <a:bodyPr rtlCol="0" anchor="ctr"/>
-          <a:lstStyle/>
-          <a:p>
-            <a:pPr algn="ctr"/>
-          </a:p>
-        </p:txBody>
-      </p:sp>
-      <p:sp>
-        <p:nvSpPr>
-          <p:cNvPr id="16" name="TextBox 15"/>
-          <p:cNvSpPr txBox="1"/>
-          <p:nvPr/>
-        </p:nvSpPr>
-        <p:spPr>
-          <a:xfrm>
-            <a:off x="594360" y="4251960"/>
-            <a:ext cx="438912" cy="438912"/>
-          </a:xfrm>
-          <a:prstGeom prst="rect">
-            <a:avLst/>
-          </a:prstGeom>
-          <a:noFill/>
-        </p:spPr>
-        <p:txBody>
-          <a:bodyPr wrap="square" anchor="ctr"/>
-          <a:lstStyle/>
-          <a:p>
-            <a:pPr algn="ctr"/>
-            <a:r>
-              <a:rPr sz="1600" b="1" i="0">
-                <a:solidFill>
-                  <a:srgbClr val="FFFFFF"/>
-                </a:solidFill>
-                <a:latin typeface="Calibri"/>
-              </a:rPr>
-              <a:t>3</a:t>
-            </a:r>
-          </a:p>
-        </p:txBody>
-      </p:sp>
-      <p:sp>
-        <p:nvSpPr>
-          <p:cNvPr id="17" name="TextBox 16"/>
-          <p:cNvSpPr txBox="1"/>
-          <p:nvPr/>
-        </p:nvSpPr>
-        <p:spPr>
-          <a:xfrm>
-            <a:off x="1188720" y="4037076"/>
-            <a:ext cx="10271455" cy="886968"/>
-          </a:xfrm>
-          <a:prstGeom prst="rect">
-            <a:avLst/>
-          </a:prstGeom>
-          <a:noFill/>
-        </p:spPr>
-        <p:txBody>
-          <a:bodyPr wrap="square" anchor="ctr"/>
-          <a:lstStyle/>
-          <a:p>
-            <a:r>
-              <a:rPr sz="1500" b="1" i="0">
-                <a:solidFill>
-                  <a:srgbClr val="095292"/>
-                </a:solidFill>
-                <a:latin typeface="Calibri"/>
-              </a:rPr>
-              <a:t>Pega y renderiza en la plataforma del curso</a:t>
+              <a:t>–   Herramienta: </a:t>
+            </a:r>
+            <a:r>
+              <a:rPr sz="2000" b="1" i="0">
+                <a:solidFill>
+                  <a:srgbClr val="333333"/>
+                </a:solidFill>
+                <a:latin typeface="Calibri"/>
+              </a:rPr>
+              <a:t>la plataforma del curso (Mermaid) · boceto en draw.io o Excalidraw</a:t>
             </a:r>
           </a:p>
           <a:p>
             <a:pPr>
-              <a:spcBef>
-                <a:spcPts val="200"/>
-              </a:spcBef>
+              <a:spcAft>
+                <a:spcPts val="800"/>
+              </a:spcAft>
             </a:pPr>
             <a:r>
-              <a:rPr sz="1300" b="0" i="0">
+              <a:rPr sz="2000" b="0" i="0">
                 <a:solidFill>
                   <a:srgbClr val="333333"/>
                 </a:solidFill>
                 <a:latin typeface="Calibri"/>
               </a:rPr>
-              <a:t>Pega ese codigo en la caja de texto de la pregunta y mira como lo dibuja la plataforma. Si no renderiza, corrige ahi mismo: lo que se califica es el diagrama renderizado dentro de la plataforma del curso.</a:t>
-            </a:r>
-          </a:p>
-        </p:txBody>
-      </p:sp>
-      <p:sp>
-        <p:nvSpPr>
-          <p:cNvPr id="18" name="Rounded Rectangle 17"/>
-          <p:cNvSpPr/>
-          <p:nvPr/>
-        </p:nvSpPr>
-        <p:spPr>
-          <a:xfrm>
-            <a:off x="457200" y="5088636"/>
-            <a:ext cx="11277295" cy="1051560"/>
-          </a:xfrm>
-          <a:prstGeom prst="roundRect">
-            <a:avLst>
-              <a:gd name="adj" fmla="val 12000"/>
-            </a:avLst>
-          </a:prstGeom>
-          <a:solidFill>
-            <a:srgbClr val="E8F4FA"/>
-          </a:solidFill>
-          <a:ln>
-            <a:noFill/>
-          </a:ln>
-        </p:spPr>
-        <p:style>
-          <a:lnRef idx="1">
-            <a:schemeClr val="accent1"/>
-          </a:lnRef>
-          <a:fillRef idx="3">
-            <a:schemeClr val="accent1"/>
-          </a:fillRef>
-          <a:effectRef idx="2">
-            <a:schemeClr val="accent1"/>
-          </a:effectRef>
-          <a:fontRef idx="minor">
-            <a:schemeClr val="lt1"/>
-          </a:fontRef>
-        </p:style>
-        <p:txBody>
-          <a:bodyPr rtlCol="0" anchor="ctr"/>
-          <a:lstStyle/>
-          <a:p>
-            <a:pPr algn="ctr"/>
-          </a:p>
-        </p:txBody>
-      </p:sp>
-      <p:sp>
-        <p:nvSpPr>
-          <p:cNvPr id="19" name="Rounded Rectangle 18"/>
-          <p:cNvSpPr/>
-          <p:nvPr/>
-        </p:nvSpPr>
-        <p:spPr>
-          <a:xfrm>
-            <a:off x="594360" y="5394960"/>
-            <a:ext cx="438912" cy="438912"/>
-          </a:xfrm>
-          <a:prstGeom prst="roundRect">
-            <a:avLst>
-              <a:gd name="adj" fmla="val 12000"/>
-            </a:avLst>
-          </a:prstGeom>
-          <a:solidFill>
-            <a:srgbClr val="095292"/>
-          </a:solidFill>
-          <a:ln>
-            <a:noFill/>
-          </a:ln>
-        </p:spPr>
-        <p:style>
-          <a:lnRef idx="1">
-            <a:schemeClr val="accent1"/>
-          </a:lnRef>
-          <a:fillRef idx="3">
-            <a:schemeClr val="accent1"/>
-          </a:fillRef>
-          <a:effectRef idx="2">
-            <a:schemeClr val="accent1"/>
-          </a:effectRef>
-          <a:fontRef idx="minor">
-            <a:schemeClr val="lt1"/>
-          </a:fontRef>
-        </p:style>
-        <p:txBody>
-          <a:bodyPr rtlCol="0" anchor="ctr"/>
-          <a:lstStyle/>
-          <a:p>
-            <a:pPr algn="ctr"/>
-          </a:p>
-        </p:txBody>
-      </p:sp>
-      <p:sp>
-        <p:nvSpPr>
-          <p:cNvPr id="20" name="TextBox 19"/>
-          <p:cNvSpPr txBox="1"/>
-          <p:nvPr/>
-        </p:nvSpPr>
-        <p:spPr>
-          <a:xfrm>
-            <a:off x="594360" y="5394960"/>
-            <a:ext cx="438912" cy="438912"/>
-          </a:xfrm>
-          <a:prstGeom prst="rect">
-            <a:avLst/>
-          </a:prstGeom>
-          <a:noFill/>
-        </p:spPr>
-        <p:txBody>
-          <a:bodyPr wrap="square" anchor="ctr"/>
-          <a:lstStyle/>
-          <a:p>
-            <a:pPr algn="ctr"/>
-            <a:r>
-              <a:rPr sz="1600" b="1" i="0">
-                <a:solidFill>
-                  <a:srgbClr val="FFFFFF"/>
-                </a:solidFill>
-                <a:latin typeface="Calibri"/>
-              </a:rPr>
-              <a:t>4</a:t>
-            </a:r>
-          </a:p>
-        </p:txBody>
-      </p:sp>
-      <p:sp>
-        <p:nvSpPr>
-          <p:cNvPr id="21" name="TextBox 20"/>
-          <p:cNvSpPr txBox="1"/>
-          <p:nvPr/>
-        </p:nvSpPr>
-        <p:spPr>
-          <a:xfrm>
-            <a:off x="1188720" y="5180076"/>
-            <a:ext cx="10271455" cy="886968"/>
-          </a:xfrm>
-          <a:prstGeom prst="rect">
-            <a:avLst/>
-          </a:prstGeom>
-          <a:noFill/>
-        </p:spPr>
-        <p:txBody>
-          <a:bodyPr wrap="square" anchor="ctr"/>
-          <a:lstStyle/>
-          <a:p>
-            <a:r>
-              <a:rPr sz="1500" b="1" i="0">
-                <a:solidFill>
-                  <a:srgbClr val="095292"/>
-                </a:solidFill>
-                <a:latin typeface="Calibri"/>
-              </a:rPr>
-              <a:t>Guarda el PNG para tu PI</a:t>
+              <a:t>–   Todo lo que construyan hoy entra al </a:t>
+            </a:r>
+            <a:r>
+              <a:rPr sz="2000" b="1" i="0">
+                <a:solidFill>
+                  <a:srgbClr val="333333"/>
+                </a:solidFill>
+                <a:latin typeface="Calibri"/>
+              </a:rPr>
+              <a:t>informe/repo del PI</a:t>
+            </a:r>
+            <a:r>
+              <a:rPr sz="2000" b="0" i="0">
+                <a:solidFill>
+                  <a:srgbClr val="333333"/>
+                </a:solidFill>
+                <a:latin typeface="Calibri"/>
+              </a:rPr>
+              <a:t> (no es lab suelto).</a:t>
             </a:r>
           </a:p>
           <a:p>
             <a:pPr>
-              <a:spcBef>
-                <a:spcPts val="200"/>
-              </a:spcBef>
+              <a:spcAft>
+                <a:spcPts val="800"/>
+              </a:spcAft>
             </a:pPr>
             <a:r>
-              <a:rPr sz="1300" b="0" i="0">
+              <a:rPr sz="2000" b="0" i="0">
                 <a:solidFill>
                   <a:srgbClr val="333333"/>
                 </a:solidFill>
                 <a:latin typeface="Calibri"/>
               </a:rPr>
-              <a:t>Exporta tambien la imagen a la carpeta de tu Proyecto Integrador. Esa copia es para tu informe; no reemplaza la respuesta en la plataforma.</a:t>
-            </a:r>
-          </a:p>
-        </p:txBody>
-      </p:sp>
-      <p:sp>
-        <p:nvSpPr>
-          <p:cNvPr id="22" name="TextBox 21"/>
+              <a:t>–   Individual por defecto · el docente puede autorizar equipos de 2–3; la entrega en la plataforma del curso siempre es individual.</a:t>
+            </a:r>
+          </a:p>
+        </p:txBody>
+      </p:sp>
+      <p:sp>
+        <p:nvSpPr>
+          <p:cNvPr id="6" name="TextBox 5"/>
           <p:cNvSpPr txBox="1"/>
           <p:nvPr/>
         </p:nvSpPr>
@@ -5507,7 +4789,7 @@
                 </a:solidFill>
                 <a:latin typeface="Calibri"/>
               </a:rPr>
-              <a:t>Taller PI (paso a paso)</a:t>
+              <a:t>Manos a la obra (paso a paso)</a:t>
             </a:r>
           </a:p>
         </p:txBody>
@@ -6781,7 +6063,7 @@
                 </a:solidFill>
                 <a:latin typeface="Calibri"/>
               </a:rPr>
-              <a:t> Taller guiado PI (demo en vivo + avance individual).</a:t>
+              <a:t> Trabajo guiado del PI (demo en vivo + avance individual).</a:t>
             </a:r>
           </a:p>
           <a:p>
@@ -7282,7 +6564,7 @@
                 </a:solidFill>
                 <a:latin typeface="Calibri"/>
               </a:rPr>
-              <a:t>PI CloudLite — entregable de hoy</a:t>
+              <a:t>Red lógica para el diagrama</a:t>
             </a:r>
           </a:p>
         </p:txBody>
@@ -7321,7 +6603,7 @@
                 </a:solidFill>
                 <a:latin typeface="Calibri"/>
               </a:rPr>
-              <a:t>–   </a:t>
+              <a:t>–   Cliente → edge/balanceador → app → datos: </a:t>
             </a:r>
             <a:r>
               <a:rPr sz="2000" b="1" i="0">
@@ -7330,7 +6612,7 @@
                 </a:solidFill>
                 <a:latin typeface="Calibri"/>
               </a:rPr>
-              <a:t>Entregable:</a:t>
+              <a:t>tres zonas</a:t>
             </a:r>
             <a:r>
               <a:rPr sz="2000" b="0" i="0">
@@ -7339,7 +6621,7 @@
                 </a:solidFill>
                 <a:latin typeface="Calibri"/>
               </a:rPr>
-              <a:t> Diagrama Deployment en Mermaid dentro de la plataforma del curso (3 zonas + puertos) + tipo de almacenamiento por componente</a:t>
+              <a:t>, no dos.</a:t>
             </a:r>
           </a:p>
           <a:p>
@@ -7355,7 +6637,7 @@
                 </a:solidFill>
                 <a:latin typeface="Calibri"/>
               </a:rPr>
-              <a:t>–   Herramienta: </a:t>
+              <a:t>–   </a:t>
             </a:r>
             <a:r>
               <a:rPr sz="2000" b="1" i="0">
@@ -7364,7 +6646,16 @@
                 </a:solidFill>
                 <a:latin typeface="Calibri"/>
               </a:rPr>
-              <a:t>la plataforma del curso (Mermaid) · boceto en draw.io o Excalidraw</a:t>
+              <a:t>La base de datos va en la zona de datos</a:t>
+            </a:r>
+            <a:r>
+              <a:rPr sz="2000" b="0" i="0">
+                <a:solidFill>
+                  <a:srgbClr val="333333"/>
+                </a:solidFill>
+                <a:latin typeface="Calibri"/>
+              </a:rPr>
+              <a:t>, nunca en la pública: es el error que la nota castiga.</a:t>
             </a:r>
           </a:p>
           <a:p>
@@ -7380,7 +6671,7 @@
                 </a:solidFill>
                 <a:latin typeface="Calibri"/>
               </a:rPr>
-              <a:t>–   Todo lo que construyan hoy entra al </a:t>
+              <a:t>–   </a:t>
             </a:r>
             <a:r>
               <a:rPr sz="2000" b="1" i="0">
@@ -7389,7 +6680,7 @@
                 </a:solidFill>
                 <a:latin typeface="Calibri"/>
               </a:rPr>
-              <a:t>informe/repo del PI</a:t>
+              <a:t>Frontera de confianza:</a:t>
             </a:r>
             <a:r>
               <a:rPr sz="2000" b="0" i="0">
@@ -7398,7 +6689,7 @@
                 </a:solidFill>
                 <a:latin typeface="Calibri"/>
               </a:rPr>
-              <a:t> (no es lab suelto).</a:t>
+              <a:t> la flecha donde termina lo que tú controlas (un SaaS externo).</a:t>
             </a:r>
           </a:p>
           <a:p>
@@ -7414,7 +6705,25 @@
                 </a:solidFill>
                 <a:latin typeface="Calibri"/>
               </a:rPr>
-              <a:t>–   Individual por defecto · el docente puede autorizar equipos de 2–3; la entrega en la plataforma del curso siempre es individual.</a:t>
+              <a:t>–   No inventen subnets AWS: usen zonas </a:t>
+            </a:r>
+            <a:r>
+              <a:rPr sz="2000" b="1" i="0">
+                <a:solidFill>
+                  <a:srgbClr val="333333"/>
+                </a:solidFill>
+                <a:latin typeface="Calibri"/>
+              </a:rPr>
+              <a:t>Pública / Privada / Datos</a:t>
+            </a:r>
+            <a:r>
+              <a:rPr sz="2000" b="0" i="0">
+                <a:solidFill>
+                  <a:srgbClr val="333333"/>
+                </a:solidFill>
+                <a:latin typeface="Calibri"/>
+              </a:rPr>
+              <a:t>.</a:t>
             </a:r>
           </a:p>
         </p:txBody>
@@ -7595,7 +6904,7 @@
                 </a:solidFill>
                 <a:latin typeface="Calibri"/>
               </a:rPr>
-              <a:t>Red lógica para el diagrama</a:t>
+              <a:t>Almacenamiento</a:t>
             </a:r>
           </a:p>
         </p:txBody>
@@ -7634,7 +6943,7 @@
                 </a:solidFill>
                 <a:latin typeface="Calibri"/>
               </a:rPr>
-              <a:t>–   Cliente → edge/balanceador → app → datos: </a:t>
+              <a:t>–   Tres tipos y sus nombres exactos: </a:t>
             </a:r>
             <a:r>
               <a:rPr sz="2000" b="1" i="0">
@@ -7643,7 +6952,7 @@
                 </a:solidFill>
                 <a:latin typeface="Calibri"/>
               </a:rPr>
-              <a:t>tres zonas</a:t>
+              <a:t>Relacional</a:t>
             </a:r>
             <a:r>
               <a:rPr sz="2000" b="0" i="0">
@@ -7652,7 +6961,43 @@
                 </a:solidFill>
                 <a:latin typeface="Calibri"/>
               </a:rPr>
-              <a:t>, no dos.</a:t>
+              <a:t> · </a:t>
+            </a:r>
+            <a:r>
+              <a:rPr sz="2000" b="1" i="0">
+                <a:solidFill>
+                  <a:srgbClr val="333333"/>
+                </a:solidFill>
+                <a:latin typeface="Calibri"/>
+              </a:rPr>
+              <a:t>Bloque</a:t>
+            </a:r>
+            <a:r>
+              <a:rPr sz="2000" b="0" i="0">
+                <a:solidFill>
+                  <a:srgbClr val="333333"/>
+                </a:solidFill>
+                <a:latin typeface="Calibri"/>
+              </a:rPr>
+              <a:t> · </a:t>
+            </a:r>
+            <a:r>
+              <a:rPr sz="2000" b="1" i="0">
+                <a:solidFill>
+                  <a:srgbClr val="333333"/>
+                </a:solidFill>
+                <a:latin typeface="Calibri"/>
+              </a:rPr>
+              <a:t>Objeto</a:t>
+            </a:r>
+            <a:r>
+              <a:rPr sz="2000" b="0" i="0">
+                <a:solidFill>
+                  <a:srgbClr val="333333"/>
+                </a:solidFill>
+                <a:latin typeface="Calibri"/>
+              </a:rPr>
+              <a:t>.</a:t>
             </a:r>
           </a:p>
           <a:p>
@@ -7668,25 +7013,7 @@
                 </a:solidFill>
                 <a:latin typeface="Calibri"/>
               </a:rPr>
-              <a:t>–   </a:t>
-            </a:r>
-            <a:r>
-              <a:rPr sz="2000" b="1" i="0">
-                <a:solidFill>
-                  <a:srgbClr val="333333"/>
-                </a:solidFill>
-                <a:latin typeface="Calibri"/>
-              </a:rPr>
-              <a:t>La base de datos va en la zona de datos</a:t>
-            </a:r>
-            <a:r>
-              <a:rPr sz="2000" b="0" i="0">
-                <a:solidFill>
-                  <a:srgbClr val="333333"/>
-                </a:solidFill>
-                <a:latin typeface="Calibri"/>
-              </a:rPr>
-              <a:t>, nunca en la pública: es el error que la nota castiga.</a:t>
+              <a:t>–   Relacional: el dato se cruza con otro · Bloque: lo monta un solo proceso · Objeto: se recupera entero.</a:t>
             </a:r>
           </a:p>
           <a:p>
@@ -7702,7 +7029,7 @@
                 </a:solidFill>
                 <a:latin typeface="Calibri"/>
               </a:rPr>
-              <a:t>–   </a:t>
+              <a:t>–   Se justifica por la </a:t>
             </a:r>
             <a:r>
               <a:rPr sz="2000" b="1" i="0">
@@ -7711,7 +7038,7 @@
                 </a:solidFill>
                 <a:latin typeface="Calibri"/>
               </a:rPr>
-              <a:t>Frontera de confianza:</a:t>
+              <a:t>característica del dato</a:t>
             </a:r>
             <a:r>
               <a:rPr sz="2000" b="0" i="0">
@@ -7720,7 +7047,7 @@
                 </a:solidFill>
                 <a:latin typeface="Calibri"/>
               </a:rPr>
-              <a:t> la flecha donde termina lo que tú controlas (un SaaS externo).</a:t>
+              <a:t>, no por preferencia.</a:t>
             </a:r>
           </a:p>
           <a:p>
@@ -7736,7 +7063,7 @@
                 </a:solidFill>
                 <a:latin typeface="Calibri"/>
               </a:rPr>
-              <a:t>–   No inventen subnets AWS: usen zonas </a:t>
+              <a:t>–   Si tu dominio no maneja archivos, </a:t>
             </a:r>
             <a:r>
               <a:rPr sz="2000" b="1" i="0">
@@ -7745,7 +7072,7 @@
                 </a:solidFill>
                 <a:latin typeface="Calibri"/>
               </a:rPr>
-              <a:t>Pública / Privada / Datos</a:t>
+              <a:t>declara que no necesitas objeto</a:t>
             </a:r>
             <a:r>
               <a:rPr sz="2000" b="0" i="0">
@@ -7754,7 +7081,7 @@
                 </a:solidFill>
                 <a:latin typeface="Calibri"/>
               </a:rPr>
-              <a:t>.</a:t>
+              <a:t>: eso suma.</a:t>
             </a:r>
           </a:p>
         </p:txBody>
@@ -7935,7 +7262,7 @@
                 </a:solidFill>
                 <a:latin typeface="Calibri"/>
               </a:rPr>
-              <a:t>Almacenamiento</a:t>
+              <a:t>Checklist del diagrama Deployment</a:t>
             </a:r>
           </a:p>
         </p:txBody>
@@ -7974,61 +7301,7 @@
                 </a:solidFill>
                 <a:latin typeface="Calibri"/>
               </a:rPr>
-              <a:t>–   Tres tipos y sus nombres exactos: </a:t>
-            </a:r>
-            <a:r>
-              <a:rPr sz="2000" b="1" i="0">
-                <a:solidFill>
-                  <a:srgbClr val="333333"/>
-                </a:solidFill>
-                <a:latin typeface="Calibri"/>
-              </a:rPr>
-              <a:t>Relacional</a:t>
-            </a:r>
-            <a:r>
-              <a:rPr sz="2000" b="0" i="0">
-                <a:solidFill>
-                  <a:srgbClr val="333333"/>
-                </a:solidFill>
-                <a:latin typeface="Calibri"/>
-              </a:rPr>
-              <a:t> · </a:t>
-            </a:r>
-            <a:r>
-              <a:rPr sz="2000" b="1" i="0">
-                <a:solidFill>
-                  <a:srgbClr val="333333"/>
-                </a:solidFill>
-                <a:latin typeface="Calibri"/>
-              </a:rPr>
-              <a:t>Bloque</a:t>
-            </a:r>
-            <a:r>
-              <a:rPr sz="2000" b="0" i="0">
-                <a:solidFill>
-                  <a:srgbClr val="333333"/>
-                </a:solidFill>
-                <a:latin typeface="Calibri"/>
-              </a:rPr>
-              <a:t> · </a:t>
-            </a:r>
-            <a:r>
-              <a:rPr sz="2000" b="1" i="0">
-                <a:solidFill>
-                  <a:srgbClr val="333333"/>
-                </a:solidFill>
-                <a:latin typeface="Calibri"/>
-              </a:rPr>
-              <a:t>Objeto</a:t>
-            </a:r>
-            <a:r>
-              <a:rPr sz="2000" b="0" i="0">
-                <a:solidFill>
-                  <a:srgbClr val="333333"/>
-                </a:solidFill>
-                <a:latin typeface="Calibri"/>
-              </a:rPr>
-              <a:t>.</a:t>
+              <a:t>–   Tres zonas rotuladas · cada componente en su zona · puerto de cada uno.</a:t>
             </a:r>
           </a:p>
           <a:p>
@@ -8044,7 +7317,25 @@
                 </a:solidFill>
                 <a:latin typeface="Calibri"/>
               </a:rPr>
-              <a:t>–   Relacional: el dato se cruza con otro · Bloque: lo monta un solo proceso · Objeto: se recupera entero.</a:t>
+              <a:t>–   Fronteras de confianza marcadas · </a:t>
+            </a:r>
+            <a:r>
+              <a:rPr sz="2000" b="1" i="0">
+                <a:solidFill>
+                  <a:srgbClr val="333333"/>
+                </a:solidFill>
+                <a:latin typeface="Calibri"/>
+              </a:rPr>
+              <a:t>que renderice sin error</a:t>
+            </a:r>
+            <a:r>
+              <a:rPr sz="2000" b="0" i="0">
+                <a:solidFill>
+                  <a:srgbClr val="333333"/>
+                </a:solidFill>
+                <a:latin typeface="Calibri"/>
+              </a:rPr>
+              <a:t> en la plataforma del curso.</a:t>
             </a:r>
           </a:p>
           <a:p>
@@ -8060,59 +7351,7 @@
                 </a:solidFill>
                 <a:latin typeface="Calibri"/>
               </a:rPr>
-              <a:t>–   Se justifica por la </a:t>
-            </a:r>
-            <a:r>
-              <a:rPr sz="2000" b="1" i="0">
-                <a:solidFill>
-                  <a:srgbClr val="333333"/>
-                </a:solidFill>
-                <a:latin typeface="Calibri"/>
-              </a:rPr>
-              <a:t>característica del dato</a:t>
-            </a:r>
-            <a:r>
-              <a:rPr sz="2000" b="0" i="0">
-                <a:solidFill>
-                  <a:srgbClr val="333333"/>
-                </a:solidFill>
-                <a:latin typeface="Calibri"/>
-              </a:rPr>
-              <a:t>, no por preferencia.</a:t>
-            </a:r>
-          </a:p>
-          <a:p>
-            <a:pPr>
-              <a:spcAft>
-                <a:spcPts val="800"/>
-              </a:spcAft>
-            </a:pPr>
-            <a:r>
-              <a:rPr sz="2000" b="0" i="0">
-                <a:solidFill>
-                  <a:srgbClr val="333333"/>
-                </a:solidFill>
-                <a:latin typeface="Calibri"/>
-              </a:rPr>
-              <a:t>–   Si tu dominio no maneja archivos, </a:t>
-            </a:r>
-            <a:r>
-              <a:rPr sz="2000" b="1" i="0">
-                <a:solidFill>
-                  <a:srgbClr val="333333"/>
-                </a:solidFill>
-                <a:latin typeface="Calibri"/>
-              </a:rPr>
-              <a:t>declara que no necesitas objeto</a:t>
-            </a:r>
-            <a:r>
-              <a:rPr sz="2000" b="0" i="0">
-                <a:solidFill>
-                  <a:srgbClr val="333333"/>
-                </a:solidFill>
-                <a:latin typeface="Calibri"/>
-              </a:rPr>
-              <a:t>: eso suma.</a:t>
+              <a:t>–   Debe alinearse con el C4 Containers (mismos nombres).</a:t>
             </a:r>
           </a:p>
         </p:txBody>
@@ -8187,7 +7426,7 @@
         <p:spPr>
           <a:xfrm>
             <a:off x="0" y="0"/>
-            <a:ext cx="12191695" cy="960120"/>
+            <a:ext cx="12191695" cy="1170432"/>
           </a:xfrm>
           <a:prstGeom prst="rect">
             <a:avLst/>
@@ -8229,7 +7468,7 @@
         </p:nvSpPr>
         <p:spPr>
           <a:xfrm>
-            <a:off x="0" y="960120"/>
+            <a:off x="0" y="1170432"/>
             <a:ext cx="12191695" cy="41148"/>
           </a:xfrm>
           <a:prstGeom prst="rect">
@@ -8273,7 +7512,7 @@
         <p:spPr>
           <a:xfrm>
             <a:off x="457200" y="164592"/>
-            <a:ext cx="11277295" cy="502920"/>
+            <a:ext cx="11277295" cy="384048"/>
           </a:xfrm>
           <a:prstGeom prst="rect">
             <a:avLst/>
@@ -8293,7 +7532,7 @@
                 </a:solidFill>
                 <a:latin typeface="Calibri"/>
               </a:rPr>
-              <a:t>Checklist del diagrama Deployment</a:t>
+              <a:t>Ejemplo de diagrama de despliegue (Deployment)</a:t>
             </a:r>
           </a:p>
         </p:txBody>
@@ -8306,8 +7545,8 @@
         </p:nvSpPr>
         <p:spPr>
           <a:xfrm>
-            <a:off x="457200" y="1170432"/>
-            <a:ext cx="11277295" cy="5230368"/>
+            <a:off x="457200" y="566928"/>
+            <a:ext cx="11277295" cy="411480"/>
           </a:xfrm>
           <a:prstGeom prst="rect">
             <a:avLst/>
@@ -8320,76 +7559,362 @@
           </a:bodyPr>
           <a:lstStyle/>
           <a:p>
-            <a:pPr>
-              <a:spcAft>
-                <a:spcPts val="800"/>
-              </a:spcAft>
-            </a:pPr>
-            <a:r>
-              <a:rPr sz="2000" b="0" i="0">
-                <a:solidFill>
-                  <a:srgbClr val="333333"/>
-                </a:solidFill>
-                <a:latin typeface="Calibri"/>
-              </a:rPr>
-              <a:t>–   Tres zonas rotuladas · cada componente en su zona · puerto de cada uno.</a:t>
-            </a:r>
-          </a:p>
-          <a:p>
-            <a:pPr>
-              <a:spcAft>
-                <a:spcPts val="800"/>
-              </a:spcAft>
-            </a:pPr>
-            <a:r>
-              <a:rPr sz="2000" b="0" i="0">
-                <a:solidFill>
-                  <a:srgbClr val="333333"/>
-                </a:solidFill>
-                <a:latin typeface="Calibri"/>
-              </a:rPr>
-              <a:t>–   Fronteras de confianza marcadas · </a:t>
-            </a:r>
-            <a:r>
-              <a:rPr sz="2000" b="1" i="0">
-                <a:solidFill>
-                  <a:srgbClr val="333333"/>
-                </a:solidFill>
-                <a:latin typeface="Calibri"/>
-              </a:rPr>
-              <a:t>que renderice sin error</a:t>
-            </a:r>
-            <a:r>
-              <a:rPr sz="2000" b="0" i="0">
-                <a:solidFill>
-                  <a:srgbClr val="333333"/>
-                </a:solidFill>
-                <a:latin typeface="Calibri"/>
-              </a:rPr>
-              <a:t> en la plataforma del curso.</a:t>
-            </a:r>
-          </a:p>
-          <a:p>
-            <a:pPr>
-              <a:spcAft>
-                <a:spcPts val="800"/>
-              </a:spcAft>
-            </a:pPr>
-            <a:r>
-              <a:rPr sz="2000" b="0" i="0">
-                <a:solidFill>
-                  <a:srgbClr val="333333"/>
-                </a:solidFill>
-                <a:latin typeface="Calibri"/>
-              </a:rPr>
-              <a:t>–   Debe alinearse con el C4 Containers (mismos nombres).</a:t>
-            </a:r>
-          </a:p>
-        </p:txBody>
-      </p:sp>
-      <p:sp>
-        <p:nvSpPr>
-          <p:cNvPr id="6" name="TextBox 5"/>
+            <a:r>
+              <a:rPr sz="1400" b="0" i="0">
+                <a:solidFill>
+                  <a:srgbClr val="B8D8EE"/>
+                </a:solidFill>
+                <a:latin typeface="Calibri"/>
+              </a:rPr>
+              <a:t>Zonas de confianza: qué es público, qué es privado, dónde viven los datos</a:t>
+            </a:r>
+          </a:p>
+        </p:txBody>
+      </p:sp>
+      <p:sp>
+        <p:nvSpPr>
+          <p:cNvPr id="6" name="Rounded Rectangle 5"/>
+          <p:cNvSpPr/>
+          <p:nvPr/>
+        </p:nvSpPr>
+        <p:spPr>
+          <a:xfrm>
+            <a:off x="822960" y="2194560"/>
+            <a:ext cx="3291840" cy="1005840"/>
+          </a:xfrm>
+          <a:prstGeom prst="roundRect">
+            <a:avLst>
+              <a:gd name="adj" fmla="val 12000"/>
+            </a:avLst>
+          </a:prstGeom>
+          <a:solidFill>
+            <a:srgbClr val="FFD000"/>
+          </a:solidFill>
+          <a:ln>
+            <a:noFill/>
+          </a:ln>
+        </p:spPr>
+        <p:style>
+          <a:lnRef idx="1">
+            <a:schemeClr val="accent1"/>
+          </a:lnRef>
+          <a:fillRef idx="3">
+            <a:schemeClr val="accent1"/>
+          </a:fillRef>
+          <a:effectRef idx="2">
+            <a:schemeClr val="accent1"/>
+          </a:effectRef>
+          <a:fontRef idx="minor">
+            <a:schemeClr val="lt1"/>
+          </a:fontRef>
+        </p:style>
+        <p:txBody>
+          <a:bodyPr rtlCol="0" anchor="ctr" wrap="square"/>
+          <a:lstStyle/>
+          <a:p>
+            <a:pPr algn="ctr"/>
+            <a:r>
+              <a:rPr sz="1300" b="1" i="0">
+                <a:solidFill>
+                  <a:srgbClr val="095292"/>
+                </a:solidFill>
+                <a:latin typeface="Calibri"/>
+              </a:rPr>
+              <a:t>Zona pública
+(balanceador / edge)</a:t>
+            </a:r>
+          </a:p>
+        </p:txBody>
+      </p:sp>
+      <p:sp>
+        <p:nvSpPr>
+          <p:cNvPr id="7" name="Rounded Rectangle 6"/>
+          <p:cNvSpPr/>
+          <p:nvPr/>
+        </p:nvSpPr>
+        <p:spPr>
+          <a:xfrm>
+            <a:off x="4754880" y="2194560"/>
+            <a:ext cx="3291840" cy="1005840"/>
+          </a:xfrm>
+          <a:prstGeom prst="roundRect">
+            <a:avLst>
+              <a:gd name="adj" fmla="val 12000"/>
+            </a:avLst>
+          </a:prstGeom>
+          <a:solidFill>
+            <a:srgbClr val="095292"/>
+          </a:solidFill>
+          <a:ln>
+            <a:noFill/>
+          </a:ln>
+        </p:spPr>
+        <p:style>
+          <a:lnRef idx="1">
+            <a:schemeClr val="accent1"/>
+          </a:lnRef>
+          <a:fillRef idx="3">
+            <a:schemeClr val="accent1"/>
+          </a:fillRef>
+          <a:effectRef idx="2">
+            <a:schemeClr val="accent1"/>
+          </a:effectRef>
+          <a:fontRef idx="minor">
+            <a:schemeClr val="lt1"/>
+          </a:fontRef>
+        </p:style>
+        <p:txBody>
+          <a:bodyPr rtlCol="0" anchor="ctr" wrap="square"/>
+          <a:lstStyle/>
+          <a:p>
+            <a:pPr algn="ctr"/>
+            <a:r>
+              <a:rPr sz="1300" b="1" i="0">
+                <a:solidFill>
+                  <a:srgbClr val="FFFFFF"/>
+                </a:solidFill>
+                <a:latin typeface="Calibri"/>
+              </a:rPr>
+              <a:t>Zona privada
+(app CloudLite)</a:t>
+            </a:r>
+          </a:p>
+        </p:txBody>
+      </p:sp>
+      <p:sp>
+        <p:nvSpPr>
+          <p:cNvPr id="8" name="Rounded Rectangle 7"/>
+          <p:cNvSpPr/>
+          <p:nvPr/>
+        </p:nvSpPr>
+        <p:spPr>
+          <a:xfrm>
+            <a:off x="8595360" y="2194560"/>
+            <a:ext cx="3291840" cy="1005840"/>
+          </a:xfrm>
+          <a:prstGeom prst="roundRect">
+            <a:avLst>
+              <a:gd name="adj" fmla="val 12000"/>
+            </a:avLst>
+          </a:prstGeom>
+          <a:solidFill>
+            <a:srgbClr val="269CCB"/>
+          </a:solidFill>
+          <a:ln>
+            <a:noFill/>
+          </a:ln>
+        </p:spPr>
+        <p:style>
+          <a:lnRef idx="1">
+            <a:schemeClr val="accent1"/>
+          </a:lnRef>
+          <a:fillRef idx="3">
+            <a:schemeClr val="accent1"/>
+          </a:fillRef>
+          <a:effectRef idx="2">
+            <a:schemeClr val="accent1"/>
+          </a:effectRef>
+          <a:fontRef idx="minor">
+            <a:schemeClr val="lt1"/>
+          </a:fontRef>
+        </p:style>
+        <p:txBody>
+          <a:bodyPr rtlCol="0" anchor="ctr" wrap="square"/>
+          <a:lstStyle/>
+          <a:p>
+            <a:pPr algn="ctr"/>
+            <a:r>
+              <a:rPr sz="1300" b="1" i="0">
+                <a:solidFill>
+                  <a:srgbClr val="FFFFFF"/>
+                </a:solidFill>
+                <a:latin typeface="Calibri"/>
+              </a:rPr>
+              <a:t>Zona de datos
+(base de datos)</a:t>
+            </a:r>
+          </a:p>
+        </p:txBody>
+      </p:sp>
+      <p:cxnSp>
+        <p:nvCxnSpPr>
+          <p:cNvPr id="9" name="Connector 8"/>
+          <p:cNvCxnSpPr/>
+          <p:nvPr/>
+        </p:nvCxnSpPr>
+        <p:spPr>
+          <a:xfrm>
+            <a:off x="4114800" y="2697480"/>
+            <a:ext cx="640080" cy="0"/>
+          </a:xfrm>
+          <a:prstGeom prst="line">
+            <a:avLst/>
+          </a:prstGeom>
+          <a:ln w="22225">
+            <a:solidFill>
+              <a:srgbClr val="666666"/>
+            </a:solidFill>
+            <a:tailEnd type="triangle" w="med" len="med"/>
+          </a:ln>
+        </p:spPr>
+        <p:style>
+          <a:lnRef idx="2">
+            <a:schemeClr val="accent1"/>
+          </a:lnRef>
+          <a:fillRef idx="0">
+            <a:schemeClr val="accent1"/>
+          </a:fillRef>
+          <a:effectRef idx="1">
+            <a:schemeClr val="accent1"/>
+          </a:effectRef>
+          <a:fontRef idx="minor">
+            <a:schemeClr val="tx1"/>
+          </a:fontRef>
+        </p:style>
+      </p:cxnSp>
+      <p:sp>
+        <p:nvSpPr>
+          <p:cNvPr id="10" name="TextBox 9"/>
+          <p:cNvSpPr txBox="1"/>
+          <p:nvPr/>
+        </p:nvSpPr>
+        <p:spPr>
+          <a:xfrm>
+            <a:off x="3611879" y="2496312"/>
+            <a:ext cx="1645920" cy="320040"/>
+          </a:xfrm>
+          <a:prstGeom prst="rect">
+            <a:avLst/>
+          </a:prstGeom>
+          <a:noFill/>
+        </p:spPr>
+        <p:txBody>
+          <a:bodyPr wrap="square">
+            <a:spAutoFit/>
+          </a:bodyPr>
+          <a:lstStyle/>
+          <a:p>
+            <a:pPr algn="ctr"/>
+            <a:r>
+              <a:rPr sz="1000" b="0" i="1">
+                <a:solidFill>
+                  <a:srgbClr val="666666"/>
+                </a:solidFill>
+                <a:latin typeface="Calibri"/>
+              </a:rPr>
+              <a:t>solo el 8080</a:t>
+            </a:r>
+          </a:p>
+        </p:txBody>
+      </p:sp>
+      <p:cxnSp>
+        <p:nvCxnSpPr>
+          <p:cNvPr id="11" name="Connector 10"/>
+          <p:cNvCxnSpPr/>
+          <p:nvPr/>
+        </p:nvCxnSpPr>
+        <p:spPr>
+          <a:xfrm>
+            <a:off x="8046720" y="2697480"/>
+            <a:ext cx="548640" cy="0"/>
+          </a:xfrm>
+          <a:prstGeom prst="line">
+            <a:avLst/>
+          </a:prstGeom>
+          <a:ln w="22225">
+            <a:solidFill>
+              <a:srgbClr val="666666"/>
+            </a:solidFill>
+            <a:tailEnd type="triangle" w="med" len="med"/>
+          </a:ln>
+        </p:spPr>
+        <p:style>
+          <a:lnRef idx="2">
+            <a:schemeClr val="accent1"/>
+          </a:lnRef>
+          <a:fillRef idx="0">
+            <a:schemeClr val="accent1"/>
+          </a:fillRef>
+          <a:effectRef idx="1">
+            <a:schemeClr val="accent1"/>
+          </a:effectRef>
+          <a:fontRef idx="minor">
+            <a:schemeClr val="tx1"/>
+          </a:fontRef>
+        </p:style>
+      </p:cxnSp>
+      <p:sp>
+        <p:nvSpPr>
+          <p:cNvPr id="12" name="TextBox 11"/>
+          <p:cNvSpPr txBox="1"/>
+          <p:nvPr/>
+        </p:nvSpPr>
+        <p:spPr>
+          <a:xfrm>
+            <a:off x="7498080" y="2496312"/>
+            <a:ext cx="1645920" cy="320040"/>
+          </a:xfrm>
+          <a:prstGeom prst="rect">
+            <a:avLst/>
+          </a:prstGeom>
+          <a:noFill/>
+        </p:spPr>
+        <p:txBody>
+          <a:bodyPr wrap="square">
+            <a:spAutoFit/>
+          </a:bodyPr>
+          <a:lstStyle/>
+          <a:p>
+            <a:pPr algn="ctr"/>
+            <a:r>
+              <a:rPr sz="1000" b="0" i="1">
+                <a:solidFill>
+                  <a:srgbClr val="666666"/>
+                </a:solidFill>
+                <a:latin typeface="Calibri"/>
+              </a:rPr>
+              <a:t>solo el 5432</a:t>
+            </a:r>
+          </a:p>
+        </p:txBody>
+      </p:sp>
+      <p:sp>
+        <p:nvSpPr>
+          <p:cNvPr id="13" name="TextBox 12"/>
+          <p:cNvSpPr txBox="1"/>
+          <p:nvPr/>
+        </p:nvSpPr>
+        <p:spPr>
+          <a:xfrm>
+            <a:off x="457200" y="6263640"/>
+            <a:ext cx="11277295" cy="411480"/>
+          </a:xfrm>
+          <a:prstGeom prst="rect">
+            <a:avLst/>
+          </a:prstGeom>
+          <a:noFill/>
+        </p:spPr>
+        <p:txBody>
+          <a:bodyPr wrap="square">
+            <a:spAutoFit/>
+          </a:bodyPr>
+          <a:lstStyle/>
+          <a:p>
+            <a:r>
+              <a:rPr sz="1100" b="0" i="1">
+                <a:solidFill>
+                  <a:srgbClr val="666666"/>
+                </a:solidFill>
+                <a:latin typeface="Calibri"/>
+              </a:rPr>
+              <a:t>La base de datos NUNCA vive en la zona pública. Los nombres deben coincidir con los del C4 Containers (Clase 4) — mismo sistema, otro ángulo.</a:t>
+            </a:r>
+          </a:p>
+        </p:txBody>
+      </p:sp>
+      <p:sp>
+        <p:nvSpPr>
+          <p:cNvPr id="14" name="TextBox 13"/>
           <p:cNvSpPr txBox="1"/>
           <p:nvPr/>
         </p:nvSpPr>
@@ -8457,7 +7982,7 @@
         <p:spPr>
           <a:xfrm>
             <a:off x="0" y="0"/>
-            <a:ext cx="12191695" cy="1170432"/>
+            <a:ext cx="12191695" cy="960120"/>
           </a:xfrm>
           <a:prstGeom prst="rect">
             <a:avLst/>
@@ -8499,7 +8024,7 @@
         </p:nvSpPr>
         <p:spPr>
           <a:xfrm>
-            <a:off x="0" y="1170432"/>
+            <a:off x="0" y="960120"/>
             <a:ext cx="12191695" cy="41148"/>
           </a:xfrm>
           <a:prstGeom prst="rect">
@@ -8543,7 +8068,7 @@
         <p:spPr>
           <a:xfrm>
             <a:off x="457200" y="164592"/>
-            <a:ext cx="11277295" cy="384048"/>
+            <a:ext cx="11277295" cy="502920"/>
           </a:xfrm>
           <a:prstGeom prst="rect">
             <a:avLst/>
@@ -8563,55 +8088,21 @@
                 </a:solidFill>
                 <a:latin typeface="Calibri"/>
               </a:rPr>
-              <a:t>Ejemplo de diagrama de despliegue (Deployment)</a:t>
-            </a:r>
-          </a:p>
-        </p:txBody>
-      </p:sp>
-      <p:sp>
-        <p:nvSpPr>
-          <p:cNvPr id="5" name="TextBox 4"/>
-          <p:cNvSpPr txBox="1"/>
-          <p:nvPr/>
-        </p:nvSpPr>
-        <p:spPr>
-          <a:xfrm>
-            <a:off x="457200" y="566928"/>
-            <a:ext cx="11277295" cy="411480"/>
-          </a:xfrm>
-          <a:prstGeom prst="rect">
-            <a:avLst/>
-          </a:prstGeom>
-          <a:noFill/>
-        </p:spPr>
-        <p:txBody>
-          <a:bodyPr wrap="square">
-            <a:spAutoFit/>
-          </a:bodyPr>
-          <a:lstStyle/>
-          <a:p>
-            <a:r>
-              <a:rPr sz="1400" b="0" i="0">
-                <a:solidFill>
-                  <a:srgbClr val="B8D8EE"/>
-                </a:solidFill>
-                <a:latin typeface="Calibri"/>
-              </a:rPr>
-              <a:t>Zonas de confianza: qué es público, qué es privado, dónde viven los datos</a:t>
-            </a:r>
-          </a:p>
-        </p:txBody>
-      </p:sp>
-      <p:sp>
-        <p:nvSpPr>
-          <p:cNvPr id="6" name="Rounded Rectangle 5"/>
+              <a:t>El Despliegue en Mermaid: el molde que la plataforma del curso renderiza</a:t>
+            </a:r>
+          </a:p>
+        </p:txBody>
+      </p:sp>
+      <p:sp>
+        <p:nvSpPr>
+          <p:cNvPr id="5" name="Rounded Rectangle 4"/>
           <p:cNvSpPr/>
           <p:nvPr/>
         </p:nvSpPr>
         <p:spPr>
           <a:xfrm>
-            <a:off x="822960" y="2194560"/>
-            <a:ext cx="3291840" cy="1005840"/>
+            <a:off x="457200" y="1261872"/>
+            <a:ext cx="11277295" cy="4773168"/>
           </a:xfrm>
           <a:prstGeom prst="roundRect">
             <a:avLst>
@@ -8619,7 +8110,7 @@
             </a:avLst>
           </a:prstGeom>
           <a:solidFill>
-            <a:srgbClr val="FFD000"/>
+            <a:srgbClr val="1E2A38"/>
           </a:solidFill>
           <a:ln>
             <a:noFill/>
@@ -8640,38 +8131,26 @@
           </a:fontRef>
         </p:style>
         <p:txBody>
-          <a:bodyPr rtlCol="0" anchor="ctr" wrap="square"/>
+          <a:bodyPr rtlCol="0" anchor="ctr"/>
           <a:lstStyle/>
           <a:p>
             <a:pPr algn="ctr"/>
-            <a:r>
-              <a:rPr sz="1300" b="1" i="0">
-                <a:solidFill>
-                  <a:srgbClr val="095292"/>
-                </a:solidFill>
-                <a:latin typeface="Calibri"/>
-              </a:rPr>
-              <a:t>Zona pública
-(balanceador / edge)</a:t>
-            </a:r>
-          </a:p>
-        </p:txBody>
-      </p:sp>
-      <p:sp>
-        <p:nvSpPr>
-          <p:cNvPr id="7" name="Rounded Rectangle 6"/>
+          </a:p>
+        </p:txBody>
+      </p:sp>
+      <p:sp>
+        <p:nvSpPr>
+          <p:cNvPr id="6" name="Rectangle 5"/>
           <p:cNvSpPr/>
           <p:nvPr/>
         </p:nvSpPr>
         <p:spPr>
           <a:xfrm>
-            <a:off x="4754880" y="2194560"/>
-            <a:ext cx="3291840" cy="1005840"/>
-          </a:xfrm>
-          <a:prstGeom prst="roundRect">
-            <a:avLst>
-              <a:gd name="adj" fmla="val 12000"/>
-            </a:avLst>
+            <a:off x="457200" y="1261872"/>
+            <a:ext cx="11277295" cy="320040"/>
+          </a:xfrm>
+          <a:prstGeom prst="rect">
+            <a:avLst/>
           </a:prstGeom>
           <a:solidFill>
             <a:srgbClr val="095292"/>
@@ -8695,124 +8174,55 @@
           </a:fontRef>
         </p:style>
         <p:txBody>
-          <a:bodyPr rtlCol="0" anchor="ctr" wrap="square"/>
+          <a:bodyPr rtlCol="0" anchor="ctr"/>
           <a:lstStyle/>
           <a:p>
             <a:pPr algn="ctr"/>
-            <a:r>
-              <a:rPr sz="1300" b="1" i="0">
-                <a:solidFill>
-                  <a:srgbClr val="FFFFFF"/>
-                </a:solidFill>
-                <a:latin typeface="Calibri"/>
-              </a:rPr>
-              <a:t>Zona privada
-(app CloudLite)</a:t>
-            </a:r>
-          </a:p>
-        </p:txBody>
-      </p:sp>
-      <p:sp>
-        <p:nvSpPr>
-          <p:cNvPr id="8" name="Rounded Rectangle 7"/>
-          <p:cNvSpPr/>
-          <p:nvPr/>
-        </p:nvSpPr>
-        <p:spPr>
-          <a:xfrm>
-            <a:off x="8595360" y="2194560"/>
-            <a:ext cx="3291840" cy="1005840"/>
-          </a:xfrm>
-          <a:prstGeom prst="roundRect">
-            <a:avLst>
-              <a:gd name="adj" fmla="val 12000"/>
-            </a:avLst>
-          </a:prstGeom>
-          <a:solidFill>
-            <a:srgbClr val="269CCB"/>
-          </a:solidFill>
-          <a:ln>
-            <a:noFill/>
-          </a:ln>
-        </p:spPr>
-        <p:style>
-          <a:lnRef idx="1">
-            <a:schemeClr val="accent1"/>
-          </a:lnRef>
-          <a:fillRef idx="3">
-            <a:schemeClr val="accent1"/>
-          </a:fillRef>
-          <a:effectRef idx="2">
-            <a:schemeClr val="accent1"/>
-          </a:effectRef>
-          <a:fontRef idx="minor">
-            <a:schemeClr val="lt1"/>
-          </a:fontRef>
-        </p:style>
-        <p:txBody>
-          <a:bodyPr rtlCol="0" anchor="ctr" wrap="square"/>
-          <a:lstStyle/>
-          <a:p>
-            <a:pPr algn="ctr"/>
-            <a:r>
-              <a:rPr sz="1300" b="1" i="0">
-                <a:solidFill>
-                  <a:srgbClr val="FFFFFF"/>
-                </a:solidFill>
-                <a:latin typeface="Calibri"/>
-              </a:rPr>
-              <a:t>Zona de datos
-(base de datos)</a:t>
-            </a:r>
-          </a:p>
-        </p:txBody>
-      </p:sp>
-      <p:cxnSp>
-        <p:nvCxnSpPr>
-          <p:cNvPr id="9" name="Connector 8"/>
-          <p:cNvCxnSpPr/>
-          <p:nvPr/>
-        </p:nvCxnSpPr>
-        <p:spPr>
-          <a:xfrm>
-            <a:off x="4114800" y="2697480"/>
-            <a:ext cx="640080" cy="0"/>
-          </a:xfrm>
-          <a:prstGeom prst="line">
-            <a:avLst/>
-          </a:prstGeom>
-          <a:ln w="22225">
-            <a:solidFill>
-              <a:srgbClr val="666666"/>
-            </a:solidFill>
-            <a:tailEnd type="triangle" w="med" len="med"/>
-          </a:ln>
-        </p:spPr>
-        <p:style>
-          <a:lnRef idx="2">
-            <a:schemeClr val="accent1"/>
-          </a:lnRef>
-          <a:fillRef idx="0">
-            <a:schemeClr val="accent1"/>
-          </a:fillRef>
-          <a:effectRef idx="1">
-            <a:schemeClr val="accent1"/>
-          </a:effectRef>
-          <a:fontRef idx="minor">
-            <a:schemeClr val="tx1"/>
-          </a:fontRef>
-        </p:style>
-      </p:cxnSp>
-      <p:sp>
-        <p:nvSpPr>
-          <p:cNvPr id="10" name="TextBox 9"/>
+          </a:p>
+        </p:txBody>
+      </p:sp>
+      <p:sp>
+        <p:nvSpPr>
+          <p:cNvPr id="7" name="TextBox 6"/>
           <p:cNvSpPr txBox="1"/>
           <p:nvPr/>
         </p:nvSpPr>
         <p:spPr>
           <a:xfrm>
-            <a:off x="3611879" y="2496312"/>
-            <a:ext cx="1645920" cy="320040"/>
+            <a:off x="685800" y="1307592"/>
+            <a:ext cx="10820095" cy="256032"/>
+          </a:xfrm>
+          <a:prstGeom prst="rect">
+            <a:avLst/>
+          </a:prstGeom>
+          <a:noFill/>
+        </p:spPr>
+        <p:txBody>
+          <a:bodyPr wrap="square" anchor="ctr"/>
+          <a:lstStyle/>
+          <a:p>
+            <a:r>
+              <a:rPr sz="1000" b="1" i="0">
+                <a:solidFill>
+                  <a:srgbClr val="269CCB"/>
+                </a:solidFill>
+                <a:latin typeface="Calibri"/>
+              </a:rPr>
+              <a:t>● ● ●</a:t>
+            </a:r>
+          </a:p>
+        </p:txBody>
+      </p:sp>
+      <p:sp>
+        <p:nvSpPr>
+          <p:cNvPr id="8" name="TextBox 7"/>
+          <p:cNvSpPr txBox="1"/>
+          <p:nvPr/>
+        </p:nvSpPr>
+        <p:spPr>
+          <a:xfrm>
+            <a:off x="777240" y="1719072"/>
+            <a:ext cx="10637215" cy="4133087"/>
           </a:xfrm>
           <a:prstGeom prst="rect">
             <a:avLst/>
@@ -8825,65 +8235,257 @@
           </a:bodyPr>
           <a:lstStyle/>
           <a:p>
-            <a:pPr algn="ctr"/>
-            <a:r>
-              <a:rPr sz="1000" b="0" i="1">
-                <a:solidFill>
-                  <a:srgbClr val="666666"/>
-                </a:solidFill>
-                <a:latin typeface="Calibri"/>
-              </a:rPr>
-              <a:t>solo el 8080</a:t>
-            </a:r>
-          </a:p>
-        </p:txBody>
-      </p:sp>
-      <p:cxnSp>
-        <p:nvCxnSpPr>
-          <p:cNvPr id="11" name="Connector 10"/>
-          <p:cNvCxnSpPr/>
-          <p:nvPr/>
-        </p:nvCxnSpPr>
-        <p:spPr>
-          <a:xfrm>
-            <a:off x="8046720" y="2697480"/>
-            <a:ext cx="548640" cy="0"/>
-          </a:xfrm>
-          <a:prstGeom prst="line">
-            <a:avLst/>
-          </a:prstGeom>
-          <a:ln w="22225">
-            <a:solidFill>
-              <a:srgbClr val="666666"/>
-            </a:solidFill>
-            <a:tailEnd type="triangle" w="med" len="med"/>
-          </a:ln>
-        </p:spPr>
-        <p:style>
-          <a:lnRef idx="2">
-            <a:schemeClr val="accent1"/>
-          </a:lnRef>
-          <a:fillRef idx="0">
-            <a:schemeClr val="accent1"/>
-          </a:fillRef>
-          <a:effectRef idx="1">
-            <a:schemeClr val="accent1"/>
-          </a:effectRef>
-          <a:fontRef idx="minor">
-            <a:schemeClr val="tx1"/>
-          </a:fontRef>
-        </p:style>
-      </p:cxnSp>
-      <p:sp>
-        <p:nvSpPr>
-          <p:cNvPr id="12" name="TextBox 11"/>
+            <a:pPr>
+              <a:spcAft>
+                <a:spcPts val="400"/>
+              </a:spcAft>
+            </a:pPr>
+            <a:r>
+              <a:rPr sz="1400" b="0" i="0">
+                <a:solidFill>
+                  <a:srgbClr val="FFFFFF"/>
+                </a:solidFill>
+                <a:latin typeface="Calibri"/>
+              </a:rPr>
+              <a:t>flowchart LR</a:t>
+            </a:r>
+          </a:p>
+          <a:p>
+            <a:pPr>
+              <a:spcAft>
+                <a:spcPts val="400"/>
+              </a:spcAft>
+            </a:pPr>
+            <a:r>
+              <a:rPr sz="1400" b="0" i="0">
+                <a:solidFill>
+                  <a:srgbClr val="FFFFFF"/>
+                </a:solidFill>
+                <a:latin typeface="Calibri"/>
+              </a:rPr>
+              <a:t>  subgraph publica["Zona publica - internet"]</a:t>
+            </a:r>
+          </a:p>
+          <a:p>
+            <a:pPr>
+              <a:spcAft>
+                <a:spcPts val="400"/>
+              </a:spcAft>
+            </a:pPr>
+            <a:r>
+              <a:rPr sz="1400" b="0" i="0">
+                <a:solidFill>
+                  <a:srgbClr val="FFFFFF"/>
+                </a:solidFill>
+                <a:latin typeface="Calibri"/>
+              </a:rPr>
+              <a:t>    web["App web&lt;br/&gt;React estatico - 443"]</a:t>
+            </a:r>
+          </a:p>
+          <a:p>
+            <a:pPr>
+              <a:spcAft>
+                <a:spcPts val="400"/>
+              </a:spcAft>
+            </a:pPr>
+            <a:r>
+              <a:rPr sz="1400" b="0" i="0">
+                <a:solidFill>
+                  <a:srgbClr val="FFFFFF"/>
+                </a:solidFill>
+                <a:latin typeface="Calibri"/>
+              </a:rPr>
+              <a:t>    edge["Edge / balanceador&lt;br/&gt;443 HTTPS"]</a:t>
+            </a:r>
+          </a:p>
+          <a:p>
+            <a:pPr>
+              <a:spcAft>
+                <a:spcPts val="400"/>
+              </a:spcAft>
+            </a:pPr>
+            <a:r>
+              <a:rPr sz="1400" b="0" i="0">
+                <a:solidFill>
+                  <a:srgbClr val="FFFFFF"/>
+                </a:solidFill>
+                <a:latin typeface="Calibri"/>
+              </a:rPr>
+              <a:t>  end</a:t>
+            </a:r>
+          </a:p>
+          <a:p>
+            <a:pPr>
+              <a:spcAft>
+                <a:spcPts val="400"/>
+              </a:spcAft>
+            </a:pPr>
+            <a:r>
+              <a:rPr sz="1400" b="0" i="0">
+                <a:solidFill>
+                  <a:srgbClr val="FFFFFF"/>
+                </a:solidFill>
+                <a:latin typeface="Calibri"/>
+              </a:rPr>
+              <a:t>  subgraph privada["Zona privada - solo desde el edge"]</a:t>
+            </a:r>
+          </a:p>
+          <a:p>
+            <a:pPr>
+              <a:spcAft>
+                <a:spcPts val="400"/>
+              </a:spcAft>
+            </a:pPr>
+            <a:r>
+              <a:rPr sz="1400" b="0" i="0">
+                <a:solidFill>
+                  <a:srgbClr val="FFFFFF"/>
+                </a:solidFill>
+                <a:latin typeface="Calibri"/>
+              </a:rPr>
+              <a:t>    api["API CloudLite&lt;br/&gt;8080 HTTP"]</a:t>
+            </a:r>
+          </a:p>
+          <a:p>
+            <a:pPr>
+              <a:spcAft>
+                <a:spcPts val="400"/>
+              </a:spcAft>
+            </a:pPr>
+            <a:r>
+              <a:rPr sz="1400" b="0" i="0">
+                <a:solidFill>
+                  <a:srgbClr val="FFFFFF"/>
+                </a:solidFill>
+                <a:latin typeface="Calibri"/>
+              </a:rPr>
+              <a:t>  end</a:t>
+            </a:r>
+          </a:p>
+          <a:p>
+            <a:pPr>
+              <a:spcAft>
+                <a:spcPts val="400"/>
+              </a:spcAft>
+            </a:pPr>
+            <a:r>
+              <a:rPr sz="1400" b="0" i="0">
+                <a:solidFill>
+                  <a:srgbClr val="FFFFFF"/>
+                </a:solidFill>
+                <a:latin typeface="Calibri"/>
+              </a:rPr>
+              <a:t>  subgraph datos["Zona de datos - sin internet: la BD va AQUI"]</a:t>
+            </a:r>
+          </a:p>
+          <a:p>
+            <a:pPr>
+              <a:spcAft>
+                <a:spcPts val="400"/>
+              </a:spcAft>
+            </a:pPr>
+            <a:r>
+              <a:rPr sz="1400" b="0" i="0">
+                <a:solidFill>
+                  <a:srgbClr val="FFFFFF"/>
+                </a:solidFill>
+                <a:latin typeface="Calibri"/>
+              </a:rPr>
+              <a:t>    db[("Base de datos&lt;br/&gt;5432 TCP")]</a:t>
+            </a:r>
+          </a:p>
+          <a:p>
+            <a:pPr>
+              <a:spcAft>
+                <a:spcPts val="400"/>
+              </a:spcAft>
+            </a:pPr>
+            <a:r>
+              <a:rPr sz="1400" b="0" i="0">
+                <a:solidFill>
+                  <a:srgbClr val="FFFFFF"/>
+                </a:solidFill>
+                <a:latin typeface="Calibri"/>
+              </a:rPr>
+              <a:t>  end</a:t>
+            </a:r>
+          </a:p>
+          <a:p>
+            <a:pPr>
+              <a:spcAft>
+                <a:spcPts val="400"/>
+              </a:spcAft>
+            </a:pPr>
+            <a:r>
+              <a:rPr sz="1400" b="0" i="0">
+                <a:solidFill>
+                  <a:srgbClr val="FFFFFF"/>
+                </a:solidFill>
+                <a:latin typeface="Calibri"/>
+              </a:rPr>
+              <a:t>  web --&gt;|"HTTPS 443"| edge</a:t>
+            </a:r>
+          </a:p>
+          <a:p>
+            <a:pPr>
+              <a:spcAft>
+                <a:spcPts val="400"/>
+              </a:spcAft>
+            </a:pPr>
+            <a:r>
+              <a:rPr sz="1400" b="0" i="0">
+                <a:solidFill>
+                  <a:srgbClr val="FFFFFF"/>
+                </a:solidFill>
+                <a:latin typeface="Calibri"/>
+              </a:rPr>
+              <a:t>  edge --&gt;|"HTTP 8080"| api</a:t>
+            </a:r>
+          </a:p>
+          <a:p>
+            <a:pPr>
+              <a:spcAft>
+                <a:spcPts val="400"/>
+              </a:spcAft>
+            </a:pPr>
+            <a:r>
+              <a:rPr sz="1400" b="0" i="0">
+                <a:solidFill>
+                  <a:srgbClr val="FFFFFF"/>
+                </a:solidFill>
+                <a:latin typeface="Calibri"/>
+              </a:rPr>
+              <a:t>  api --&gt;|"TCP 5432"| db</a:t>
+            </a:r>
+          </a:p>
+          <a:p>
+            <a:pPr>
+              <a:spcAft>
+                <a:spcPts val="400"/>
+              </a:spcAft>
+            </a:pPr>
+            <a:r>
+              <a:rPr sz="1400" b="0" i="0">
+                <a:solidFill>
+                  <a:srgbClr val="FFFFFF"/>
+                </a:solidFill>
+                <a:latin typeface="Calibri"/>
+              </a:rPr>
+              <a:t>  api --&gt;|"HTTPS 443 - frontera de confianza"| pagos["Pasarela de pagos externa"]</a:t>
+            </a:r>
+          </a:p>
+        </p:txBody>
+      </p:sp>
+      <p:sp>
+        <p:nvSpPr>
+          <p:cNvPr id="9" name="TextBox 8"/>
           <p:cNvSpPr txBox="1"/>
           <p:nvPr/>
         </p:nvSpPr>
         <p:spPr>
           <a:xfrm>
-            <a:off x="7498080" y="2496312"/>
-            <a:ext cx="1645920" cy="320040"/>
+            <a:off x="457200" y="6080760"/>
+            <a:ext cx="11277295" cy="320040"/>
           </a:xfrm>
           <a:prstGeom prst="rect">
             <a:avLst/>
@@ -8898,54 +8500,20 @@
           <a:p>
             <a:pPr algn="ctr"/>
             <a:r>
-              <a:rPr sz="1000" b="0" i="1">
+              <a:rPr sz="1200" b="0" i="1">
                 <a:solidFill>
                   <a:srgbClr val="666666"/>
                 </a:solidFill>
                 <a:latin typeface="Calibri"/>
               </a:rPr>
-              <a:t>solo el 5432</a:t>
-            </a:r>
-          </a:p>
-        </p:txBody>
-      </p:sp>
-      <p:sp>
-        <p:nvSpPr>
-          <p:cNvPr id="13" name="TextBox 12"/>
-          <p:cNvSpPr txBox="1"/>
-          <p:nvPr/>
-        </p:nvSpPr>
-        <p:spPr>
-          <a:xfrm>
-            <a:off x="457200" y="6263640"/>
-            <a:ext cx="11277295" cy="411480"/>
-          </a:xfrm>
-          <a:prstGeom prst="rect">
-            <a:avLst/>
-          </a:prstGeom>
-          <a:noFill/>
-        </p:spPr>
-        <p:txBody>
-          <a:bodyPr wrap="square">
-            <a:spAutoFit/>
-          </a:bodyPr>
-          <a:lstStyle/>
-          <a:p>
-            <a:r>
-              <a:rPr sz="1100" b="0" i="1">
-                <a:solidFill>
-                  <a:srgbClr val="666666"/>
-                </a:solidFill>
-                <a:latin typeface="Calibri"/>
-              </a:rPr>
-              <a:t>La base de datos NUNCA vive en la zona pública. Los nombres deben coincidir con los del C4 Containers (Clase 4) — mismo sistema, otro ángulo.</a:t>
-            </a:r>
-          </a:p>
-        </p:txBody>
-      </p:sp>
-      <p:sp>
-        <p:nvSpPr>
-          <p:cNvPr id="14" name="TextBox 13"/>
+              <a:t>Una «subgraph» por zona, el puerto en cada caja y la base con «[( )]». La flecha al externo ES la frontera de confianza. Nombres: los mismos del C4 Containers de la Clase 4.</a:t>
+            </a:r>
+          </a:p>
+        </p:txBody>
+      </p:sp>
+      <p:sp>
+        <p:nvSpPr>
+          <p:cNvPr id="10" name="TextBox 9"/>
           <p:cNvSpPr txBox="1"/>
           <p:nvPr/>
         </p:nvSpPr>
@@ -9013,7 +8581,7 @@
         <p:spPr>
           <a:xfrm>
             <a:off x="0" y="0"/>
-            <a:ext cx="12191695" cy="960120"/>
+            <a:ext cx="12191695" cy="1170432"/>
           </a:xfrm>
           <a:prstGeom prst="rect">
             <a:avLst/>
@@ -9055,7 +8623,7 @@
         </p:nvSpPr>
         <p:spPr>
           <a:xfrm>
-            <a:off x="0" y="960120"/>
+            <a:off x="0" y="1170432"/>
             <a:ext cx="12191695" cy="41148"/>
           </a:xfrm>
           <a:prstGeom prst="rect">
@@ -9099,7 +8667,7 @@
         <p:spPr>
           <a:xfrm>
             <a:off x="457200" y="164592"/>
-            <a:ext cx="11277295" cy="502920"/>
+            <a:ext cx="11277295" cy="384048"/>
           </a:xfrm>
           <a:prstGeom prst="rect">
             <a:avLst/>
@@ -9119,21 +8687,55 @@
                 </a:solidFill>
                 <a:latin typeface="Calibri"/>
               </a:rPr>
-              <a:t>El Despliegue en Mermaid: el molde que la plataforma del curso renderiza</a:t>
-            </a:r>
-          </a:p>
-        </p:txBody>
-      </p:sp>
-      <p:sp>
-        <p:nvSpPr>
-          <p:cNvPr id="5" name="Rounded Rectangle 4"/>
+              <a:t>Herramientas de hoy</a:t>
+            </a:r>
+          </a:p>
+        </p:txBody>
+      </p:sp>
+      <p:sp>
+        <p:nvSpPr>
+          <p:cNvPr id="5" name="TextBox 4"/>
+          <p:cNvSpPr txBox="1"/>
+          <p:nvPr/>
+        </p:nvSpPr>
+        <p:spPr>
+          <a:xfrm>
+            <a:off x="457200" y="566928"/>
+            <a:ext cx="11277295" cy="411480"/>
+          </a:xfrm>
+          <a:prstGeom prst="rect">
+            <a:avLst/>
+          </a:prstGeom>
+          <a:noFill/>
+        </p:spPr>
+        <p:txBody>
+          <a:bodyPr wrap="square">
+            <a:spAutoFit/>
+          </a:bodyPr>
+          <a:lstStyle/>
+          <a:p>
+            <a:r>
+              <a:rPr sz="1400" b="0" i="0">
+                <a:solidFill>
+                  <a:srgbClr val="B8D8EE"/>
+                </a:solidFill>
+                <a:latin typeface="Calibri"/>
+              </a:rPr>
+              <a:t>Gratis · navegador o free tier · sin cuenta de pago</a:t>
+            </a:r>
+          </a:p>
+        </p:txBody>
+      </p:sp>
+      <p:sp>
+        <p:nvSpPr>
+          <p:cNvPr id="6" name="Rounded Rectangle 5"/>
           <p:cNvSpPr/>
           <p:nvPr/>
         </p:nvSpPr>
         <p:spPr>
           <a:xfrm>
-            <a:off x="457200" y="1261872"/>
-            <a:ext cx="11277295" cy="4773168"/>
+            <a:off x="457200" y="1591056"/>
+            <a:ext cx="3624986" cy="2299716"/>
           </a:xfrm>
           <a:prstGeom prst="roundRect">
             <a:avLst>
@@ -9141,7 +8743,7 @@
             </a:avLst>
           </a:prstGeom>
           <a:solidFill>
-            <a:srgbClr val="1E2A38"/>
+            <a:srgbClr val="F2F2F2"/>
           </a:solidFill>
           <a:ln>
             <a:noFill/>
@@ -9171,14 +8773,14 @@
       </p:sp>
       <p:sp>
         <p:nvSpPr>
-          <p:cNvPr id="6" name="Rectangle 5"/>
+          <p:cNvPr id="7" name="Rectangle 6"/>
           <p:cNvSpPr/>
           <p:nvPr/>
         </p:nvSpPr>
         <p:spPr>
           <a:xfrm>
-            <a:off x="457200" y="1261872"/>
-            <a:ext cx="11277295" cy="320040"/>
+            <a:off x="457200" y="1591056"/>
+            <a:ext cx="3624986" cy="64008"/>
           </a:xfrm>
           <a:prstGeom prst="rect">
             <a:avLst/>
@@ -9214,14 +8816,81 @@
       </p:sp>
       <p:sp>
         <p:nvSpPr>
-          <p:cNvPr id="7" name="TextBox 6"/>
+          <p:cNvPr id="8" name="Rectangle 7"/>
+          <p:cNvSpPr/>
+          <p:nvPr/>
+        </p:nvSpPr>
+        <p:spPr>
+          <a:xfrm>
+            <a:off x="457200" y="1655064"/>
+            <a:ext cx="3624986" cy="27432"/>
+          </a:xfrm>
+          <a:prstGeom prst="rect">
+            <a:avLst/>
+          </a:prstGeom>
+          <a:solidFill>
+            <a:srgbClr val="FFD000"/>
+          </a:solidFill>
+          <a:ln>
+            <a:noFill/>
+          </a:ln>
+        </p:spPr>
+        <p:style>
+          <a:lnRef idx="1">
+            <a:schemeClr val="accent1"/>
+          </a:lnRef>
+          <a:fillRef idx="3">
+            <a:schemeClr val="accent1"/>
+          </a:fillRef>
+          <a:effectRef idx="2">
+            <a:schemeClr val="accent1"/>
+          </a:effectRef>
+          <a:fontRef idx="minor">
+            <a:schemeClr val="lt1"/>
+          </a:fontRef>
+        </p:style>
+        <p:txBody>
+          <a:bodyPr rtlCol="0" anchor="ctr"/>
+          <a:lstStyle/>
+          <a:p>
+            <a:pPr algn="ctr"/>
+          </a:p>
+        </p:txBody>
+      </p:sp>
+      <p:pic>
+        <p:nvPicPr>
+          <p:cNvPr id="9" name="Picture 8" descr="drawio.png"/>
+          <p:cNvPicPr>
+            <a:picLocks noChangeAspect="1"/>
+          </p:cNvPicPr>
+          <p:nvPr/>
+        </p:nvPicPr>
+        <p:blipFill>
+          <a:blip r:embed="rId2"/>
+          <a:stretch>
+            <a:fillRect/>
+          </a:stretch>
+        </p:blipFill>
+        <p:spPr>
+          <a:xfrm>
+            <a:off x="1659331" y="1847087"/>
+            <a:ext cx="1220724" cy="1220724"/>
+          </a:xfrm>
+          <a:prstGeom prst="rect">
+            <a:avLst/>
+          </a:prstGeom>
+        </p:spPr>
+      </p:pic>
+      <p:sp>
+        <p:nvSpPr>
+          <p:cNvPr id="10" name="TextBox 9"/>
           <p:cNvSpPr txBox="1"/>
           <p:nvPr/>
         </p:nvSpPr>
         <p:spPr>
           <a:xfrm>
-            <a:off x="685800" y="1307592"/>
-            <a:ext cx="10820095" cy="256032"/>
+            <a:off x="530352" y="3159251"/>
+            <a:ext cx="3478682" cy="621792"/>
           </a:xfrm>
           <a:prstGeom prst="rect">
             <a:avLst/>
@@ -9229,31 +8898,203 @@
           <a:noFill/>
         </p:spPr>
         <p:txBody>
-          <a:bodyPr wrap="square" anchor="ctr"/>
-          <a:lstStyle/>
-          <a:p>
-            <a:r>
-              <a:rPr sz="1000" b="1" i="0">
-                <a:solidFill>
-                  <a:srgbClr val="269CCB"/>
-                </a:solidFill>
-                <a:latin typeface="Calibri"/>
-              </a:rPr>
-              <a:t>● ● ●</a:t>
-            </a:r>
-          </a:p>
-        </p:txBody>
-      </p:sp>
-      <p:sp>
-        <p:nvSpPr>
-          <p:cNvPr id="8" name="TextBox 7"/>
+          <a:bodyPr wrap="square" anchor="t"/>
+          <a:lstStyle/>
+          <a:p>
+            <a:pPr algn="ctr"/>
+            <a:r>
+              <a:rPr sz="1300" b="1" i="0">
+                <a:solidFill>
+                  <a:srgbClr val="095292"/>
+                </a:solidFill>
+                <a:latin typeface="Calibri"/>
+              </a:rPr>
+              <a:t>draw.io</a:t>
+            </a:r>
+          </a:p>
+          <a:p>
+            <a:pPr algn="ctr">
+              <a:spcBef>
+                <a:spcPts val="200"/>
+              </a:spcBef>
+            </a:pPr>
+            <a:r>
+              <a:rPr sz="1000" b="0" i="0">
+                <a:solidFill>
+                  <a:srgbClr val="666666"/>
+                </a:solidFill>
+                <a:latin typeface="Calibri"/>
+              </a:rPr>
+              <a:t>Deployment</a:t>
+            </a:r>
+          </a:p>
+        </p:txBody>
+      </p:sp>
+      <p:sp>
+        <p:nvSpPr>
+          <p:cNvPr id="11" name="Rounded Rectangle 10"/>
+          <p:cNvSpPr/>
+          <p:nvPr/>
+        </p:nvSpPr>
+        <p:spPr>
+          <a:xfrm>
+            <a:off x="4283354" y="1591056"/>
+            <a:ext cx="3624986" cy="2299716"/>
+          </a:xfrm>
+          <a:prstGeom prst="roundRect">
+            <a:avLst>
+              <a:gd name="adj" fmla="val 12000"/>
+            </a:avLst>
+          </a:prstGeom>
+          <a:solidFill>
+            <a:srgbClr val="F2F2F2"/>
+          </a:solidFill>
+          <a:ln>
+            <a:noFill/>
+          </a:ln>
+        </p:spPr>
+        <p:style>
+          <a:lnRef idx="1">
+            <a:schemeClr val="accent1"/>
+          </a:lnRef>
+          <a:fillRef idx="3">
+            <a:schemeClr val="accent1"/>
+          </a:fillRef>
+          <a:effectRef idx="2">
+            <a:schemeClr val="accent1"/>
+          </a:effectRef>
+          <a:fontRef idx="minor">
+            <a:schemeClr val="lt1"/>
+          </a:fontRef>
+        </p:style>
+        <p:txBody>
+          <a:bodyPr rtlCol="0" anchor="ctr"/>
+          <a:lstStyle/>
+          <a:p>
+            <a:pPr algn="ctr"/>
+          </a:p>
+        </p:txBody>
+      </p:sp>
+      <p:sp>
+        <p:nvSpPr>
+          <p:cNvPr id="12" name="Rectangle 11"/>
+          <p:cNvSpPr/>
+          <p:nvPr/>
+        </p:nvSpPr>
+        <p:spPr>
+          <a:xfrm>
+            <a:off x="4283354" y="1591056"/>
+            <a:ext cx="3624986" cy="64008"/>
+          </a:xfrm>
+          <a:prstGeom prst="rect">
+            <a:avLst/>
+          </a:prstGeom>
+          <a:solidFill>
+            <a:srgbClr val="095292"/>
+          </a:solidFill>
+          <a:ln>
+            <a:noFill/>
+          </a:ln>
+        </p:spPr>
+        <p:style>
+          <a:lnRef idx="1">
+            <a:schemeClr val="accent1"/>
+          </a:lnRef>
+          <a:fillRef idx="3">
+            <a:schemeClr val="accent1"/>
+          </a:fillRef>
+          <a:effectRef idx="2">
+            <a:schemeClr val="accent1"/>
+          </a:effectRef>
+          <a:fontRef idx="minor">
+            <a:schemeClr val="lt1"/>
+          </a:fontRef>
+        </p:style>
+        <p:txBody>
+          <a:bodyPr rtlCol="0" anchor="ctr"/>
+          <a:lstStyle/>
+          <a:p>
+            <a:pPr algn="ctr"/>
+          </a:p>
+        </p:txBody>
+      </p:sp>
+      <p:sp>
+        <p:nvSpPr>
+          <p:cNvPr id="13" name="Rectangle 12"/>
+          <p:cNvSpPr/>
+          <p:nvPr/>
+        </p:nvSpPr>
+        <p:spPr>
+          <a:xfrm>
+            <a:off x="4283354" y="1655064"/>
+            <a:ext cx="3624986" cy="27432"/>
+          </a:xfrm>
+          <a:prstGeom prst="rect">
+            <a:avLst/>
+          </a:prstGeom>
+          <a:solidFill>
+            <a:srgbClr val="FFD000"/>
+          </a:solidFill>
+          <a:ln>
+            <a:noFill/>
+          </a:ln>
+        </p:spPr>
+        <p:style>
+          <a:lnRef idx="1">
+            <a:schemeClr val="accent1"/>
+          </a:lnRef>
+          <a:fillRef idx="3">
+            <a:schemeClr val="accent1"/>
+          </a:fillRef>
+          <a:effectRef idx="2">
+            <a:schemeClr val="accent1"/>
+          </a:effectRef>
+          <a:fontRef idx="minor">
+            <a:schemeClr val="lt1"/>
+          </a:fontRef>
+        </p:style>
+        <p:txBody>
+          <a:bodyPr rtlCol="0" anchor="ctr"/>
+          <a:lstStyle/>
+          <a:p>
+            <a:pPr algn="ctr"/>
+          </a:p>
+        </p:txBody>
+      </p:sp>
+      <p:pic>
+        <p:nvPicPr>
+          <p:cNvPr id="14" name="Picture 13" descr="google_docs.png"/>
+          <p:cNvPicPr>
+            <a:picLocks noChangeAspect="1"/>
+          </p:cNvPicPr>
+          <p:nvPr/>
+        </p:nvPicPr>
+        <p:blipFill>
+          <a:blip r:embed="rId3"/>
+          <a:stretch>
+            <a:fillRect/>
+          </a:stretch>
+        </p:blipFill>
+        <p:spPr>
+          <a:xfrm>
+            <a:off x="5485485" y="1847087"/>
+            <a:ext cx="1220724" cy="1220724"/>
+          </a:xfrm>
+          <a:prstGeom prst="rect">
+            <a:avLst/>
+          </a:prstGeom>
+        </p:spPr>
+      </p:pic>
+      <p:sp>
+        <p:nvSpPr>
+          <p:cNvPr id="15" name="TextBox 14"/>
           <p:cNvSpPr txBox="1"/>
           <p:nvPr/>
         </p:nvSpPr>
         <p:spPr>
           <a:xfrm>
-            <a:off x="777240" y="1719072"/>
-            <a:ext cx="10637215" cy="4133087"/>
+            <a:off x="4356506" y="3159251"/>
+            <a:ext cx="3478682" cy="621792"/>
           </a:xfrm>
           <a:prstGeom prst="rect">
             <a:avLst/>
@@ -9261,290 +9102,449 @@
           <a:noFill/>
         </p:spPr>
         <p:txBody>
-          <a:bodyPr wrap="square">
-            <a:spAutoFit/>
-          </a:bodyPr>
-          <a:lstStyle/>
-          <a:p>
-            <a:pPr>
-              <a:spcAft>
-                <a:spcPts val="400"/>
-              </a:spcAft>
+          <a:bodyPr wrap="square" anchor="t"/>
+          <a:lstStyle/>
+          <a:p>
+            <a:pPr algn="ctr"/>
+            <a:r>
+              <a:rPr sz="1300" b="1" i="0">
+                <a:solidFill>
+                  <a:srgbClr val="095292"/>
+                </a:solidFill>
+                <a:latin typeface="Calibri"/>
+              </a:rPr>
+              <a:t>Google Docs</a:t>
+            </a:r>
+          </a:p>
+          <a:p>
+            <a:pPr algn="ctr">
+              <a:spcBef>
+                <a:spcPts val="200"/>
+              </a:spcBef>
             </a:pPr>
             <a:r>
-              <a:rPr sz="1400" b="0" i="0">
-                <a:solidFill>
-                  <a:srgbClr val="FFFFFF"/>
-                </a:solidFill>
-                <a:latin typeface="Calibri"/>
-              </a:rPr>
-              <a:t>flowchart LR</a:t>
-            </a:r>
-          </a:p>
-          <a:p>
-            <a:pPr>
-              <a:spcAft>
-                <a:spcPts val="400"/>
-              </a:spcAft>
+              <a:rPr sz="1000" b="0" i="0">
+                <a:solidFill>
+                  <a:srgbClr val="666666"/>
+                </a:solidFill>
+                <a:latin typeface="Calibri"/>
+              </a:rPr>
+              <a:t>Informe PI</a:t>
+            </a:r>
+          </a:p>
+        </p:txBody>
+      </p:sp>
+      <p:sp>
+        <p:nvSpPr>
+          <p:cNvPr id="16" name="Rounded Rectangle 15"/>
+          <p:cNvSpPr/>
+          <p:nvPr/>
+        </p:nvSpPr>
+        <p:spPr>
+          <a:xfrm>
+            <a:off x="8109508" y="1591056"/>
+            <a:ext cx="3624986" cy="2299716"/>
+          </a:xfrm>
+          <a:prstGeom prst="roundRect">
+            <a:avLst>
+              <a:gd name="adj" fmla="val 12000"/>
+            </a:avLst>
+          </a:prstGeom>
+          <a:solidFill>
+            <a:srgbClr val="F2F2F2"/>
+          </a:solidFill>
+          <a:ln>
+            <a:noFill/>
+          </a:ln>
+        </p:spPr>
+        <p:style>
+          <a:lnRef idx="1">
+            <a:schemeClr val="accent1"/>
+          </a:lnRef>
+          <a:fillRef idx="3">
+            <a:schemeClr val="accent1"/>
+          </a:fillRef>
+          <a:effectRef idx="2">
+            <a:schemeClr val="accent1"/>
+          </a:effectRef>
+          <a:fontRef idx="minor">
+            <a:schemeClr val="lt1"/>
+          </a:fontRef>
+        </p:style>
+        <p:txBody>
+          <a:bodyPr rtlCol="0" anchor="ctr"/>
+          <a:lstStyle/>
+          <a:p>
+            <a:pPr algn="ctr"/>
+          </a:p>
+        </p:txBody>
+      </p:sp>
+      <p:sp>
+        <p:nvSpPr>
+          <p:cNvPr id="17" name="Rectangle 16"/>
+          <p:cNvSpPr/>
+          <p:nvPr/>
+        </p:nvSpPr>
+        <p:spPr>
+          <a:xfrm>
+            <a:off x="8109508" y="1591056"/>
+            <a:ext cx="3624986" cy="64008"/>
+          </a:xfrm>
+          <a:prstGeom prst="rect">
+            <a:avLst/>
+          </a:prstGeom>
+          <a:solidFill>
+            <a:srgbClr val="095292"/>
+          </a:solidFill>
+          <a:ln>
+            <a:noFill/>
+          </a:ln>
+        </p:spPr>
+        <p:style>
+          <a:lnRef idx="1">
+            <a:schemeClr val="accent1"/>
+          </a:lnRef>
+          <a:fillRef idx="3">
+            <a:schemeClr val="accent1"/>
+          </a:fillRef>
+          <a:effectRef idx="2">
+            <a:schemeClr val="accent1"/>
+          </a:effectRef>
+          <a:fontRef idx="minor">
+            <a:schemeClr val="lt1"/>
+          </a:fontRef>
+        </p:style>
+        <p:txBody>
+          <a:bodyPr rtlCol="0" anchor="ctr"/>
+          <a:lstStyle/>
+          <a:p>
+            <a:pPr algn="ctr"/>
+          </a:p>
+        </p:txBody>
+      </p:sp>
+      <p:sp>
+        <p:nvSpPr>
+          <p:cNvPr id="18" name="Rectangle 17"/>
+          <p:cNvSpPr/>
+          <p:nvPr/>
+        </p:nvSpPr>
+        <p:spPr>
+          <a:xfrm>
+            <a:off x="8109508" y="1655064"/>
+            <a:ext cx="3624986" cy="27432"/>
+          </a:xfrm>
+          <a:prstGeom prst="rect">
+            <a:avLst/>
+          </a:prstGeom>
+          <a:solidFill>
+            <a:srgbClr val="FFD000"/>
+          </a:solidFill>
+          <a:ln>
+            <a:noFill/>
+          </a:ln>
+        </p:spPr>
+        <p:style>
+          <a:lnRef idx="1">
+            <a:schemeClr val="accent1"/>
+          </a:lnRef>
+          <a:fillRef idx="3">
+            <a:schemeClr val="accent1"/>
+          </a:fillRef>
+          <a:effectRef idx="2">
+            <a:schemeClr val="accent1"/>
+          </a:effectRef>
+          <a:fontRef idx="minor">
+            <a:schemeClr val="lt1"/>
+          </a:fontRef>
+        </p:style>
+        <p:txBody>
+          <a:bodyPr rtlCol="0" anchor="ctr"/>
+          <a:lstStyle/>
+          <a:p>
+            <a:pPr algn="ctr"/>
+          </a:p>
+        </p:txBody>
+      </p:sp>
+      <p:pic>
+        <p:nvPicPr>
+          <p:cNvPr id="19" name="Picture 18" descr="mermaid.png"/>
+          <p:cNvPicPr>
+            <a:picLocks noChangeAspect="1"/>
+          </p:cNvPicPr>
+          <p:nvPr/>
+        </p:nvPicPr>
+        <p:blipFill>
+          <a:blip r:embed="rId4"/>
+          <a:stretch>
+            <a:fillRect/>
+          </a:stretch>
+        </p:blipFill>
+        <p:spPr>
+          <a:xfrm>
+            <a:off x="9311640" y="1847087"/>
+            <a:ext cx="1220724" cy="1220724"/>
+          </a:xfrm>
+          <a:prstGeom prst="rect">
+            <a:avLst/>
+          </a:prstGeom>
+        </p:spPr>
+      </p:pic>
+      <p:sp>
+        <p:nvSpPr>
+          <p:cNvPr id="20" name="TextBox 19"/>
+          <p:cNvSpPr txBox="1"/>
+          <p:nvPr/>
+        </p:nvSpPr>
+        <p:spPr>
+          <a:xfrm>
+            <a:off x="8182660" y="3159251"/>
+            <a:ext cx="3478682" cy="621792"/>
+          </a:xfrm>
+          <a:prstGeom prst="rect">
+            <a:avLst/>
+          </a:prstGeom>
+          <a:noFill/>
+        </p:spPr>
+        <p:txBody>
+          <a:bodyPr wrap="square" anchor="t"/>
+          <a:lstStyle/>
+          <a:p>
+            <a:pPr algn="ctr"/>
+            <a:r>
+              <a:rPr sz="1300" b="1" i="0">
+                <a:solidFill>
+                  <a:srgbClr val="095292"/>
+                </a:solidFill>
+                <a:latin typeface="Calibri"/>
+              </a:rPr>
+              <a:t>Mermaid</a:t>
+            </a:r>
+          </a:p>
+          <a:p>
+            <a:pPr algn="ctr">
+              <a:spcBef>
+                <a:spcPts val="200"/>
+              </a:spcBef>
             </a:pPr>
             <a:r>
-              <a:rPr sz="1400" b="0" i="0">
-                <a:solidFill>
-                  <a:srgbClr val="FFFFFF"/>
-                </a:solidFill>
-                <a:latin typeface="Calibri"/>
-              </a:rPr>
-              <a:t>  subgraph publica["Zona publica - internet"]</a:t>
-            </a:r>
-          </a:p>
-          <a:p>
-            <a:pPr>
-              <a:spcAft>
-                <a:spcPts val="400"/>
-              </a:spcAft>
+              <a:rPr sz="1000" b="0" i="0">
+                <a:solidFill>
+                  <a:srgbClr val="666666"/>
+                </a:solidFill>
+                <a:latin typeface="Calibri"/>
+              </a:rPr>
+              <a:t>Codigo del diagrama</a:t>
+            </a:r>
+          </a:p>
+        </p:txBody>
+      </p:sp>
+      <p:sp>
+        <p:nvSpPr>
+          <p:cNvPr id="21" name="Rounded Rectangle 20"/>
+          <p:cNvSpPr/>
+          <p:nvPr/>
+        </p:nvSpPr>
+        <p:spPr>
+          <a:xfrm>
+            <a:off x="4283354" y="4055364"/>
+            <a:ext cx="3624986" cy="2299716"/>
+          </a:xfrm>
+          <a:prstGeom prst="roundRect">
+            <a:avLst>
+              <a:gd name="adj" fmla="val 12000"/>
+            </a:avLst>
+          </a:prstGeom>
+          <a:solidFill>
+            <a:srgbClr val="F2F2F2"/>
+          </a:solidFill>
+          <a:ln>
+            <a:noFill/>
+          </a:ln>
+        </p:spPr>
+        <p:style>
+          <a:lnRef idx="1">
+            <a:schemeClr val="accent1"/>
+          </a:lnRef>
+          <a:fillRef idx="3">
+            <a:schemeClr val="accent1"/>
+          </a:fillRef>
+          <a:effectRef idx="2">
+            <a:schemeClr val="accent1"/>
+          </a:effectRef>
+          <a:fontRef idx="minor">
+            <a:schemeClr val="lt1"/>
+          </a:fontRef>
+        </p:style>
+        <p:txBody>
+          <a:bodyPr rtlCol="0" anchor="ctr"/>
+          <a:lstStyle/>
+          <a:p>
+            <a:pPr algn="ctr"/>
+          </a:p>
+        </p:txBody>
+      </p:sp>
+      <p:sp>
+        <p:nvSpPr>
+          <p:cNvPr id="22" name="Rectangle 21"/>
+          <p:cNvSpPr/>
+          <p:nvPr/>
+        </p:nvSpPr>
+        <p:spPr>
+          <a:xfrm>
+            <a:off x="4283354" y="4055364"/>
+            <a:ext cx="3624986" cy="64008"/>
+          </a:xfrm>
+          <a:prstGeom prst="rect">
+            <a:avLst/>
+          </a:prstGeom>
+          <a:solidFill>
+            <a:srgbClr val="095292"/>
+          </a:solidFill>
+          <a:ln>
+            <a:noFill/>
+          </a:ln>
+        </p:spPr>
+        <p:style>
+          <a:lnRef idx="1">
+            <a:schemeClr val="accent1"/>
+          </a:lnRef>
+          <a:fillRef idx="3">
+            <a:schemeClr val="accent1"/>
+          </a:fillRef>
+          <a:effectRef idx="2">
+            <a:schemeClr val="accent1"/>
+          </a:effectRef>
+          <a:fontRef idx="minor">
+            <a:schemeClr val="lt1"/>
+          </a:fontRef>
+        </p:style>
+        <p:txBody>
+          <a:bodyPr rtlCol="0" anchor="ctr"/>
+          <a:lstStyle/>
+          <a:p>
+            <a:pPr algn="ctr"/>
+          </a:p>
+        </p:txBody>
+      </p:sp>
+      <p:sp>
+        <p:nvSpPr>
+          <p:cNvPr id="23" name="Rectangle 22"/>
+          <p:cNvSpPr/>
+          <p:nvPr/>
+        </p:nvSpPr>
+        <p:spPr>
+          <a:xfrm>
+            <a:off x="4283354" y="4119372"/>
+            <a:ext cx="3624986" cy="27432"/>
+          </a:xfrm>
+          <a:prstGeom prst="rect">
+            <a:avLst/>
+          </a:prstGeom>
+          <a:solidFill>
+            <a:srgbClr val="FFD000"/>
+          </a:solidFill>
+          <a:ln>
+            <a:noFill/>
+          </a:ln>
+        </p:spPr>
+        <p:style>
+          <a:lnRef idx="1">
+            <a:schemeClr val="accent1"/>
+          </a:lnRef>
+          <a:fillRef idx="3">
+            <a:schemeClr val="accent1"/>
+          </a:fillRef>
+          <a:effectRef idx="2">
+            <a:schemeClr val="accent1"/>
+          </a:effectRef>
+          <a:fontRef idx="minor">
+            <a:schemeClr val="lt1"/>
+          </a:fontRef>
+        </p:style>
+        <p:txBody>
+          <a:bodyPr rtlCol="0" anchor="ctr"/>
+          <a:lstStyle/>
+          <a:p>
+            <a:pPr algn="ctr"/>
+          </a:p>
+        </p:txBody>
+      </p:sp>
+      <p:pic>
+        <p:nvPicPr>
+          <p:cNvPr id="24" name="Picture 23" descr="examlab.png"/>
+          <p:cNvPicPr>
+            <a:picLocks noChangeAspect="1"/>
+          </p:cNvPicPr>
+          <p:nvPr/>
+        </p:nvPicPr>
+        <p:blipFill>
+          <a:blip r:embed="rId5"/>
+          <a:stretch>
+            <a:fillRect/>
+          </a:stretch>
+        </p:blipFill>
+        <p:spPr>
+          <a:xfrm>
+            <a:off x="5485485" y="4311396"/>
+            <a:ext cx="1220724" cy="1220724"/>
+          </a:xfrm>
+          <a:prstGeom prst="rect">
+            <a:avLst/>
+          </a:prstGeom>
+        </p:spPr>
+      </p:pic>
+      <p:sp>
+        <p:nvSpPr>
+          <p:cNvPr id="25" name="TextBox 24"/>
+          <p:cNvSpPr txBox="1"/>
+          <p:nvPr/>
+        </p:nvSpPr>
+        <p:spPr>
+          <a:xfrm>
+            <a:off x="4356506" y="5623560"/>
+            <a:ext cx="3478682" cy="621792"/>
+          </a:xfrm>
+          <a:prstGeom prst="rect">
+            <a:avLst/>
+          </a:prstGeom>
+          <a:noFill/>
+        </p:spPr>
+        <p:txBody>
+          <a:bodyPr wrap="square" anchor="t"/>
+          <a:lstStyle/>
+          <a:p>
+            <a:pPr algn="ctr"/>
+            <a:r>
+              <a:rPr sz="1300" b="1" i="0">
+                <a:solidFill>
+                  <a:srgbClr val="095292"/>
+                </a:solidFill>
+                <a:latin typeface="Calibri"/>
+              </a:rPr>
+              <a:t>la plataforma del curso</a:t>
+            </a:r>
+          </a:p>
+          <a:p>
+            <a:pPr algn="ctr">
+              <a:spcBef>
+                <a:spcPts val="200"/>
+              </a:spcBef>
             </a:pPr>
             <a:r>
-              <a:rPr sz="1400" b="0" i="0">
-                <a:solidFill>
-                  <a:srgbClr val="FFFFFF"/>
-                </a:solidFill>
-                <a:latin typeface="Calibri"/>
-              </a:rPr>
-              <a:t>    web["App web&lt;br/&gt;React estatico - 443"]</a:t>
-            </a:r>
-          </a:p>
-          <a:p>
-            <a:pPr>
-              <a:spcAft>
-                <a:spcPts val="400"/>
-              </a:spcAft>
-            </a:pPr>
-            <a:r>
-              <a:rPr sz="1400" b="0" i="0">
-                <a:solidFill>
-                  <a:srgbClr val="FFFFFF"/>
-                </a:solidFill>
-                <a:latin typeface="Calibri"/>
-              </a:rPr>
-              <a:t>    edge["Edge / balanceador&lt;br/&gt;443 HTTPS"]</a:t>
-            </a:r>
-          </a:p>
-          <a:p>
-            <a:pPr>
-              <a:spcAft>
-                <a:spcPts val="400"/>
-              </a:spcAft>
-            </a:pPr>
-            <a:r>
-              <a:rPr sz="1400" b="0" i="0">
-                <a:solidFill>
-                  <a:srgbClr val="FFFFFF"/>
-                </a:solidFill>
-                <a:latin typeface="Calibri"/>
-              </a:rPr>
-              <a:t>  end</a:t>
-            </a:r>
-          </a:p>
-          <a:p>
-            <a:pPr>
-              <a:spcAft>
-                <a:spcPts val="400"/>
-              </a:spcAft>
-            </a:pPr>
-            <a:r>
-              <a:rPr sz="1400" b="0" i="0">
-                <a:solidFill>
-                  <a:srgbClr val="FFFFFF"/>
-                </a:solidFill>
-                <a:latin typeface="Calibri"/>
-              </a:rPr>
-              <a:t>  subgraph privada["Zona privada - solo desde el edge"]</a:t>
-            </a:r>
-          </a:p>
-          <a:p>
-            <a:pPr>
-              <a:spcAft>
-                <a:spcPts val="400"/>
-              </a:spcAft>
-            </a:pPr>
-            <a:r>
-              <a:rPr sz="1400" b="0" i="0">
-                <a:solidFill>
-                  <a:srgbClr val="FFFFFF"/>
-                </a:solidFill>
-                <a:latin typeface="Calibri"/>
-              </a:rPr>
-              <a:t>    api["API CloudLite&lt;br/&gt;8080 HTTP"]</a:t>
-            </a:r>
-          </a:p>
-          <a:p>
-            <a:pPr>
-              <a:spcAft>
-                <a:spcPts val="400"/>
-              </a:spcAft>
-            </a:pPr>
-            <a:r>
-              <a:rPr sz="1400" b="0" i="0">
-                <a:solidFill>
-                  <a:srgbClr val="FFFFFF"/>
-                </a:solidFill>
-                <a:latin typeface="Calibri"/>
-              </a:rPr>
-              <a:t>  end</a:t>
-            </a:r>
-          </a:p>
-          <a:p>
-            <a:pPr>
-              <a:spcAft>
-                <a:spcPts val="400"/>
-              </a:spcAft>
-            </a:pPr>
-            <a:r>
-              <a:rPr sz="1400" b="0" i="0">
-                <a:solidFill>
-                  <a:srgbClr val="FFFFFF"/>
-                </a:solidFill>
-                <a:latin typeface="Calibri"/>
-              </a:rPr>
-              <a:t>  subgraph datos["Zona de datos - sin internet: la BD va AQUI"]</a:t>
-            </a:r>
-          </a:p>
-          <a:p>
-            <a:pPr>
-              <a:spcAft>
-                <a:spcPts val="400"/>
-              </a:spcAft>
-            </a:pPr>
-            <a:r>
-              <a:rPr sz="1400" b="0" i="0">
-                <a:solidFill>
-                  <a:srgbClr val="FFFFFF"/>
-                </a:solidFill>
-                <a:latin typeface="Calibri"/>
-              </a:rPr>
-              <a:t>    db[("Base de datos&lt;br/&gt;5432 TCP")]</a:t>
-            </a:r>
-          </a:p>
-          <a:p>
-            <a:pPr>
-              <a:spcAft>
-                <a:spcPts val="400"/>
-              </a:spcAft>
-            </a:pPr>
-            <a:r>
-              <a:rPr sz="1400" b="0" i="0">
-                <a:solidFill>
-                  <a:srgbClr val="FFFFFF"/>
-                </a:solidFill>
-                <a:latin typeface="Calibri"/>
-              </a:rPr>
-              <a:t>  end</a:t>
-            </a:r>
-          </a:p>
-          <a:p>
-            <a:pPr>
-              <a:spcAft>
-                <a:spcPts val="400"/>
-              </a:spcAft>
-            </a:pPr>
-            <a:r>
-              <a:rPr sz="1400" b="0" i="0">
-                <a:solidFill>
-                  <a:srgbClr val="FFFFFF"/>
-                </a:solidFill>
-                <a:latin typeface="Calibri"/>
-              </a:rPr>
-              <a:t>  web --&gt;|"HTTPS 443"| edge</a:t>
-            </a:r>
-          </a:p>
-          <a:p>
-            <a:pPr>
-              <a:spcAft>
-                <a:spcPts val="400"/>
-              </a:spcAft>
-            </a:pPr>
-            <a:r>
-              <a:rPr sz="1400" b="0" i="0">
-                <a:solidFill>
-                  <a:srgbClr val="FFFFFF"/>
-                </a:solidFill>
-                <a:latin typeface="Calibri"/>
-              </a:rPr>
-              <a:t>  edge --&gt;|"HTTP 8080"| api</a:t>
-            </a:r>
-          </a:p>
-          <a:p>
-            <a:pPr>
-              <a:spcAft>
-                <a:spcPts val="400"/>
-              </a:spcAft>
-            </a:pPr>
-            <a:r>
-              <a:rPr sz="1400" b="0" i="0">
-                <a:solidFill>
-                  <a:srgbClr val="FFFFFF"/>
-                </a:solidFill>
-                <a:latin typeface="Calibri"/>
-              </a:rPr>
-              <a:t>  api --&gt;|"TCP 5432"| db</a:t>
-            </a:r>
-          </a:p>
-          <a:p>
-            <a:pPr>
-              <a:spcAft>
-                <a:spcPts val="400"/>
-              </a:spcAft>
-            </a:pPr>
-            <a:r>
-              <a:rPr sz="1400" b="0" i="0">
-                <a:solidFill>
-                  <a:srgbClr val="FFFFFF"/>
-                </a:solidFill>
-                <a:latin typeface="Calibri"/>
-              </a:rPr>
-              <a:t>  api --&gt;|"HTTPS 443 - frontera de confianza"| pagos["Pasarela de pagos externa"]</a:t>
-            </a:r>
-          </a:p>
-        </p:txBody>
-      </p:sp>
-      <p:sp>
-        <p:nvSpPr>
-          <p:cNvPr id="9" name="TextBox 8"/>
-          <p:cNvSpPr txBox="1"/>
-          <p:nvPr/>
-        </p:nvSpPr>
-        <p:spPr>
-          <a:xfrm>
-            <a:off x="457200" y="6080760"/>
-            <a:ext cx="11277295" cy="320040"/>
-          </a:xfrm>
-          <a:prstGeom prst="rect">
-            <a:avLst/>
-          </a:prstGeom>
-          <a:noFill/>
-        </p:spPr>
-        <p:txBody>
-          <a:bodyPr wrap="square">
-            <a:spAutoFit/>
-          </a:bodyPr>
-          <a:lstStyle/>
-          <a:p>
-            <a:pPr algn="ctr"/>
-            <a:r>
-              <a:rPr sz="1200" b="0" i="1">
+              <a:rPr sz="1000" b="0" i="0">
                 <a:solidFill>
                   <a:srgbClr val="666666"/>
                 </a:solidFill>
                 <a:latin typeface="Calibri"/>
               </a:rPr>
-              <a:t>Una «subgraph» por zona, el puerto en cada caja y la base con «[( )]». La flecha al externo ES la frontera de confianza. Nombres: los mismos del C4 Containers de la Clase 4.</a:t>
-            </a:r>
-          </a:p>
-        </p:txBody>
-      </p:sp>
-      <p:sp>
-        <p:nvSpPr>
-          <p:cNvPr id="10" name="TextBox 9"/>
+              <a:t>Donde se entrega</a:t>
+            </a:r>
+          </a:p>
+        </p:txBody>
+      </p:sp>
+      <p:sp>
+        <p:nvSpPr>
+          <p:cNvPr id="26" name="TextBox 25"/>
           <p:cNvSpPr txBox="1"/>
           <p:nvPr/>
         </p:nvSpPr>
